--- a/unterlagen/slides.pptx
+++ b/unterlagen/slides.pptx
@@ -511,7 +511,7 @@
           <a:lstStyle/>
           <a:p>
             <a:r>
-              <a:t>A – Ausrichten (~0:00–0:03). Begrüssen, kurz persönlich abholen: Wer hätte gern eine eigene Website? Thema und Dauer (20–25 Min.) nennen, betonen: heute geht es ums selbst Ausprobieren. Noch nichts erklären.</a:t>
+              <a:t>A – Ausrichten (0:00–0:03). Begrüssen, kurz persönlich abholen: Wer hätte gern eine eigene Website? Thema und Dauer nennen, betonen: heute geht es ums selbst Ausprobieren.</a:t>
             </a:r>
           </a:p>
         </p:txBody>
@@ -581,7 +581,7 @@
           <a:lstStyle/>
           <a:p>
             <a:r>
-              <a:t>A – Auswerten / Abschluss. Teilnehmende zeigen sich gegenseitig ihre Ergebnisse und posten ihren Vorschau-/Veröffentlichungs-Link in den WhatsApp-Gruppenchat. Danken und zum Weiterprobieren ermutigen.</a:t>
+              <a:t>A – Abschluss. Teilnehmende zeigen sich ihre Ergebnisse und posten den Link in den WhatsApp-Gruppenchat. Danken, zum Weiterprobieren ermutigen.</a:t>
             </a:r>
           </a:p>
         </p:txBody>
@@ -651,7 +651,7 @@
           <a:lstStyle/>
           <a:p>
             <a:r>
-              <a:t>A – Ausrichten. Die 3 Lernziele transparent machen – das ist das Ziel für heute. Nach Mager beobachtbar formuliert. Kurz halten (~30 Sek.), nicht vorlesen, sondern in eigenen Worten.</a:t>
+              <a:t>A – Ausrichten. Die drei Lernziele in eigenen Worten nennen (nach Mager, beobachtbar). Kurz halten.</a:t>
             </a:r>
           </a:p>
         </p:txBody>
@@ -721,7 +721,7 @@
           <a:lstStyle/>
           <a:p>
             <a:r>
-              <a:t>A – Ausrichten. Ablauf zeigen, damit alle Orientierung haben. Betonen, dass der Schwerpunkt auf dem eigenen Tun liegt (Verarbeiten, 8 Min.). Gesamtrahmen 23 Min.</a:t>
+              <a:t>A – Ausrichten. Ablauf zeigen, Orientierung geben. Schwerpunkt: Verarbeiten (8 Min.). Gesamt 23 Min.</a:t>
             </a:r>
           </a:p>
         </p:txBody>
@@ -791,7 +791,7 @@
           <a:lstStyle/>
           <a:p>
             <a:r>
-              <a:t>R – Reaktivieren (~0:03–0:06). An Vorerfahrung anknüpfen: per Handzeichen fragen, wer schon mal eine KI (z. B. ChatGPT) gefragt hat. Brücke bauen: KI schreibt nicht nur Texte, sondern baut ganze Websites. Dialogisch und aktivierend halten. (Die Phasen-Cues auf der Folie sind bewusst sichtbar – im SVEB-Rahmen ok.)</a:t>
+              <a:t>R – Reaktivieren (0:03–0:06). Per Handzeichen fragen, wer schon eine KI genutzt hat. Brücke bauen: KI baut ganze Websites. Dialogisch, aktivierend.</a:t>
             </a:r>
           </a:p>
         </p:txBody>
@@ -861,7 +861,7 @@
           <a:lstStyle/>
           <a:p>
             <a:r>
-              <a:t>I – Informieren (~0:06–0:11). Kurzer, adressatengerechter Input – keine Fachbegriffe. Die 4 Punkte nennen. Danach eine kurze Live-Mini-Demo: ein Beispiel-Prompt → Website erscheint. Stoffreduktion: kein Code, kein Deployment, keine Konto-Details.</a:t>
+              <a:t>I – Informieren (0:06–0:11). Kurzer, einfacher Input – keine Fachbegriffe. Die vier Punkte nennen, dann kurze Live-Demo. Stoffreduktion: kein Code, kein Deployment.</a:t>
             </a:r>
           </a:p>
         </p:txBody>
@@ -931,7 +931,7 @@
           <a:lstStyle/>
           <a:p>
             <a:r>
-              <a:t>I – Informieren. Kernbotschaft hervorheben: Ein guter Auftrag = ein gutes Ergebnis. Konkretes Beispiel geben: «freundlich, kurze Texte» wirkt besser als nur «schön». Überleitung zum Baukasten.</a:t>
+              <a:t>I – Informieren. Kernbotschaft betonen. Beispiel: «freundlich, kurze Texte» statt nur «schön». Überleitung zum Baukasten.</a:t>
             </a:r>
           </a:p>
         </p:txBody>
@@ -1001,7 +1001,7 @@
           <a:lstStyle/>
           <a:p>
             <a:r>
-              <a:t>I → V. Die 3 Schritte zeigen und den Baukasten vorstellen. Link/QR teilen (am Beamer und im Handout). Einmal vormachen, dann übernehmen die Teilnehmenden selbst.</a:t>
+              <a:t>I → V. Drei Schritte zeigen, Link/QR teilen, einmal vormachen. Dann übernehmen die Teilnehmenden.</a:t>
             </a:r>
           </a:p>
         </p:txBody>
@@ -1071,7 +1071,7 @@
           <a:lstStyle/>
           <a:p>
             <a:r>
-              <a:t>V – Verarbeiten (~0:11–0:19). Aktivste Phase, ca. 8 Min. Teilnehmende öffnen den Baukasten (QR/Link), bauen einen eigenen Prompt; 1–2 Freiwillige zeigen ihr Resultat live am Beamer. Herumgehen, Hilfestellung geben. Plan B bei knapper Zeit: nur ein Live-Beispiel.</a:t>
+              <a:t>V – Verarbeiten (0:11–0:19). Aktivste Phase (~8 Min.). Herumgehen, Hilfestellung geben. Plan B bei knapper Zeit: nur ein Live-Beispiel.</a:t>
             </a:r>
           </a:p>
         </p:txBody>
@@ -1141,7 +1141,7 @@
           <a:lstStyle/>
           <a:p>
             <a:r>
-              <a:t>A – Auswerten (~0:19–0:23). Lernzielkontrolle: Teilnehmende nennen die 3 Schritte und je zwei Einsatzmöglichkeiten (kurze Murmelrunde). Fragemöglichkeit geben. ~4 Min.</a:t>
+              <a:t>A – Auswerten (0:19–0:23). Lernzielkontrolle: drei Schritte und zwei Bau-Beispiele nennen lassen (Murmelrunde). Fragen zulassen.</a:t>
             </a:r>
           </a:p>
         </p:txBody>
@@ -4162,27 +4162,13 @@
             <a:avLst/>
           </a:prstGeom>
           <a:solidFill>
-            <a:srgbClr val="0F172A"/>
+            <a:srgbClr val="121316"/>
           </a:solidFill>
           <a:ln>
             <a:noFill/>
           </a:ln>
           <a:effectLst/>
         </p:spPr>
-        <p:style>
-          <a:lnRef idx="1">
-            <a:schemeClr val="accent1"/>
-          </a:lnRef>
-          <a:fillRef idx="3">
-            <a:schemeClr val="accent1"/>
-          </a:fillRef>
-          <a:effectRef idx="2">
-            <a:schemeClr val="accent1"/>
-          </a:effectRef>
-          <a:fontRef idx="minor">
-            <a:schemeClr val="lt1"/>
-          </a:fontRef>
-        </p:style>
         <p:txBody>
           <a:bodyPr rtlCol="0" anchor="ctr"/>
           <a:lstStyle/>
@@ -4193,102 +4179,14 @@
       </p:sp>
       <p:sp>
         <p:nvSpPr>
-          <p:cNvPr id="3" name="Rectangle 2"/>
-          <p:cNvSpPr/>
-          <p:nvPr/>
-        </p:nvSpPr>
-        <p:spPr>
-          <a:xfrm>
-            <a:off x="0" y="0"/>
-            <a:ext cx="292608" cy="6858000"/>
-          </a:xfrm>
-          <a:prstGeom prst="rect">
-            <a:avLst/>
-          </a:prstGeom>
-          <a:solidFill>
-            <a:srgbClr val="4F46E5"/>
-          </a:solidFill>
-          <a:ln>
-            <a:noFill/>
-          </a:ln>
-          <a:effectLst/>
-        </p:spPr>
-        <p:style>
-          <a:lnRef idx="1">
-            <a:schemeClr val="accent1"/>
-          </a:lnRef>
-          <a:fillRef idx="3">
-            <a:schemeClr val="accent1"/>
-          </a:fillRef>
-          <a:effectRef idx="2">
-            <a:schemeClr val="accent1"/>
-          </a:effectRef>
-          <a:fontRef idx="minor">
-            <a:schemeClr val="lt1"/>
-          </a:fontRef>
-        </p:style>
-        <p:txBody>
-          <a:bodyPr rtlCol="0" anchor="ctr"/>
-          <a:lstStyle/>
-          <a:p>
-            <a:pPr algn="ctr"/>
-          </a:p>
-        </p:txBody>
-      </p:sp>
-      <p:sp>
-        <p:nvSpPr>
-          <p:cNvPr id="4" name="Rectangle 3"/>
-          <p:cNvSpPr/>
-          <p:nvPr/>
-        </p:nvSpPr>
-        <p:spPr>
-          <a:xfrm>
-            <a:off x="0" y="0"/>
-            <a:ext cx="12191695" cy="292608"/>
-          </a:xfrm>
-          <a:prstGeom prst="rect">
-            <a:avLst/>
-          </a:prstGeom>
-          <a:solidFill>
-            <a:srgbClr val="4F46E5"/>
-          </a:solidFill>
-          <a:ln>
-            <a:noFill/>
-          </a:ln>
-          <a:effectLst/>
-        </p:spPr>
-        <p:style>
-          <a:lnRef idx="1">
-            <a:schemeClr val="accent1"/>
-          </a:lnRef>
-          <a:fillRef idx="3">
-            <a:schemeClr val="accent1"/>
-          </a:fillRef>
-          <a:effectRef idx="2">
-            <a:schemeClr val="accent1"/>
-          </a:effectRef>
-          <a:fontRef idx="minor">
-            <a:schemeClr val="lt1"/>
-          </a:fontRef>
-        </p:style>
-        <p:txBody>
-          <a:bodyPr rtlCol="0" anchor="ctr"/>
-          <a:lstStyle/>
-          <a:p>
-            <a:pPr algn="ctr"/>
-          </a:p>
-        </p:txBody>
-      </p:sp>
-      <p:sp>
-        <p:nvSpPr>
-          <p:cNvPr id="5" name="TextBox 4"/>
+          <p:cNvPr id="3" name="TextBox 2"/>
           <p:cNvSpPr txBox="1"/>
           <p:nvPr/>
         </p:nvSpPr>
         <p:spPr>
           <a:xfrm>
-            <a:off x="822960" y="1371600"/>
-            <a:ext cx="10515600" cy="457200"/>
+            <a:off x="868680" y="1051560"/>
+            <a:ext cx="10058400" cy="365760"/>
           </a:xfrm>
           <a:prstGeom prst="rect">
             <a:avLst/>
@@ -4307,27 +4205,27 @@
               </a:spcAft>
             </a:pPr>
             <a:r>
-              <a:rPr sz="1400" b="1" i="0">
-                <a:solidFill>
-                  <a:srgbClr val="0EA5E9"/>
-                </a:solidFill>
-                <a:latin typeface="Trebuchet MS"/>
-              </a:rPr>
-              <a:t>SVEB · MINILEKTION (MICRO-TEACHING)</a:t>
-            </a:r>
-          </a:p>
-        </p:txBody>
-      </p:sp>
-      <p:sp>
-        <p:nvSpPr>
-          <p:cNvPr id="6" name="TextBox 5"/>
+              <a:rPr sz="1200" b="1" i="0">
+                <a:solidFill>
+                  <a:srgbClr val="A1A1AA"/>
+                </a:solidFill>
+                <a:latin typeface="Arial"/>
+              </a:rPr>
+              <a:t>SVEB · MINILEKTION</a:t>
+            </a:r>
+          </a:p>
+        </p:txBody>
+      </p:sp>
+      <p:sp>
+        <p:nvSpPr>
+          <p:cNvPr id="4" name="TextBox 3"/>
           <p:cNvSpPr txBox="1"/>
           <p:nvPr/>
         </p:nvSpPr>
         <p:spPr>
           <a:xfrm>
-            <a:off x="777240" y="1965960"/>
-            <a:ext cx="10607040" cy="2194560"/>
+            <a:off x="868680" y="1828800"/>
+            <a:ext cx="10424160" cy="2377440"/>
           </a:xfrm>
           <a:prstGeom prst="rect">
             <a:avLst/>
@@ -4349,13 +4247,13 @@
               </a:spcAft>
             </a:pPr>
             <a:r>
-              <a:rPr sz="4800" b="1" i="0">
+              <a:rPr sz="4600" b="1" i="0">
                 <a:solidFill>
                   <a:srgbClr val="FFFFFF"/>
                 </a:solidFill>
-                <a:latin typeface="Trebuchet MS"/>
-              </a:rPr>
-              <a:t>Meine eigene Website</a:t>
+                <a:latin typeface="Arial"/>
+              </a:rPr>
+              <a:t>Meine eigene Website mit </a:t>
             </a:r>
           </a:p>
           <a:p>
@@ -4368,45 +4266,27 @@
               </a:spcAft>
             </a:pPr>
             <a:r>
-              <a:rPr sz="4800" b="1" i="0">
+              <a:rPr sz="4600" b="1" i="0">
                 <a:solidFill>
                   <a:srgbClr val="FFFFFF"/>
                 </a:solidFill>
-                <a:latin typeface="Trebuchet MS"/>
-              </a:rPr>
-              <a:t>mit </a:t>
-            </a:r>
-            <a:r>
-              <a:rPr sz="4800" b="1" i="0">
-                <a:solidFill>
-                  <a:srgbClr val="0EA5E9"/>
-                </a:solidFill>
-                <a:latin typeface="Trebuchet MS"/>
+                <a:latin typeface="Arial"/>
               </a:rPr>
               <a:t>Google AI Studio</a:t>
             </a:r>
-            <a:r>
-              <a:rPr sz="4800" b="1" i="0">
-                <a:solidFill>
-                  <a:srgbClr val="FFFFFF"/>
-                </a:solidFill>
-                <a:latin typeface="Trebuchet MS"/>
-              </a:rPr>
-              <a:t> erstellen</a:t>
-            </a:r>
-          </a:p>
-        </p:txBody>
-      </p:sp>
-      <p:sp>
-        <p:nvSpPr>
-          <p:cNvPr id="7" name="TextBox 6"/>
+          </a:p>
+        </p:txBody>
+      </p:sp>
+      <p:sp>
+        <p:nvSpPr>
+          <p:cNvPr id="5" name="TextBox 4"/>
           <p:cNvSpPr txBox="1"/>
           <p:nvPr/>
         </p:nvSpPr>
         <p:spPr>
           <a:xfrm>
-            <a:off x="822960" y="4114800"/>
-            <a:ext cx="10058400" cy="548640"/>
+            <a:off x="868680" y="3794760"/>
+            <a:ext cx="9601200" cy="548640"/>
           </a:xfrm>
           <a:prstGeom prst="rect">
             <a:avLst/>
@@ -4427,195 +4307,47 @@
             <a:r>
               <a:rPr sz="1900" b="0" i="0">
                 <a:solidFill>
-                  <a:srgbClr val="CBD5E1"/>
-                </a:solidFill>
-                <a:latin typeface="Calibri"/>
-              </a:rPr>
-              <a:t>Ohne Programmieren – in normaler Sprache beschreiben, die KI baut die Website.</a:t>
-            </a:r>
-          </a:p>
-        </p:txBody>
-      </p:sp>
-      <p:sp>
-        <p:nvSpPr>
-          <p:cNvPr id="8" name="Rounded Rectangle 7"/>
-          <p:cNvSpPr/>
-          <p:nvPr/>
-        </p:nvSpPr>
-        <p:spPr>
-          <a:xfrm>
-            <a:off x="822960" y="5120640"/>
-            <a:ext cx="2468880" cy="594360"/>
-          </a:xfrm>
-          <a:prstGeom prst="roundRect">
-            <a:avLst>
-              <a:gd name="adj" fmla="val 8000"/>
-            </a:avLst>
-          </a:prstGeom>
-          <a:solidFill>
-            <a:srgbClr val="1E293B"/>
-          </a:solidFill>
-          <a:ln>
-            <a:noFill/>
+                  <a:srgbClr val="A1A1AA"/>
+                </a:solidFill>
+                <a:latin typeface="Arial"/>
+              </a:rPr>
+              <a:t>Ohne Programmieren – beschreiben, die KI baut.</a:t>
+            </a:r>
+          </a:p>
+        </p:txBody>
+      </p:sp>
+      <p:cxnSp>
+        <p:nvCxnSpPr>
+          <p:cNvPr id="6" name="Connector 5"/>
+          <p:cNvCxnSpPr/>
+          <p:nvPr/>
+        </p:nvCxnSpPr>
+        <p:spPr>
+          <a:xfrm>
+            <a:off x="868680" y="5074920"/>
+            <a:ext cx="10469879" cy="0"/>
+          </a:xfrm>
+          <a:prstGeom prst="line">
+            <a:avLst/>
+          </a:prstGeom>
+          <a:ln w="12700">
+            <a:solidFill>
+              <a:srgbClr val="3F3F46"/>
+            </a:solidFill>
           </a:ln>
           <a:effectLst/>
         </p:spPr>
-        <p:style>
-          <a:lnRef idx="1">
-            <a:schemeClr val="accent1"/>
-          </a:lnRef>
-          <a:fillRef idx="3">
-            <a:schemeClr val="accent1"/>
-          </a:fillRef>
-          <a:effectRef idx="2">
-            <a:schemeClr val="accent1"/>
-          </a:effectRef>
-          <a:fontRef idx="minor">
-            <a:schemeClr val="lt1"/>
-          </a:fontRef>
-        </p:style>
-        <p:txBody>
-          <a:bodyPr rtlCol="0" anchor="ctr"/>
-          <a:lstStyle/>
-          <a:p>
-            <a:pPr algn="ctr"/>
-          </a:p>
-        </p:txBody>
-      </p:sp>
-      <p:sp>
-        <p:nvSpPr>
-          <p:cNvPr id="9" name="TextBox 8"/>
+      </p:cxnSp>
+      <p:sp>
+        <p:nvSpPr>
+          <p:cNvPr id="7" name="TextBox 6"/>
           <p:cNvSpPr txBox="1"/>
           <p:nvPr/>
         </p:nvSpPr>
         <p:spPr>
           <a:xfrm>
-            <a:off x="822960" y="5120640"/>
-            <a:ext cx="2468880" cy="594360"/>
-          </a:xfrm>
-          <a:prstGeom prst="rect">
-            <a:avLst/>
-          </a:prstGeom>
-          <a:noFill/>
-        </p:spPr>
-        <p:txBody>
-          <a:bodyPr wrap="square" anchor="ctr" lIns="0" rIns="0" tIns="0" bIns="0">
-            <a:spAutoFit/>
-          </a:bodyPr>
-          <a:lstStyle/>
-          <a:p>
-            <a:pPr algn="ctr">
-              <a:spcAft>
-                <a:spcPts val="200"/>
-              </a:spcAft>
-            </a:pPr>
-            <a:r>
-              <a:rPr sz="1500" b="1" i="0">
-                <a:solidFill>
-                  <a:srgbClr val="FFFFFF"/>
-                </a:solidFill>
-                <a:latin typeface="Calibri"/>
-              </a:rPr>
-              <a:t>20–25 Minuten</a:t>
-            </a:r>
-          </a:p>
-        </p:txBody>
-      </p:sp>
-      <p:sp>
-        <p:nvSpPr>
-          <p:cNvPr id="10" name="Rounded Rectangle 9"/>
-          <p:cNvSpPr/>
-          <p:nvPr/>
-        </p:nvSpPr>
-        <p:spPr>
-          <a:xfrm>
-            <a:off x="3429000" y="5120640"/>
-            <a:ext cx="3017520" cy="594360"/>
-          </a:xfrm>
-          <a:prstGeom prst="roundRect">
-            <a:avLst>
-              <a:gd name="adj" fmla="val 8000"/>
-            </a:avLst>
-          </a:prstGeom>
-          <a:solidFill>
-            <a:srgbClr val="1E293B"/>
-          </a:solidFill>
-          <a:ln>
-            <a:noFill/>
-          </a:ln>
-          <a:effectLst/>
-        </p:spPr>
-        <p:style>
-          <a:lnRef idx="1">
-            <a:schemeClr val="accent1"/>
-          </a:lnRef>
-          <a:fillRef idx="3">
-            <a:schemeClr val="accent1"/>
-          </a:fillRef>
-          <a:effectRef idx="2">
-            <a:schemeClr val="accent1"/>
-          </a:effectRef>
-          <a:fontRef idx="minor">
-            <a:schemeClr val="lt1"/>
-          </a:fontRef>
-        </p:style>
-        <p:txBody>
-          <a:bodyPr rtlCol="0" anchor="ctr"/>
-          <a:lstStyle/>
-          <a:p>
-            <a:pPr algn="ctr"/>
-          </a:p>
-        </p:txBody>
-      </p:sp>
-      <p:sp>
-        <p:nvSpPr>
-          <p:cNvPr id="11" name="TextBox 10"/>
-          <p:cNvSpPr txBox="1"/>
-          <p:nvPr/>
-        </p:nvSpPr>
-        <p:spPr>
-          <a:xfrm>
-            <a:off x="3429000" y="5120640"/>
-            <a:ext cx="3017520" cy="594360"/>
-          </a:xfrm>
-          <a:prstGeom prst="rect">
-            <a:avLst/>
-          </a:prstGeom>
-          <a:noFill/>
-        </p:spPr>
-        <p:txBody>
-          <a:bodyPr wrap="square" anchor="ctr" lIns="0" rIns="0" tIns="0" bIns="0">
-            <a:spAutoFit/>
-          </a:bodyPr>
-          <a:lstStyle/>
-          <a:p>
-            <a:pPr algn="ctr">
-              <a:spcAft>
-                <a:spcPts val="200"/>
-              </a:spcAft>
-            </a:pPr>
-            <a:r>
-              <a:rPr sz="1500" b="1" i="0">
-                <a:solidFill>
-                  <a:srgbClr val="FFFFFF"/>
-                </a:solidFill>
-                <a:latin typeface="Calibri"/>
-              </a:rPr>
-              <a:t>Absolute Einsteiger:innen</a:t>
-            </a:r>
-          </a:p>
-        </p:txBody>
-      </p:sp>
-      <p:sp>
-        <p:nvSpPr>
-          <p:cNvPr id="12" name="TextBox 11"/>
-          <p:cNvSpPr txBox="1"/>
-          <p:nvPr/>
-        </p:nvSpPr>
-        <p:spPr>
-          <a:xfrm>
-            <a:off x="822960" y="6126480"/>
-            <a:ext cx="10515600" cy="365760"/>
+            <a:off x="868680" y="5303520"/>
+            <a:ext cx="10469880" cy="457200"/>
           </a:xfrm>
           <a:prstGeom prst="rect">
             <a:avLst/>
@@ -4636,11 +4368,11 @@
             <a:r>
               <a:rPr sz="1300" b="0" i="0">
                 <a:solidFill>
-                  <a:srgbClr val="64748B"/>
-                </a:solidFill>
-                <a:latin typeface="Calibri"/>
-              </a:rPr>
-              <a:t>Name: ____________________      Datum: __________</a:t>
+                  <a:srgbClr val="A1A1AA"/>
+                </a:solidFill>
+                <a:latin typeface="Arial"/>
+              </a:rPr>
+              <a:t>20–25 Min.      Absolute Einsteiger:innen      Name / Datum: ______________</a:t>
             </a:r>
           </a:p>
         </p:txBody>
@@ -4678,27 +4410,13 @@
             <a:avLst/>
           </a:prstGeom>
           <a:solidFill>
-            <a:srgbClr val="0F172A"/>
+            <a:srgbClr val="121316"/>
           </a:solidFill>
           <a:ln>
             <a:noFill/>
           </a:ln>
           <a:effectLst/>
         </p:spPr>
-        <p:style>
-          <a:lnRef idx="1">
-            <a:schemeClr val="accent1"/>
-          </a:lnRef>
-          <a:fillRef idx="3">
-            <a:schemeClr val="accent1"/>
-          </a:fillRef>
-          <a:effectRef idx="2">
-            <a:schemeClr val="accent1"/>
-          </a:effectRef>
-          <a:fontRef idx="minor">
-            <a:schemeClr val="lt1"/>
-          </a:fontRef>
-        </p:style>
         <p:txBody>
           <a:bodyPr rtlCol="0" anchor="ctr"/>
           <a:lstStyle/>
@@ -4709,58 +4427,14 @@
       </p:sp>
       <p:sp>
         <p:nvSpPr>
-          <p:cNvPr id="3" name="Rectangle 2"/>
-          <p:cNvSpPr/>
-          <p:nvPr/>
-        </p:nvSpPr>
-        <p:spPr>
-          <a:xfrm>
-            <a:off x="0" y="0"/>
-            <a:ext cx="292608" cy="6858000"/>
-          </a:xfrm>
-          <a:prstGeom prst="rect">
-            <a:avLst/>
-          </a:prstGeom>
-          <a:solidFill>
-            <a:srgbClr val="4F46E5"/>
-          </a:solidFill>
-          <a:ln>
-            <a:noFill/>
-          </a:ln>
-          <a:effectLst/>
-        </p:spPr>
-        <p:style>
-          <a:lnRef idx="1">
-            <a:schemeClr val="accent1"/>
-          </a:lnRef>
-          <a:fillRef idx="3">
-            <a:schemeClr val="accent1"/>
-          </a:fillRef>
-          <a:effectRef idx="2">
-            <a:schemeClr val="accent1"/>
-          </a:effectRef>
-          <a:fontRef idx="minor">
-            <a:schemeClr val="lt1"/>
-          </a:fontRef>
-        </p:style>
-        <p:txBody>
-          <a:bodyPr rtlCol="0" anchor="ctr"/>
-          <a:lstStyle/>
-          <a:p>
-            <a:pPr algn="ctr"/>
-          </a:p>
-        </p:txBody>
-      </p:sp>
-      <p:sp>
-        <p:nvSpPr>
-          <p:cNvPr id="4" name="TextBox 3"/>
+          <p:cNvPr id="3" name="TextBox 2"/>
           <p:cNvSpPr txBox="1"/>
           <p:nvPr/>
         </p:nvSpPr>
         <p:spPr>
           <a:xfrm>
-            <a:off x="822960" y="914400"/>
-            <a:ext cx="10515600" cy="1371600"/>
+            <a:off x="868680" y="1234440"/>
+            <a:ext cx="10424160" cy="1371600"/>
           </a:xfrm>
           <a:prstGeom prst="rect">
             <a:avLst/>
@@ -4783,7 +4457,7 @@
                 <a:solidFill>
                   <a:srgbClr val="FFFFFF"/>
                 </a:solidFill>
-                <a:latin typeface="Trebuchet MS"/>
+                <a:latin typeface="Arial"/>
               </a:rPr>
               <a:t>Geschafft – und jetzt?</a:t>
             </a:r>
@@ -4797,97 +4471,59 @@
             <a:r>
               <a:rPr sz="1900" b="0" i="0">
                 <a:solidFill>
-                  <a:srgbClr val="CBD5E1"/>
-                </a:solidFill>
-                <a:latin typeface="Calibri"/>
-              </a:rPr>
-              <a:t>Eure eigene Website ist nur einen Prompt entfernt.</a:t>
-            </a:r>
-          </a:p>
-        </p:txBody>
-      </p:sp>
-      <p:sp>
-        <p:nvSpPr>
-          <p:cNvPr id="5" name="Rounded Rectangle 4"/>
-          <p:cNvSpPr/>
-          <p:nvPr/>
-        </p:nvSpPr>
-        <p:spPr>
-          <a:xfrm>
-            <a:off x="822960" y="2743200"/>
-            <a:ext cx="5074920" cy="2468880"/>
-          </a:xfrm>
-          <a:prstGeom prst="roundRect">
-            <a:avLst>
-              <a:gd name="adj" fmla="val 8000"/>
-            </a:avLst>
-          </a:prstGeom>
-          <a:solidFill>
-            <a:srgbClr val="1E293B"/>
-          </a:solidFill>
-          <a:ln>
-            <a:noFill/>
+                  <a:srgbClr val="A1A1AA"/>
+                </a:solidFill>
+                <a:latin typeface="Arial"/>
+              </a:rPr>
+              <a:t>Eure Website ist nur einen Prompt entfernt.</a:t>
+            </a:r>
+          </a:p>
+        </p:txBody>
+      </p:sp>
+      <p:cxnSp>
+        <p:nvCxnSpPr>
+          <p:cNvPr id="4" name="Connector 3"/>
+          <p:cNvCxnSpPr/>
+          <p:nvPr/>
+        </p:nvCxnSpPr>
+        <p:spPr>
+          <a:xfrm>
+            <a:off x="868680" y="3200400"/>
+            <a:ext cx="10469879" cy="0"/>
+          </a:xfrm>
+          <a:prstGeom prst="line">
+            <a:avLst/>
+          </a:prstGeom>
+          <a:ln w="12700">
+            <a:solidFill>
+              <a:srgbClr val="3F3F46"/>
+            </a:solidFill>
           </a:ln>
           <a:effectLst/>
         </p:spPr>
-        <p:style>
-          <a:lnRef idx="1">
-            <a:schemeClr val="accent1"/>
-          </a:lnRef>
-          <a:fillRef idx="3">
-            <a:schemeClr val="accent1"/>
-          </a:fillRef>
-          <a:effectRef idx="2">
-            <a:schemeClr val="accent1"/>
-          </a:effectRef>
-          <a:fontRef idx="minor">
-            <a:schemeClr val="lt1"/>
-          </a:fontRef>
-        </p:style>
-        <p:txBody>
-          <a:bodyPr rtlCol="0" anchor="ctr"/>
-          <a:lstStyle/>
-          <a:p>
-            <a:pPr algn="ctr"/>
-          </a:p>
-        </p:txBody>
-      </p:sp>
-      <p:sp>
-        <p:nvSpPr>
-          <p:cNvPr id="6" name="Oval 5"/>
+      </p:cxnSp>
+      <p:sp>
+        <p:nvSpPr>
+          <p:cNvPr id="5" name="Oval 4"/>
           <p:cNvSpPr/>
           <p:nvPr/>
         </p:nvSpPr>
         <p:spPr>
           <a:xfrm>
-            <a:off x="1143000" y="3063240"/>
-            <a:ext cx="640080" cy="640080"/>
+            <a:off x="868680" y="3474720"/>
+            <a:ext cx="548640" cy="548640"/>
           </a:xfrm>
           <a:prstGeom prst="ellipse">
             <a:avLst/>
           </a:prstGeom>
-          <a:solidFill>
-            <a:srgbClr val="0EA5E9"/>
-          </a:solidFill>
-          <a:ln>
-            <a:noFill/>
+          <a:noFill/>
+          <a:ln w="16510">
+            <a:solidFill>
+              <a:srgbClr val="A1A1AA"/>
+            </a:solidFill>
           </a:ln>
           <a:effectLst/>
         </p:spPr>
-        <p:style>
-          <a:lnRef idx="1">
-            <a:schemeClr val="accent1"/>
-          </a:lnRef>
-          <a:fillRef idx="3">
-            <a:schemeClr val="accent1"/>
-          </a:fillRef>
-          <a:effectRef idx="2">
-            <a:schemeClr val="accent1"/>
-          </a:effectRef>
-          <a:fontRef idx="minor">
-            <a:schemeClr val="lt1"/>
-          </a:fontRef>
-        </p:style>
         <p:txBody>
           <a:bodyPr rtlCol="0" anchor="ctr"/>
           <a:lstStyle/>
@@ -4898,14 +4534,14 @@
       </p:sp>
       <p:sp>
         <p:nvSpPr>
-          <p:cNvPr id="7" name="TextBox 6"/>
+          <p:cNvPr id="6" name="TextBox 5"/>
           <p:cNvSpPr txBox="1"/>
           <p:nvPr/>
         </p:nvSpPr>
         <p:spPr>
           <a:xfrm>
-            <a:off x="1143000" y="3044952"/>
-            <a:ext cx="640080" cy="640080"/>
+            <a:off x="868680" y="3447288"/>
+            <a:ext cx="548640" cy="548640"/>
           </a:xfrm>
           <a:prstGeom prst="rect">
             <a:avLst/>
@@ -4924,11 +4560,11 @@
               </a:spcAft>
             </a:pPr>
             <a:r>
-              <a:rPr sz="1800" b="1" i="0">
+              <a:rPr sz="1400" b="1" i="0">
                 <a:solidFill>
                   <a:srgbClr val="FFFFFF"/>
                 </a:solidFill>
-                <a:latin typeface="Trebuchet MS"/>
+                <a:latin typeface="Arial"/>
               </a:rPr>
               <a:t>1</a:t>
             </a:r>
@@ -4937,14 +4573,14 @@
       </p:sp>
       <p:sp>
         <p:nvSpPr>
-          <p:cNvPr id="8" name="TextBox 7"/>
+          <p:cNvPr id="7" name="TextBox 6"/>
           <p:cNvSpPr txBox="1"/>
           <p:nvPr/>
         </p:nvSpPr>
         <p:spPr>
           <a:xfrm>
-            <a:off x="1143000" y="3931920"/>
-            <a:ext cx="4526280" cy="1188720"/>
+            <a:off x="1737360" y="3438144"/>
+            <a:ext cx="9418320" cy="914400"/>
           </a:xfrm>
           <a:prstGeom prst="rect">
             <a:avLst/>
@@ -4959,122 +4595,81 @@
           <a:p>
             <a:pPr algn="l">
               <a:spcAft>
-                <a:spcPts val="600"/>
-              </a:spcAft>
-            </a:pPr>
-            <a:r>
-              <a:rPr sz="1900" b="1" i="0">
+                <a:spcPts val="300"/>
+              </a:spcAft>
+            </a:pPr>
+            <a:r>
+              <a:rPr sz="2100" b="1" i="0">
                 <a:solidFill>
                   <a:srgbClr val="FFFFFF"/>
                 </a:solidFill>
-                <a:latin typeface="Trebuchet MS"/>
+                <a:latin typeface="Arial"/>
               </a:rPr>
               <a:t>Zeigt euch eure Ergebnisse</a:t>
             </a:r>
           </a:p>
           <a:p>
             <a:pPr algn="l">
-              <a:lnSpc>
-                <a:spcPct val="112000"/>
-              </a:lnSpc>
               <a:spcAft>
                 <a:spcPts val="200"/>
               </a:spcAft>
             </a:pPr>
             <a:r>
-              <a:rPr sz="1450" b="0" i="0">
-                <a:solidFill>
-                  <a:srgbClr val="CBD5E1"/>
-                </a:solidFill>
-                <a:latin typeface="Calibri"/>
-              </a:rPr>
-              <a:t>Geht kurz herum und schaut euch gegenseitig eure Websites an – holt euch Ideen.</a:t>
-            </a:r>
-          </a:p>
-        </p:txBody>
-      </p:sp>
-      <p:sp>
-        <p:nvSpPr>
-          <p:cNvPr id="9" name="Rounded Rectangle 8"/>
-          <p:cNvSpPr/>
-          <p:nvPr/>
-        </p:nvSpPr>
-        <p:spPr>
-          <a:xfrm>
-            <a:off x="6263640" y="2743200"/>
-            <a:ext cx="5074920" cy="2468880"/>
-          </a:xfrm>
-          <a:prstGeom prst="roundRect">
-            <a:avLst>
-              <a:gd name="adj" fmla="val 8000"/>
-            </a:avLst>
-          </a:prstGeom>
-          <a:solidFill>
-            <a:srgbClr val="1E293B"/>
-          </a:solidFill>
-          <a:ln>
-            <a:noFill/>
+              <a:rPr sz="1500" b="0" i="0">
+                <a:solidFill>
+                  <a:srgbClr val="A1A1AA"/>
+                </a:solidFill>
+                <a:latin typeface="Arial"/>
+              </a:rPr>
+              <a:t>Kurz herumgehen, Ideen holen.</a:t>
+            </a:r>
+          </a:p>
+        </p:txBody>
+      </p:sp>
+      <p:cxnSp>
+        <p:nvCxnSpPr>
+          <p:cNvPr id="8" name="Connector 7"/>
+          <p:cNvCxnSpPr/>
+          <p:nvPr/>
+        </p:nvCxnSpPr>
+        <p:spPr>
+          <a:xfrm>
+            <a:off x="868680" y="4434840"/>
+            <a:ext cx="10469879" cy="0"/>
+          </a:xfrm>
+          <a:prstGeom prst="line">
+            <a:avLst/>
+          </a:prstGeom>
+          <a:ln w="12700">
+            <a:solidFill>
+              <a:srgbClr val="3F3F46"/>
+            </a:solidFill>
           </a:ln>
           <a:effectLst/>
         </p:spPr>
-        <p:style>
-          <a:lnRef idx="1">
-            <a:schemeClr val="accent1"/>
-          </a:lnRef>
-          <a:fillRef idx="3">
-            <a:schemeClr val="accent1"/>
-          </a:fillRef>
-          <a:effectRef idx="2">
-            <a:schemeClr val="accent1"/>
-          </a:effectRef>
-          <a:fontRef idx="minor">
-            <a:schemeClr val="lt1"/>
-          </a:fontRef>
-        </p:style>
-        <p:txBody>
-          <a:bodyPr rtlCol="0" anchor="ctr"/>
-          <a:lstStyle/>
-          <a:p>
-            <a:pPr algn="ctr"/>
-          </a:p>
-        </p:txBody>
-      </p:sp>
-      <p:sp>
-        <p:nvSpPr>
-          <p:cNvPr id="10" name="Oval 9"/>
+      </p:cxnSp>
+      <p:sp>
+        <p:nvSpPr>
+          <p:cNvPr id="9" name="Oval 8"/>
           <p:cNvSpPr/>
           <p:nvPr/>
         </p:nvSpPr>
         <p:spPr>
           <a:xfrm>
-            <a:off x="6583680" y="3063240"/>
-            <a:ext cx="640080" cy="640080"/>
+            <a:off x="868680" y="4709159"/>
+            <a:ext cx="548640" cy="548640"/>
           </a:xfrm>
           <a:prstGeom prst="ellipse">
             <a:avLst/>
           </a:prstGeom>
-          <a:solidFill>
-            <a:srgbClr val="0EA5E9"/>
-          </a:solidFill>
-          <a:ln>
-            <a:noFill/>
+          <a:noFill/>
+          <a:ln w="16510">
+            <a:solidFill>
+              <a:srgbClr val="A1A1AA"/>
+            </a:solidFill>
           </a:ln>
           <a:effectLst/>
         </p:spPr>
-        <p:style>
-          <a:lnRef idx="1">
-            <a:schemeClr val="accent1"/>
-          </a:lnRef>
-          <a:fillRef idx="3">
-            <a:schemeClr val="accent1"/>
-          </a:fillRef>
-          <a:effectRef idx="2">
-            <a:schemeClr val="accent1"/>
-          </a:effectRef>
-          <a:fontRef idx="minor">
-            <a:schemeClr val="lt1"/>
-          </a:fontRef>
-        </p:style>
         <p:txBody>
           <a:bodyPr rtlCol="0" anchor="ctr"/>
           <a:lstStyle/>
@@ -5085,14 +4680,14 @@
       </p:sp>
       <p:sp>
         <p:nvSpPr>
-          <p:cNvPr id="11" name="TextBox 10"/>
+          <p:cNvPr id="10" name="TextBox 9"/>
           <p:cNvSpPr txBox="1"/>
           <p:nvPr/>
         </p:nvSpPr>
         <p:spPr>
           <a:xfrm>
-            <a:off x="6583680" y="3044952"/>
-            <a:ext cx="640080" cy="640080"/>
+            <a:off x="868680" y="4681727"/>
+            <a:ext cx="548640" cy="548640"/>
           </a:xfrm>
           <a:prstGeom prst="rect">
             <a:avLst/>
@@ -5111,11 +4706,11 @@
               </a:spcAft>
             </a:pPr>
             <a:r>
-              <a:rPr sz="1800" b="1" i="0">
+              <a:rPr sz="1400" b="1" i="0">
                 <a:solidFill>
                   <a:srgbClr val="FFFFFF"/>
                 </a:solidFill>
-                <a:latin typeface="Trebuchet MS"/>
+                <a:latin typeface="Arial"/>
               </a:rPr>
               <a:t>2</a:t>
             </a:r>
@@ -5124,14 +4719,14 @@
       </p:sp>
       <p:sp>
         <p:nvSpPr>
-          <p:cNvPr id="12" name="TextBox 11"/>
+          <p:cNvPr id="11" name="TextBox 10"/>
           <p:cNvSpPr txBox="1"/>
           <p:nvPr/>
         </p:nvSpPr>
         <p:spPr>
           <a:xfrm>
-            <a:off x="6583680" y="3931920"/>
-            <a:ext cx="4526280" cy="1188720"/>
+            <a:off x="1737360" y="4672583"/>
+            <a:ext cx="9418320" cy="914400"/>
           </a:xfrm>
           <a:prstGeom prst="rect">
             <a:avLst/>
@@ -5146,40 +4741,59 @@
           <a:p>
             <a:pPr algn="l">
               <a:spcAft>
-                <a:spcPts val="600"/>
-              </a:spcAft>
-            </a:pPr>
-            <a:r>
-              <a:rPr sz="1900" b="1" i="0">
+                <a:spcPts val="300"/>
+              </a:spcAft>
+            </a:pPr>
+            <a:r>
+              <a:rPr sz="2100" b="1" i="0">
                 <a:solidFill>
                   <a:srgbClr val="FFFFFF"/>
                 </a:solidFill>
-                <a:latin typeface="Trebuchet MS"/>
+                <a:latin typeface="Arial"/>
               </a:rPr>
               <a:t>Teilt euren Link</a:t>
             </a:r>
           </a:p>
           <a:p>
             <a:pPr algn="l">
-              <a:lnSpc>
-                <a:spcPct val="112000"/>
-              </a:lnSpc>
               <a:spcAft>
                 <a:spcPts val="200"/>
               </a:spcAft>
             </a:pPr>
             <a:r>
-              <a:rPr sz="1450" b="0" i="0">
-                <a:solidFill>
-                  <a:srgbClr val="CBD5E1"/>
-                </a:solidFill>
-                <a:latin typeface="Calibri"/>
-              </a:rPr>
-              <a:t>Postet euren Vorschau-/Veröffentlichungs-Link in den WhatsApp-Gruppenchat.</a:t>
-            </a:r>
-          </a:p>
-        </p:txBody>
-      </p:sp>
+              <a:rPr sz="1500" b="0" i="0">
+                <a:solidFill>
+                  <a:srgbClr val="A1A1AA"/>
+                </a:solidFill>
+                <a:latin typeface="Arial"/>
+              </a:rPr>
+              <a:t>Vorschau-Link in den WhatsApp-Gruppenchat posten.</a:t>
+            </a:r>
+          </a:p>
+        </p:txBody>
+      </p:sp>
+      <p:cxnSp>
+        <p:nvCxnSpPr>
+          <p:cNvPr id="12" name="Connector 11"/>
+          <p:cNvCxnSpPr/>
+          <p:nvPr/>
+        </p:nvCxnSpPr>
+        <p:spPr>
+          <a:xfrm>
+            <a:off x="868680" y="5669279"/>
+            <a:ext cx="10469879" cy="0"/>
+          </a:xfrm>
+          <a:prstGeom prst="line">
+            <a:avLst/>
+          </a:prstGeom>
+          <a:ln w="12700">
+            <a:solidFill>
+              <a:srgbClr val="3F3F46"/>
+            </a:solidFill>
+          </a:ln>
+          <a:effectLst/>
+        </p:spPr>
+      </p:cxnSp>
       <p:sp>
         <p:nvSpPr>
           <p:cNvPr id="13" name="TextBox 12"/>
@@ -5188,8 +4802,8 @@
         </p:nvSpPr>
         <p:spPr>
           <a:xfrm>
-            <a:off x="822960" y="5623560"/>
-            <a:ext cx="10515600" cy="457200"/>
+            <a:off x="868680" y="5897879"/>
+            <a:ext cx="10469880" cy="365760"/>
           </a:xfrm>
           <a:prstGeom prst="rect">
             <a:avLst/>
@@ -5202,19 +4816,19 @@
           </a:bodyPr>
           <a:lstStyle/>
           <a:p>
-            <a:pPr algn="ctr">
+            <a:pPr algn="l">
               <a:spcAft>
                 <a:spcPts val="200"/>
               </a:spcAft>
             </a:pPr>
             <a:r>
-              <a:rPr sz="1600" b="0" i="1">
-                <a:solidFill>
-                  <a:srgbClr val="94A3B8"/>
-                </a:solidFill>
-                <a:latin typeface="Calibri"/>
-              </a:rPr>
-              <a:t>Danke fürs Mitmachen – und viel Spass beim Weiterbauen!</a:t>
+              <a:rPr sz="1500" b="0" i="1">
+                <a:solidFill>
+                  <a:srgbClr val="A1A1AA"/>
+                </a:solidFill>
+                <a:latin typeface="Arial"/>
+              </a:rPr>
+              <a:t>Danke fürs Mitmachen.</a:t>
             </a:r>
           </a:p>
         </p:txBody>
@@ -5252,27 +4866,13 @@
             <a:avLst/>
           </a:prstGeom>
           <a:solidFill>
-            <a:srgbClr val="F8FAFC"/>
+            <a:srgbClr val="FFFFFF"/>
           </a:solidFill>
           <a:ln>
             <a:noFill/>
           </a:ln>
           <a:effectLst/>
         </p:spPr>
-        <p:style>
-          <a:lnRef idx="1">
-            <a:schemeClr val="accent1"/>
-          </a:lnRef>
-          <a:fillRef idx="3">
-            <a:schemeClr val="accent1"/>
-          </a:fillRef>
-          <a:effectRef idx="2">
-            <a:schemeClr val="accent1"/>
-          </a:effectRef>
-          <a:fontRef idx="minor">
-            <a:schemeClr val="lt1"/>
-          </a:fontRef>
-        </p:style>
         <p:txBody>
           <a:bodyPr rtlCol="0" anchor="ctr"/>
           <a:lstStyle/>
@@ -5289,8 +4889,8 @@
         </p:nvSpPr>
         <p:spPr>
           <a:xfrm>
-            <a:off x="822960" y="594360"/>
-            <a:ext cx="7315200" cy="365760"/>
+            <a:off x="868680" y="777240"/>
+            <a:ext cx="10058400" cy="365760"/>
           </a:xfrm>
           <a:prstGeom prst="rect">
             <a:avLst/>
@@ -5311,11 +4911,11 @@
             <a:r>
               <a:rPr sz="1200" b="1" i="0">
                 <a:solidFill>
-                  <a:srgbClr val="4F46E5"/>
-                </a:solidFill>
-                <a:latin typeface="Trebuchet MS"/>
-              </a:rPr>
-              <a:t>LERNZIELE · NACH R. F. MAGER</a:t>
+                  <a:srgbClr val="71717A"/>
+                </a:solidFill>
+                <a:latin typeface="Arial"/>
+              </a:rPr>
+              <a:t>LERNZIELE · NACH MAGER</a:t>
             </a:r>
           </a:p>
         </p:txBody>
@@ -5328,8 +4928,8 @@
         </p:nvSpPr>
         <p:spPr>
           <a:xfrm>
-            <a:off x="822960" y="960120"/>
-            <a:ext cx="10515600" cy="731520"/>
+            <a:off x="868680" y="1234440"/>
+            <a:ext cx="10424160" cy="822960"/>
           </a:xfrm>
           <a:prstGeom prst="rect">
             <a:avLst/>
@@ -5348,65 +4948,39 @@
               </a:spcAft>
             </a:pPr>
             <a:r>
-              <a:rPr sz="3400" b="1" i="0">
-                <a:solidFill>
-                  <a:srgbClr val="0F172A"/>
-                </a:solidFill>
-                <a:latin typeface="Trebuchet MS"/>
-              </a:rPr>
-              <a:t>Was ihr nach der Lektion könnt</a:t>
-            </a:r>
-          </a:p>
-        </p:txBody>
-      </p:sp>
-      <p:sp>
-        <p:nvSpPr>
-          <p:cNvPr id="5" name="Rounded Rectangle 4"/>
-          <p:cNvSpPr/>
-          <p:nvPr/>
-        </p:nvSpPr>
-        <p:spPr>
-          <a:xfrm>
-            <a:off x="822960" y="2011680"/>
-            <a:ext cx="10515600" cy="1234440"/>
-          </a:xfrm>
-          <a:prstGeom prst="roundRect">
-            <a:avLst>
-              <a:gd name="adj" fmla="val 8000"/>
-            </a:avLst>
-          </a:prstGeom>
-          <a:solidFill>
-            <a:srgbClr val="FFFFFF"/>
-          </a:solidFill>
+              <a:rPr sz="3300" b="1" i="0">
+                <a:solidFill>
+                  <a:srgbClr val="121316"/>
+                </a:solidFill>
+                <a:latin typeface="Arial"/>
+              </a:rPr>
+              <a:t>Was ihr danach könnt</a:t>
+            </a:r>
+          </a:p>
+        </p:txBody>
+      </p:sp>
+      <p:cxnSp>
+        <p:nvCxnSpPr>
+          <p:cNvPr id="5" name="Connector 4"/>
+          <p:cNvCxnSpPr/>
+          <p:nvPr/>
+        </p:nvCxnSpPr>
+        <p:spPr>
+          <a:xfrm>
+            <a:off x="868680" y="2468880"/>
+            <a:ext cx="10469879" cy="0"/>
+          </a:xfrm>
+          <a:prstGeom prst="line">
+            <a:avLst/>
+          </a:prstGeom>
           <a:ln w="12700">
             <a:solidFill>
-              <a:srgbClr val="E2E8F0"/>
+              <a:srgbClr val="E4E4E7"/>
             </a:solidFill>
           </a:ln>
           <a:effectLst/>
         </p:spPr>
-        <p:style>
-          <a:lnRef idx="1">
-            <a:schemeClr val="accent1"/>
-          </a:lnRef>
-          <a:fillRef idx="3">
-            <a:schemeClr val="accent1"/>
-          </a:fillRef>
-          <a:effectRef idx="2">
-            <a:schemeClr val="accent1"/>
-          </a:effectRef>
-          <a:fontRef idx="minor">
-            <a:schemeClr val="lt1"/>
-          </a:fontRef>
-        </p:style>
-        <p:txBody>
-          <a:bodyPr rtlCol="0" anchor="ctr"/>
-          <a:lstStyle/>
-          <a:p>
-            <a:pPr algn="ctr"/>
-          </a:p>
-        </p:txBody>
-      </p:sp>
+      </p:cxnSp>
       <p:sp>
         <p:nvSpPr>
           <p:cNvPr id="6" name="Oval 5"/>
@@ -5415,34 +4989,20 @@
         </p:nvSpPr>
         <p:spPr>
           <a:xfrm>
-            <a:off x="1097280" y="2313432"/>
-            <a:ext cx="640080" cy="640080"/>
+            <a:off x="868680" y="2761488"/>
+            <a:ext cx="548640" cy="548640"/>
           </a:xfrm>
           <a:prstGeom prst="ellipse">
             <a:avLst/>
           </a:prstGeom>
-          <a:solidFill>
-            <a:srgbClr val="4F46E5"/>
-          </a:solidFill>
-          <a:ln>
-            <a:noFill/>
+          <a:noFill/>
+          <a:ln w="16510">
+            <a:solidFill>
+              <a:srgbClr val="121316"/>
+            </a:solidFill>
           </a:ln>
           <a:effectLst/>
         </p:spPr>
-        <p:style>
-          <a:lnRef idx="1">
-            <a:schemeClr val="accent1"/>
-          </a:lnRef>
-          <a:fillRef idx="3">
-            <a:schemeClr val="accent1"/>
-          </a:fillRef>
-          <a:effectRef idx="2">
-            <a:schemeClr val="accent1"/>
-          </a:effectRef>
-          <a:fontRef idx="minor">
-            <a:schemeClr val="lt1"/>
-          </a:fontRef>
-        </p:style>
         <p:txBody>
           <a:bodyPr rtlCol="0" anchor="ctr"/>
           <a:lstStyle/>
@@ -5459,8 +5019,8 @@
         </p:nvSpPr>
         <p:spPr>
           <a:xfrm>
-            <a:off x="1097280" y="2295144"/>
-            <a:ext cx="640080" cy="640080"/>
+            <a:off x="868680" y="2734056"/>
+            <a:ext cx="548640" cy="548640"/>
           </a:xfrm>
           <a:prstGeom prst="rect">
             <a:avLst/>
@@ -5479,11 +5039,11 @@
               </a:spcAft>
             </a:pPr>
             <a:r>
-              <a:rPr sz="1800" b="1" i="0">
-                <a:solidFill>
-                  <a:srgbClr val="FFFFFF"/>
-                </a:solidFill>
-                <a:latin typeface="Trebuchet MS"/>
+              <a:rPr sz="1400" b="1" i="0">
+                <a:solidFill>
+                  <a:srgbClr val="121316"/>
+                </a:solidFill>
+                <a:latin typeface="Arial"/>
               </a:rPr>
               <a:t>1</a:t>
             </a:r>
@@ -5498,8 +5058,8 @@
         </p:nvSpPr>
         <p:spPr>
           <a:xfrm>
-            <a:off x="2057400" y="2212848"/>
-            <a:ext cx="9052560" cy="914400"/>
+            <a:off x="1737360" y="2724912"/>
+            <a:ext cx="9509760" cy="1005840"/>
           </a:xfrm>
           <a:prstGeom prst="rect">
             <a:avLst/>
@@ -5520,9 +5080,9 @@
             <a:r>
               <a:rPr sz="2000" b="1" i="0">
                 <a:solidFill>
-                  <a:srgbClr val="4F46E5"/>
-                </a:solidFill>
-                <a:latin typeface="Trebuchet MS"/>
+                  <a:srgbClr val="121316"/>
+                </a:solidFill>
+                <a:latin typeface="Arial"/>
               </a:rPr>
               <a:t>Erklären, was Google AI Studio ist</a:t>
             </a:r>
@@ -5534,65 +5094,39 @@
               </a:spcAft>
             </a:pPr>
             <a:r>
-              <a:rPr sz="1500" b="0" i="0">
-                <a:solidFill>
-                  <a:srgbClr val="0F172A"/>
-                </a:solidFill>
-                <a:latin typeface="Calibri"/>
-              </a:rPr>
-              <a:t>Mindestens zwei Einsatzmöglichkeiten benennen können.</a:t>
-            </a:r>
-          </a:p>
-        </p:txBody>
-      </p:sp>
-      <p:sp>
-        <p:nvSpPr>
-          <p:cNvPr id="9" name="Rounded Rectangle 8"/>
-          <p:cNvSpPr/>
-          <p:nvPr/>
-        </p:nvSpPr>
-        <p:spPr>
-          <a:xfrm>
-            <a:off x="822960" y="3474720"/>
-            <a:ext cx="10515600" cy="1234440"/>
-          </a:xfrm>
-          <a:prstGeom prst="roundRect">
-            <a:avLst>
-              <a:gd name="adj" fmla="val 8000"/>
-            </a:avLst>
-          </a:prstGeom>
-          <a:solidFill>
-            <a:srgbClr val="FFFFFF"/>
-          </a:solidFill>
+              <a:rPr sz="1400" b="0" i="0">
+                <a:solidFill>
+                  <a:srgbClr val="71717A"/>
+                </a:solidFill>
+                <a:latin typeface="Arial"/>
+              </a:rPr>
+              <a:t>Zwei Beispiele nennen, was man damit bauen kann.</a:t>
+            </a:r>
+          </a:p>
+        </p:txBody>
+      </p:sp>
+      <p:cxnSp>
+        <p:nvCxnSpPr>
+          <p:cNvPr id="9" name="Connector 8"/>
+          <p:cNvCxnSpPr/>
+          <p:nvPr/>
+        </p:nvCxnSpPr>
+        <p:spPr>
+          <a:xfrm>
+            <a:off x="868680" y="3749039"/>
+            <a:ext cx="10469879" cy="0"/>
+          </a:xfrm>
+          <a:prstGeom prst="line">
+            <a:avLst/>
+          </a:prstGeom>
           <a:ln w="12700">
             <a:solidFill>
-              <a:srgbClr val="E2E8F0"/>
+              <a:srgbClr val="E4E4E7"/>
             </a:solidFill>
           </a:ln>
           <a:effectLst/>
         </p:spPr>
-        <p:style>
-          <a:lnRef idx="1">
-            <a:schemeClr val="accent1"/>
-          </a:lnRef>
-          <a:fillRef idx="3">
-            <a:schemeClr val="accent1"/>
-          </a:fillRef>
-          <a:effectRef idx="2">
-            <a:schemeClr val="accent1"/>
-          </a:effectRef>
-          <a:fontRef idx="minor">
-            <a:schemeClr val="lt1"/>
-          </a:fontRef>
-        </p:style>
-        <p:txBody>
-          <a:bodyPr rtlCol="0" anchor="ctr"/>
-          <a:lstStyle/>
-          <a:p>
-            <a:pPr algn="ctr"/>
-          </a:p>
-        </p:txBody>
-      </p:sp>
+      </p:cxnSp>
       <p:sp>
         <p:nvSpPr>
           <p:cNvPr id="10" name="Oval 9"/>
@@ -5601,34 +5135,20 @@
         </p:nvSpPr>
         <p:spPr>
           <a:xfrm>
-            <a:off x="1097280" y="3776472"/>
-            <a:ext cx="640080" cy="640080"/>
+            <a:off x="868680" y="4041648"/>
+            <a:ext cx="548640" cy="548640"/>
           </a:xfrm>
           <a:prstGeom prst="ellipse">
             <a:avLst/>
           </a:prstGeom>
-          <a:solidFill>
-            <a:srgbClr val="4F46E5"/>
-          </a:solidFill>
-          <a:ln>
-            <a:noFill/>
+          <a:noFill/>
+          <a:ln w="16510">
+            <a:solidFill>
+              <a:srgbClr val="121316"/>
+            </a:solidFill>
           </a:ln>
           <a:effectLst/>
         </p:spPr>
-        <p:style>
-          <a:lnRef idx="1">
-            <a:schemeClr val="accent1"/>
-          </a:lnRef>
-          <a:fillRef idx="3">
-            <a:schemeClr val="accent1"/>
-          </a:fillRef>
-          <a:effectRef idx="2">
-            <a:schemeClr val="accent1"/>
-          </a:effectRef>
-          <a:fontRef idx="minor">
-            <a:schemeClr val="lt1"/>
-          </a:fontRef>
-        </p:style>
         <p:txBody>
           <a:bodyPr rtlCol="0" anchor="ctr"/>
           <a:lstStyle/>
@@ -5645,8 +5165,8 @@
         </p:nvSpPr>
         <p:spPr>
           <a:xfrm>
-            <a:off x="1097280" y="3758184"/>
-            <a:ext cx="640080" cy="640080"/>
+            <a:off x="868680" y="4014215"/>
+            <a:ext cx="548640" cy="548640"/>
           </a:xfrm>
           <a:prstGeom prst="rect">
             <a:avLst/>
@@ -5665,11 +5185,11 @@
               </a:spcAft>
             </a:pPr>
             <a:r>
-              <a:rPr sz="1800" b="1" i="0">
-                <a:solidFill>
-                  <a:srgbClr val="FFFFFF"/>
-                </a:solidFill>
-                <a:latin typeface="Trebuchet MS"/>
+              <a:rPr sz="1400" b="1" i="0">
+                <a:solidFill>
+                  <a:srgbClr val="121316"/>
+                </a:solidFill>
+                <a:latin typeface="Arial"/>
               </a:rPr>
               <a:t>2</a:t>
             </a:r>
@@ -5684,8 +5204,8 @@
         </p:nvSpPr>
         <p:spPr>
           <a:xfrm>
-            <a:off x="2057400" y="3675888"/>
-            <a:ext cx="9052560" cy="914400"/>
+            <a:off x="1737360" y="4005072"/>
+            <a:ext cx="9509760" cy="1005840"/>
           </a:xfrm>
           <a:prstGeom prst="rect">
             <a:avLst/>
@@ -5706,11 +5226,11 @@
             <a:r>
               <a:rPr sz="2000" b="1" i="0">
                 <a:solidFill>
-                  <a:srgbClr val="4F46E5"/>
-                </a:solidFill>
-                <a:latin typeface="Trebuchet MS"/>
-              </a:rPr>
-              <a:t>Einen Website-Auftrag (Prompt) bauen</a:t>
+                  <a:srgbClr val="121316"/>
+                </a:solidFill>
+                <a:latin typeface="Arial"/>
+              </a:rPr>
+              <a:t>Einen Website-Auftrag bauen</a:t>
             </a:r>
           </a:p>
           <a:p>
@@ -5720,65 +5240,39 @@
               </a:spcAft>
             </a:pPr>
             <a:r>
-              <a:rPr sz="1500" b="0" i="0">
-                <a:solidFill>
-                  <a:srgbClr val="0F172A"/>
-                </a:solidFill>
-                <a:latin typeface="Calibri"/>
-              </a:rPr>
-              <a:t>Mit dem Baukasten einen klaren Auftrag zum eigenen Thema zusammenstellen.</a:t>
-            </a:r>
-          </a:p>
-        </p:txBody>
-      </p:sp>
-      <p:sp>
-        <p:nvSpPr>
-          <p:cNvPr id="13" name="Rounded Rectangle 12"/>
-          <p:cNvSpPr/>
-          <p:nvPr/>
-        </p:nvSpPr>
-        <p:spPr>
-          <a:xfrm>
-            <a:off x="822960" y="4937760"/>
-            <a:ext cx="10515600" cy="1234440"/>
-          </a:xfrm>
-          <a:prstGeom prst="roundRect">
-            <a:avLst>
-              <a:gd name="adj" fmla="val 8000"/>
-            </a:avLst>
-          </a:prstGeom>
-          <a:solidFill>
-            <a:srgbClr val="FFFFFF"/>
-          </a:solidFill>
+              <a:rPr sz="1400" b="0" i="0">
+                <a:solidFill>
+                  <a:srgbClr val="71717A"/>
+                </a:solidFill>
+                <a:latin typeface="Arial"/>
+              </a:rPr>
+              <a:t>Mit dem Baukasten einen klaren Prompt zusammenstellen.</a:t>
+            </a:r>
+          </a:p>
+        </p:txBody>
+      </p:sp>
+      <p:cxnSp>
+        <p:nvCxnSpPr>
+          <p:cNvPr id="13" name="Connector 12"/>
+          <p:cNvCxnSpPr/>
+          <p:nvPr/>
+        </p:nvCxnSpPr>
+        <p:spPr>
+          <a:xfrm>
+            <a:off x="868680" y="5029200"/>
+            <a:ext cx="10469879" cy="0"/>
+          </a:xfrm>
+          <a:prstGeom prst="line">
+            <a:avLst/>
+          </a:prstGeom>
           <a:ln w="12700">
             <a:solidFill>
-              <a:srgbClr val="E2E8F0"/>
+              <a:srgbClr val="E4E4E7"/>
             </a:solidFill>
           </a:ln>
           <a:effectLst/>
         </p:spPr>
-        <p:style>
-          <a:lnRef idx="1">
-            <a:schemeClr val="accent1"/>
-          </a:lnRef>
-          <a:fillRef idx="3">
-            <a:schemeClr val="accent1"/>
-          </a:fillRef>
-          <a:effectRef idx="2">
-            <a:schemeClr val="accent1"/>
-          </a:effectRef>
-          <a:fontRef idx="minor">
-            <a:schemeClr val="lt1"/>
-          </a:fontRef>
-        </p:style>
-        <p:txBody>
-          <a:bodyPr rtlCol="0" anchor="ctr"/>
-          <a:lstStyle/>
-          <a:p>
-            <a:pPr algn="ctr"/>
-          </a:p>
-        </p:txBody>
-      </p:sp>
+      </p:cxnSp>
       <p:sp>
         <p:nvSpPr>
           <p:cNvPr id="14" name="Oval 13"/>
@@ -5787,34 +5281,20 @@
         </p:nvSpPr>
         <p:spPr>
           <a:xfrm>
-            <a:off x="1097280" y="5239512"/>
-            <a:ext cx="640080" cy="640080"/>
+            <a:off x="868680" y="5321808"/>
+            <a:ext cx="548640" cy="548640"/>
           </a:xfrm>
           <a:prstGeom prst="ellipse">
             <a:avLst/>
           </a:prstGeom>
-          <a:solidFill>
-            <a:srgbClr val="4F46E5"/>
-          </a:solidFill>
-          <a:ln>
-            <a:noFill/>
+          <a:noFill/>
+          <a:ln w="16510">
+            <a:solidFill>
+              <a:srgbClr val="121316"/>
+            </a:solidFill>
           </a:ln>
           <a:effectLst/>
         </p:spPr>
-        <p:style>
-          <a:lnRef idx="1">
-            <a:schemeClr val="accent1"/>
-          </a:lnRef>
-          <a:fillRef idx="3">
-            <a:schemeClr val="accent1"/>
-          </a:fillRef>
-          <a:effectRef idx="2">
-            <a:schemeClr val="accent1"/>
-          </a:effectRef>
-          <a:fontRef idx="minor">
-            <a:schemeClr val="lt1"/>
-          </a:fontRef>
-        </p:style>
         <p:txBody>
           <a:bodyPr rtlCol="0" anchor="ctr"/>
           <a:lstStyle/>
@@ -5831,8 +5311,8 @@
         </p:nvSpPr>
         <p:spPr>
           <a:xfrm>
-            <a:off x="1097280" y="5221224"/>
-            <a:ext cx="640080" cy="640080"/>
+            <a:off x="868680" y="5294376"/>
+            <a:ext cx="548640" cy="548640"/>
           </a:xfrm>
           <a:prstGeom prst="rect">
             <a:avLst/>
@@ -5851,11 +5331,11 @@
               </a:spcAft>
             </a:pPr>
             <a:r>
-              <a:rPr sz="1800" b="1" i="0">
-                <a:solidFill>
-                  <a:srgbClr val="FFFFFF"/>
-                </a:solidFill>
-                <a:latin typeface="Trebuchet MS"/>
+              <a:rPr sz="1400" b="1" i="0">
+                <a:solidFill>
+                  <a:srgbClr val="121316"/>
+                </a:solidFill>
+                <a:latin typeface="Arial"/>
               </a:rPr>
               <a:t>3</a:t>
             </a:r>
@@ -5870,8 +5350,8 @@
         </p:nvSpPr>
         <p:spPr>
           <a:xfrm>
-            <a:off x="2057400" y="5138928"/>
-            <a:ext cx="9052560" cy="914400"/>
+            <a:off x="1737360" y="5285232"/>
+            <a:ext cx="9509760" cy="1005840"/>
           </a:xfrm>
           <a:prstGeom prst="rect">
             <a:avLst/>
@@ -5892,9 +5372,9 @@
             <a:r>
               <a:rPr sz="2000" b="1" i="0">
                 <a:solidFill>
-                  <a:srgbClr val="4F46E5"/>
-                </a:solidFill>
-                <a:latin typeface="Trebuchet MS"/>
+                  <a:srgbClr val="121316"/>
+                </a:solidFill>
+                <a:latin typeface="Arial"/>
               </a:rPr>
               <a:t>Eine erste Website erzeugen</a:t>
             </a:r>
@@ -5906,17 +5386,39 @@
               </a:spcAft>
             </a:pPr>
             <a:r>
-              <a:rPr sz="1500" b="0" i="0">
-                <a:solidFill>
-                  <a:srgbClr val="0F172A"/>
-                </a:solidFill>
-                <a:latin typeface="Calibri"/>
-              </a:rPr>
-              <a:t>Den Prompt in Google AI Studio einfügen und die Live-Vorschau sehen.</a:t>
-            </a:r>
-          </a:p>
-        </p:txBody>
-      </p:sp>
+              <a:rPr sz="1400" b="0" i="0">
+                <a:solidFill>
+                  <a:srgbClr val="71717A"/>
+                </a:solidFill>
+                <a:latin typeface="Arial"/>
+              </a:rPr>
+              <a:t>Prompt in AI Studio einfügen, Vorschau sehen.</a:t>
+            </a:r>
+          </a:p>
+        </p:txBody>
+      </p:sp>
+      <p:cxnSp>
+        <p:nvCxnSpPr>
+          <p:cNvPr id="17" name="Connector 16"/>
+          <p:cNvCxnSpPr/>
+          <p:nvPr/>
+        </p:nvCxnSpPr>
+        <p:spPr>
+          <a:xfrm>
+            <a:off x="868680" y="6309360"/>
+            <a:ext cx="10469879" cy="0"/>
+          </a:xfrm>
+          <a:prstGeom prst="line">
+            <a:avLst/>
+          </a:prstGeom>
+          <a:ln w="12700">
+            <a:solidFill>
+              <a:srgbClr val="E4E4E7"/>
+            </a:solidFill>
+          </a:ln>
+          <a:effectLst/>
+        </p:spPr>
+      </p:cxnSp>
     </p:spTree>
   </p:cSld>
   <p:clrMapOvr>
@@ -5950,27 +5452,13 @@
             <a:avLst/>
           </a:prstGeom>
           <a:solidFill>
-            <a:srgbClr val="F8FAFC"/>
+            <a:srgbClr val="FFFFFF"/>
           </a:solidFill>
           <a:ln>
             <a:noFill/>
           </a:ln>
           <a:effectLst/>
         </p:spPr>
-        <p:style>
-          <a:lnRef idx="1">
-            <a:schemeClr val="accent1"/>
-          </a:lnRef>
-          <a:fillRef idx="3">
-            <a:schemeClr val="accent1"/>
-          </a:fillRef>
-          <a:effectRef idx="2">
-            <a:schemeClr val="accent1"/>
-          </a:effectRef>
-          <a:fontRef idx="minor">
-            <a:schemeClr val="lt1"/>
-          </a:fontRef>
-        </p:style>
         <p:txBody>
           <a:bodyPr rtlCol="0" anchor="ctr"/>
           <a:lstStyle/>
@@ -5987,8 +5475,8 @@
         </p:nvSpPr>
         <p:spPr>
           <a:xfrm>
-            <a:off x="822960" y="594360"/>
-            <a:ext cx="7315200" cy="365760"/>
+            <a:off x="868680" y="777240"/>
+            <a:ext cx="10058400" cy="365760"/>
           </a:xfrm>
           <a:prstGeom prst="rect">
             <a:avLst/>
@@ -6009,11 +5497,11 @@
             <a:r>
               <a:rPr sz="1200" b="1" i="0">
                 <a:solidFill>
-                  <a:srgbClr val="4F46E5"/>
-                </a:solidFill>
-                <a:latin typeface="Trebuchet MS"/>
-              </a:rPr>
-              <a:t>ABLAUF · MODELL ARIVA</a:t>
+                  <a:srgbClr val="71717A"/>
+                </a:solidFill>
+                <a:latin typeface="Arial"/>
+              </a:rPr>
+              <a:t>ABLAUF · ARIVA</a:t>
             </a:r>
           </a:p>
         </p:txBody>
@@ -6026,8 +5514,8 @@
         </p:nvSpPr>
         <p:spPr>
           <a:xfrm>
-            <a:off x="822960" y="960120"/>
-            <a:ext cx="10515600" cy="731520"/>
+            <a:off x="868680" y="1234440"/>
+            <a:ext cx="10424160" cy="822960"/>
           </a:xfrm>
           <a:prstGeom prst="rect">
             <a:avLst/>
@@ -6046,158 +5534,49 @@
               </a:spcAft>
             </a:pPr>
             <a:r>
-              <a:rPr sz="3400" b="1" i="0">
-                <a:solidFill>
-                  <a:srgbClr val="0F172A"/>
-                </a:solidFill>
-                <a:latin typeface="Trebuchet MS"/>
-              </a:rPr>
-              <a:t>So läuft die Lektion ab</a:t>
-            </a:r>
-          </a:p>
-        </p:txBody>
-      </p:sp>
-      <p:sp>
-        <p:nvSpPr>
-          <p:cNvPr id="5" name="Rounded Rectangle 4"/>
-          <p:cNvSpPr/>
-          <p:nvPr/>
-        </p:nvSpPr>
-        <p:spPr>
-          <a:xfrm>
-            <a:off x="822960" y="2148840"/>
-            <a:ext cx="1993392" cy="3200400"/>
-          </a:xfrm>
-          <a:prstGeom prst="roundRect">
-            <a:avLst>
-              <a:gd name="adj" fmla="val 8000"/>
-            </a:avLst>
-          </a:prstGeom>
-          <a:solidFill>
-            <a:srgbClr val="FFFFFF"/>
-          </a:solidFill>
+              <a:rPr sz="3300" b="1" i="0">
+                <a:solidFill>
+                  <a:srgbClr val="121316"/>
+                </a:solidFill>
+                <a:latin typeface="Arial"/>
+              </a:rPr>
+              <a:t>So läuft die Lektion</a:t>
+            </a:r>
+          </a:p>
+        </p:txBody>
+      </p:sp>
+      <p:cxnSp>
+        <p:nvCxnSpPr>
+          <p:cNvPr id="5" name="Connector 4"/>
+          <p:cNvCxnSpPr/>
+          <p:nvPr/>
+        </p:nvCxnSpPr>
+        <p:spPr>
+          <a:xfrm>
+            <a:off x="868680" y="2331720"/>
+            <a:ext cx="10469879" cy="0"/>
+          </a:xfrm>
+          <a:prstGeom prst="line">
+            <a:avLst/>
+          </a:prstGeom>
           <a:ln w="12700">
             <a:solidFill>
-              <a:srgbClr val="E2E8F0"/>
+              <a:srgbClr val="E4E4E7"/>
             </a:solidFill>
           </a:ln>
           <a:effectLst/>
         </p:spPr>
-        <p:style>
-          <a:lnRef idx="1">
-            <a:schemeClr val="accent1"/>
-          </a:lnRef>
-          <a:fillRef idx="3">
-            <a:schemeClr val="accent1"/>
-          </a:fillRef>
-          <a:effectRef idx="2">
-            <a:schemeClr val="accent1"/>
-          </a:effectRef>
-          <a:fontRef idx="minor">
-            <a:schemeClr val="lt1"/>
-          </a:fontRef>
-        </p:style>
-        <p:txBody>
-          <a:bodyPr rtlCol="0" anchor="ctr"/>
-          <a:lstStyle/>
-          <a:p>
-            <a:pPr algn="ctr"/>
-          </a:p>
-        </p:txBody>
-      </p:sp>
-      <p:sp>
-        <p:nvSpPr>
-          <p:cNvPr id="6" name="Oval 5"/>
-          <p:cNvSpPr/>
-          <p:nvPr/>
-        </p:nvSpPr>
-        <p:spPr>
-          <a:xfrm>
-            <a:off x="1408176" y="2468880"/>
-            <a:ext cx="822960" cy="822960"/>
-          </a:xfrm>
-          <a:prstGeom prst="ellipse">
-            <a:avLst/>
-          </a:prstGeom>
-          <a:solidFill>
-            <a:srgbClr val="4F46E5"/>
-          </a:solidFill>
-          <a:ln>
-            <a:noFill/>
-          </a:ln>
-          <a:effectLst/>
-        </p:spPr>
-        <p:style>
-          <a:lnRef idx="1">
-            <a:schemeClr val="accent1"/>
-          </a:lnRef>
-          <a:fillRef idx="3">
-            <a:schemeClr val="accent1"/>
-          </a:fillRef>
-          <a:effectRef idx="2">
-            <a:schemeClr val="accent1"/>
-          </a:effectRef>
-          <a:fontRef idx="minor">
-            <a:schemeClr val="lt1"/>
-          </a:fontRef>
-        </p:style>
-        <p:txBody>
-          <a:bodyPr rtlCol="0" anchor="ctr"/>
-          <a:lstStyle/>
-          <a:p>
-            <a:pPr algn="ctr"/>
-          </a:p>
-        </p:txBody>
-      </p:sp>
-      <p:sp>
-        <p:nvSpPr>
-          <p:cNvPr id="7" name="TextBox 6"/>
+      </p:cxnSp>
+      <p:sp>
+        <p:nvSpPr>
+          <p:cNvPr id="6" name="TextBox 5"/>
           <p:cNvSpPr txBox="1"/>
           <p:nvPr/>
         </p:nvSpPr>
         <p:spPr>
           <a:xfrm>
-            <a:off x="1408176" y="2450592"/>
-            <a:ext cx="822960" cy="822960"/>
-          </a:xfrm>
-          <a:prstGeom prst="rect">
-            <a:avLst/>
-          </a:prstGeom>
-          <a:noFill/>
-        </p:spPr>
-        <p:txBody>
-          <a:bodyPr wrap="square" anchor="ctr" lIns="0" rIns="0" tIns="0" bIns="0">
-            <a:spAutoFit/>
-          </a:bodyPr>
-          <a:lstStyle/>
-          <a:p>
-            <a:pPr algn="ctr">
-              <a:spcAft>
-                <a:spcPts val="200"/>
-              </a:spcAft>
-            </a:pPr>
-            <a:r>
-              <a:rPr sz="3000" b="1" i="0">
-                <a:solidFill>
-                  <a:srgbClr val="FFFFFF"/>
-                </a:solidFill>
-                <a:latin typeface="Trebuchet MS"/>
-              </a:rPr>
-              <a:t>A</a:t>
-            </a:r>
-          </a:p>
-        </p:txBody>
-      </p:sp>
-      <p:sp>
-        <p:nvSpPr>
-          <p:cNvPr id="8" name="TextBox 7"/>
-          <p:cNvSpPr txBox="1"/>
-          <p:nvPr/>
-        </p:nvSpPr>
-        <p:spPr>
-          <a:xfrm>
-            <a:off x="914400" y="3474720"/>
-            <a:ext cx="1810512" cy="1737360"/>
+            <a:off x="978407" y="2651760"/>
+            <a:ext cx="1874519" cy="822960"/>
           </a:xfrm>
           <a:prstGeom prst="rect">
             <a:avLst/>
@@ -6210,39 +5589,81 @@
           </a:bodyPr>
           <a:lstStyle/>
           <a:p>
-            <a:pPr algn="ctr">
-              <a:spcAft>
-                <a:spcPts val="400"/>
-              </a:spcAft>
-            </a:pPr>
-            <a:r>
-              <a:rPr sz="1600" b="1" i="0">
-                <a:solidFill>
-                  <a:srgbClr val="0F172A"/>
-                </a:solidFill>
-                <a:latin typeface="Trebuchet MS"/>
+            <a:pPr algn="l">
+              <a:spcAft>
+                <a:spcPts val="200"/>
+              </a:spcAft>
+            </a:pPr>
+            <a:r>
+              <a:rPr sz="3400" b="1" i="0">
+                <a:solidFill>
+                  <a:srgbClr val="121316"/>
+                </a:solidFill>
+                <a:latin typeface="Arial"/>
+              </a:rPr>
+              <a:t>A</a:t>
+            </a:r>
+          </a:p>
+        </p:txBody>
+      </p:sp>
+      <p:sp>
+        <p:nvSpPr>
+          <p:cNvPr id="7" name="TextBox 6"/>
+          <p:cNvSpPr txBox="1"/>
+          <p:nvPr/>
+        </p:nvSpPr>
+        <p:spPr>
+          <a:xfrm>
+            <a:off x="978407" y="3520439"/>
+            <a:ext cx="1874519" cy="1645920"/>
+          </a:xfrm>
+          <a:prstGeom prst="rect">
+            <a:avLst/>
+          </a:prstGeom>
+          <a:noFill/>
+        </p:spPr>
+        <p:txBody>
+          <a:bodyPr wrap="square" anchor="t" lIns="0" rIns="0" tIns="0" bIns="0">
+            <a:spAutoFit/>
+          </a:bodyPr>
+          <a:lstStyle/>
+          <a:p>
+            <a:pPr algn="l">
+              <a:lnSpc>
+                <a:spcPct val="100000"/>
+              </a:lnSpc>
+              <a:spcAft>
+                <a:spcPts val="300"/>
+              </a:spcAft>
+            </a:pPr>
+            <a:r>
+              <a:rPr sz="1500" b="1" i="0">
+                <a:solidFill>
+                  <a:srgbClr val="121316"/>
+                </a:solidFill>
+                <a:latin typeface="Arial"/>
               </a:rPr>
               <a:t>Ausrichten</a:t>
             </a:r>
           </a:p>
           <a:p>
-            <a:pPr algn="ctr">
-              <a:spcAft>
-                <a:spcPts val="600"/>
+            <a:pPr algn="l">
+              <a:spcAft>
+                <a:spcPts val="500"/>
               </a:spcAft>
             </a:pPr>
             <a:r>
               <a:rPr sz="1400" b="1" i="0">
                 <a:solidFill>
-                  <a:srgbClr val="4F46E5"/>
-                </a:solidFill>
-                <a:latin typeface="Calibri"/>
-              </a:rPr>
-              <a:t>3 Min</a:t>
-            </a:r>
-          </a:p>
-          <a:p>
-            <a:pPr algn="ctr">
+                  <a:srgbClr val="71717A"/>
+                </a:solidFill>
+                <a:latin typeface="Arial"/>
+              </a:rPr>
+              <a:t>3′</a:t>
+            </a:r>
+          </a:p>
+          <a:p>
+            <a:pPr algn="l">
               <a:lnSpc>
                 <a:spcPct val="105000"/>
               </a:lnSpc>
@@ -6251,158 +5672,49 @@
               </a:spcAft>
             </a:pPr>
             <a:r>
-              <a:rPr sz="1250" b="0" i="0">
-                <a:solidFill>
-                  <a:srgbClr val="64748B"/>
-                </a:solidFill>
-                <a:latin typeface="Calibri"/>
-              </a:rPr>
-              <a:t>Begrüssung, Ziele &amp; Ablauf</a:t>
-            </a:r>
-          </a:p>
-        </p:txBody>
-      </p:sp>
-      <p:sp>
-        <p:nvSpPr>
-          <p:cNvPr id="9" name="Rounded Rectangle 8"/>
-          <p:cNvSpPr/>
-          <p:nvPr/>
-        </p:nvSpPr>
-        <p:spPr>
-          <a:xfrm>
-            <a:off x="2999232" y="2148840"/>
-            <a:ext cx="1993392" cy="3200400"/>
-          </a:xfrm>
-          <a:prstGeom prst="roundRect">
-            <a:avLst>
-              <a:gd name="adj" fmla="val 8000"/>
-            </a:avLst>
-          </a:prstGeom>
-          <a:solidFill>
-            <a:srgbClr val="FFFFFF"/>
-          </a:solidFill>
+              <a:rPr sz="1200" b="0" i="0">
+                <a:solidFill>
+                  <a:srgbClr val="71717A"/>
+                </a:solidFill>
+                <a:latin typeface="Arial"/>
+              </a:rPr>
+              <a:t>Ziele &amp; Ablauf</a:t>
+            </a:r>
+          </a:p>
+        </p:txBody>
+      </p:sp>
+      <p:cxnSp>
+        <p:nvCxnSpPr>
+          <p:cNvPr id="8" name="Connector 7"/>
+          <p:cNvCxnSpPr/>
+          <p:nvPr/>
+        </p:nvCxnSpPr>
+        <p:spPr>
+          <a:xfrm>
+            <a:off x="2962656" y="2514600"/>
+            <a:ext cx="0" cy="2743200"/>
+          </a:xfrm>
+          <a:prstGeom prst="line">
+            <a:avLst/>
+          </a:prstGeom>
           <a:ln w="12700">
             <a:solidFill>
-              <a:srgbClr val="E2E8F0"/>
+              <a:srgbClr val="E4E4E7"/>
             </a:solidFill>
           </a:ln>
           <a:effectLst/>
         </p:spPr>
-        <p:style>
-          <a:lnRef idx="1">
-            <a:schemeClr val="accent1"/>
-          </a:lnRef>
-          <a:fillRef idx="3">
-            <a:schemeClr val="accent1"/>
-          </a:fillRef>
-          <a:effectRef idx="2">
-            <a:schemeClr val="accent1"/>
-          </a:effectRef>
-          <a:fontRef idx="minor">
-            <a:schemeClr val="lt1"/>
-          </a:fontRef>
-        </p:style>
-        <p:txBody>
-          <a:bodyPr rtlCol="0" anchor="ctr"/>
-          <a:lstStyle/>
-          <a:p>
-            <a:pPr algn="ctr"/>
-          </a:p>
-        </p:txBody>
-      </p:sp>
-      <p:sp>
-        <p:nvSpPr>
-          <p:cNvPr id="10" name="Oval 9"/>
-          <p:cNvSpPr/>
-          <p:nvPr/>
-        </p:nvSpPr>
-        <p:spPr>
-          <a:xfrm>
-            <a:off x="3584448" y="2468880"/>
-            <a:ext cx="822960" cy="822960"/>
-          </a:xfrm>
-          <a:prstGeom prst="ellipse">
-            <a:avLst/>
-          </a:prstGeom>
-          <a:solidFill>
-            <a:srgbClr val="7C3AED"/>
-          </a:solidFill>
-          <a:ln>
-            <a:noFill/>
-          </a:ln>
-          <a:effectLst/>
-        </p:spPr>
-        <p:style>
-          <a:lnRef idx="1">
-            <a:schemeClr val="accent1"/>
-          </a:lnRef>
-          <a:fillRef idx="3">
-            <a:schemeClr val="accent1"/>
-          </a:fillRef>
-          <a:effectRef idx="2">
-            <a:schemeClr val="accent1"/>
-          </a:effectRef>
-          <a:fontRef idx="minor">
-            <a:schemeClr val="lt1"/>
-          </a:fontRef>
-        </p:style>
-        <p:txBody>
-          <a:bodyPr rtlCol="0" anchor="ctr"/>
-          <a:lstStyle/>
-          <a:p>
-            <a:pPr algn="ctr"/>
-          </a:p>
-        </p:txBody>
-      </p:sp>
-      <p:sp>
-        <p:nvSpPr>
-          <p:cNvPr id="11" name="TextBox 10"/>
+      </p:cxnSp>
+      <p:sp>
+        <p:nvSpPr>
+          <p:cNvPr id="9" name="TextBox 8"/>
           <p:cNvSpPr txBox="1"/>
           <p:nvPr/>
         </p:nvSpPr>
         <p:spPr>
           <a:xfrm>
-            <a:off x="3584448" y="2450592"/>
-            <a:ext cx="822960" cy="822960"/>
-          </a:xfrm>
-          <a:prstGeom prst="rect">
-            <a:avLst/>
-          </a:prstGeom>
-          <a:noFill/>
-        </p:spPr>
-        <p:txBody>
-          <a:bodyPr wrap="square" anchor="ctr" lIns="0" rIns="0" tIns="0" bIns="0">
-            <a:spAutoFit/>
-          </a:bodyPr>
-          <a:lstStyle/>
-          <a:p>
-            <a:pPr algn="ctr">
-              <a:spcAft>
-                <a:spcPts val="200"/>
-              </a:spcAft>
-            </a:pPr>
-            <a:r>
-              <a:rPr sz="3000" b="1" i="0">
-                <a:solidFill>
-                  <a:srgbClr val="FFFFFF"/>
-                </a:solidFill>
-                <a:latin typeface="Trebuchet MS"/>
-              </a:rPr>
-              <a:t>R</a:t>
-            </a:r>
-          </a:p>
-        </p:txBody>
-      </p:sp>
-      <p:sp>
-        <p:nvSpPr>
-          <p:cNvPr id="12" name="TextBox 11"/>
-          <p:cNvSpPr txBox="1"/>
-          <p:nvPr/>
-        </p:nvSpPr>
-        <p:spPr>
-          <a:xfrm>
-            <a:off x="3090672" y="3474720"/>
-            <a:ext cx="1810512" cy="1737360"/>
+            <a:off x="3072384" y="2651760"/>
+            <a:ext cx="1874519" cy="822960"/>
           </a:xfrm>
           <a:prstGeom prst="rect">
             <a:avLst/>
@@ -6415,39 +5727,81 @@
           </a:bodyPr>
           <a:lstStyle/>
           <a:p>
-            <a:pPr algn="ctr">
-              <a:spcAft>
-                <a:spcPts val="400"/>
-              </a:spcAft>
-            </a:pPr>
-            <a:r>
-              <a:rPr sz="1600" b="1" i="0">
-                <a:solidFill>
-                  <a:srgbClr val="0F172A"/>
-                </a:solidFill>
-                <a:latin typeface="Trebuchet MS"/>
+            <a:pPr algn="l">
+              <a:spcAft>
+                <a:spcPts val="200"/>
+              </a:spcAft>
+            </a:pPr>
+            <a:r>
+              <a:rPr sz="3400" b="1" i="0">
+                <a:solidFill>
+                  <a:srgbClr val="121316"/>
+                </a:solidFill>
+                <a:latin typeface="Arial"/>
+              </a:rPr>
+              <a:t>R</a:t>
+            </a:r>
+          </a:p>
+        </p:txBody>
+      </p:sp>
+      <p:sp>
+        <p:nvSpPr>
+          <p:cNvPr id="10" name="TextBox 9"/>
+          <p:cNvSpPr txBox="1"/>
+          <p:nvPr/>
+        </p:nvSpPr>
+        <p:spPr>
+          <a:xfrm>
+            <a:off x="3072384" y="3520439"/>
+            <a:ext cx="1874519" cy="1645920"/>
+          </a:xfrm>
+          <a:prstGeom prst="rect">
+            <a:avLst/>
+          </a:prstGeom>
+          <a:noFill/>
+        </p:spPr>
+        <p:txBody>
+          <a:bodyPr wrap="square" anchor="t" lIns="0" rIns="0" tIns="0" bIns="0">
+            <a:spAutoFit/>
+          </a:bodyPr>
+          <a:lstStyle/>
+          <a:p>
+            <a:pPr algn="l">
+              <a:lnSpc>
+                <a:spcPct val="100000"/>
+              </a:lnSpc>
+              <a:spcAft>
+                <a:spcPts val="300"/>
+              </a:spcAft>
+            </a:pPr>
+            <a:r>
+              <a:rPr sz="1500" b="1" i="0">
+                <a:solidFill>
+                  <a:srgbClr val="121316"/>
+                </a:solidFill>
+                <a:latin typeface="Arial"/>
               </a:rPr>
               <a:t>Reaktivieren</a:t>
             </a:r>
           </a:p>
           <a:p>
-            <a:pPr algn="ctr">
-              <a:spcAft>
-                <a:spcPts val="600"/>
+            <a:pPr algn="l">
+              <a:spcAft>
+                <a:spcPts val="500"/>
               </a:spcAft>
             </a:pPr>
             <a:r>
               <a:rPr sz="1400" b="1" i="0">
                 <a:solidFill>
-                  <a:srgbClr val="7C3AED"/>
-                </a:solidFill>
-                <a:latin typeface="Calibri"/>
-              </a:rPr>
-              <a:t>3 Min</a:t>
-            </a:r>
-          </a:p>
-          <a:p>
-            <a:pPr algn="ctr">
+                  <a:srgbClr val="71717A"/>
+                </a:solidFill>
+                <a:latin typeface="Arial"/>
+              </a:rPr>
+              <a:t>3′</a:t>
+            </a:r>
+          </a:p>
+          <a:p>
+            <a:pPr algn="l">
               <a:lnSpc>
                 <a:spcPct val="105000"/>
               </a:lnSpc>
@@ -6456,158 +5810,49 @@
               </a:spcAft>
             </a:pPr>
             <a:r>
-              <a:rPr sz="1250" b="0" i="0">
-                <a:solidFill>
-                  <a:srgbClr val="64748B"/>
-                </a:solidFill>
-                <a:latin typeface="Calibri"/>
-              </a:rPr>
-              <a:t>An KI-Erfahrung anknüpfen</a:t>
-            </a:r>
-          </a:p>
-        </p:txBody>
-      </p:sp>
-      <p:sp>
-        <p:nvSpPr>
-          <p:cNvPr id="13" name="Rounded Rectangle 12"/>
-          <p:cNvSpPr/>
-          <p:nvPr/>
-        </p:nvSpPr>
-        <p:spPr>
-          <a:xfrm>
-            <a:off x="5175504" y="2148840"/>
-            <a:ext cx="1993392" cy="3200400"/>
-          </a:xfrm>
-          <a:prstGeom prst="roundRect">
-            <a:avLst>
-              <a:gd name="adj" fmla="val 8000"/>
-            </a:avLst>
-          </a:prstGeom>
-          <a:solidFill>
-            <a:srgbClr val="FFFFFF"/>
-          </a:solidFill>
+              <a:rPr sz="1200" b="0" i="0">
+                <a:solidFill>
+                  <a:srgbClr val="71717A"/>
+                </a:solidFill>
+                <a:latin typeface="Arial"/>
+              </a:rPr>
+              <a:t>An KI anknüpfen</a:t>
+            </a:r>
+          </a:p>
+        </p:txBody>
+      </p:sp>
+      <p:cxnSp>
+        <p:nvCxnSpPr>
+          <p:cNvPr id="11" name="Connector 10"/>
+          <p:cNvCxnSpPr/>
+          <p:nvPr/>
+        </p:nvCxnSpPr>
+        <p:spPr>
+          <a:xfrm>
+            <a:off x="5056632" y="2514600"/>
+            <a:ext cx="0" cy="2743200"/>
+          </a:xfrm>
+          <a:prstGeom prst="line">
+            <a:avLst/>
+          </a:prstGeom>
           <a:ln w="12700">
             <a:solidFill>
-              <a:srgbClr val="E2E8F0"/>
+              <a:srgbClr val="E4E4E7"/>
             </a:solidFill>
           </a:ln>
           <a:effectLst/>
         </p:spPr>
-        <p:style>
-          <a:lnRef idx="1">
-            <a:schemeClr val="accent1"/>
-          </a:lnRef>
-          <a:fillRef idx="3">
-            <a:schemeClr val="accent1"/>
-          </a:fillRef>
-          <a:effectRef idx="2">
-            <a:schemeClr val="accent1"/>
-          </a:effectRef>
-          <a:fontRef idx="minor">
-            <a:schemeClr val="lt1"/>
-          </a:fontRef>
-        </p:style>
-        <p:txBody>
-          <a:bodyPr rtlCol="0" anchor="ctr"/>
-          <a:lstStyle/>
-          <a:p>
-            <a:pPr algn="ctr"/>
-          </a:p>
-        </p:txBody>
-      </p:sp>
-      <p:sp>
-        <p:nvSpPr>
-          <p:cNvPr id="14" name="Oval 13"/>
-          <p:cNvSpPr/>
-          <p:nvPr/>
-        </p:nvSpPr>
-        <p:spPr>
-          <a:xfrm>
-            <a:off x="5760720" y="2468880"/>
-            <a:ext cx="822960" cy="822960"/>
-          </a:xfrm>
-          <a:prstGeom prst="ellipse">
-            <a:avLst/>
-          </a:prstGeom>
-          <a:solidFill>
-            <a:srgbClr val="0EA5E9"/>
-          </a:solidFill>
-          <a:ln>
-            <a:noFill/>
-          </a:ln>
-          <a:effectLst/>
-        </p:spPr>
-        <p:style>
-          <a:lnRef idx="1">
-            <a:schemeClr val="accent1"/>
-          </a:lnRef>
-          <a:fillRef idx="3">
-            <a:schemeClr val="accent1"/>
-          </a:fillRef>
-          <a:effectRef idx="2">
-            <a:schemeClr val="accent1"/>
-          </a:effectRef>
-          <a:fontRef idx="minor">
-            <a:schemeClr val="lt1"/>
-          </a:fontRef>
-        </p:style>
-        <p:txBody>
-          <a:bodyPr rtlCol="0" anchor="ctr"/>
-          <a:lstStyle/>
-          <a:p>
-            <a:pPr algn="ctr"/>
-          </a:p>
-        </p:txBody>
-      </p:sp>
-      <p:sp>
-        <p:nvSpPr>
-          <p:cNvPr id="15" name="TextBox 14"/>
+      </p:cxnSp>
+      <p:sp>
+        <p:nvSpPr>
+          <p:cNvPr id="12" name="TextBox 11"/>
           <p:cNvSpPr txBox="1"/>
           <p:nvPr/>
         </p:nvSpPr>
         <p:spPr>
           <a:xfrm>
-            <a:off x="5760720" y="2450592"/>
-            <a:ext cx="822960" cy="822960"/>
-          </a:xfrm>
-          <a:prstGeom prst="rect">
-            <a:avLst/>
-          </a:prstGeom>
-          <a:noFill/>
-        </p:spPr>
-        <p:txBody>
-          <a:bodyPr wrap="square" anchor="ctr" lIns="0" rIns="0" tIns="0" bIns="0">
-            <a:spAutoFit/>
-          </a:bodyPr>
-          <a:lstStyle/>
-          <a:p>
-            <a:pPr algn="ctr">
-              <a:spcAft>
-                <a:spcPts val="200"/>
-              </a:spcAft>
-            </a:pPr>
-            <a:r>
-              <a:rPr sz="3000" b="1" i="0">
-                <a:solidFill>
-                  <a:srgbClr val="FFFFFF"/>
-                </a:solidFill>
-                <a:latin typeface="Trebuchet MS"/>
-              </a:rPr>
-              <a:t>I</a:t>
-            </a:r>
-          </a:p>
-        </p:txBody>
-      </p:sp>
-      <p:sp>
-        <p:nvSpPr>
-          <p:cNvPr id="16" name="TextBox 15"/>
-          <p:cNvSpPr txBox="1"/>
-          <p:nvPr/>
-        </p:nvSpPr>
-        <p:spPr>
-          <a:xfrm>
-            <a:off x="5266944" y="3474720"/>
-            <a:ext cx="1810512" cy="1737360"/>
+            <a:off x="5166360" y="2651760"/>
+            <a:ext cx="1874519" cy="822960"/>
           </a:xfrm>
           <a:prstGeom prst="rect">
             <a:avLst/>
@@ -6620,39 +5865,81 @@
           </a:bodyPr>
           <a:lstStyle/>
           <a:p>
-            <a:pPr algn="ctr">
-              <a:spcAft>
-                <a:spcPts val="400"/>
-              </a:spcAft>
-            </a:pPr>
-            <a:r>
-              <a:rPr sz="1600" b="1" i="0">
-                <a:solidFill>
-                  <a:srgbClr val="0F172A"/>
-                </a:solidFill>
-                <a:latin typeface="Trebuchet MS"/>
+            <a:pPr algn="l">
+              <a:spcAft>
+                <a:spcPts val="200"/>
+              </a:spcAft>
+            </a:pPr>
+            <a:r>
+              <a:rPr sz="3400" b="1" i="0">
+                <a:solidFill>
+                  <a:srgbClr val="121316"/>
+                </a:solidFill>
+                <a:latin typeface="Arial"/>
+              </a:rPr>
+              <a:t>I</a:t>
+            </a:r>
+          </a:p>
+        </p:txBody>
+      </p:sp>
+      <p:sp>
+        <p:nvSpPr>
+          <p:cNvPr id="13" name="TextBox 12"/>
+          <p:cNvSpPr txBox="1"/>
+          <p:nvPr/>
+        </p:nvSpPr>
+        <p:spPr>
+          <a:xfrm>
+            <a:off x="5166360" y="3520439"/>
+            <a:ext cx="1874519" cy="1645920"/>
+          </a:xfrm>
+          <a:prstGeom prst="rect">
+            <a:avLst/>
+          </a:prstGeom>
+          <a:noFill/>
+        </p:spPr>
+        <p:txBody>
+          <a:bodyPr wrap="square" anchor="t" lIns="0" rIns="0" tIns="0" bIns="0">
+            <a:spAutoFit/>
+          </a:bodyPr>
+          <a:lstStyle/>
+          <a:p>
+            <a:pPr algn="l">
+              <a:lnSpc>
+                <a:spcPct val="100000"/>
+              </a:lnSpc>
+              <a:spcAft>
+                <a:spcPts val="300"/>
+              </a:spcAft>
+            </a:pPr>
+            <a:r>
+              <a:rPr sz="1500" b="1" i="0">
+                <a:solidFill>
+                  <a:srgbClr val="121316"/>
+                </a:solidFill>
+                <a:latin typeface="Arial"/>
               </a:rPr>
               <a:t>Informieren</a:t>
             </a:r>
           </a:p>
           <a:p>
-            <a:pPr algn="ctr">
-              <a:spcAft>
-                <a:spcPts val="600"/>
+            <a:pPr algn="l">
+              <a:spcAft>
+                <a:spcPts val="500"/>
               </a:spcAft>
             </a:pPr>
             <a:r>
               <a:rPr sz="1400" b="1" i="0">
                 <a:solidFill>
-                  <a:srgbClr val="0EA5E9"/>
-                </a:solidFill>
-                <a:latin typeface="Calibri"/>
-              </a:rPr>
-              <a:t>5 Min</a:t>
-            </a:r>
-          </a:p>
-          <a:p>
-            <a:pPr algn="ctr">
+                  <a:srgbClr val="71717A"/>
+                </a:solidFill>
+                <a:latin typeface="Arial"/>
+              </a:rPr>
+              <a:t>5′</a:t>
+            </a:r>
+          </a:p>
+          <a:p>
+            <a:pPr algn="l">
               <a:lnSpc>
                 <a:spcPct val="105000"/>
               </a:lnSpc>
@@ -6661,158 +5948,49 @@
               </a:spcAft>
             </a:pPr>
             <a:r>
-              <a:rPr sz="1250" b="0" i="0">
-                <a:solidFill>
-                  <a:srgbClr val="64748B"/>
-                </a:solidFill>
-                <a:latin typeface="Calibri"/>
-              </a:rPr>
-              <a:t>Was ist AI Studio + Demo</a:t>
-            </a:r>
-          </a:p>
-        </p:txBody>
-      </p:sp>
-      <p:sp>
-        <p:nvSpPr>
-          <p:cNvPr id="17" name="Rounded Rectangle 16"/>
-          <p:cNvSpPr/>
-          <p:nvPr/>
-        </p:nvSpPr>
-        <p:spPr>
-          <a:xfrm>
-            <a:off x="7351776" y="2148840"/>
-            <a:ext cx="1993392" cy="3200400"/>
-          </a:xfrm>
-          <a:prstGeom prst="roundRect">
-            <a:avLst>
-              <a:gd name="adj" fmla="val 8000"/>
-            </a:avLst>
-          </a:prstGeom>
-          <a:solidFill>
-            <a:srgbClr val="FFFFFF"/>
-          </a:solidFill>
+              <a:rPr sz="1200" b="0" i="0">
+                <a:solidFill>
+                  <a:srgbClr val="71717A"/>
+                </a:solidFill>
+                <a:latin typeface="Arial"/>
+              </a:rPr>
+              <a:t>AI Studio + Demo</a:t>
+            </a:r>
+          </a:p>
+        </p:txBody>
+      </p:sp>
+      <p:cxnSp>
+        <p:nvCxnSpPr>
+          <p:cNvPr id="14" name="Connector 13"/>
+          <p:cNvCxnSpPr/>
+          <p:nvPr/>
+        </p:nvCxnSpPr>
+        <p:spPr>
+          <a:xfrm>
+            <a:off x="7150608" y="2514600"/>
+            <a:ext cx="0" cy="2743200"/>
+          </a:xfrm>
+          <a:prstGeom prst="line">
+            <a:avLst/>
+          </a:prstGeom>
           <a:ln w="12700">
             <a:solidFill>
-              <a:srgbClr val="E2E8F0"/>
+              <a:srgbClr val="E4E4E7"/>
             </a:solidFill>
           </a:ln>
           <a:effectLst/>
         </p:spPr>
-        <p:style>
-          <a:lnRef idx="1">
-            <a:schemeClr val="accent1"/>
-          </a:lnRef>
-          <a:fillRef idx="3">
-            <a:schemeClr val="accent1"/>
-          </a:fillRef>
-          <a:effectRef idx="2">
-            <a:schemeClr val="accent1"/>
-          </a:effectRef>
-          <a:fontRef idx="minor">
-            <a:schemeClr val="lt1"/>
-          </a:fontRef>
-        </p:style>
-        <p:txBody>
-          <a:bodyPr rtlCol="0" anchor="ctr"/>
-          <a:lstStyle/>
-          <a:p>
-            <a:pPr algn="ctr"/>
-          </a:p>
-        </p:txBody>
-      </p:sp>
-      <p:sp>
-        <p:nvSpPr>
-          <p:cNvPr id="18" name="Oval 17"/>
-          <p:cNvSpPr/>
-          <p:nvPr/>
-        </p:nvSpPr>
-        <p:spPr>
-          <a:xfrm>
-            <a:off x="7936992" y="2468880"/>
-            <a:ext cx="822960" cy="822960"/>
-          </a:xfrm>
-          <a:prstGeom prst="ellipse">
-            <a:avLst/>
-          </a:prstGeom>
-          <a:solidFill>
-            <a:srgbClr val="4F46E5"/>
-          </a:solidFill>
-          <a:ln>
-            <a:noFill/>
-          </a:ln>
-          <a:effectLst/>
-        </p:spPr>
-        <p:style>
-          <a:lnRef idx="1">
-            <a:schemeClr val="accent1"/>
-          </a:lnRef>
-          <a:fillRef idx="3">
-            <a:schemeClr val="accent1"/>
-          </a:fillRef>
-          <a:effectRef idx="2">
-            <a:schemeClr val="accent1"/>
-          </a:effectRef>
-          <a:fontRef idx="minor">
-            <a:schemeClr val="lt1"/>
-          </a:fontRef>
-        </p:style>
-        <p:txBody>
-          <a:bodyPr rtlCol="0" anchor="ctr"/>
-          <a:lstStyle/>
-          <a:p>
-            <a:pPr algn="ctr"/>
-          </a:p>
-        </p:txBody>
-      </p:sp>
-      <p:sp>
-        <p:nvSpPr>
-          <p:cNvPr id="19" name="TextBox 18"/>
+      </p:cxnSp>
+      <p:sp>
+        <p:nvSpPr>
+          <p:cNvPr id="15" name="TextBox 14"/>
           <p:cNvSpPr txBox="1"/>
           <p:nvPr/>
         </p:nvSpPr>
         <p:spPr>
           <a:xfrm>
-            <a:off x="7936992" y="2450592"/>
-            <a:ext cx="822960" cy="822960"/>
-          </a:xfrm>
-          <a:prstGeom prst="rect">
-            <a:avLst/>
-          </a:prstGeom>
-          <a:noFill/>
-        </p:spPr>
-        <p:txBody>
-          <a:bodyPr wrap="square" anchor="ctr" lIns="0" rIns="0" tIns="0" bIns="0">
-            <a:spAutoFit/>
-          </a:bodyPr>
-          <a:lstStyle/>
-          <a:p>
-            <a:pPr algn="ctr">
-              <a:spcAft>
-                <a:spcPts val="200"/>
-              </a:spcAft>
-            </a:pPr>
-            <a:r>
-              <a:rPr sz="3000" b="1" i="0">
-                <a:solidFill>
-                  <a:srgbClr val="FFFFFF"/>
-                </a:solidFill>
-                <a:latin typeface="Trebuchet MS"/>
-              </a:rPr>
-              <a:t>V</a:t>
-            </a:r>
-          </a:p>
-        </p:txBody>
-      </p:sp>
-      <p:sp>
-        <p:nvSpPr>
-          <p:cNvPr id="20" name="TextBox 19"/>
-          <p:cNvSpPr txBox="1"/>
-          <p:nvPr/>
-        </p:nvSpPr>
-        <p:spPr>
-          <a:xfrm>
-            <a:off x="7443216" y="3474720"/>
-            <a:ext cx="1810512" cy="1737360"/>
+            <a:off x="7260336" y="2651760"/>
+            <a:ext cx="1874519" cy="822960"/>
           </a:xfrm>
           <a:prstGeom prst="rect">
             <a:avLst/>
@@ -6825,39 +6003,81 @@
           </a:bodyPr>
           <a:lstStyle/>
           <a:p>
-            <a:pPr algn="ctr">
-              <a:spcAft>
-                <a:spcPts val="400"/>
-              </a:spcAft>
-            </a:pPr>
-            <a:r>
-              <a:rPr sz="1600" b="1" i="0">
-                <a:solidFill>
-                  <a:srgbClr val="0F172A"/>
-                </a:solidFill>
-                <a:latin typeface="Trebuchet MS"/>
+            <a:pPr algn="l">
+              <a:spcAft>
+                <a:spcPts val="200"/>
+              </a:spcAft>
+            </a:pPr>
+            <a:r>
+              <a:rPr sz="3400" b="1" i="0">
+                <a:solidFill>
+                  <a:srgbClr val="121316"/>
+                </a:solidFill>
+                <a:latin typeface="Arial"/>
+              </a:rPr>
+              <a:t>V</a:t>
+            </a:r>
+          </a:p>
+        </p:txBody>
+      </p:sp>
+      <p:sp>
+        <p:nvSpPr>
+          <p:cNvPr id="16" name="TextBox 15"/>
+          <p:cNvSpPr txBox="1"/>
+          <p:nvPr/>
+        </p:nvSpPr>
+        <p:spPr>
+          <a:xfrm>
+            <a:off x="7260336" y="3520439"/>
+            <a:ext cx="1874519" cy="1645920"/>
+          </a:xfrm>
+          <a:prstGeom prst="rect">
+            <a:avLst/>
+          </a:prstGeom>
+          <a:noFill/>
+        </p:spPr>
+        <p:txBody>
+          <a:bodyPr wrap="square" anchor="t" lIns="0" rIns="0" tIns="0" bIns="0">
+            <a:spAutoFit/>
+          </a:bodyPr>
+          <a:lstStyle/>
+          <a:p>
+            <a:pPr algn="l">
+              <a:lnSpc>
+                <a:spcPct val="100000"/>
+              </a:lnSpc>
+              <a:spcAft>
+                <a:spcPts val="300"/>
+              </a:spcAft>
+            </a:pPr>
+            <a:r>
+              <a:rPr sz="1500" b="1" i="0">
+                <a:solidFill>
+                  <a:srgbClr val="121316"/>
+                </a:solidFill>
+                <a:latin typeface="Arial"/>
               </a:rPr>
               <a:t>Verarbeiten</a:t>
             </a:r>
           </a:p>
           <a:p>
-            <a:pPr algn="ctr">
-              <a:spcAft>
-                <a:spcPts val="600"/>
+            <a:pPr algn="l">
+              <a:spcAft>
+                <a:spcPts val="500"/>
               </a:spcAft>
             </a:pPr>
             <a:r>
               <a:rPr sz="1400" b="1" i="0">
                 <a:solidFill>
-                  <a:srgbClr val="4F46E5"/>
-                </a:solidFill>
-                <a:latin typeface="Calibri"/>
-              </a:rPr>
-              <a:t>8 Min</a:t>
-            </a:r>
-          </a:p>
-          <a:p>
-            <a:pPr algn="ctr">
+                  <a:srgbClr val="71717A"/>
+                </a:solidFill>
+                <a:latin typeface="Arial"/>
+              </a:rPr>
+              <a:t>8′</a:t>
+            </a:r>
+          </a:p>
+          <a:p>
+            <a:pPr algn="l">
               <a:lnSpc>
                 <a:spcPct val="105000"/>
               </a:lnSpc>
@@ -6866,158 +6086,49 @@
               </a:spcAft>
             </a:pPr>
             <a:r>
-              <a:rPr sz="1250" b="0" i="0">
-                <a:solidFill>
-                  <a:srgbClr val="64748B"/>
-                </a:solidFill>
-                <a:latin typeface="Calibri"/>
-              </a:rPr>
-              <a:t>Selbst einen Prompt bauen</a:t>
-            </a:r>
-          </a:p>
-        </p:txBody>
-      </p:sp>
-      <p:sp>
-        <p:nvSpPr>
-          <p:cNvPr id="21" name="Rounded Rectangle 20"/>
-          <p:cNvSpPr/>
-          <p:nvPr/>
-        </p:nvSpPr>
-        <p:spPr>
-          <a:xfrm>
-            <a:off x="9528048" y="2148840"/>
-            <a:ext cx="1993392" cy="3200400"/>
-          </a:xfrm>
-          <a:prstGeom prst="roundRect">
-            <a:avLst>
-              <a:gd name="adj" fmla="val 8000"/>
-            </a:avLst>
-          </a:prstGeom>
-          <a:solidFill>
-            <a:srgbClr val="FFFFFF"/>
-          </a:solidFill>
+              <a:rPr sz="1200" b="0" i="0">
+                <a:solidFill>
+                  <a:srgbClr val="71717A"/>
+                </a:solidFill>
+                <a:latin typeface="Arial"/>
+              </a:rPr>
+              <a:t>Selbst bauen</a:t>
+            </a:r>
+          </a:p>
+        </p:txBody>
+      </p:sp>
+      <p:cxnSp>
+        <p:nvCxnSpPr>
+          <p:cNvPr id="17" name="Connector 16"/>
+          <p:cNvCxnSpPr/>
+          <p:nvPr/>
+        </p:nvCxnSpPr>
+        <p:spPr>
+          <a:xfrm>
+            <a:off x="9244584" y="2514600"/>
+            <a:ext cx="0" cy="2743200"/>
+          </a:xfrm>
+          <a:prstGeom prst="line">
+            <a:avLst/>
+          </a:prstGeom>
           <a:ln w="12700">
             <a:solidFill>
-              <a:srgbClr val="E2E8F0"/>
+              <a:srgbClr val="E4E4E7"/>
             </a:solidFill>
           </a:ln>
           <a:effectLst/>
         </p:spPr>
-        <p:style>
-          <a:lnRef idx="1">
-            <a:schemeClr val="accent1"/>
-          </a:lnRef>
-          <a:fillRef idx="3">
-            <a:schemeClr val="accent1"/>
-          </a:fillRef>
-          <a:effectRef idx="2">
-            <a:schemeClr val="accent1"/>
-          </a:effectRef>
-          <a:fontRef idx="minor">
-            <a:schemeClr val="lt1"/>
-          </a:fontRef>
-        </p:style>
-        <p:txBody>
-          <a:bodyPr rtlCol="0" anchor="ctr"/>
-          <a:lstStyle/>
-          <a:p>
-            <a:pPr algn="ctr"/>
-          </a:p>
-        </p:txBody>
-      </p:sp>
-      <p:sp>
-        <p:nvSpPr>
-          <p:cNvPr id="22" name="Oval 21"/>
-          <p:cNvSpPr/>
-          <p:nvPr/>
-        </p:nvSpPr>
-        <p:spPr>
-          <a:xfrm>
-            <a:off x="10113264" y="2468880"/>
-            <a:ext cx="822960" cy="822960"/>
-          </a:xfrm>
-          <a:prstGeom prst="ellipse">
-            <a:avLst/>
-          </a:prstGeom>
-          <a:solidFill>
-            <a:srgbClr val="7C3AED"/>
-          </a:solidFill>
-          <a:ln>
-            <a:noFill/>
-          </a:ln>
-          <a:effectLst/>
-        </p:spPr>
-        <p:style>
-          <a:lnRef idx="1">
-            <a:schemeClr val="accent1"/>
-          </a:lnRef>
-          <a:fillRef idx="3">
-            <a:schemeClr val="accent1"/>
-          </a:fillRef>
-          <a:effectRef idx="2">
-            <a:schemeClr val="accent1"/>
-          </a:effectRef>
-          <a:fontRef idx="minor">
-            <a:schemeClr val="lt1"/>
-          </a:fontRef>
-        </p:style>
-        <p:txBody>
-          <a:bodyPr rtlCol="0" anchor="ctr"/>
-          <a:lstStyle/>
-          <a:p>
-            <a:pPr algn="ctr"/>
-          </a:p>
-        </p:txBody>
-      </p:sp>
-      <p:sp>
-        <p:nvSpPr>
-          <p:cNvPr id="23" name="TextBox 22"/>
+      </p:cxnSp>
+      <p:sp>
+        <p:nvSpPr>
+          <p:cNvPr id="18" name="TextBox 17"/>
           <p:cNvSpPr txBox="1"/>
           <p:nvPr/>
         </p:nvSpPr>
         <p:spPr>
           <a:xfrm>
-            <a:off x="10113264" y="2450592"/>
-            <a:ext cx="822960" cy="822960"/>
-          </a:xfrm>
-          <a:prstGeom prst="rect">
-            <a:avLst/>
-          </a:prstGeom>
-          <a:noFill/>
-        </p:spPr>
-        <p:txBody>
-          <a:bodyPr wrap="square" anchor="ctr" lIns="0" rIns="0" tIns="0" bIns="0">
-            <a:spAutoFit/>
-          </a:bodyPr>
-          <a:lstStyle/>
-          <a:p>
-            <a:pPr algn="ctr">
-              <a:spcAft>
-                <a:spcPts val="200"/>
-              </a:spcAft>
-            </a:pPr>
-            <a:r>
-              <a:rPr sz="3000" b="1" i="0">
-                <a:solidFill>
-                  <a:srgbClr val="FFFFFF"/>
-                </a:solidFill>
-                <a:latin typeface="Trebuchet MS"/>
-              </a:rPr>
-              <a:t>A</a:t>
-            </a:r>
-          </a:p>
-        </p:txBody>
-      </p:sp>
-      <p:sp>
-        <p:nvSpPr>
-          <p:cNvPr id="24" name="TextBox 23"/>
-          <p:cNvSpPr txBox="1"/>
-          <p:nvPr/>
-        </p:nvSpPr>
-        <p:spPr>
-          <a:xfrm>
-            <a:off x="9619488" y="3474720"/>
-            <a:ext cx="1810512" cy="1737360"/>
+            <a:off x="9354311" y="2651760"/>
+            <a:ext cx="1874519" cy="822960"/>
           </a:xfrm>
           <a:prstGeom prst="rect">
             <a:avLst/>
@@ -7030,39 +6141,81 @@
           </a:bodyPr>
           <a:lstStyle/>
           <a:p>
-            <a:pPr algn="ctr">
-              <a:spcAft>
-                <a:spcPts val="400"/>
-              </a:spcAft>
-            </a:pPr>
-            <a:r>
-              <a:rPr sz="1600" b="1" i="0">
-                <a:solidFill>
-                  <a:srgbClr val="0F172A"/>
-                </a:solidFill>
-                <a:latin typeface="Trebuchet MS"/>
+            <a:pPr algn="l">
+              <a:spcAft>
+                <a:spcPts val="200"/>
+              </a:spcAft>
+            </a:pPr>
+            <a:r>
+              <a:rPr sz="3400" b="1" i="0">
+                <a:solidFill>
+                  <a:srgbClr val="121316"/>
+                </a:solidFill>
+                <a:latin typeface="Arial"/>
+              </a:rPr>
+              <a:t>A</a:t>
+            </a:r>
+          </a:p>
+        </p:txBody>
+      </p:sp>
+      <p:sp>
+        <p:nvSpPr>
+          <p:cNvPr id="19" name="TextBox 18"/>
+          <p:cNvSpPr txBox="1"/>
+          <p:nvPr/>
+        </p:nvSpPr>
+        <p:spPr>
+          <a:xfrm>
+            <a:off x="9354311" y="3520439"/>
+            <a:ext cx="1874519" cy="1645920"/>
+          </a:xfrm>
+          <a:prstGeom prst="rect">
+            <a:avLst/>
+          </a:prstGeom>
+          <a:noFill/>
+        </p:spPr>
+        <p:txBody>
+          <a:bodyPr wrap="square" anchor="t" lIns="0" rIns="0" tIns="0" bIns="0">
+            <a:spAutoFit/>
+          </a:bodyPr>
+          <a:lstStyle/>
+          <a:p>
+            <a:pPr algn="l">
+              <a:lnSpc>
+                <a:spcPct val="100000"/>
+              </a:lnSpc>
+              <a:spcAft>
+                <a:spcPts val="300"/>
+              </a:spcAft>
+            </a:pPr>
+            <a:r>
+              <a:rPr sz="1500" b="1" i="0">
+                <a:solidFill>
+                  <a:srgbClr val="121316"/>
+                </a:solidFill>
+                <a:latin typeface="Arial"/>
               </a:rPr>
               <a:t>Auswerten</a:t>
             </a:r>
           </a:p>
           <a:p>
-            <a:pPr algn="ctr">
-              <a:spcAft>
-                <a:spcPts val="600"/>
+            <a:pPr algn="l">
+              <a:spcAft>
+                <a:spcPts val="500"/>
               </a:spcAft>
             </a:pPr>
             <a:r>
               <a:rPr sz="1400" b="1" i="0">
                 <a:solidFill>
-                  <a:srgbClr val="7C3AED"/>
-                </a:solidFill>
-                <a:latin typeface="Calibri"/>
-              </a:rPr>
-              <a:t>4 Min</a:t>
-            </a:r>
-          </a:p>
-          <a:p>
-            <a:pPr algn="ctr">
+                  <a:srgbClr val="71717A"/>
+                </a:solidFill>
+                <a:latin typeface="Arial"/>
+              </a:rPr>
+              <a:t>4′</a:t>
+            </a:r>
+          </a:p>
+          <a:p>
+            <a:pPr algn="l">
               <a:lnSpc>
                 <a:spcPct val="105000"/>
               </a:lnSpc>
@@ -7071,27 +6224,49 @@
               </a:spcAft>
             </a:pPr>
             <a:r>
-              <a:rPr sz="1250" b="0" i="0">
-                <a:solidFill>
-                  <a:srgbClr val="64748B"/>
-                </a:solidFill>
-                <a:latin typeface="Calibri"/>
-              </a:rPr>
-              <a:t>Zusammenfassen &amp; prüfen</a:t>
-            </a:r>
-          </a:p>
-        </p:txBody>
-      </p:sp>
-      <p:sp>
-        <p:nvSpPr>
-          <p:cNvPr id="25" name="TextBox 24"/>
+              <a:rPr sz="1200" b="0" i="0">
+                <a:solidFill>
+                  <a:srgbClr val="71717A"/>
+                </a:solidFill>
+                <a:latin typeface="Arial"/>
+              </a:rPr>
+              <a:t>Prüfen &amp; Abschluss</a:t>
+            </a:r>
+          </a:p>
+        </p:txBody>
+      </p:sp>
+      <p:cxnSp>
+        <p:nvCxnSpPr>
+          <p:cNvPr id="20" name="Connector 19"/>
+          <p:cNvCxnSpPr/>
+          <p:nvPr/>
+        </p:nvCxnSpPr>
+        <p:spPr>
+          <a:xfrm>
+            <a:off x="868680" y="5349240"/>
+            <a:ext cx="10469879" cy="0"/>
+          </a:xfrm>
+          <a:prstGeom prst="line">
+            <a:avLst/>
+          </a:prstGeom>
+          <a:ln w="12700">
+            <a:solidFill>
+              <a:srgbClr val="E4E4E7"/>
+            </a:solidFill>
+          </a:ln>
+          <a:effectLst/>
+        </p:spPr>
+      </p:cxnSp>
+      <p:sp>
+        <p:nvSpPr>
+          <p:cNvPr id="21" name="TextBox 20"/>
           <p:cNvSpPr txBox="1"/>
           <p:nvPr/>
         </p:nvSpPr>
         <p:spPr>
           <a:xfrm>
-            <a:off x="822960" y="5715000"/>
-            <a:ext cx="10515600" cy="457200"/>
+            <a:off x="868680" y="5532120"/>
+            <a:ext cx="10469880" cy="365760"/>
           </a:xfrm>
           <a:prstGeom prst="rect">
             <a:avLst/>
@@ -7110,13 +6285,13 @@
               </a:spcAft>
             </a:pPr>
             <a:r>
-              <a:rPr sz="1400" b="0" i="1">
-                <a:solidFill>
-                  <a:srgbClr val="64748B"/>
-                </a:solidFill>
-                <a:latin typeface="Calibri"/>
-              </a:rPr>
-              <a:t>Gesamt: 23 Minuten  ·  Schwerpunkt liegt auf dem eigenen Ausprobieren (Verarbeiten).</a:t>
+              <a:rPr sz="1300" b="0" i="1">
+                <a:solidFill>
+                  <a:srgbClr val="71717A"/>
+                </a:solidFill>
+                <a:latin typeface="Arial"/>
+              </a:rPr>
+              <a:t>Gesamt 23 Minuten — Schwerpunkt: selbst ausprobieren.</a:t>
             </a:r>
           </a:p>
         </p:txBody>
@@ -7154,27 +6329,13 @@
             <a:avLst/>
           </a:prstGeom>
           <a:solidFill>
-            <a:srgbClr val="0F172A"/>
+            <a:srgbClr val="121316"/>
           </a:solidFill>
           <a:ln>
             <a:noFill/>
           </a:ln>
           <a:effectLst/>
         </p:spPr>
-        <p:style>
-          <a:lnRef idx="1">
-            <a:schemeClr val="accent1"/>
-          </a:lnRef>
-          <a:fillRef idx="3">
-            <a:schemeClr val="accent1"/>
-          </a:fillRef>
-          <a:effectRef idx="2">
-            <a:schemeClr val="accent1"/>
-          </a:effectRef>
-          <a:fontRef idx="minor">
-            <a:schemeClr val="lt1"/>
-          </a:fontRef>
-        </p:style>
         <p:txBody>
           <a:bodyPr rtlCol="0" anchor="ctr"/>
           <a:lstStyle/>
@@ -7185,58 +6346,14 @@
       </p:sp>
       <p:sp>
         <p:nvSpPr>
-          <p:cNvPr id="3" name="Rectangle 2"/>
-          <p:cNvSpPr/>
-          <p:nvPr/>
-        </p:nvSpPr>
-        <p:spPr>
-          <a:xfrm>
-            <a:off x="0" y="0"/>
-            <a:ext cx="292608" cy="6858000"/>
-          </a:xfrm>
-          <a:prstGeom prst="rect">
-            <a:avLst/>
-          </a:prstGeom>
-          <a:solidFill>
-            <a:srgbClr val="0EA5E9"/>
-          </a:solidFill>
-          <a:ln>
-            <a:noFill/>
-          </a:ln>
-          <a:effectLst/>
-        </p:spPr>
-        <p:style>
-          <a:lnRef idx="1">
-            <a:schemeClr val="accent1"/>
-          </a:lnRef>
-          <a:fillRef idx="3">
-            <a:schemeClr val="accent1"/>
-          </a:fillRef>
-          <a:effectRef idx="2">
-            <a:schemeClr val="accent1"/>
-          </a:effectRef>
-          <a:fontRef idx="minor">
-            <a:schemeClr val="lt1"/>
-          </a:fontRef>
-        </p:style>
-        <p:txBody>
-          <a:bodyPr rtlCol="0" anchor="ctr"/>
-          <a:lstStyle/>
-          <a:p>
-            <a:pPr algn="ctr"/>
-          </a:p>
-        </p:txBody>
-      </p:sp>
-      <p:sp>
-        <p:nvSpPr>
-          <p:cNvPr id="4" name="TextBox 3"/>
+          <p:cNvPr id="3" name="TextBox 2"/>
           <p:cNvSpPr txBox="1"/>
           <p:nvPr/>
         </p:nvSpPr>
         <p:spPr>
           <a:xfrm>
-            <a:off x="822960" y="640080"/>
-            <a:ext cx="7315200" cy="365760"/>
+            <a:off x="868680" y="1005840"/>
+            <a:ext cx="10058400" cy="365760"/>
           </a:xfrm>
           <a:prstGeom prst="rect">
             <a:avLst/>
@@ -7257,9 +6374,9 @@
             <a:r>
               <a:rPr sz="1200" b="1" i="0">
                 <a:solidFill>
-                  <a:srgbClr val="7DD3FC"/>
-                </a:solidFill>
-                <a:latin typeface="Trebuchet MS"/>
+                  <a:srgbClr val="A1A1AA"/>
+                </a:solidFill>
+                <a:latin typeface="Arial"/>
               </a:rPr>
               <a:t>EINSTIEG &amp; REAKTIVIEREN</a:t>
             </a:r>
@@ -7268,14 +6385,14 @@
       </p:sp>
       <p:sp>
         <p:nvSpPr>
-          <p:cNvPr id="5" name="TextBox 4"/>
+          <p:cNvPr id="4" name="TextBox 3"/>
           <p:cNvSpPr txBox="1"/>
           <p:nvPr/>
         </p:nvSpPr>
         <p:spPr>
           <a:xfrm>
-            <a:off x="822960" y="1143000"/>
-            <a:ext cx="10515600" cy="1828800"/>
+            <a:off x="868680" y="1737360"/>
+            <a:ext cx="10332720" cy="2194560"/>
           </a:xfrm>
           <a:prstGeom prst="rect">
             <a:avLst/>
@@ -7290,117 +6407,84 @@
           <a:p>
             <a:pPr algn="l">
               <a:lnSpc>
-                <a:spcPct val="110000"/>
+                <a:spcPct val="112000"/>
               </a:lnSpc>
               <a:spcAft>
                 <a:spcPts val="200"/>
               </a:spcAft>
             </a:pPr>
             <a:r>
-              <a:rPr sz="3300" b="1" i="0">
+              <a:rPr sz="3600" b="1" i="0">
                 <a:solidFill>
                   <a:srgbClr val="FFFFFF"/>
                 </a:solidFill>
-                <a:latin typeface="Trebuchet MS"/>
+                <a:latin typeface="Arial"/>
               </a:rPr>
               <a:t>„Wer hätte gern eine </a:t>
             </a:r>
             <a:r>
-              <a:rPr sz="3300" b="1" i="0">
-                <a:solidFill>
-                  <a:srgbClr val="0EA5E9"/>
-                </a:solidFill>
-                <a:latin typeface="Trebuchet MS"/>
+              <a:rPr sz="3600" b="1" i="0">
+                <a:solidFill>
+                  <a:srgbClr val="FFFFFF"/>
+                </a:solidFill>
+                <a:latin typeface="Arial"/>
               </a:rPr>
               <a:t>eigene Website</a:t>
-            </a:r>
-            <a:r>
-              <a:rPr sz="3300" b="1" i="0">
-                <a:solidFill>
-                  <a:srgbClr val="FFFFFF"/>
-                </a:solidFill>
-                <a:latin typeface="Trebuchet MS"/>
-              </a:rPr>
-              <a:t> –</a:t>
             </a:r>
           </a:p>
           <a:p>
             <a:pPr algn="l">
               <a:lnSpc>
-                <a:spcPct val="110000"/>
+                <a:spcPct val="112000"/>
               </a:lnSpc>
               <a:spcAft>
                 <a:spcPts val="200"/>
               </a:spcAft>
             </a:pPr>
             <a:r>
-              <a:rPr sz="3300" b="1" i="0">
+              <a:rPr sz="3600" b="1" i="0">
                 <a:solidFill>
                   <a:srgbClr val="FFFFFF"/>
                 </a:solidFill>
-                <a:latin typeface="Trebuchet MS"/>
-              </a:rPr>
-              <a:t>und wen hat bisher der Aufwand abgeschreckt?“</a:t>
-            </a:r>
-          </a:p>
-        </p:txBody>
-      </p:sp>
-      <p:sp>
-        <p:nvSpPr>
-          <p:cNvPr id="6" name="Rounded Rectangle 5"/>
-          <p:cNvSpPr/>
-          <p:nvPr/>
-        </p:nvSpPr>
-        <p:spPr>
-          <a:xfrm>
-            <a:off x="822960" y="3383280"/>
-            <a:ext cx="10515600" cy="2377440"/>
-          </a:xfrm>
-          <a:prstGeom prst="roundRect">
-            <a:avLst>
-              <a:gd name="adj" fmla="val 8000"/>
-            </a:avLst>
-          </a:prstGeom>
-          <a:solidFill>
-            <a:srgbClr val="1E293B"/>
-          </a:solidFill>
-          <a:ln>
-            <a:noFill/>
+                <a:latin typeface="Arial"/>
+              </a:rPr>
+              <a:t>– und wen schreckt der Aufwand ab?“</a:t>
+            </a:r>
+          </a:p>
+        </p:txBody>
+      </p:sp>
+      <p:cxnSp>
+        <p:nvCxnSpPr>
+          <p:cNvPr id="5" name="Connector 4"/>
+          <p:cNvCxnSpPr/>
+          <p:nvPr/>
+        </p:nvCxnSpPr>
+        <p:spPr>
+          <a:xfrm>
+            <a:off x="868680" y="4114800"/>
+            <a:ext cx="10469879" cy="0"/>
+          </a:xfrm>
+          <a:prstGeom prst="line">
+            <a:avLst/>
+          </a:prstGeom>
+          <a:ln w="12700">
+            <a:solidFill>
+              <a:srgbClr val="3F3F46"/>
+            </a:solidFill>
           </a:ln>
           <a:effectLst/>
         </p:spPr>
-        <p:style>
-          <a:lnRef idx="1">
-            <a:schemeClr val="accent1"/>
-          </a:lnRef>
-          <a:fillRef idx="3">
-            <a:schemeClr val="accent1"/>
-          </a:fillRef>
-          <a:effectRef idx="2">
-            <a:schemeClr val="accent1"/>
-          </a:effectRef>
-          <a:fontRef idx="minor">
-            <a:schemeClr val="lt1"/>
-          </a:fontRef>
-        </p:style>
-        <p:txBody>
-          <a:bodyPr rtlCol="0" anchor="ctr"/>
-          <a:lstStyle/>
-          <a:p>
-            <a:pPr algn="ctr"/>
-          </a:p>
-        </p:txBody>
-      </p:sp>
-      <p:sp>
-        <p:nvSpPr>
-          <p:cNvPr id="7" name="TextBox 6"/>
+      </p:cxnSp>
+      <p:sp>
+        <p:nvSpPr>
+          <p:cNvPr id="6" name="TextBox 5"/>
           <p:cNvSpPr txBox="1"/>
           <p:nvPr/>
         </p:nvSpPr>
         <p:spPr>
           <a:xfrm>
-            <a:off x="1188720" y="3657600"/>
-            <a:ext cx="9784080" cy="1920240"/>
+            <a:off x="868680" y="4434840"/>
+            <a:ext cx="10332720" cy="1828800"/>
           </a:xfrm>
           <a:prstGeom prst="rect">
             <a:avLst/>
@@ -7415,74 +6499,42 @@
           <a:p>
             <a:pPr algn="l">
               <a:spcAft>
-                <a:spcPts val="800"/>
-              </a:spcAft>
-            </a:pPr>
-            <a:r>
-              <a:rPr sz="1700" b="1" i="0">
-                <a:solidFill>
-                  <a:srgbClr val="0EA5E9"/>
-                </a:solidFill>
-                <a:latin typeface="Trebuchet MS"/>
-              </a:rPr>
-              <a:t>Kurz überlegt:</a:t>
+                <a:spcPts val="1000"/>
+              </a:spcAft>
+            </a:pPr>
+            <a:r>
+              <a:rPr sz="1900" b="0" i="0">
+                <a:solidFill>
+                  <a:srgbClr val="E7E7EA"/>
+                </a:solidFill>
+                <a:latin typeface="Arial"/>
+              </a:rPr>
+              <a:t>Wer hat schon einmal eine KI (z. B. ChatGPT) gefragt?</a:t>
             </a:r>
           </a:p>
           <a:p>
             <a:pPr algn="l">
               <a:spcAft>
-                <a:spcPts val="700"/>
-              </a:spcAft>
-            </a:pPr>
-            <a:r>
-              <a:rPr sz="1800" b="0" i="0">
+                <a:spcPts val="200"/>
+              </a:spcAft>
+            </a:pPr>
+            <a:r>
+              <a:rPr sz="1900" b="0" i="0">
+                <a:solidFill>
+                  <a:srgbClr val="E7E7EA"/>
+                </a:solidFill>
+                <a:latin typeface="Arial"/>
+              </a:rPr>
+              <a:t>KI schreibt nicht nur Texte – sie baut ganze </a:t>
+            </a:r>
+            <a:r>
+              <a:rPr sz="1900" b="1" i="0">
                 <a:solidFill>
                   <a:srgbClr val="FFFFFF"/>
                 </a:solidFill>
-                <a:latin typeface="Calibri"/>
-              </a:rPr>
-              <a:t>• Wer hat schon einmal eine KI wie ChatGPT etwas gefragt?</a:t>
-            </a:r>
-          </a:p>
-          <a:p>
-            <a:pPr algn="l">
-              <a:spcAft>
-                <a:spcPts val="700"/>
-              </a:spcAft>
-            </a:pPr>
-            <a:r>
-              <a:rPr sz="1800" b="0" i="0">
-                <a:solidFill>
-                  <a:srgbClr val="FFFFFF"/>
-                </a:solidFill>
-                <a:latin typeface="Calibri"/>
-              </a:rPr>
-              <a:t>• KI kann nicht nur Texte schreiben …</a:t>
-            </a:r>
-          </a:p>
-          <a:p>
-            <a:pPr algn="l">
-              <a:spcAft>
-                <a:spcPts val="200"/>
-              </a:spcAft>
-            </a:pPr>
-            <a:r>
-              <a:rPr sz="1800" b="0" i="0">
-                <a:solidFill>
-                  <a:srgbClr val="FFFFFF"/>
-                </a:solidFill>
-                <a:latin typeface="Calibri"/>
-              </a:rPr>
-              <a:t>• … sondern ganze </a:t>
-            </a:r>
-            <a:r>
-              <a:rPr sz="1800" b="1" i="0">
-                <a:solidFill>
-                  <a:srgbClr val="0EA5E9"/>
-                </a:solidFill>
-                <a:latin typeface="Calibri"/>
-              </a:rPr>
-              <a:t>Websites bauen.</a:t>
+                <a:latin typeface="Arial"/>
+              </a:rPr>
+              <a:t>Websites.</a:t>
             </a:r>
           </a:p>
         </p:txBody>
@@ -7520,27 +6572,13 @@
             <a:avLst/>
           </a:prstGeom>
           <a:solidFill>
-            <a:srgbClr val="F8FAFC"/>
+            <a:srgbClr val="FFFFFF"/>
           </a:solidFill>
           <a:ln>
             <a:noFill/>
           </a:ln>
           <a:effectLst/>
         </p:spPr>
-        <p:style>
-          <a:lnRef idx="1">
-            <a:schemeClr val="accent1"/>
-          </a:lnRef>
-          <a:fillRef idx="3">
-            <a:schemeClr val="accent1"/>
-          </a:fillRef>
-          <a:effectRef idx="2">
-            <a:schemeClr val="accent1"/>
-          </a:effectRef>
-          <a:fontRef idx="minor">
-            <a:schemeClr val="lt1"/>
-          </a:fontRef>
-        </p:style>
         <p:txBody>
           <a:bodyPr rtlCol="0" anchor="ctr"/>
           <a:lstStyle/>
@@ -7557,8 +6595,8 @@
         </p:nvSpPr>
         <p:spPr>
           <a:xfrm>
-            <a:off x="822960" y="594360"/>
-            <a:ext cx="7315200" cy="365760"/>
+            <a:off x="868680" y="777240"/>
+            <a:ext cx="10058400" cy="365760"/>
           </a:xfrm>
           <a:prstGeom prst="rect">
             <a:avLst/>
@@ -7579,9 +6617,9 @@
             <a:r>
               <a:rPr sz="1200" b="1" i="0">
                 <a:solidFill>
-                  <a:srgbClr val="4F46E5"/>
-                </a:solidFill>
-                <a:latin typeface="Trebuchet MS"/>
+                  <a:srgbClr val="71717A"/>
+                </a:solidFill>
+                <a:latin typeface="Arial"/>
               </a:rPr>
               <a:t>INFORMIEREN</a:t>
             </a:r>
@@ -7596,8 +6634,8 @@
         </p:nvSpPr>
         <p:spPr>
           <a:xfrm>
-            <a:off x="822960" y="960120"/>
-            <a:ext cx="10515600" cy="731520"/>
+            <a:off x="868680" y="1234440"/>
+            <a:ext cx="10424160" cy="822960"/>
           </a:xfrm>
           <a:prstGeom prst="rect">
             <a:avLst/>
@@ -7616,65 +6654,39 @@
               </a:spcAft>
             </a:pPr>
             <a:r>
-              <a:rPr sz="3400" b="1" i="0">
-                <a:solidFill>
-                  <a:srgbClr val="0F172A"/>
-                </a:solidFill>
-                <a:latin typeface="Trebuchet MS"/>
+              <a:rPr sz="3300" b="1" i="0">
+                <a:solidFill>
+                  <a:srgbClr val="121316"/>
+                </a:solidFill>
+                <a:latin typeface="Arial"/>
               </a:rPr>
               <a:t>Was ist Google AI Studio?</a:t>
             </a:r>
           </a:p>
         </p:txBody>
       </p:sp>
-      <p:sp>
-        <p:nvSpPr>
-          <p:cNvPr id="5" name="Rounded Rectangle 4"/>
-          <p:cNvSpPr/>
-          <p:nvPr/>
-        </p:nvSpPr>
-        <p:spPr>
-          <a:xfrm>
-            <a:off x="822960" y="2011680"/>
-            <a:ext cx="10515600" cy="914400"/>
-          </a:xfrm>
-          <a:prstGeom prst="roundRect">
-            <a:avLst>
-              <a:gd name="adj" fmla="val 8000"/>
-            </a:avLst>
-          </a:prstGeom>
-          <a:solidFill>
-            <a:srgbClr val="FFFFFF"/>
-          </a:solidFill>
+      <p:cxnSp>
+        <p:nvCxnSpPr>
+          <p:cNvPr id="5" name="Connector 4"/>
+          <p:cNvCxnSpPr/>
+          <p:nvPr/>
+        </p:nvCxnSpPr>
+        <p:spPr>
+          <a:xfrm>
+            <a:off x="868680" y="2331720"/>
+            <a:ext cx="10469879" cy="0"/>
+          </a:xfrm>
+          <a:prstGeom prst="line">
+            <a:avLst/>
+          </a:prstGeom>
           <a:ln w="12700">
             <a:solidFill>
-              <a:srgbClr val="E2E8F0"/>
+              <a:srgbClr val="E4E4E7"/>
             </a:solidFill>
           </a:ln>
           <a:effectLst/>
         </p:spPr>
-        <p:style>
-          <a:lnRef idx="1">
-            <a:schemeClr val="accent1"/>
-          </a:lnRef>
-          <a:fillRef idx="3">
-            <a:schemeClr val="accent1"/>
-          </a:fillRef>
-          <a:effectRef idx="2">
-            <a:schemeClr val="accent1"/>
-          </a:effectRef>
-          <a:fontRef idx="minor">
-            <a:schemeClr val="lt1"/>
-          </a:fontRef>
-        </p:style>
-        <p:txBody>
-          <a:bodyPr rtlCol="0" anchor="ctr"/>
-          <a:lstStyle/>
-          <a:p>
-            <a:pPr algn="ctr"/>
-          </a:p>
-        </p:txBody>
-      </p:sp>
+      </p:cxnSp>
       <p:sp>
         <p:nvSpPr>
           <p:cNvPr id="6" name="Oval 5"/>
@@ -7683,34 +6695,20 @@
         </p:nvSpPr>
         <p:spPr>
           <a:xfrm>
-            <a:off x="1024128" y="2194560"/>
-            <a:ext cx="548640" cy="548640"/>
+            <a:off x="868680" y="2551176"/>
+            <a:ext cx="502920" cy="502920"/>
           </a:xfrm>
           <a:prstGeom prst="ellipse">
             <a:avLst/>
           </a:prstGeom>
-          <a:solidFill>
-            <a:srgbClr val="0EA5E9"/>
-          </a:solidFill>
-          <a:ln>
-            <a:noFill/>
+          <a:noFill/>
+          <a:ln w="16510">
+            <a:solidFill>
+              <a:srgbClr val="121316"/>
+            </a:solidFill>
           </a:ln>
           <a:effectLst/>
         </p:spPr>
-        <p:style>
-          <a:lnRef idx="1">
-            <a:schemeClr val="accent1"/>
-          </a:lnRef>
-          <a:fillRef idx="3">
-            <a:schemeClr val="accent1"/>
-          </a:fillRef>
-          <a:effectRef idx="2">
-            <a:schemeClr val="accent1"/>
-          </a:effectRef>
-          <a:fontRef idx="minor">
-            <a:schemeClr val="lt1"/>
-          </a:fontRef>
-        </p:style>
         <p:txBody>
           <a:bodyPr rtlCol="0" anchor="ctr"/>
           <a:lstStyle/>
@@ -7727,8 +6725,8 @@
         </p:nvSpPr>
         <p:spPr>
           <a:xfrm>
-            <a:off x="1024128" y="2176272"/>
-            <a:ext cx="548640" cy="548640"/>
+            <a:off x="868680" y="2523744"/>
+            <a:ext cx="502920" cy="502920"/>
           </a:xfrm>
           <a:prstGeom prst="rect">
             <a:avLst/>
@@ -7747,11 +6745,11 @@
               </a:spcAft>
             </a:pPr>
             <a:r>
-              <a:rPr sz="1500" b="1" i="0">
-                <a:solidFill>
-                  <a:srgbClr val="FFFFFF"/>
-                </a:solidFill>
-                <a:latin typeface="Trebuchet MS"/>
+              <a:rPr sz="1300" b="1" i="0">
+                <a:solidFill>
+                  <a:srgbClr val="121316"/>
+                </a:solidFill>
+                <a:latin typeface="Arial"/>
               </a:rPr>
               <a:t>1</a:t>
             </a:r>
@@ -7766,8 +6764,8 @@
         </p:nvSpPr>
         <p:spPr>
           <a:xfrm>
-            <a:off x="1828800" y="2157984"/>
-            <a:ext cx="9326880" cy="685800"/>
+            <a:off x="1691640" y="2478024"/>
+            <a:ext cx="9509760" cy="822960"/>
           </a:xfrm>
           <a:prstGeom prst="rect">
             <a:avLst/>
@@ -7788,79 +6786,46 @@
             <a:r>
               <a:rPr sz="1700" b="1" i="0">
                 <a:solidFill>
-                  <a:srgbClr val="0F172A"/>
-                </a:solidFill>
-                <a:latin typeface="Trebuchet MS"/>
-              </a:rPr>
-              <a:t>Kostenloses Web-Tool von Google</a:t>
-            </a:r>
-          </a:p>
-          <a:p>
-            <a:pPr algn="l">
-              <a:spcAft>
-                <a:spcPts val="200"/>
-              </a:spcAft>
-            </a:pPr>
-            <a:r>
-              <a:rPr sz="1350" b="0" i="0">
-                <a:solidFill>
-                  <a:srgbClr val="64748B"/>
-                </a:solidFill>
-                <a:latin typeface="Calibri"/>
-              </a:rPr>
-              <a:t>„Build“-Modus auf aistudio.google.com/apps – nichts installieren.</a:t>
-            </a:r>
-          </a:p>
-        </p:txBody>
-      </p:sp>
-      <p:sp>
-        <p:nvSpPr>
-          <p:cNvPr id="9" name="Rounded Rectangle 8"/>
-          <p:cNvSpPr/>
-          <p:nvPr/>
-        </p:nvSpPr>
-        <p:spPr>
-          <a:xfrm>
-            <a:off x="822960" y="3081528"/>
-            <a:ext cx="10515600" cy="914400"/>
-          </a:xfrm>
-          <a:prstGeom prst="roundRect">
-            <a:avLst>
-              <a:gd name="adj" fmla="val 8000"/>
-            </a:avLst>
-          </a:prstGeom>
-          <a:solidFill>
-            <a:srgbClr val="FFFFFF"/>
-          </a:solidFill>
+                  <a:srgbClr val="121316"/>
+                </a:solidFill>
+                <a:latin typeface="Arial"/>
+              </a:rPr>
+              <a:t>Kostenloses Web-Tool von Google  </a:t>
+            </a:r>
+            <a:r>
+              <a:rPr sz="1400" b="0" i="0">
+                <a:solidFill>
+                  <a:srgbClr val="71717A"/>
+                </a:solidFill>
+                <a:latin typeface="Arial"/>
+              </a:rPr>
+              <a:t>Build-Modus auf aistudio.google.com/apps – nichts installieren.</a:t>
+            </a:r>
+          </a:p>
+        </p:txBody>
+      </p:sp>
+      <p:cxnSp>
+        <p:nvCxnSpPr>
+          <p:cNvPr id="9" name="Connector 8"/>
+          <p:cNvCxnSpPr/>
+          <p:nvPr/>
+        </p:nvCxnSpPr>
+        <p:spPr>
+          <a:xfrm>
+            <a:off x="868680" y="3264408"/>
+            <a:ext cx="10469879" cy="0"/>
+          </a:xfrm>
+          <a:prstGeom prst="line">
+            <a:avLst/>
+          </a:prstGeom>
           <a:ln w="12700">
             <a:solidFill>
-              <a:srgbClr val="E2E8F0"/>
+              <a:srgbClr val="E4E4E7"/>
             </a:solidFill>
           </a:ln>
           <a:effectLst/>
         </p:spPr>
-        <p:style>
-          <a:lnRef idx="1">
-            <a:schemeClr val="accent1"/>
-          </a:lnRef>
-          <a:fillRef idx="3">
-            <a:schemeClr val="accent1"/>
-          </a:fillRef>
-          <a:effectRef idx="2">
-            <a:schemeClr val="accent1"/>
-          </a:effectRef>
-          <a:fontRef idx="minor">
-            <a:schemeClr val="lt1"/>
-          </a:fontRef>
-        </p:style>
-        <p:txBody>
-          <a:bodyPr rtlCol="0" anchor="ctr"/>
-          <a:lstStyle/>
-          <a:p>
-            <a:pPr algn="ctr"/>
-          </a:p>
-        </p:txBody>
-      </p:sp>
+      </p:cxnSp>
       <p:sp>
         <p:nvSpPr>
           <p:cNvPr id="10" name="Oval 9"/>
@@ -7869,34 +6834,20 @@
         </p:nvSpPr>
         <p:spPr>
           <a:xfrm>
-            <a:off x="1024128" y="3264408"/>
-            <a:ext cx="548640" cy="548640"/>
+            <a:off x="868680" y="3483863"/>
+            <a:ext cx="502920" cy="502920"/>
           </a:xfrm>
           <a:prstGeom prst="ellipse">
             <a:avLst/>
           </a:prstGeom>
-          <a:solidFill>
-            <a:srgbClr val="0EA5E9"/>
-          </a:solidFill>
-          <a:ln>
-            <a:noFill/>
+          <a:noFill/>
+          <a:ln w="16510">
+            <a:solidFill>
+              <a:srgbClr val="121316"/>
+            </a:solidFill>
           </a:ln>
           <a:effectLst/>
         </p:spPr>
-        <p:style>
-          <a:lnRef idx="1">
-            <a:schemeClr val="accent1"/>
-          </a:lnRef>
-          <a:fillRef idx="3">
-            <a:schemeClr val="accent1"/>
-          </a:fillRef>
-          <a:effectRef idx="2">
-            <a:schemeClr val="accent1"/>
-          </a:effectRef>
-          <a:fontRef idx="minor">
-            <a:schemeClr val="lt1"/>
-          </a:fontRef>
-        </p:style>
         <p:txBody>
           <a:bodyPr rtlCol="0" anchor="ctr"/>
           <a:lstStyle/>
@@ -7913,8 +6864,8 @@
         </p:nvSpPr>
         <p:spPr>
           <a:xfrm>
-            <a:off x="1024128" y="3246120"/>
-            <a:ext cx="548640" cy="548640"/>
+            <a:off x="868680" y="3456432"/>
+            <a:ext cx="502920" cy="502920"/>
           </a:xfrm>
           <a:prstGeom prst="rect">
             <a:avLst/>
@@ -7933,11 +6884,11 @@
               </a:spcAft>
             </a:pPr>
             <a:r>
-              <a:rPr sz="1500" b="1" i="0">
-                <a:solidFill>
-                  <a:srgbClr val="FFFFFF"/>
-                </a:solidFill>
-                <a:latin typeface="Trebuchet MS"/>
+              <a:rPr sz="1300" b="1" i="0">
+                <a:solidFill>
+                  <a:srgbClr val="121316"/>
+                </a:solidFill>
+                <a:latin typeface="Arial"/>
               </a:rPr>
               <a:t>2</a:t>
             </a:r>
@@ -7952,8 +6903,8 @@
         </p:nvSpPr>
         <p:spPr>
           <a:xfrm>
-            <a:off x="1828800" y="3227832"/>
-            <a:ext cx="9326880" cy="685800"/>
+            <a:off x="1691640" y="3410712"/>
+            <a:ext cx="9509760" cy="822960"/>
           </a:xfrm>
           <a:prstGeom prst="rect">
             <a:avLst/>
@@ -7974,79 +6925,46 @@
             <a:r>
               <a:rPr sz="1700" b="1" i="0">
                 <a:solidFill>
-                  <a:srgbClr val="0F172A"/>
-                </a:solidFill>
-                <a:latin typeface="Trebuchet MS"/>
-              </a:rPr>
-              <a:t>Beschreiben statt programmieren</a:t>
-            </a:r>
-          </a:p>
-          <a:p>
-            <a:pPr algn="l">
-              <a:spcAft>
-                <a:spcPts val="200"/>
-              </a:spcAft>
-            </a:pPr>
-            <a:r>
-              <a:rPr sz="1350" b="0" i="0">
-                <a:solidFill>
-                  <a:srgbClr val="64748B"/>
-                </a:solidFill>
-                <a:latin typeface="Calibri"/>
-              </a:rPr>
-              <a:t>Du sagst in normaler Sprache, was du willst – die KI baut die Website.</a:t>
-            </a:r>
-          </a:p>
-        </p:txBody>
-      </p:sp>
-      <p:sp>
-        <p:nvSpPr>
-          <p:cNvPr id="13" name="Rounded Rectangle 12"/>
-          <p:cNvSpPr/>
-          <p:nvPr/>
-        </p:nvSpPr>
-        <p:spPr>
-          <a:xfrm>
-            <a:off x="822960" y="4151376"/>
-            <a:ext cx="10515600" cy="914400"/>
-          </a:xfrm>
-          <a:prstGeom prst="roundRect">
-            <a:avLst>
-              <a:gd name="adj" fmla="val 8000"/>
-            </a:avLst>
-          </a:prstGeom>
-          <a:solidFill>
-            <a:srgbClr val="FFFFFF"/>
-          </a:solidFill>
+                  <a:srgbClr val="121316"/>
+                </a:solidFill>
+                <a:latin typeface="Arial"/>
+              </a:rPr>
+              <a:t>Beschreiben statt programmieren  </a:t>
+            </a:r>
+            <a:r>
+              <a:rPr sz="1400" b="0" i="0">
+                <a:solidFill>
+                  <a:srgbClr val="71717A"/>
+                </a:solidFill>
+                <a:latin typeface="Arial"/>
+              </a:rPr>
+              <a:t>In normaler Sprache sagen, was du willst.</a:t>
+            </a:r>
+          </a:p>
+        </p:txBody>
+      </p:sp>
+      <p:cxnSp>
+        <p:nvCxnSpPr>
+          <p:cNvPr id="13" name="Connector 12"/>
+          <p:cNvCxnSpPr/>
+          <p:nvPr/>
+        </p:nvCxnSpPr>
+        <p:spPr>
+          <a:xfrm>
+            <a:off x="868680" y="4197096"/>
+            <a:ext cx="10469879" cy="0"/>
+          </a:xfrm>
+          <a:prstGeom prst="line">
+            <a:avLst/>
+          </a:prstGeom>
           <a:ln w="12700">
             <a:solidFill>
-              <a:srgbClr val="E2E8F0"/>
+              <a:srgbClr val="E4E4E7"/>
             </a:solidFill>
           </a:ln>
           <a:effectLst/>
         </p:spPr>
-        <p:style>
-          <a:lnRef idx="1">
-            <a:schemeClr val="accent1"/>
-          </a:lnRef>
-          <a:fillRef idx="3">
-            <a:schemeClr val="accent1"/>
-          </a:fillRef>
-          <a:effectRef idx="2">
-            <a:schemeClr val="accent1"/>
-          </a:effectRef>
-          <a:fontRef idx="minor">
-            <a:schemeClr val="lt1"/>
-          </a:fontRef>
-        </p:style>
-        <p:txBody>
-          <a:bodyPr rtlCol="0" anchor="ctr"/>
-          <a:lstStyle/>
-          <a:p>
-            <a:pPr algn="ctr"/>
-          </a:p>
-        </p:txBody>
-      </p:sp>
+      </p:cxnSp>
       <p:sp>
         <p:nvSpPr>
           <p:cNvPr id="14" name="Oval 13"/>
@@ -8055,34 +6973,20 @@
         </p:nvSpPr>
         <p:spPr>
           <a:xfrm>
-            <a:off x="1024128" y="4334256"/>
-            <a:ext cx="548640" cy="548640"/>
+            <a:off x="868680" y="4416552"/>
+            <a:ext cx="502920" cy="502920"/>
           </a:xfrm>
           <a:prstGeom prst="ellipse">
             <a:avLst/>
           </a:prstGeom>
-          <a:solidFill>
-            <a:srgbClr val="0EA5E9"/>
-          </a:solidFill>
-          <a:ln>
-            <a:noFill/>
+          <a:noFill/>
+          <a:ln w="16510">
+            <a:solidFill>
+              <a:srgbClr val="121316"/>
+            </a:solidFill>
           </a:ln>
           <a:effectLst/>
         </p:spPr>
-        <p:style>
-          <a:lnRef idx="1">
-            <a:schemeClr val="accent1"/>
-          </a:lnRef>
-          <a:fillRef idx="3">
-            <a:schemeClr val="accent1"/>
-          </a:fillRef>
-          <a:effectRef idx="2">
-            <a:schemeClr val="accent1"/>
-          </a:effectRef>
-          <a:fontRef idx="minor">
-            <a:schemeClr val="lt1"/>
-          </a:fontRef>
-        </p:style>
         <p:txBody>
           <a:bodyPr rtlCol="0" anchor="ctr"/>
           <a:lstStyle/>
@@ -8099,8 +7003,8 @@
         </p:nvSpPr>
         <p:spPr>
           <a:xfrm>
-            <a:off x="1024128" y="4315968"/>
-            <a:ext cx="548640" cy="548640"/>
+            <a:off x="868680" y="4389120"/>
+            <a:ext cx="502920" cy="502920"/>
           </a:xfrm>
           <a:prstGeom prst="rect">
             <a:avLst/>
@@ -8119,11 +7023,11 @@
               </a:spcAft>
             </a:pPr>
             <a:r>
-              <a:rPr sz="1500" b="1" i="0">
-                <a:solidFill>
-                  <a:srgbClr val="FFFFFF"/>
-                </a:solidFill>
-                <a:latin typeface="Trebuchet MS"/>
+              <a:rPr sz="1300" b="1" i="0">
+                <a:solidFill>
+                  <a:srgbClr val="121316"/>
+                </a:solidFill>
+                <a:latin typeface="Arial"/>
               </a:rPr>
               <a:t>3</a:t>
             </a:r>
@@ -8138,8 +7042,8 @@
         </p:nvSpPr>
         <p:spPr>
           <a:xfrm>
-            <a:off x="1828800" y="4297680"/>
-            <a:ext cx="9326880" cy="685800"/>
+            <a:off x="1691640" y="4343400"/>
+            <a:ext cx="9509760" cy="822960"/>
           </a:xfrm>
           <a:prstGeom prst="rect">
             <a:avLst/>
@@ -8160,79 +7064,46 @@
             <a:r>
               <a:rPr sz="1700" b="1" i="0">
                 <a:solidFill>
-                  <a:srgbClr val="0F172A"/>
-                </a:solidFill>
-                <a:latin typeface="Trebuchet MS"/>
-              </a:rPr>
-              <a:t>Sofort sichtbar</a:t>
-            </a:r>
-          </a:p>
-          <a:p>
-            <a:pPr algn="l">
-              <a:spcAft>
-                <a:spcPts val="200"/>
-              </a:spcAft>
-            </a:pPr>
-            <a:r>
-              <a:rPr sz="1350" b="0" i="0">
-                <a:solidFill>
-                  <a:srgbClr val="64748B"/>
-                </a:solidFill>
-                <a:latin typeface="Calibri"/>
-              </a:rPr>
-              <a:t>Rechts erscheint live eine Vorschau deiner Website.</a:t>
-            </a:r>
-          </a:p>
-        </p:txBody>
-      </p:sp>
-      <p:sp>
-        <p:nvSpPr>
-          <p:cNvPr id="17" name="Rounded Rectangle 16"/>
-          <p:cNvSpPr/>
-          <p:nvPr/>
-        </p:nvSpPr>
-        <p:spPr>
-          <a:xfrm>
-            <a:off x="822960" y="5221224"/>
-            <a:ext cx="10515600" cy="914400"/>
-          </a:xfrm>
-          <a:prstGeom prst="roundRect">
-            <a:avLst>
-              <a:gd name="adj" fmla="val 8000"/>
-            </a:avLst>
-          </a:prstGeom>
-          <a:solidFill>
-            <a:srgbClr val="FFFFFF"/>
-          </a:solidFill>
+                  <a:srgbClr val="121316"/>
+                </a:solidFill>
+                <a:latin typeface="Arial"/>
+              </a:rPr>
+              <a:t>Sofort sichtbar  </a:t>
+            </a:r>
+            <a:r>
+              <a:rPr sz="1400" b="0" i="0">
+                <a:solidFill>
+                  <a:srgbClr val="71717A"/>
+                </a:solidFill>
+                <a:latin typeface="Arial"/>
+              </a:rPr>
+              <a:t>Die Vorschau erscheint live.</a:t>
+            </a:r>
+          </a:p>
+        </p:txBody>
+      </p:sp>
+      <p:cxnSp>
+        <p:nvCxnSpPr>
+          <p:cNvPr id="17" name="Connector 16"/>
+          <p:cNvCxnSpPr/>
+          <p:nvPr/>
+        </p:nvCxnSpPr>
+        <p:spPr>
+          <a:xfrm>
+            <a:off x="868680" y="5129783"/>
+            <a:ext cx="10469879" cy="0"/>
+          </a:xfrm>
+          <a:prstGeom prst="line">
+            <a:avLst/>
+          </a:prstGeom>
           <a:ln w="12700">
             <a:solidFill>
-              <a:srgbClr val="E2E8F0"/>
+              <a:srgbClr val="E4E4E7"/>
             </a:solidFill>
           </a:ln>
           <a:effectLst/>
         </p:spPr>
-        <p:style>
-          <a:lnRef idx="1">
-            <a:schemeClr val="accent1"/>
-          </a:lnRef>
-          <a:fillRef idx="3">
-            <a:schemeClr val="accent1"/>
-          </a:fillRef>
-          <a:effectRef idx="2">
-            <a:schemeClr val="accent1"/>
-          </a:effectRef>
-          <a:fontRef idx="minor">
-            <a:schemeClr val="lt1"/>
-          </a:fontRef>
-        </p:style>
-        <p:txBody>
-          <a:bodyPr rtlCol="0" anchor="ctr"/>
-          <a:lstStyle/>
-          <a:p>
-            <a:pPr algn="ctr"/>
-          </a:p>
-        </p:txBody>
-      </p:sp>
+      </p:cxnSp>
       <p:sp>
         <p:nvSpPr>
           <p:cNvPr id="18" name="Oval 17"/>
@@ -8241,34 +7112,20 @@
         </p:nvSpPr>
         <p:spPr>
           <a:xfrm>
-            <a:off x="1024128" y="5404104"/>
-            <a:ext cx="548640" cy="548640"/>
+            <a:off x="868680" y="5349240"/>
+            <a:ext cx="502920" cy="502920"/>
           </a:xfrm>
           <a:prstGeom prst="ellipse">
             <a:avLst/>
           </a:prstGeom>
-          <a:solidFill>
-            <a:srgbClr val="0EA5E9"/>
-          </a:solidFill>
-          <a:ln>
-            <a:noFill/>
+          <a:noFill/>
+          <a:ln w="16510">
+            <a:solidFill>
+              <a:srgbClr val="121316"/>
+            </a:solidFill>
           </a:ln>
           <a:effectLst/>
         </p:spPr>
-        <p:style>
-          <a:lnRef idx="1">
-            <a:schemeClr val="accent1"/>
-          </a:lnRef>
-          <a:fillRef idx="3">
-            <a:schemeClr val="accent1"/>
-          </a:fillRef>
-          <a:effectRef idx="2">
-            <a:schemeClr val="accent1"/>
-          </a:effectRef>
-          <a:fontRef idx="minor">
-            <a:schemeClr val="lt1"/>
-          </a:fontRef>
-        </p:style>
         <p:txBody>
           <a:bodyPr rtlCol="0" anchor="ctr"/>
           <a:lstStyle/>
@@ -8285,8 +7142,8 @@
         </p:nvSpPr>
         <p:spPr>
           <a:xfrm>
-            <a:off x="1024128" y="5385816"/>
-            <a:ext cx="548640" cy="548640"/>
+            <a:off x="868680" y="5321807"/>
+            <a:ext cx="502920" cy="502920"/>
           </a:xfrm>
           <a:prstGeom prst="rect">
             <a:avLst/>
@@ -8305,11 +7162,11 @@
               </a:spcAft>
             </a:pPr>
             <a:r>
-              <a:rPr sz="1500" b="1" i="0">
-                <a:solidFill>
-                  <a:srgbClr val="FFFFFF"/>
-                </a:solidFill>
-                <a:latin typeface="Trebuchet MS"/>
+              <a:rPr sz="1300" b="1" i="0">
+                <a:solidFill>
+                  <a:srgbClr val="121316"/>
+                </a:solidFill>
+                <a:latin typeface="Arial"/>
               </a:rPr>
               <a:t>4</a:t>
             </a:r>
@@ -8324,8 +7181,8 @@
         </p:nvSpPr>
         <p:spPr>
           <a:xfrm>
-            <a:off x="1828800" y="5367528"/>
-            <a:ext cx="9326880" cy="685800"/>
+            <a:off x="1691640" y="5276088"/>
+            <a:ext cx="9509760" cy="822960"/>
           </a:xfrm>
           <a:prstGeom prst="rect">
             <a:avLst/>
@@ -8346,31 +7203,46 @@
             <a:r>
               <a:rPr sz="1700" b="1" i="0">
                 <a:solidFill>
-                  <a:srgbClr val="0F172A"/>
-                </a:solidFill>
-                <a:latin typeface="Trebuchet MS"/>
-              </a:rPr>
-              <a:t>Einfach anpassen</a:t>
-            </a:r>
-          </a:p>
-          <a:p>
-            <a:pPr algn="l">
-              <a:spcAft>
-                <a:spcPts val="200"/>
-              </a:spcAft>
-            </a:pPr>
-            <a:r>
-              <a:rPr sz="1350" b="0" i="0">
-                <a:solidFill>
-                  <a:srgbClr val="64748B"/>
-                </a:solidFill>
-                <a:latin typeface="Calibri"/>
-              </a:rPr>
-              <a:t>Änderungswunsch als nächste Nachricht: „Mach die Kopfzeile grösser.“</a:t>
-            </a:r>
-          </a:p>
-        </p:txBody>
-      </p:sp>
+                  <a:srgbClr val="121316"/>
+                </a:solidFill>
+                <a:latin typeface="Arial"/>
+              </a:rPr>
+              <a:t>Einfach anpassen  </a:t>
+            </a:r>
+            <a:r>
+              <a:rPr sz="1400" b="0" i="0">
+                <a:solidFill>
+                  <a:srgbClr val="71717A"/>
+                </a:solidFill>
+                <a:latin typeface="Arial"/>
+              </a:rPr>
+              <a:t>Änderung als nächste Nachricht schreiben.</a:t>
+            </a:r>
+          </a:p>
+        </p:txBody>
+      </p:sp>
+      <p:cxnSp>
+        <p:nvCxnSpPr>
+          <p:cNvPr id="21" name="Connector 20"/>
+          <p:cNvCxnSpPr/>
+          <p:nvPr/>
+        </p:nvCxnSpPr>
+        <p:spPr>
+          <a:xfrm>
+            <a:off x="868680" y="6062471"/>
+            <a:ext cx="10469879" cy="0"/>
+          </a:xfrm>
+          <a:prstGeom prst="line">
+            <a:avLst/>
+          </a:prstGeom>
+          <a:ln w="12700">
+            <a:solidFill>
+              <a:srgbClr val="E4E4E7"/>
+            </a:solidFill>
+          </a:ln>
+          <a:effectLst/>
+        </p:spPr>
+      </p:cxnSp>
     </p:spTree>
   </p:cSld>
   <p:clrMapOvr>
@@ -8404,27 +7276,13 @@
             <a:avLst/>
           </a:prstGeom>
           <a:solidFill>
-            <a:srgbClr val="4F46E5"/>
+            <a:srgbClr val="FFFFFF"/>
           </a:solidFill>
           <a:ln>
             <a:noFill/>
           </a:ln>
           <a:effectLst/>
         </p:spPr>
-        <p:style>
-          <a:lnRef idx="1">
-            <a:schemeClr val="accent1"/>
-          </a:lnRef>
-          <a:fillRef idx="3">
-            <a:schemeClr val="accent1"/>
-          </a:fillRef>
-          <a:effectRef idx="2">
-            <a:schemeClr val="accent1"/>
-          </a:effectRef>
-          <a:fontRef idx="minor">
-            <a:schemeClr val="lt1"/>
-          </a:fontRef>
-        </p:style>
         <p:txBody>
           <a:bodyPr rtlCol="0" anchor="ctr"/>
           <a:lstStyle/>
@@ -8441,8 +7299,8 @@
         </p:nvSpPr>
         <p:spPr>
           <a:xfrm>
-            <a:off x="914400" y="1828800"/>
-            <a:ext cx="10332720" cy="2286000"/>
+            <a:off x="868680" y="1371600"/>
+            <a:ext cx="10058400" cy="365760"/>
           </a:xfrm>
           <a:prstGeom prst="rect">
             <a:avLst/>
@@ -8455,85 +7313,63 @@
           </a:bodyPr>
           <a:lstStyle/>
           <a:p>
-            <a:pPr algn="ctr">
-              <a:spcAft>
-                <a:spcPts val="1400"/>
-              </a:spcAft>
-            </a:pPr>
-            <a:r>
-              <a:rPr sz="1800" b="1" i="0">
-                <a:solidFill>
-                  <a:srgbClr val="C7D2FE"/>
-                </a:solidFill>
-                <a:latin typeface="Trebuchet MS"/>
-              </a:rPr>
-              <a:t>Das Wichtigste</a:t>
-            </a:r>
-          </a:p>
-          <a:p>
-            <a:pPr algn="ctr">
+            <a:pPr algn="l">
+              <a:spcAft>
+                <a:spcPts val="200"/>
+              </a:spcAft>
+            </a:pPr>
+            <a:r>
+              <a:rPr sz="1200" b="1" i="0">
+                <a:solidFill>
+                  <a:srgbClr val="71717A"/>
+                </a:solidFill>
+                <a:latin typeface="Arial"/>
+              </a:rPr>
+              <a:t>DAS WICHTIGSTE</a:t>
+            </a:r>
+          </a:p>
+        </p:txBody>
+      </p:sp>
+      <p:sp>
+        <p:nvSpPr>
+          <p:cNvPr id="4" name="TextBox 3"/>
+          <p:cNvSpPr txBox="1"/>
+          <p:nvPr/>
+        </p:nvSpPr>
+        <p:spPr>
+          <a:xfrm>
+            <a:off x="868680" y="2468880"/>
+            <a:ext cx="10469880" cy="2011680"/>
+          </a:xfrm>
+          <a:prstGeom prst="rect">
+            <a:avLst/>
+          </a:prstGeom>
+          <a:noFill/>
+        </p:spPr>
+        <p:txBody>
+          <a:bodyPr wrap="square" anchor="t" lIns="0" rIns="0" tIns="0" bIns="0">
+            <a:spAutoFit/>
+          </a:bodyPr>
+          <a:lstStyle/>
+          <a:p>
+            <a:pPr algn="l">
               <a:lnSpc>
-                <a:spcPct val="110000"/>
+                <a:spcPct val="108000"/>
               </a:lnSpc>
               <a:spcAft>
                 <a:spcPts val="200"/>
               </a:spcAft>
             </a:pPr>
             <a:r>
-              <a:rPr sz="4000" b="1" i="0">
-                <a:solidFill>
-                  <a:srgbClr val="FFFFFF"/>
-                </a:solidFill>
-                <a:latin typeface="Trebuchet MS"/>
-              </a:rPr>
-              <a:t>Ein guter Auftrag  =  ein gutes Ergebnis</a:t>
-            </a:r>
-          </a:p>
-        </p:txBody>
-      </p:sp>
-      <p:sp>
-        <p:nvSpPr>
-          <p:cNvPr id="4" name="Rounded Rectangle 3"/>
-          <p:cNvSpPr/>
-          <p:nvPr/>
-        </p:nvSpPr>
-        <p:spPr>
-          <a:xfrm>
-            <a:off x="2468880" y="4297680"/>
-            <a:ext cx="7223760" cy="914400"/>
-          </a:xfrm>
-          <a:prstGeom prst="roundRect">
-            <a:avLst>
-              <a:gd name="adj" fmla="val 8000"/>
-            </a:avLst>
-          </a:prstGeom>
-          <a:solidFill>
-            <a:srgbClr val="4338CA"/>
-          </a:solidFill>
-          <a:ln>
-            <a:noFill/>
-          </a:ln>
-          <a:effectLst/>
-        </p:spPr>
-        <p:style>
-          <a:lnRef idx="1">
-            <a:schemeClr val="accent1"/>
-          </a:lnRef>
-          <a:fillRef idx="3">
-            <a:schemeClr val="accent1"/>
-          </a:fillRef>
-          <a:effectRef idx="2">
-            <a:schemeClr val="accent1"/>
-          </a:effectRef>
-          <a:fontRef idx="minor">
-            <a:schemeClr val="lt1"/>
-          </a:fontRef>
-        </p:style>
-        <p:txBody>
-          <a:bodyPr rtlCol="0" anchor="ctr"/>
-          <a:lstStyle/>
-          <a:p>
-            <a:pPr algn="ctr"/>
+              <a:rPr sz="5000" b="1" i="0">
+                <a:solidFill>
+                  <a:srgbClr val="121316"/>
+                </a:solidFill>
+                <a:latin typeface="Arial"/>
+              </a:rPr>
+              <a:t>Ein guter Auftrag =
+</a:t>
+            </a:r>
           </a:p>
         </p:txBody>
       </p:sp>
@@ -8545,8 +7381,8 @@
         </p:nvSpPr>
         <p:spPr>
           <a:xfrm>
-            <a:off x="2651760" y="4297680"/>
-            <a:ext cx="6858000" cy="914400"/>
+            <a:off x="868680" y="3429000"/>
+            <a:ext cx="10469880" cy="1280160"/>
           </a:xfrm>
           <a:prstGeom prst="rect">
             <a:avLst/>
@@ -8554,22 +7390,61 @@
           <a:noFill/>
         </p:spPr>
         <p:txBody>
-          <a:bodyPr wrap="square" anchor="ctr" lIns="0" rIns="0" tIns="0" bIns="0">
+          <a:bodyPr wrap="square" anchor="t" lIns="0" rIns="0" tIns="0" bIns="0">
             <a:spAutoFit/>
           </a:bodyPr>
           <a:lstStyle/>
           <a:p>
-            <a:pPr algn="ctr">
+            <a:pPr algn="l">
               <a:spcAft>
                 <a:spcPts val="200"/>
               </a:spcAft>
             </a:pPr>
             <a:r>
+              <a:rPr sz="5000" b="1" i="0">
+                <a:solidFill>
+                  <a:srgbClr val="2563EB"/>
+                </a:solidFill>
+                <a:latin typeface="Arial"/>
+              </a:rPr>
+              <a:t>ein gutes Ergebnis.</a:t>
+            </a:r>
+          </a:p>
+        </p:txBody>
+      </p:sp>
+      <p:sp>
+        <p:nvSpPr>
+          <p:cNvPr id="6" name="TextBox 5"/>
+          <p:cNvSpPr txBox="1"/>
+          <p:nvPr/>
+        </p:nvSpPr>
+        <p:spPr>
+          <a:xfrm>
+            <a:off x="868680" y="5029200"/>
+            <a:ext cx="10469880" cy="548640"/>
+          </a:xfrm>
+          <a:prstGeom prst="rect">
+            <a:avLst/>
+          </a:prstGeom>
+          <a:noFill/>
+        </p:spPr>
+        <p:txBody>
+          <a:bodyPr wrap="square" anchor="t" lIns="0" rIns="0" tIns="0" bIns="0">
+            <a:spAutoFit/>
+          </a:bodyPr>
+          <a:lstStyle/>
+          <a:p>
+            <a:pPr algn="l">
+              <a:spcAft>
+                <a:spcPts val="200"/>
+              </a:spcAft>
+            </a:pPr>
+            <a:r>
               <a:rPr sz="1800" b="0" i="0">
                 <a:solidFill>
-                  <a:srgbClr val="FFFFFF"/>
-                </a:solidFill>
-                <a:latin typeface="Calibri"/>
+                  <a:srgbClr val="71717A"/>
+                </a:solidFill>
+                <a:latin typeface="Arial"/>
               </a:rPr>
               <a:t>Je konkreter du beschreibst, desto besser wird die Website.</a:t>
             </a:r>
@@ -8609,27 +7484,13 @@
             <a:avLst/>
           </a:prstGeom>
           <a:solidFill>
-            <a:srgbClr val="F8FAFC"/>
+            <a:srgbClr val="FFFFFF"/>
           </a:solidFill>
           <a:ln>
             <a:noFill/>
           </a:ln>
           <a:effectLst/>
         </p:spPr>
-        <p:style>
-          <a:lnRef idx="1">
-            <a:schemeClr val="accent1"/>
-          </a:lnRef>
-          <a:fillRef idx="3">
-            <a:schemeClr val="accent1"/>
-          </a:fillRef>
-          <a:effectRef idx="2">
-            <a:schemeClr val="accent1"/>
-          </a:effectRef>
-          <a:fontRef idx="minor">
-            <a:schemeClr val="lt1"/>
-          </a:fontRef>
-        </p:style>
         <p:txBody>
           <a:bodyPr rtlCol="0" anchor="ctr"/>
           <a:lstStyle/>
@@ -8646,8 +7507,8 @@
         </p:nvSpPr>
         <p:spPr>
           <a:xfrm>
-            <a:off x="822960" y="548640"/>
-            <a:ext cx="7315200" cy="365760"/>
+            <a:off x="868680" y="777240"/>
+            <a:ext cx="10058400" cy="365760"/>
           </a:xfrm>
           <a:prstGeom prst="rect">
             <a:avLst/>
@@ -8668,9 +7529,9 @@
             <a:r>
               <a:rPr sz="1200" b="1" i="0">
                 <a:solidFill>
-                  <a:srgbClr val="4F46E5"/>
-                </a:solidFill>
-                <a:latin typeface="Trebuchet MS"/>
+                  <a:srgbClr val="71717A"/>
+                </a:solidFill>
+                <a:latin typeface="Arial"/>
               </a:rPr>
               <a:t>DER WEG ZUR WEBSITE</a:t>
             </a:r>
@@ -8685,8 +7546,8 @@
         </p:nvSpPr>
         <p:spPr>
           <a:xfrm>
-            <a:off x="822960" y="914400"/>
-            <a:ext cx="7772400" cy="731520"/>
+            <a:off x="868680" y="1234440"/>
+            <a:ext cx="7315200" cy="822960"/>
           </a:xfrm>
           <a:prstGeom prst="rect">
             <a:avLst/>
@@ -8705,65 +7566,39 @@
               </a:spcAft>
             </a:pPr>
             <a:r>
-              <a:rPr sz="3400" b="1" i="0">
-                <a:solidFill>
-                  <a:srgbClr val="0F172A"/>
-                </a:solidFill>
-                <a:latin typeface="Trebuchet MS"/>
-              </a:rPr>
-              <a:t>In nur 3 Schritten</a:t>
-            </a:r>
-          </a:p>
-        </p:txBody>
-      </p:sp>
-      <p:sp>
-        <p:nvSpPr>
-          <p:cNvPr id="5" name="Rounded Rectangle 4"/>
-          <p:cNvSpPr/>
-          <p:nvPr/>
-        </p:nvSpPr>
-        <p:spPr>
-          <a:xfrm>
-            <a:off x="822960" y="1965960"/>
-            <a:ext cx="7498079" cy="1143000"/>
-          </a:xfrm>
-          <a:prstGeom prst="roundRect">
-            <a:avLst>
-              <a:gd name="adj" fmla="val 8000"/>
-            </a:avLst>
-          </a:prstGeom>
-          <a:solidFill>
-            <a:srgbClr val="FFFFFF"/>
-          </a:solidFill>
+              <a:rPr sz="3300" b="1" i="0">
+                <a:solidFill>
+                  <a:srgbClr val="121316"/>
+                </a:solidFill>
+                <a:latin typeface="Arial"/>
+              </a:rPr>
+              <a:t>In drei Schritten</a:t>
+            </a:r>
+          </a:p>
+        </p:txBody>
+      </p:sp>
+      <p:cxnSp>
+        <p:nvCxnSpPr>
+          <p:cNvPr id="5" name="Connector 4"/>
+          <p:cNvCxnSpPr/>
+          <p:nvPr/>
+        </p:nvCxnSpPr>
+        <p:spPr>
+          <a:xfrm>
+            <a:off x="868680" y="2468880"/>
+            <a:ext cx="6766560" cy="0"/>
+          </a:xfrm>
+          <a:prstGeom prst="line">
+            <a:avLst/>
+          </a:prstGeom>
           <a:ln w="12700">
             <a:solidFill>
-              <a:srgbClr val="E2E8F0"/>
+              <a:srgbClr val="E4E4E7"/>
             </a:solidFill>
           </a:ln>
           <a:effectLst/>
         </p:spPr>
-        <p:style>
-          <a:lnRef idx="1">
-            <a:schemeClr val="accent1"/>
-          </a:lnRef>
-          <a:fillRef idx="3">
-            <a:schemeClr val="accent1"/>
-          </a:fillRef>
-          <a:effectRef idx="2">
-            <a:schemeClr val="accent1"/>
-          </a:effectRef>
-          <a:fontRef idx="minor">
-            <a:schemeClr val="lt1"/>
-          </a:fontRef>
-        </p:style>
-        <p:txBody>
-          <a:bodyPr rtlCol="0" anchor="ctr"/>
-          <a:lstStyle/>
-          <a:p>
-            <a:pPr algn="ctr"/>
-          </a:p>
-        </p:txBody>
-      </p:sp>
+      </p:cxnSp>
       <p:sp>
         <p:nvSpPr>
           <p:cNvPr id="6" name="Oval 5"/>
@@ -8772,34 +7607,20 @@
         </p:nvSpPr>
         <p:spPr>
           <a:xfrm>
-            <a:off x="1097280" y="2240279"/>
-            <a:ext cx="594360" cy="594360"/>
+            <a:off x="868680" y="2706624"/>
+            <a:ext cx="502920" cy="502920"/>
           </a:xfrm>
           <a:prstGeom prst="ellipse">
             <a:avLst/>
           </a:prstGeom>
-          <a:solidFill>
-            <a:srgbClr val="0EA5E9"/>
-          </a:solidFill>
-          <a:ln>
-            <a:noFill/>
+          <a:noFill/>
+          <a:ln w="16510">
+            <a:solidFill>
+              <a:srgbClr val="121316"/>
+            </a:solidFill>
           </a:ln>
           <a:effectLst/>
         </p:spPr>
-        <p:style>
-          <a:lnRef idx="1">
-            <a:schemeClr val="accent1"/>
-          </a:lnRef>
-          <a:fillRef idx="3">
-            <a:schemeClr val="accent1"/>
-          </a:fillRef>
-          <a:effectRef idx="2">
-            <a:schemeClr val="accent1"/>
-          </a:effectRef>
-          <a:fontRef idx="minor">
-            <a:schemeClr val="lt1"/>
-          </a:fontRef>
-        </p:style>
         <p:txBody>
           <a:bodyPr rtlCol="0" anchor="ctr"/>
           <a:lstStyle/>
@@ -8816,8 +7637,8 @@
         </p:nvSpPr>
         <p:spPr>
           <a:xfrm>
-            <a:off x="1097280" y="2221991"/>
-            <a:ext cx="594360" cy="594360"/>
+            <a:off x="868680" y="2679192"/>
+            <a:ext cx="502920" cy="502920"/>
           </a:xfrm>
           <a:prstGeom prst="rect">
             <a:avLst/>
@@ -8836,11 +7657,11 @@
               </a:spcAft>
             </a:pPr>
             <a:r>
-              <a:rPr sz="1600" b="1" i="0">
-                <a:solidFill>
-                  <a:srgbClr val="FFFFFF"/>
-                </a:solidFill>
-                <a:latin typeface="Trebuchet MS"/>
+              <a:rPr sz="1300" b="1" i="0">
+                <a:solidFill>
+                  <a:srgbClr val="121316"/>
+                </a:solidFill>
+                <a:latin typeface="Arial"/>
               </a:rPr>
               <a:t>1</a:t>
             </a:r>
@@ -8855,8 +7676,8 @@
         </p:nvSpPr>
         <p:spPr>
           <a:xfrm>
-            <a:off x="1965960" y="2148840"/>
-            <a:ext cx="6217920" cy="868680"/>
+            <a:off x="1691640" y="2651760"/>
+            <a:ext cx="5760720" cy="914400"/>
           </a:xfrm>
           <a:prstGeom prst="rect">
             <a:avLst/>
@@ -8877,82 +7698,53 @@
             <a:r>
               <a:rPr sz="1800" b="1" i="0">
                 <a:solidFill>
-                  <a:srgbClr val="0F172A"/>
-                </a:solidFill>
-                <a:latin typeface="Trebuchet MS"/>
+                  <a:srgbClr val="121316"/>
+                </a:solidFill>
+                <a:latin typeface="Arial"/>
               </a:rPr>
               <a:t>Baukasten ausfüllen</a:t>
             </a:r>
           </a:p>
           <a:p>
             <a:pPr algn="l">
-              <a:lnSpc>
-                <a:spcPct val="100000"/>
-              </a:lnSpc>
               <a:spcAft>
                 <a:spcPts val="200"/>
               </a:spcAft>
             </a:pPr>
             <a:r>
-              <a:rPr sz="1350" b="0" i="0">
-                <a:solidFill>
-                  <a:srgbClr val="64748B"/>
-                </a:solidFill>
-                <a:latin typeface="Calibri"/>
-              </a:rPr>
-              <a:t>Fragen beantworten (Art, Zweck, Inhalte, Stil) – der Prompt entsteht automatisch.</a:t>
-            </a:r>
-          </a:p>
-        </p:txBody>
-      </p:sp>
-      <p:sp>
-        <p:nvSpPr>
-          <p:cNvPr id="9" name="Rounded Rectangle 8"/>
-          <p:cNvSpPr/>
-          <p:nvPr/>
-        </p:nvSpPr>
-        <p:spPr>
-          <a:xfrm>
-            <a:off x="822960" y="3291839"/>
-            <a:ext cx="7498079" cy="1143000"/>
-          </a:xfrm>
-          <a:prstGeom prst="roundRect">
-            <a:avLst>
-              <a:gd name="adj" fmla="val 8000"/>
-            </a:avLst>
-          </a:prstGeom>
-          <a:solidFill>
-            <a:srgbClr val="FFFFFF"/>
-          </a:solidFill>
+              <a:rPr sz="1300" b="0" i="0">
+                <a:solidFill>
+                  <a:srgbClr val="71717A"/>
+                </a:solidFill>
+                <a:latin typeface="Arial"/>
+              </a:rPr>
+              <a:t>Fragen beantworten – der Prompt entsteht.</a:t>
+            </a:r>
+          </a:p>
+        </p:txBody>
+      </p:sp>
+      <p:cxnSp>
+        <p:nvCxnSpPr>
+          <p:cNvPr id="9" name="Connector 8"/>
+          <p:cNvCxnSpPr/>
+          <p:nvPr/>
+        </p:nvCxnSpPr>
+        <p:spPr>
+          <a:xfrm>
+            <a:off x="868680" y="3520440"/>
+            <a:ext cx="6766560" cy="0"/>
+          </a:xfrm>
+          <a:prstGeom prst="line">
+            <a:avLst/>
+          </a:prstGeom>
           <a:ln w="12700">
             <a:solidFill>
-              <a:srgbClr val="E2E8F0"/>
+              <a:srgbClr val="E4E4E7"/>
             </a:solidFill>
           </a:ln>
           <a:effectLst/>
         </p:spPr>
-        <p:style>
-          <a:lnRef idx="1">
-            <a:schemeClr val="accent1"/>
-          </a:lnRef>
-          <a:fillRef idx="3">
-            <a:schemeClr val="accent1"/>
-          </a:fillRef>
-          <a:effectRef idx="2">
-            <a:schemeClr val="accent1"/>
-          </a:effectRef>
-          <a:fontRef idx="minor">
-            <a:schemeClr val="lt1"/>
-          </a:fontRef>
-        </p:style>
-        <p:txBody>
-          <a:bodyPr rtlCol="0" anchor="ctr"/>
-          <a:lstStyle/>
-          <a:p>
-            <a:pPr algn="ctr"/>
-          </a:p>
-        </p:txBody>
-      </p:sp>
+      </p:cxnSp>
       <p:sp>
         <p:nvSpPr>
           <p:cNvPr id="10" name="Oval 9"/>
@@ -8961,34 +7753,20 @@
         </p:nvSpPr>
         <p:spPr>
           <a:xfrm>
-            <a:off x="1097280" y="3566159"/>
-            <a:ext cx="594360" cy="594360"/>
+            <a:off x="868680" y="3758184"/>
+            <a:ext cx="502920" cy="502920"/>
           </a:xfrm>
           <a:prstGeom prst="ellipse">
             <a:avLst/>
           </a:prstGeom>
-          <a:solidFill>
-            <a:srgbClr val="0EA5E9"/>
-          </a:solidFill>
-          <a:ln>
-            <a:noFill/>
+          <a:noFill/>
+          <a:ln w="16510">
+            <a:solidFill>
+              <a:srgbClr val="121316"/>
+            </a:solidFill>
           </a:ln>
           <a:effectLst/>
         </p:spPr>
-        <p:style>
-          <a:lnRef idx="1">
-            <a:schemeClr val="accent1"/>
-          </a:lnRef>
-          <a:fillRef idx="3">
-            <a:schemeClr val="accent1"/>
-          </a:fillRef>
-          <a:effectRef idx="2">
-            <a:schemeClr val="accent1"/>
-          </a:effectRef>
-          <a:fontRef idx="minor">
-            <a:schemeClr val="lt1"/>
-          </a:fontRef>
-        </p:style>
         <p:txBody>
           <a:bodyPr rtlCol="0" anchor="ctr"/>
           <a:lstStyle/>
@@ -9005,8 +7783,8 @@
         </p:nvSpPr>
         <p:spPr>
           <a:xfrm>
-            <a:off x="1097280" y="3547871"/>
-            <a:ext cx="594360" cy="594360"/>
+            <a:off x="868680" y="3730752"/>
+            <a:ext cx="502920" cy="502920"/>
           </a:xfrm>
           <a:prstGeom prst="rect">
             <a:avLst/>
@@ -9025,11 +7803,11 @@
               </a:spcAft>
             </a:pPr>
             <a:r>
-              <a:rPr sz="1600" b="1" i="0">
-                <a:solidFill>
-                  <a:srgbClr val="FFFFFF"/>
-                </a:solidFill>
-                <a:latin typeface="Trebuchet MS"/>
+              <a:rPr sz="1300" b="1" i="0">
+                <a:solidFill>
+                  <a:srgbClr val="121316"/>
+                </a:solidFill>
+                <a:latin typeface="Arial"/>
               </a:rPr>
               <a:t>2</a:t>
             </a:r>
@@ -9044,8 +7822,8 @@
         </p:nvSpPr>
         <p:spPr>
           <a:xfrm>
-            <a:off x="1965960" y="3474720"/>
-            <a:ext cx="6217920" cy="868680"/>
+            <a:off x="1691640" y="3703320"/>
+            <a:ext cx="5760720" cy="914400"/>
           </a:xfrm>
           <a:prstGeom prst="rect">
             <a:avLst/>
@@ -9066,82 +7844,53 @@
             <a:r>
               <a:rPr sz="1800" b="1" i="0">
                 <a:solidFill>
-                  <a:srgbClr val="0F172A"/>
-                </a:solidFill>
-                <a:latin typeface="Trebuchet MS"/>
+                  <a:srgbClr val="121316"/>
+                </a:solidFill>
+                <a:latin typeface="Arial"/>
               </a:rPr>
               <a:t>Prompt kopieren</a:t>
             </a:r>
           </a:p>
           <a:p>
             <a:pPr algn="l">
-              <a:lnSpc>
-                <a:spcPct val="100000"/>
-              </a:lnSpc>
               <a:spcAft>
                 <a:spcPts val="200"/>
               </a:spcAft>
             </a:pPr>
             <a:r>
-              <a:rPr sz="1350" b="0" i="0">
-                <a:solidFill>
-                  <a:srgbClr val="64748B"/>
-                </a:solidFill>
-                <a:latin typeface="Calibri"/>
-              </a:rPr>
-              <a:t>Ein Klick auf „Prompt kopieren“.</a:t>
-            </a:r>
-          </a:p>
-        </p:txBody>
-      </p:sp>
-      <p:sp>
-        <p:nvSpPr>
-          <p:cNvPr id="13" name="Rounded Rectangle 12"/>
-          <p:cNvSpPr/>
-          <p:nvPr/>
-        </p:nvSpPr>
-        <p:spPr>
-          <a:xfrm>
-            <a:off x="822960" y="4617720"/>
-            <a:ext cx="7498079" cy="1143000"/>
-          </a:xfrm>
-          <a:prstGeom prst="roundRect">
-            <a:avLst>
-              <a:gd name="adj" fmla="val 8000"/>
-            </a:avLst>
-          </a:prstGeom>
-          <a:solidFill>
-            <a:srgbClr val="FFFFFF"/>
-          </a:solidFill>
+              <a:rPr sz="1300" b="0" i="0">
+                <a:solidFill>
+                  <a:srgbClr val="71717A"/>
+                </a:solidFill>
+                <a:latin typeface="Arial"/>
+              </a:rPr>
+              <a:t>Ein Klick.</a:t>
+            </a:r>
+          </a:p>
+        </p:txBody>
+      </p:sp>
+      <p:cxnSp>
+        <p:nvCxnSpPr>
+          <p:cNvPr id="13" name="Connector 12"/>
+          <p:cNvCxnSpPr/>
+          <p:nvPr/>
+        </p:nvCxnSpPr>
+        <p:spPr>
+          <a:xfrm>
+            <a:off x="868680" y="4572000"/>
+            <a:ext cx="6766560" cy="0"/>
+          </a:xfrm>
+          <a:prstGeom prst="line">
+            <a:avLst/>
+          </a:prstGeom>
           <a:ln w="12700">
             <a:solidFill>
-              <a:srgbClr val="E2E8F0"/>
+              <a:srgbClr val="E4E4E7"/>
             </a:solidFill>
           </a:ln>
           <a:effectLst/>
         </p:spPr>
-        <p:style>
-          <a:lnRef idx="1">
-            <a:schemeClr val="accent1"/>
-          </a:lnRef>
-          <a:fillRef idx="3">
-            <a:schemeClr val="accent1"/>
-          </a:fillRef>
-          <a:effectRef idx="2">
-            <a:schemeClr val="accent1"/>
-          </a:effectRef>
-          <a:fontRef idx="minor">
-            <a:schemeClr val="lt1"/>
-          </a:fontRef>
-        </p:style>
-        <p:txBody>
-          <a:bodyPr rtlCol="0" anchor="ctr"/>
-          <a:lstStyle/>
-          <a:p>
-            <a:pPr algn="ctr"/>
-          </a:p>
-        </p:txBody>
-      </p:sp>
+      </p:cxnSp>
       <p:sp>
         <p:nvSpPr>
           <p:cNvPr id="14" name="Oval 13"/>
@@ -9150,34 +7899,20 @@
         </p:nvSpPr>
         <p:spPr>
           <a:xfrm>
-            <a:off x="1097280" y="4892040"/>
-            <a:ext cx="594360" cy="594360"/>
+            <a:off x="868680" y="4809744"/>
+            <a:ext cx="502920" cy="502920"/>
           </a:xfrm>
           <a:prstGeom prst="ellipse">
             <a:avLst/>
           </a:prstGeom>
-          <a:solidFill>
-            <a:srgbClr val="0EA5E9"/>
-          </a:solidFill>
-          <a:ln>
-            <a:noFill/>
+          <a:noFill/>
+          <a:ln w="16510">
+            <a:solidFill>
+              <a:srgbClr val="121316"/>
+            </a:solidFill>
           </a:ln>
           <a:effectLst/>
         </p:spPr>
-        <p:style>
-          <a:lnRef idx="1">
-            <a:schemeClr val="accent1"/>
-          </a:lnRef>
-          <a:fillRef idx="3">
-            <a:schemeClr val="accent1"/>
-          </a:fillRef>
-          <a:effectRef idx="2">
-            <a:schemeClr val="accent1"/>
-          </a:effectRef>
-          <a:fontRef idx="minor">
-            <a:schemeClr val="lt1"/>
-          </a:fontRef>
-        </p:style>
         <p:txBody>
           <a:bodyPr rtlCol="0" anchor="ctr"/>
           <a:lstStyle/>
@@ -9194,8 +7929,8 @@
         </p:nvSpPr>
         <p:spPr>
           <a:xfrm>
-            <a:off x="1097280" y="4873752"/>
-            <a:ext cx="594360" cy="594360"/>
+            <a:off x="868680" y="4782312"/>
+            <a:ext cx="502920" cy="502920"/>
           </a:xfrm>
           <a:prstGeom prst="rect">
             <a:avLst/>
@@ -9214,11 +7949,11 @@
               </a:spcAft>
             </a:pPr>
             <a:r>
-              <a:rPr sz="1600" b="1" i="0">
-                <a:solidFill>
-                  <a:srgbClr val="FFFFFF"/>
-                </a:solidFill>
-                <a:latin typeface="Trebuchet MS"/>
+              <a:rPr sz="1300" b="1" i="0">
+                <a:solidFill>
+                  <a:srgbClr val="121316"/>
+                </a:solidFill>
+                <a:latin typeface="Arial"/>
               </a:rPr>
               <a:t>3</a:t>
             </a:r>
@@ -9233,8 +7968,8 @@
         </p:nvSpPr>
         <p:spPr>
           <a:xfrm>
-            <a:off x="1965960" y="4800600"/>
-            <a:ext cx="6217920" cy="868680"/>
+            <a:off x="1691640" y="4754880"/>
+            <a:ext cx="5760720" cy="914400"/>
           </a:xfrm>
           <a:prstGeom prst="rect">
             <a:avLst/>
@@ -9255,72 +7990,75 @@
             <a:r>
               <a:rPr sz="1800" b="1" i="0">
                 <a:solidFill>
-                  <a:srgbClr val="0F172A"/>
-                </a:solidFill>
-                <a:latin typeface="Trebuchet MS"/>
+                  <a:srgbClr val="121316"/>
+                </a:solidFill>
+                <a:latin typeface="Arial"/>
               </a:rPr>
               <a:t>In AI Studio einfügen</a:t>
             </a:r>
           </a:p>
           <a:p>
             <a:pPr algn="l">
-              <a:lnSpc>
-                <a:spcPct val="100000"/>
-              </a:lnSpc>
               <a:spcAft>
                 <a:spcPts val="200"/>
               </a:spcAft>
             </a:pPr>
             <a:r>
-              <a:rPr sz="1350" b="0" i="0">
-                <a:solidFill>
-                  <a:srgbClr val="64748B"/>
-                </a:solidFill>
-                <a:latin typeface="Calibri"/>
-              </a:rPr>
-              <a:t>Einfügen, abschicken – die Website-Vorschau erscheint.</a:t>
-            </a:r>
-          </a:p>
-        </p:txBody>
-      </p:sp>
-      <p:sp>
-        <p:nvSpPr>
-          <p:cNvPr id="17" name="Rounded Rectangle 16"/>
-          <p:cNvSpPr/>
-          <p:nvPr/>
-        </p:nvSpPr>
-        <p:spPr>
-          <a:xfrm>
-            <a:off x="8641080" y="1965960"/>
-            <a:ext cx="2697480" cy="3749039"/>
-          </a:xfrm>
-          <a:prstGeom prst="roundRect">
-            <a:avLst>
-              <a:gd name="adj" fmla="val 8000"/>
-            </a:avLst>
-          </a:prstGeom>
-          <a:solidFill>
-            <a:srgbClr val="0F172A"/>
-          </a:solidFill>
-          <a:ln>
-            <a:noFill/>
+              <a:rPr sz="1300" b="0" i="0">
+                <a:solidFill>
+                  <a:srgbClr val="71717A"/>
+                </a:solidFill>
+                <a:latin typeface="Arial"/>
+              </a:rPr>
+              <a:t>Einfügen, abschicken, Vorschau.</a:t>
+            </a:r>
+          </a:p>
+        </p:txBody>
+      </p:sp>
+      <p:cxnSp>
+        <p:nvCxnSpPr>
+          <p:cNvPr id="17" name="Connector 16"/>
+          <p:cNvCxnSpPr/>
+          <p:nvPr/>
+        </p:nvCxnSpPr>
+        <p:spPr>
+          <a:xfrm>
+            <a:off x="868680" y="5623560"/>
+            <a:ext cx="6766560" cy="0"/>
+          </a:xfrm>
+          <a:prstGeom prst="line">
+            <a:avLst/>
+          </a:prstGeom>
+          <a:ln w="12700">
+            <a:solidFill>
+              <a:srgbClr val="E4E4E7"/>
+            </a:solidFill>
           </a:ln>
           <a:effectLst/>
         </p:spPr>
-        <p:style>
-          <a:lnRef idx="1">
-            <a:schemeClr val="accent1"/>
-          </a:lnRef>
-          <a:fillRef idx="3">
-            <a:schemeClr val="accent1"/>
-          </a:fillRef>
-          <a:effectRef idx="2">
-            <a:schemeClr val="accent1"/>
-          </a:effectRef>
-          <a:fontRef idx="minor">
-            <a:schemeClr val="lt1"/>
-          </a:fontRef>
-        </p:style>
+      </p:cxnSp>
+      <p:sp>
+        <p:nvSpPr>
+          <p:cNvPr id="18" name="Rectangle 17"/>
+          <p:cNvSpPr/>
+          <p:nvPr/>
+        </p:nvSpPr>
+        <p:spPr>
+          <a:xfrm>
+            <a:off x="8732520" y="2468880"/>
+            <a:ext cx="2606040" cy="3246120"/>
+          </a:xfrm>
+          <a:prstGeom prst="rect">
+            <a:avLst/>
+          </a:prstGeom>
+          <a:noFill/>
+          <a:ln w="12700">
+            <a:solidFill>
+              <a:srgbClr val="E4E4E7"/>
+            </a:solidFill>
+          </a:ln>
+          <a:effectLst/>
+        </p:spPr>
         <p:txBody>
           <a:bodyPr rtlCol="0" anchor="ctr"/>
           <a:lstStyle/>
@@ -9331,14 +8069,14 @@
       </p:sp>
       <p:sp>
         <p:nvSpPr>
-          <p:cNvPr id="18" name="TextBox 17"/>
+          <p:cNvPr id="19" name="TextBox 18"/>
           <p:cNvSpPr txBox="1"/>
           <p:nvPr/>
         </p:nvSpPr>
         <p:spPr>
           <a:xfrm>
-            <a:off x="8641080" y="2240280"/>
-            <a:ext cx="2697480" cy="457200"/>
+            <a:off x="8732520" y="2697480"/>
+            <a:ext cx="2606040" cy="365760"/>
           </a:xfrm>
           <a:prstGeom prst="rect">
             <a:avLst/>
@@ -9357,20 +8095,20 @@
               </a:spcAft>
             </a:pPr>
             <a:r>
-              <a:rPr sz="1500" b="1" i="0">
-                <a:solidFill>
-                  <a:srgbClr val="FFFFFF"/>
-                </a:solidFill>
-                <a:latin typeface="Trebuchet MS"/>
-              </a:rPr>
-              <a:t>Direkt scannen</a:t>
+              <a:rPr sz="1100" b="1" i="0">
+                <a:solidFill>
+                  <a:srgbClr val="71717A"/>
+                </a:solidFill>
+                <a:latin typeface="Arial"/>
+              </a:rPr>
+              <a:t>SCANNEN</a:t>
             </a:r>
           </a:p>
         </p:txBody>
       </p:sp>
       <p:pic>
         <p:nvPicPr>
-          <p:cNvPr id="19" name="Picture 18" descr="qr.png"/>
+          <p:cNvPr id="20" name="Picture 19" descr="qr.png"/>
           <p:cNvPicPr>
             <a:picLocks noChangeAspect="1"/>
           </p:cNvPicPr>
@@ -9384,58 +8122,14 @@
         </p:blipFill>
         <p:spPr>
           <a:xfrm>
-            <a:off x="9281160" y="2743200"/>
-            <a:ext cx="1417320" cy="1417320"/>
+            <a:off x="9390888" y="3108960"/>
+            <a:ext cx="1280160" cy="1280160"/>
           </a:xfrm>
           <a:prstGeom prst="rect">
             <a:avLst/>
           </a:prstGeom>
         </p:spPr>
       </p:pic>
-      <p:sp>
-        <p:nvSpPr>
-          <p:cNvPr id="20" name="Rectangle 19"/>
-          <p:cNvSpPr/>
-          <p:nvPr/>
-        </p:nvSpPr>
-        <p:spPr>
-          <a:xfrm>
-            <a:off x="9235440" y="2743200"/>
-            <a:ext cx="1508760" cy="1508760"/>
-          </a:xfrm>
-          <a:prstGeom prst="rect">
-            <a:avLst/>
-          </a:prstGeom>
-          <a:noFill/>
-          <a:ln w="19050">
-            <a:solidFill>
-              <a:srgbClr val="FFFFFF"/>
-            </a:solidFill>
-          </a:ln>
-          <a:effectLst/>
-        </p:spPr>
-        <p:style>
-          <a:lnRef idx="1">
-            <a:schemeClr val="accent1"/>
-          </a:lnRef>
-          <a:fillRef idx="3">
-            <a:schemeClr val="accent1"/>
-          </a:fillRef>
-          <a:effectRef idx="2">
-            <a:schemeClr val="accent1"/>
-          </a:effectRef>
-          <a:fontRef idx="minor">
-            <a:schemeClr val="lt1"/>
-          </a:fontRef>
-        </p:style>
-        <p:txBody>
-          <a:bodyPr rtlCol="0" anchor="ctr"/>
-          <a:lstStyle/>
-          <a:p>
-            <a:pPr algn="ctr"/>
-          </a:p>
-        </p:txBody>
-      </p:sp>
       <p:sp>
         <p:nvSpPr>
           <p:cNvPr id="21" name="TextBox 20"/>
@@ -9444,8 +8138,8 @@
         </p:nvSpPr>
         <p:spPr>
           <a:xfrm>
-            <a:off x="8732520" y="4434840"/>
-            <a:ext cx="2514600" cy="1097280"/>
+            <a:off x="8823960" y="4617720"/>
+            <a:ext cx="2423160" cy="1005840"/>
           </a:xfrm>
           <a:prstGeom prst="rect">
             <a:avLst/>
@@ -9460,15 +8154,15 @@
           <a:p>
             <a:pPr algn="ctr">
               <a:spcAft>
-                <a:spcPts val="0"/>
-              </a:spcAft>
-            </a:pPr>
-            <a:r>
-              <a:rPr sz="1150" b="1" i="0">
-                <a:solidFill>
-                  <a:srgbClr val="0EA5E9"/>
-                </a:solidFill>
-                <a:latin typeface="Calibri"/>
+                <a:spcPts val="200"/>
+              </a:spcAft>
+            </a:pPr>
+            <a:r>
+              <a:rPr sz="1100" b="1" i="0">
+                <a:solidFill>
+                  <a:srgbClr val="2563EB"/>
+                </a:solidFill>
+                <a:latin typeface="Arial"/>
               </a:rPr>
               <a:t>criseone.github.io/</a:t>
             </a:r>
@@ -9480,11 +8174,11 @@
               </a:spcAft>
             </a:pPr>
             <a:r>
-              <a:rPr sz="1150" b="1" i="0">
-                <a:solidFill>
-                  <a:srgbClr val="0EA5E9"/>
-                </a:solidFill>
-                <a:latin typeface="Calibri"/>
+              <a:rPr sz="1100" b="1" i="0">
+                <a:solidFill>
+                  <a:srgbClr val="2563EB"/>
+                </a:solidFill>
+                <a:latin typeface="Arial"/>
               </a:rPr>
               <a:t>meine-website-ai-studio</a:t>
             </a:r>
@@ -9524,27 +8218,13 @@
             <a:avLst/>
           </a:prstGeom>
           <a:solidFill>
-            <a:srgbClr val="0F172A"/>
+            <a:srgbClr val="121316"/>
           </a:solidFill>
           <a:ln>
             <a:noFill/>
           </a:ln>
           <a:effectLst/>
         </p:spPr>
-        <p:style>
-          <a:lnRef idx="1">
-            <a:schemeClr val="accent1"/>
-          </a:lnRef>
-          <a:fillRef idx="3">
-            <a:schemeClr val="accent1"/>
-          </a:fillRef>
-          <a:effectRef idx="2">
-            <a:schemeClr val="accent1"/>
-          </a:effectRef>
-          <a:fontRef idx="minor">
-            <a:schemeClr val="lt1"/>
-          </a:fontRef>
-        </p:style>
         <p:txBody>
           <a:bodyPr rtlCol="0" anchor="ctr"/>
           <a:lstStyle/>
@@ -9555,58 +8235,14 @@
       </p:sp>
       <p:sp>
         <p:nvSpPr>
-          <p:cNvPr id="3" name="Rectangle 2"/>
-          <p:cNvSpPr/>
-          <p:nvPr/>
-        </p:nvSpPr>
-        <p:spPr>
-          <a:xfrm>
-            <a:off x="0" y="0"/>
-            <a:ext cx="12191695" cy="292608"/>
-          </a:xfrm>
-          <a:prstGeom prst="rect">
-            <a:avLst/>
-          </a:prstGeom>
-          <a:solidFill>
-            <a:srgbClr val="0EA5E9"/>
-          </a:solidFill>
-          <a:ln>
-            <a:noFill/>
-          </a:ln>
-          <a:effectLst/>
-        </p:spPr>
-        <p:style>
-          <a:lnRef idx="1">
-            <a:schemeClr val="accent1"/>
-          </a:lnRef>
-          <a:fillRef idx="3">
-            <a:schemeClr val="accent1"/>
-          </a:fillRef>
-          <a:effectRef idx="2">
-            <a:schemeClr val="accent1"/>
-          </a:effectRef>
-          <a:fontRef idx="minor">
-            <a:schemeClr val="lt1"/>
-          </a:fontRef>
-        </p:style>
-        <p:txBody>
-          <a:bodyPr rtlCol="0" anchor="ctr"/>
-          <a:lstStyle/>
-          <a:p>
-            <a:pPr algn="ctr"/>
-          </a:p>
-        </p:txBody>
-      </p:sp>
-      <p:sp>
-        <p:nvSpPr>
-          <p:cNvPr id="4" name="TextBox 3"/>
+          <p:cNvPr id="3" name="TextBox 2"/>
           <p:cNvSpPr txBox="1"/>
           <p:nvPr/>
         </p:nvSpPr>
         <p:spPr>
           <a:xfrm>
-            <a:off x="822960" y="731520"/>
-            <a:ext cx="10515600" cy="914400"/>
+            <a:off x="868680" y="822960"/>
+            <a:ext cx="10058400" cy="365760"/>
           </a:xfrm>
           <a:prstGeom prst="rect">
             <a:avLst/>
@@ -9625,27 +8261,27 @@
               </a:spcAft>
             </a:pPr>
             <a:r>
-              <a:rPr sz="4000" b="1" i="0">
-                <a:solidFill>
-                  <a:srgbClr val="FFFFFF"/>
-                </a:solidFill>
-                <a:latin typeface="Trebuchet MS"/>
-              </a:rPr>
-              <a:t>Jetzt seid ihr dran!</a:t>
-            </a:r>
-          </a:p>
-        </p:txBody>
-      </p:sp>
-      <p:sp>
-        <p:nvSpPr>
-          <p:cNvPr id="5" name="TextBox 4"/>
+              <a:rPr sz="1200" b="1" i="0">
+                <a:solidFill>
+                  <a:srgbClr val="A1A1AA"/>
+                </a:solidFill>
+                <a:latin typeface="Arial"/>
+              </a:rPr>
+              <a:t>VERARBEITEN · CA. 8 MIN · EINZELN ODER ZU ZWEIT</a:t>
+            </a:r>
+          </a:p>
+        </p:txBody>
+      </p:sp>
+      <p:sp>
+        <p:nvSpPr>
+          <p:cNvPr id="4" name="TextBox 3"/>
           <p:cNvSpPr txBox="1"/>
           <p:nvPr/>
         </p:nvSpPr>
         <p:spPr>
           <a:xfrm>
-            <a:off x="822960" y="1783080"/>
-            <a:ext cx="6766560" cy="457200"/>
+            <a:off x="868680" y="1371600"/>
+            <a:ext cx="6949440" cy="1005840"/>
           </a:xfrm>
           <a:prstGeom prst="rect">
             <a:avLst/>
@@ -9664,14 +8300,44 @@
               </a:spcAft>
             </a:pPr>
             <a:r>
-              <a:rPr sz="1600" b="1" i="0">
-                <a:solidFill>
-                  <a:srgbClr val="0EA5E9"/>
-                </a:solidFill>
-                <a:latin typeface="Calibri"/>
-              </a:rPr>
-              <a:t>Verarbeiten · ca. 8 Minuten · Einzeln oder zu zweit</a:t>
-            </a:r>
+              <a:rPr sz="4000" b="1" i="0">
+                <a:solidFill>
+                  <a:srgbClr val="FFFFFF"/>
+                </a:solidFill>
+                <a:latin typeface="Arial"/>
+              </a:rPr>
+              <a:t>Jetzt seid ihr dran.</a:t>
+            </a:r>
+          </a:p>
+        </p:txBody>
+      </p:sp>
+      <p:sp>
+        <p:nvSpPr>
+          <p:cNvPr id="5" name="Oval 4"/>
+          <p:cNvSpPr/>
+          <p:nvPr/>
+        </p:nvSpPr>
+        <p:spPr>
+          <a:xfrm>
+            <a:off x="868680" y="2743200"/>
+            <a:ext cx="457200" cy="457200"/>
+          </a:xfrm>
+          <a:prstGeom prst="ellipse">
+            <a:avLst/>
+          </a:prstGeom>
+          <a:noFill/>
+          <a:ln w="16510">
+            <a:solidFill>
+              <a:srgbClr val="A1A1AA"/>
+            </a:solidFill>
+          </a:ln>
+          <a:effectLst/>
+        </p:spPr>
+        <p:txBody>
+          <a:bodyPr rtlCol="0" anchor="ctr"/>
+          <a:lstStyle/>
+          <a:p>
+            <a:pPr algn="ctr"/>
           </a:p>
         </p:txBody>
       </p:sp>
@@ -9683,8 +8349,8 @@
         </p:nvSpPr>
         <p:spPr>
           <a:xfrm>
-            <a:off x="868680" y="2560320"/>
-            <a:ext cx="6583680" cy="3108960"/>
+            <a:off x="868680" y="2715768"/>
+            <a:ext cx="457200" cy="457200"/>
           </a:xfrm>
           <a:prstGeom prst="rect">
             <a:avLst/>
@@ -9692,58 +8358,373 @@
           <a:noFill/>
         </p:spPr>
         <p:txBody>
-          <a:bodyPr wrap="square" anchor="t" lIns="0" rIns="0" tIns="0" bIns="0">
+          <a:bodyPr wrap="square" anchor="ctr" lIns="0" rIns="0" tIns="0" bIns="0">
             <a:spAutoFit/>
           </a:bodyPr>
           <a:lstStyle/>
           <a:p>
+            <a:pPr algn="ctr">
+              <a:spcAft>
+                <a:spcPts val="200"/>
+              </a:spcAft>
+            </a:pPr>
+            <a:r>
+              <a:rPr sz="1200" b="1" i="0">
+                <a:solidFill>
+                  <a:srgbClr val="FFFFFF"/>
+                </a:solidFill>
+                <a:latin typeface="Arial"/>
+              </a:rPr>
+              <a:t>1</a:t>
+            </a:r>
+          </a:p>
+        </p:txBody>
+      </p:sp>
+      <p:sp>
+        <p:nvSpPr>
+          <p:cNvPr id="7" name="TextBox 6"/>
+          <p:cNvSpPr txBox="1"/>
+          <p:nvPr/>
+        </p:nvSpPr>
+        <p:spPr>
+          <a:xfrm>
+            <a:off x="1600200" y="2761488"/>
+            <a:ext cx="6035040" cy="457200"/>
+          </a:xfrm>
+          <a:prstGeom prst="rect">
+            <a:avLst/>
+          </a:prstGeom>
+          <a:noFill/>
+        </p:spPr>
+        <p:txBody>
+          <a:bodyPr wrap="square" anchor="ctr" lIns="0" rIns="0" tIns="0" bIns="0">
+            <a:spAutoFit/>
+          </a:bodyPr>
+          <a:lstStyle/>
+          <a:p>
             <a:pPr algn="l">
               <a:spcAft>
-                <a:spcPts val="1200"/>
-              </a:spcAft>
-            </a:pPr>
-            <a:r>
-              <a:rPr sz="1900" b="0" i="0">
+                <a:spcPts val="200"/>
+              </a:spcAft>
+            </a:pPr>
+            <a:r>
+              <a:rPr sz="1800" b="0" i="0">
+                <a:solidFill>
+                  <a:srgbClr val="E7E7EA"/>
+                </a:solidFill>
+                <a:latin typeface="Arial"/>
+              </a:rPr>
+              <a:t>Baukasten öffnen (QR rechts).</a:t>
+            </a:r>
+          </a:p>
+        </p:txBody>
+      </p:sp>
+      <p:sp>
+        <p:nvSpPr>
+          <p:cNvPr id="8" name="Oval 7"/>
+          <p:cNvSpPr/>
+          <p:nvPr/>
+        </p:nvSpPr>
+        <p:spPr>
+          <a:xfrm>
+            <a:off x="868680" y="3493008"/>
+            <a:ext cx="457200" cy="457200"/>
+          </a:xfrm>
+          <a:prstGeom prst="ellipse">
+            <a:avLst/>
+          </a:prstGeom>
+          <a:noFill/>
+          <a:ln w="16510">
+            <a:solidFill>
+              <a:srgbClr val="A1A1AA"/>
+            </a:solidFill>
+          </a:ln>
+          <a:effectLst/>
+        </p:spPr>
+        <p:txBody>
+          <a:bodyPr rtlCol="0" anchor="ctr"/>
+          <a:lstStyle/>
+          <a:p>
+            <a:pPr algn="ctr"/>
+          </a:p>
+        </p:txBody>
+      </p:sp>
+      <p:sp>
+        <p:nvSpPr>
+          <p:cNvPr id="9" name="TextBox 8"/>
+          <p:cNvSpPr txBox="1"/>
+          <p:nvPr/>
+        </p:nvSpPr>
+        <p:spPr>
+          <a:xfrm>
+            <a:off x="868680" y="3465576"/>
+            <a:ext cx="457200" cy="457200"/>
+          </a:xfrm>
+          <a:prstGeom prst="rect">
+            <a:avLst/>
+          </a:prstGeom>
+          <a:noFill/>
+        </p:spPr>
+        <p:txBody>
+          <a:bodyPr wrap="square" anchor="ctr" lIns="0" rIns="0" tIns="0" bIns="0">
+            <a:spAutoFit/>
+          </a:bodyPr>
+          <a:lstStyle/>
+          <a:p>
+            <a:pPr algn="ctr">
+              <a:spcAft>
+                <a:spcPts val="200"/>
+              </a:spcAft>
+            </a:pPr>
+            <a:r>
+              <a:rPr sz="1200" b="1" i="0">
                 <a:solidFill>
                   <a:srgbClr val="FFFFFF"/>
                 </a:solidFill>
-                <a:latin typeface="Calibri"/>
-              </a:rPr>
-              <a:t>1.  Öffnet den Baukasten (Link/QR rechts).</a:t>
-            </a:r>
-          </a:p>
+                <a:latin typeface="Arial"/>
+              </a:rPr>
+              <a:t>2</a:t>
+            </a:r>
+          </a:p>
+        </p:txBody>
+      </p:sp>
+      <p:sp>
+        <p:nvSpPr>
+          <p:cNvPr id="10" name="TextBox 9"/>
+          <p:cNvSpPr txBox="1"/>
+          <p:nvPr/>
+        </p:nvSpPr>
+        <p:spPr>
+          <a:xfrm>
+            <a:off x="1600200" y="3511296"/>
+            <a:ext cx="6035040" cy="457200"/>
+          </a:xfrm>
+          <a:prstGeom prst="rect">
+            <a:avLst/>
+          </a:prstGeom>
+          <a:noFill/>
+        </p:spPr>
+        <p:txBody>
+          <a:bodyPr wrap="square" anchor="ctr" lIns="0" rIns="0" tIns="0" bIns="0">
+            <a:spAutoFit/>
+          </a:bodyPr>
+          <a:lstStyle/>
           <a:p>
             <a:pPr algn="l">
               <a:spcAft>
-                <a:spcPts val="1200"/>
-              </a:spcAft>
-            </a:pPr>
-            <a:r>
-              <a:rPr sz="1900" b="0" i="0">
+                <a:spcPts val="200"/>
+              </a:spcAft>
+            </a:pPr>
+            <a:r>
+              <a:rPr sz="1800" b="0" i="0">
+                <a:solidFill>
+                  <a:srgbClr val="E7E7EA"/>
+                </a:solidFill>
+                <a:latin typeface="Arial"/>
+              </a:rPr>
+              <a:t>Für die eigene Idee ausfüllen.</a:t>
+            </a:r>
+          </a:p>
+        </p:txBody>
+      </p:sp>
+      <p:sp>
+        <p:nvSpPr>
+          <p:cNvPr id="11" name="Oval 10"/>
+          <p:cNvSpPr/>
+          <p:nvPr/>
+        </p:nvSpPr>
+        <p:spPr>
+          <a:xfrm>
+            <a:off x="868680" y="4242816"/>
+            <a:ext cx="457200" cy="457200"/>
+          </a:xfrm>
+          <a:prstGeom prst="ellipse">
+            <a:avLst/>
+          </a:prstGeom>
+          <a:noFill/>
+          <a:ln w="16510">
+            <a:solidFill>
+              <a:srgbClr val="A1A1AA"/>
+            </a:solidFill>
+          </a:ln>
+          <a:effectLst/>
+        </p:spPr>
+        <p:txBody>
+          <a:bodyPr rtlCol="0" anchor="ctr"/>
+          <a:lstStyle/>
+          <a:p>
+            <a:pPr algn="ctr"/>
+          </a:p>
+        </p:txBody>
+      </p:sp>
+      <p:sp>
+        <p:nvSpPr>
+          <p:cNvPr id="12" name="TextBox 11"/>
+          <p:cNvSpPr txBox="1"/>
+          <p:nvPr/>
+        </p:nvSpPr>
+        <p:spPr>
+          <a:xfrm>
+            <a:off x="868680" y="4215383"/>
+            <a:ext cx="457200" cy="457200"/>
+          </a:xfrm>
+          <a:prstGeom prst="rect">
+            <a:avLst/>
+          </a:prstGeom>
+          <a:noFill/>
+        </p:spPr>
+        <p:txBody>
+          <a:bodyPr wrap="square" anchor="ctr" lIns="0" rIns="0" tIns="0" bIns="0">
+            <a:spAutoFit/>
+          </a:bodyPr>
+          <a:lstStyle/>
+          <a:p>
+            <a:pPr algn="ctr">
+              <a:spcAft>
+                <a:spcPts val="200"/>
+              </a:spcAft>
+            </a:pPr>
+            <a:r>
+              <a:rPr sz="1200" b="1" i="0">
                 <a:solidFill>
                   <a:srgbClr val="FFFFFF"/>
                 </a:solidFill>
-                <a:latin typeface="Calibri"/>
-              </a:rPr>
-              <a:t>2.  Füllt ihn für eure eigene Idee aus.</a:t>
-            </a:r>
-          </a:p>
+                <a:latin typeface="Arial"/>
+              </a:rPr>
+              <a:t>3</a:t>
+            </a:r>
+          </a:p>
+        </p:txBody>
+      </p:sp>
+      <p:sp>
+        <p:nvSpPr>
+          <p:cNvPr id="13" name="TextBox 12"/>
+          <p:cNvSpPr txBox="1"/>
+          <p:nvPr/>
+        </p:nvSpPr>
+        <p:spPr>
+          <a:xfrm>
+            <a:off x="1600200" y="4261103"/>
+            <a:ext cx="6035040" cy="457200"/>
+          </a:xfrm>
+          <a:prstGeom prst="rect">
+            <a:avLst/>
+          </a:prstGeom>
+          <a:noFill/>
+        </p:spPr>
+        <p:txBody>
+          <a:bodyPr wrap="square" anchor="ctr" lIns="0" rIns="0" tIns="0" bIns="0">
+            <a:spAutoFit/>
+          </a:bodyPr>
+          <a:lstStyle/>
           <a:p>
             <a:pPr algn="l">
               <a:spcAft>
-                <a:spcPts val="1200"/>
-              </a:spcAft>
-            </a:pPr>
-            <a:r>
-              <a:rPr sz="1900" b="0" i="0">
+                <a:spcPts val="200"/>
+              </a:spcAft>
+            </a:pPr>
+            <a:r>
+              <a:rPr sz="1800" b="0" i="0">
+                <a:solidFill>
+                  <a:srgbClr val="E7E7EA"/>
+                </a:solidFill>
+                <a:latin typeface="Arial"/>
+              </a:rPr>
+              <a:t>Prompt kopieren.</a:t>
+            </a:r>
+          </a:p>
+        </p:txBody>
+      </p:sp>
+      <p:sp>
+        <p:nvSpPr>
+          <p:cNvPr id="14" name="Oval 13"/>
+          <p:cNvSpPr/>
+          <p:nvPr/>
+        </p:nvSpPr>
+        <p:spPr>
+          <a:xfrm>
+            <a:off x="868680" y="4992624"/>
+            <a:ext cx="457200" cy="457200"/>
+          </a:xfrm>
+          <a:prstGeom prst="ellipse">
+            <a:avLst/>
+          </a:prstGeom>
+          <a:noFill/>
+          <a:ln w="16510">
+            <a:solidFill>
+              <a:srgbClr val="A1A1AA"/>
+            </a:solidFill>
+          </a:ln>
+          <a:effectLst/>
+        </p:spPr>
+        <p:txBody>
+          <a:bodyPr rtlCol="0" anchor="ctr"/>
+          <a:lstStyle/>
+          <a:p>
+            <a:pPr algn="ctr"/>
+          </a:p>
+        </p:txBody>
+      </p:sp>
+      <p:sp>
+        <p:nvSpPr>
+          <p:cNvPr id="15" name="TextBox 14"/>
+          <p:cNvSpPr txBox="1"/>
+          <p:nvPr/>
+        </p:nvSpPr>
+        <p:spPr>
+          <a:xfrm>
+            <a:off x="868680" y="4965192"/>
+            <a:ext cx="457200" cy="457200"/>
+          </a:xfrm>
+          <a:prstGeom prst="rect">
+            <a:avLst/>
+          </a:prstGeom>
+          <a:noFill/>
+        </p:spPr>
+        <p:txBody>
+          <a:bodyPr wrap="square" anchor="ctr" lIns="0" rIns="0" tIns="0" bIns="0">
+            <a:spAutoFit/>
+          </a:bodyPr>
+          <a:lstStyle/>
+          <a:p>
+            <a:pPr algn="ctr">
+              <a:spcAft>
+                <a:spcPts val="200"/>
+              </a:spcAft>
+            </a:pPr>
+            <a:r>
+              <a:rPr sz="1200" b="1" i="0">
                 <a:solidFill>
                   <a:srgbClr val="FFFFFF"/>
                 </a:solidFill>
-                <a:latin typeface="Calibri"/>
-              </a:rPr>
-              <a:t>3.  Kopiert euren Prompt.</a:t>
-            </a:r>
-          </a:p>
+                <a:latin typeface="Arial"/>
+              </a:rPr>
+              <a:t>4</a:t>
+            </a:r>
+          </a:p>
+        </p:txBody>
+      </p:sp>
+      <p:sp>
+        <p:nvSpPr>
+          <p:cNvPr id="16" name="TextBox 15"/>
+          <p:cNvSpPr txBox="1"/>
+          <p:nvPr/>
+        </p:nvSpPr>
+        <p:spPr>
+          <a:xfrm>
+            <a:off x="1600200" y="5010912"/>
+            <a:ext cx="6035040" cy="457200"/>
+          </a:xfrm>
+          <a:prstGeom prst="rect">
+            <a:avLst/>
+          </a:prstGeom>
+          <a:noFill/>
+        </p:spPr>
+        <p:txBody>
+          <a:bodyPr wrap="square" anchor="ctr" lIns="0" rIns="0" tIns="0" bIns="0">
+            <a:spAutoFit/>
+          </a:bodyPr>
+          <a:lstStyle/>
           <a:p>
             <a:pPr algn="l">
               <a:spcAft>
@@ -9751,32 +8732,30 @@
               </a:spcAft>
             </a:pPr>
             <a:r>
-              <a:rPr sz="1900" b="0" i="0">
-                <a:solidFill>
-                  <a:srgbClr val="FFFFFF"/>
-                </a:solidFill>
-                <a:latin typeface="Calibri"/>
-              </a:rPr>
-              <a:t>4.  1–2 Freiwillige zeigen ihre Website live.</a:t>
-            </a:r>
-          </a:p>
-        </p:txBody>
-      </p:sp>
-      <p:sp>
-        <p:nvSpPr>
-          <p:cNvPr id="7" name="Rounded Rectangle 6"/>
+              <a:rPr sz="1800" b="0" i="0">
+                <a:solidFill>
+                  <a:srgbClr val="E7E7EA"/>
+                </a:solidFill>
+                <a:latin typeface="Arial"/>
+              </a:rPr>
+              <a:t>1–2 zeigen ihre Website live.</a:t>
+            </a:r>
+          </a:p>
+        </p:txBody>
+      </p:sp>
+      <p:sp>
+        <p:nvSpPr>
+          <p:cNvPr id="17" name="Rectangle 16"/>
           <p:cNvSpPr/>
           <p:nvPr/>
         </p:nvSpPr>
         <p:spPr>
           <a:xfrm>
-            <a:off x="7955279" y="2286000"/>
-            <a:ext cx="3383280" cy="3383280"/>
-          </a:xfrm>
-          <a:prstGeom prst="roundRect">
-            <a:avLst>
-              <a:gd name="adj" fmla="val 8000"/>
-            </a:avLst>
+            <a:off x="8366760" y="2468880"/>
+            <a:ext cx="2971800" cy="3291840"/>
+          </a:xfrm>
+          <a:prstGeom prst="rect">
+            <a:avLst/>
           </a:prstGeom>
           <a:solidFill>
             <a:srgbClr val="FFFFFF"/>
@@ -9786,70 +8765,17 @@
           </a:ln>
           <a:effectLst/>
         </p:spPr>
-        <p:style>
-          <a:lnRef idx="1">
-            <a:schemeClr val="accent1"/>
-          </a:lnRef>
-          <a:fillRef idx="3">
-            <a:schemeClr val="accent1"/>
-          </a:fillRef>
-          <a:effectRef idx="2">
-            <a:schemeClr val="accent1"/>
-          </a:effectRef>
-          <a:fontRef idx="minor">
-            <a:schemeClr val="lt1"/>
-          </a:fontRef>
-        </p:style>
         <p:txBody>
           <a:bodyPr rtlCol="0" anchor="ctr"/>
           <a:lstStyle/>
           <a:p>
             <a:pPr algn="ctr"/>
-          </a:p>
-        </p:txBody>
-      </p:sp>
-      <p:sp>
-        <p:nvSpPr>
-          <p:cNvPr id="8" name="TextBox 7"/>
-          <p:cNvSpPr txBox="1"/>
-          <p:nvPr/>
-        </p:nvSpPr>
-        <p:spPr>
-          <a:xfrm>
-            <a:off x="7955279" y="2514600"/>
-            <a:ext cx="3383280" cy="457200"/>
-          </a:xfrm>
-          <a:prstGeom prst="rect">
-            <a:avLst/>
-          </a:prstGeom>
-          <a:noFill/>
-        </p:spPr>
-        <p:txBody>
-          <a:bodyPr wrap="square" anchor="t" lIns="0" rIns="0" tIns="0" bIns="0">
-            <a:spAutoFit/>
-          </a:bodyPr>
-          <a:lstStyle/>
-          <a:p>
-            <a:pPr algn="ctr">
-              <a:spcAft>
-                <a:spcPts val="200"/>
-              </a:spcAft>
-            </a:pPr>
-            <a:r>
-              <a:rPr sz="1600" b="1" i="0">
-                <a:solidFill>
-                  <a:srgbClr val="0F172A"/>
-                </a:solidFill>
-                <a:latin typeface="Trebuchet MS"/>
-              </a:rPr>
-              <a:t>Hier starten</a:t>
-            </a:r>
           </a:p>
         </p:txBody>
       </p:sp>
       <p:pic>
         <p:nvPicPr>
-          <p:cNvPr id="9" name="Picture 8" descr="qr.png"/>
+          <p:cNvPr id="18" name="Picture 17" descr="qr.png"/>
           <p:cNvPicPr>
             <a:picLocks noChangeAspect="1"/>
           </p:cNvPicPr>
@@ -9863,8 +8789,8 @@
         </p:blipFill>
         <p:spPr>
           <a:xfrm>
-            <a:off x="8732520" y="3017520"/>
-            <a:ext cx="1828800" cy="1828800"/>
+            <a:off x="9098280" y="2880360"/>
+            <a:ext cx="1508760" cy="1508760"/>
           </a:xfrm>
           <a:prstGeom prst="rect">
             <a:avLst/>
@@ -9873,14 +8799,14 @@
       </p:pic>
       <p:sp>
         <p:nvSpPr>
-          <p:cNvPr id="10" name="TextBox 9"/>
+          <p:cNvPr id="19" name="TextBox 18"/>
           <p:cNvSpPr txBox="1"/>
           <p:nvPr/>
         </p:nvSpPr>
         <p:spPr>
           <a:xfrm>
-            <a:off x="8001000" y="5029200"/>
-            <a:ext cx="3291840" cy="548640"/>
+            <a:off x="8412480" y="4617720"/>
+            <a:ext cx="2880360" cy="914400"/>
           </a:xfrm>
           <a:prstGeom prst="rect">
             <a:avLst/>
@@ -9901,11 +8827,27 @@
             <a:r>
               <a:rPr sz="1150" b="1" i="0">
                 <a:solidFill>
-                  <a:srgbClr val="4F46E5"/>
-                </a:solidFill>
-                <a:latin typeface="Calibri"/>
-              </a:rPr>
-              <a:t>criseone.github.io/meine-website-ai-studio</a:t>
+                  <a:srgbClr val="121316"/>
+                </a:solidFill>
+                <a:latin typeface="Arial"/>
+              </a:rPr>
+              <a:t>criseone.github.io/</a:t>
+            </a:r>
+          </a:p>
+          <a:p>
+            <a:pPr algn="ctr">
+              <a:spcAft>
+                <a:spcPts val="200"/>
+              </a:spcAft>
+            </a:pPr>
+            <a:r>
+              <a:rPr sz="1150" b="1" i="0">
+                <a:solidFill>
+                  <a:srgbClr val="121316"/>
+                </a:solidFill>
+                <a:latin typeface="Arial"/>
+              </a:rPr>
+              <a:t>meine-website-ai-studio</a:t>
             </a:r>
           </a:p>
         </p:txBody>
@@ -9943,27 +8885,13 @@
             <a:avLst/>
           </a:prstGeom>
           <a:solidFill>
-            <a:srgbClr val="F8FAFC"/>
+            <a:srgbClr val="FFFFFF"/>
           </a:solidFill>
           <a:ln>
             <a:noFill/>
           </a:ln>
           <a:effectLst/>
         </p:spPr>
-        <p:style>
-          <a:lnRef idx="1">
-            <a:schemeClr val="accent1"/>
-          </a:lnRef>
-          <a:fillRef idx="3">
-            <a:schemeClr val="accent1"/>
-          </a:fillRef>
-          <a:effectRef idx="2">
-            <a:schemeClr val="accent1"/>
-          </a:effectRef>
-          <a:fontRef idx="minor">
-            <a:schemeClr val="lt1"/>
-          </a:fontRef>
-        </p:style>
         <p:txBody>
           <a:bodyPr rtlCol="0" anchor="ctr"/>
           <a:lstStyle/>
@@ -9980,8 +8908,8 @@
         </p:nvSpPr>
         <p:spPr>
           <a:xfrm>
-            <a:off x="822960" y="594360"/>
-            <a:ext cx="7315200" cy="365760"/>
+            <a:off x="868680" y="777240"/>
+            <a:ext cx="10058400" cy="365760"/>
           </a:xfrm>
           <a:prstGeom prst="rect">
             <a:avLst/>
@@ -10002,11 +8930,11 @@
             <a:r>
               <a:rPr sz="1200" b="1" i="0">
                 <a:solidFill>
-                  <a:srgbClr val="4F46E5"/>
-                </a:solidFill>
-                <a:latin typeface="Trebuchet MS"/>
-              </a:rPr>
-              <a:t>AUSWERTEN &amp; ZUSAMMENFASSUNG</a:t>
+                  <a:srgbClr val="71717A"/>
+                </a:solidFill>
+                <a:latin typeface="Arial"/>
+              </a:rPr>
+              <a:t>AUSWERTEN</a:t>
             </a:r>
           </a:p>
         </p:txBody>
@@ -10019,8 +8947,8 @@
         </p:nvSpPr>
         <p:spPr>
           <a:xfrm>
-            <a:off x="822960" y="960120"/>
-            <a:ext cx="10515600" cy="731520"/>
+            <a:off x="868680" y="1234440"/>
+            <a:ext cx="10424160" cy="822960"/>
           </a:xfrm>
           <a:prstGeom prst="rect">
             <a:avLst/>
@@ -10039,65 +8967,39 @@
               </a:spcAft>
             </a:pPr>
             <a:r>
-              <a:rPr sz="3400" b="1" i="0">
-                <a:solidFill>
-                  <a:srgbClr val="0F172A"/>
-                </a:solidFill>
-                <a:latin typeface="Trebuchet MS"/>
+              <a:rPr sz="3300" b="1" i="0">
+                <a:solidFill>
+                  <a:srgbClr val="121316"/>
+                </a:solidFill>
+                <a:latin typeface="Arial"/>
               </a:rPr>
               <a:t>Was bleibt hängen?</a:t>
             </a:r>
           </a:p>
         </p:txBody>
       </p:sp>
-      <p:sp>
-        <p:nvSpPr>
-          <p:cNvPr id="5" name="Rounded Rectangle 4"/>
-          <p:cNvSpPr/>
-          <p:nvPr/>
-        </p:nvSpPr>
-        <p:spPr>
-          <a:xfrm>
-            <a:off x="822960" y="2011680"/>
-            <a:ext cx="5074920" cy="3474720"/>
-          </a:xfrm>
-          <a:prstGeom prst="roundRect">
-            <a:avLst>
-              <a:gd name="adj" fmla="val 8000"/>
-            </a:avLst>
-          </a:prstGeom>
-          <a:solidFill>
-            <a:srgbClr val="FFFFFF"/>
-          </a:solidFill>
+      <p:cxnSp>
+        <p:nvCxnSpPr>
+          <p:cNvPr id="5" name="Connector 4"/>
+          <p:cNvCxnSpPr/>
+          <p:nvPr/>
+        </p:nvCxnSpPr>
+        <p:spPr>
+          <a:xfrm>
+            <a:off x="6035040" y="2468880"/>
+            <a:ext cx="0" cy="3108960"/>
+          </a:xfrm>
+          <a:prstGeom prst="line">
+            <a:avLst/>
+          </a:prstGeom>
           <a:ln w="12700">
             <a:solidFill>
-              <a:srgbClr val="E2E8F0"/>
+              <a:srgbClr val="E4E4E7"/>
             </a:solidFill>
           </a:ln>
           <a:effectLst/>
         </p:spPr>
-        <p:style>
-          <a:lnRef idx="1">
-            <a:schemeClr val="accent1"/>
-          </a:lnRef>
-          <a:fillRef idx="3">
-            <a:schemeClr val="accent1"/>
-          </a:fillRef>
-          <a:effectRef idx="2">
-            <a:schemeClr val="accent1"/>
-          </a:effectRef>
-          <a:fontRef idx="minor">
-            <a:schemeClr val="lt1"/>
-          </a:fontRef>
-        </p:style>
-        <p:txBody>
-          <a:bodyPr rtlCol="0" anchor="ctr"/>
-          <a:lstStyle/>
-          <a:p>
-            <a:pPr algn="ctr"/>
-          </a:p>
-        </p:txBody>
-      </p:sp>
+      </p:cxnSp>
       <p:sp>
         <p:nvSpPr>
           <p:cNvPr id="6" name="TextBox 5"/>
@@ -10106,8 +9008,8 @@
         </p:nvSpPr>
         <p:spPr>
           <a:xfrm>
-            <a:off x="1143000" y="2286000"/>
-            <a:ext cx="4480560" cy="548640"/>
+            <a:off x="868680" y="2377440"/>
+            <a:ext cx="4754880" cy="457200"/>
           </a:xfrm>
           <a:prstGeom prst="rect">
             <a:avLst/>
@@ -10126,13 +9028,13 @@
               </a:spcAft>
             </a:pPr>
             <a:r>
-              <a:rPr sz="1900" b="1" i="0">
-                <a:solidFill>
-                  <a:srgbClr val="4F46E5"/>
-                </a:solidFill>
-                <a:latin typeface="Trebuchet MS"/>
-              </a:rPr>
-              <a:t>Die 3 Schritte</a:t>
+              <a:rPr sz="1600" b="1" i="0">
+                <a:solidFill>
+                  <a:srgbClr val="71717A"/>
+                </a:solidFill>
+                <a:latin typeface="Arial"/>
+              </a:rPr>
+              <a:t>Die drei Schritte</a:t>
             </a:r>
           </a:p>
         </p:txBody>
@@ -10145,8 +9047,8 @@
         </p:nvSpPr>
         <p:spPr>
           <a:xfrm>
-            <a:off x="1143000" y="2926080"/>
-            <a:ext cx="4526280" cy="2377440"/>
+            <a:off x="868680" y="3017520"/>
+            <a:ext cx="4846320" cy="2194560"/>
           </a:xfrm>
           <a:prstGeom prst="rect">
             <a:avLst/>
@@ -10165,13 +9067,13 @@
               </a:spcAft>
             </a:pPr>
             <a:r>
-              <a:rPr sz="1700" b="0" i="0">
-                <a:solidFill>
-                  <a:srgbClr val="0F172A"/>
-                </a:solidFill>
-                <a:latin typeface="Calibri"/>
-              </a:rPr>
-              <a:t>1.  Baukasten ausfüllen</a:t>
+              <a:rPr sz="1800" b="0" i="0">
+                <a:solidFill>
+                  <a:srgbClr val="121316"/>
+                </a:solidFill>
+                <a:latin typeface="Arial"/>
+              </a:rPr>
+              <a:t>1   Baukasten ausfüllen</a:t>
             </a:r>
           </a:p>
           <a:p>
@@ -10181,13 +9083,13 @@
               </a:spcAft>
             </a:pPr>
             <a:r>
-              <a:rPr sz="1700" b="0" i="0">
-                <a:solidFill>
-                  <a:srgbClr val="0F172A"/>
-                </a:solidFill>
-                <a:latin typeface="Calibri"/>
-              </a:rPr>
-              <a:t>2.  Prompt kopieren</a:t>
+              <a:rPr sz="1800" b="0" i="0">
+                <a:solidFill>
+                  <a:srgbClr val="121316"/>
+                </a:solidFill>
+                <a:latin typeface="Arial"/>
+              </a:rPr>
+              <a:t>2   Prompt kopieren</a:t>
             </a:r>
           </a:p>
           <a:p>
@@ -10197,75 +9099,159 @@
               </a:spcAft>
             </a:pPr>
             <a:r>
-              <a:rPr sz="1700" b="0" i="0">
-                <a:solidFill>
-                  <a:srgbClr val="0F172A"/>
-                </a:solidFill>
-                <a:latin typeface="Calibri"/>
-              </a:rPr>
-              <a:t>3.  In AI Studio einfügen</a:t>
-            </a:r>
-          </a:p>
-        </p:txBody>
-      </p:sp>
-      <p:sp>
-        <p:nvSpPr>
-          <p:cNvPr id="8" name="Rounded Rectangle 7"/>
-          <p:cNvSpPr/>
-          <p:nvPr/>
-        </p:nvSpPr>
-        <p:spPr>
-          <a:xfrm>
-            <a:off x="6263640" y="2011680"/>
-            <a:ext cx="5074920" cy="3474720"/>
-          </a:xfrm>
-          <a:prstGeom prst="roundRect">
-            <a:avLst>
-              <a:gd name="adj" fmla="val 8000"/>
-            </a:avLst>
-          </a:prstGeom>
-          <a:solidFill>
-            <a:srgbClr val="EEF2FF"/>
-          </a:solidFill>
+              <a:rPr sz="1800" b="0" i="0">
+                <a:solidFill>
+                  <a:srgbClr val="121316"/>
+                </a:solidFill>
+                <a:latin typeface="Arial"/>
+              </a:rPr>
+              <a:t>3   In AI Studio einfügen</a:t>
+            </a:r>
+          </a:p>
+        </p:txBody>
+      </p:sp>
+      <p:sp>
+        <p:nvSpPr>
+          <p:cNvPr id="8" name="TextBox 7"/>
+          <p:cNvSpPr txBox="1"/>
+          <p:nvPr/>
+        </p:nvSpPr>
+        <p:spPr>
+          <a:xfrm>
+            <a:off x="6400800" y="2377440"/>
+            <a:ext cx="4754880" cy="457200"/>
+          </a:xfrm>
+          <a:prstGeom prst="rect">
+            <a:avLst/>
+          </a:prstGeom>
+          <a:noFill/>
+        </p:spPr>
+        <p:txBody>
+          <a:bodyPr wrap="square" anchor="t" lIns="0" rIns="0" tIns="0" bIns="0">
+            <a:spAutoFit/>
+          </a:bodyPr>
+          <a:lstStyle/>
+          <a:p>
+            <a:pPr algn="l">
+              <a:spcAft>
+                <a:spcPts val="200"/>
+              </a:spcAft>
+            </a:pPr>
+            <a:r>
+              <a:rPr sz="1600" b="1" i="0">
+                <a:solidFill>
+                  <a:srgbClr val="71717A"/>
+                </a:solidFill>
+                <a:latin typeface="Arial"/>
+              </a:rPr>
+              <a:t>Lernzielkontrolle</a:t>
+            </a:r>
+          </a:p>
+        </p:txBody>
+      </p:sp>
+      <p:sp>
+        <p:nvSpPr>
+          <p:cNvPr id="9" name="TextBox 8"/>
+          <p:cNvSpPr txBox="1"/>
+          <p:nvPr/>
+        </p:nvSpPr>
+        <p:spPr>
+          <a:xfrm>
+            <a:off x="6400800" y="3017520"/>
+            <a:ext cx="4846320" cy="2377440"/>
+          </a:xfrm>
+          <a:prstGeom prst="rect">
+            <a:avLst/>
+          </a:prstGeom>
+          <a:noFill/>
+        </p:spPr>
+        <p:txBody>
+          <a:bodyPr wrap="square" anchor="t" lIns="0" rIns="0" tIns="0" bIns="0">
+            <a:spAutoFit/>
+          </a:bodyPr>
+          <a:lstStyle/>
+          <a:p>
+            <a:pPr algn="l">
+              <a:spcAft>
+                <a:spcPts val="1100"/>
+              </a:spcAft>
+            </a:pPr>
+            <a:r>
+              <a:rPr sz="1600" b="0" i="0">
+                <a:solidFill>
+                  <a:srgbClr val="121316"/>
+                </a:solidFill>
+                <a:latin typeface="Arial"/>
+              </a:rPr>
+              <a:t>Was ist Google AI Studio?</a:t>
+            </a:r>
+          </a:p>
+          <a:p>
+            <a:pPr algn="l">
+              <a:spcAft>
+                <a:spcPts val="1100"/>
+              </a:spcAft>
+            </a:pPr>
+            <a:r>
+              <a:rPr sz="1600" b="0" i="0">
+                <a:solidFill>
+                  <a:srgbClr val="121316"/>
+                </a:solidFill>
+                <a:latin typeface="Arial"/>
+              </a:rPr>
+              <a:t>Nenne zwei Dinge, die man damit bauen kann.</a:t>
+            </a:r>
+          </a:p>
+          <a:p>
+            <a:pPr algn="l">
+              <a:spcAft>
+                <a:spcPts val="200"/>
+              </a:spcAft>
+            </a:pPr>
+            <a:r>
+              <a:rPr sz="1600" b="0" i="0">
+                <a:solidFill>
+                  <a:srgbClr val="121316"/>
+                </a:solidFill>
+                <a:latin typeface="Arial"/>
+              </a:rPr>
+              <a:t>Wofür würdest DU eine Website bauen?</a:t>
+            </a:r>
+          </a:p>
+        </p:txBody>
+      </p:sp>
+      <p:cxnSp>
+        <p:nvCxnSpPr>
+          <p:cNvPr id="10" name="Connector 9"/>
+          <p:cNvCxnSpPr/>
+          <p:nvPr/>
+        </p:nvCxnSpPr>
+        <p:spPr>
+          <a:xfrm>
+            <a:off x="868680" y="5760720"/>
+            <a:ext cx="10469879" cy="0"/>
+          </a:xfrm>
+          <a:prstGeom prst="line">
+            <a:avLst/>
+          </a:prstGeom>
           <a:ln w="12700">
             <a:solidFill>
-              <a:srgbClr val="E2E8F0"/>
+              <a:srgbClr val="E4E4E7"/>
             </a:solidFill>
           </a:ln>
           <a:effectLst/>
         </p:spPr>
-        <p:style>
-          <a:lnRef idx="1">
-            <a:schemeClr val="accent1"/>
-          </a:lnRef>
-          <a:fillRef idx="3">
-            <a:schemeClr val="accent1"/>
-          </a:fillRef>
-          <a:effectRef idx="2">
-            <a:schemeClr val="accent1"/>
-          </a:effectRef>
-          <a:fontRef idx="minor">
-            <a:schemeClr val="lt1"/>
-          </a:fontRef>
-        </p:style>
-        <p:txBody>
-          <a:bodyPr rtlCol="0" anchor="ctr"/>
-          <a:lstStyle/>
-          <a:p>
-            <a:pPr algn="ctr"/>
-          </a:p>
-        </p:txBody>
-      </p:sp>
-      <p:sp>
-        <p:nvSpPr>
-          <p:cNvPr id="9" name="TextBox 8"/>
+      </p:cxnSp>
+      <p:sp>
+        <p:nvSpPr>
+          <p:cNvPr id="11" name="TextBox 10"/>
           <p:cNvSpPr txBox="1"/>
           <p:nvPr/>
         </p:nvSpPr>
         <p:spPr>
           <a:xfrm>
-            <a:off x="6583680" y="2286000"/>
-            <a:ext cx="4480560" cy="548640"/>
+            <a:off x="868680" y="5943600"/>
+            <a:ext cx="10469880" cy="365760"/>
           </a:xfrm>
           <a:prstGeom prst="rect">
             <a:avLst/>
@@ -10284,123 +9270,13 @@
               </a:spcAft>
             </a:pPr>
             <a:r>
-              <a:rPr sz="1900" b="1" i="0">
-                <a:solidFill>
-                  <a:srgbClr val="7C3AED"/>
-                </a:solidFill>
-                <a:latin typeface="Trebuchet MS"/>
-              </a:rPr>
-              <a:t>Lernzielkontrolle</a:t>
-            </a:r>
-          </a:p>
-        </p:txBody>
-      </p:sp>
-      <p:sp>
-        <p:nvSpPr>
-          <p:cNvPr id="10" name="TextBox 9"/>
-          <p:cNvSpPr txBox="1"/>
-          <p:nvPr/>
-        </p:nvSpPr>
-        <p:spPr>
-          <a:xfrm>
-            <a:off x="6583680" y="2926080"/>
-            <a:ext cx="4526280" cy="2377440"/>
-          </a:xfrm>
-          <a:prstGeom prst="rect">
-            <a:avLst/>
-          </a:prstGeom>
-          <a:noFill/>
-        </p:spPr>
-        <p:txBody>
-          <a:bodyPr wrap="square" anchor="t" lIns="0" rIns="0" tIns="0" bIns="0">
-            <a:spAutoFit/>
-          </a:bodyPr>
-          <a:lstStyle/>
-          <a:p>
-            <a:pPr algn="l">
-              <a:spcAft>
-                <a:spcPts val="1000"/>
-              </a:spcAft>
-            </a:pPr>
-            <a:r>
-              <a:rPr sz="1600" b="0" i="0">
-                <a:solidFill>
-                  <a:srgbClr val="0F172A"/>
-                </a:solidFill>
-                <a:latin typeface="Calibri"/>
-              </a:rPr>
-              <a:t>• Was ist Google AI Studio?</a:t>
-            </a:r>
-          </a:p>
-          <a:p>
-            <a:pPr algn="l">
-              <a:spcAft>
-                <a:spcPts val="1000"/>
-              </a:spcAft>
-            </a:pPr>
-            <a:r>
-              <a:rPr sz="1600" b="0" i="0">
-                <a:solidFill>
-                  <a:srgbClr val="0F172A"/>
-                </a:solidFill>
-                <a:latin typeface="Calibri"/>
-              </a:rPr>
-              <a:t>• Nenne 2 Dinge, die man damit machen kann.</a:t>
-            </a:r>
-          </a:p>
-          <a:p>
-            <a:pPr algn="l">
-              <a:spcAft>
-                <a:spcPts val="200"/>
-              </a:spcAft>
-            </a:pPr>
-            <a:r>
-              <a:rPr sz="1600" b="0" i="0">
-                <a:solidFill>
-                  <a:srgbClr val="0F172A"/>
-                </a:solidFill>
-                <a:latin typeface="Calibri"/>
-              </a:rPr>
-              <a:t>• Wofür würdest DU eine Website bauen?</a:t>
-            </a:r>
-          </a:p>
-        </p:txBody>
-      </p:sp>
-      <p:sp>
-        <p:nvSpPr>
-          <p:cNvPr id="11" name="TextBox 10"/>
-          <p:cNvSpPr txBox="1"/>
-          <p:nvPr/>
-        </p:nvSpPr>
-        <p:spPr>
-          <a:xfrm>
-            <a:off x="822960" y="5806440"/>
-            <a:ext cx="10515600" cy="457200"/>
-          </a:xfrm>
-          <a:prstGeom prst="rect">
-            <a:avLst/>
-          </a:prstGeom>
-          <a:noFill/>
-        </p:spPr>
-        <p:txBody>
-          <a:bodyPr wrap="square" anchor="t" lIns="0" rIns="0" tIns="0" bIns="0">
-            <a:spAutoFit/>
-          </a:bodyPr>
-          <a:lstStyle/>
-          <a:p>
-            <a:pPr algn="l">
-              <a:spcAft>
-                <a:spcPts val="200"/>
-              </a:spcAft>
-            </a:pPr>
-            <a:r>
-              <a:rPr sz="1500" b="0" i="1">
-                <a:solidFill>
-                  <a:srgbClr val="64748B"/>
-                </a:solidFill>
-                <a:latin typeface="Calibri"/>
-              </a:rPr>
-              <a:t>Fragen? — und dann: einfach selbst weiter ausprobieren.</a:t>
+              <a:rPr sz="1300" b="0" i="1">
+                <a:solidFill>
+                  <a:srgbClr val="71717A"/>
+                </a:solidFill>
+                <a:latin typeface="Arial"/>
+              </a:rPr>
+              <a:t>Fragen? Dann: selbst weiterprobieren.</a:t>
             </a:r>
           </a:p>
         </p:txBody>

--- a/unterlagen/slides.pptx
+++ b/unterlagen/slides.pptx
@@ -861,7 +861,7 @@
           <a:lstStyle/>
           <a:p>
             <a:r>
-              <a:t>I – Informieren (0:06–0:11). Kurzer, einfacher Input – keine Fachbegriffe. Die vier Punkte nennen, dann kurze Live-Demo. Stoffreduktion: kein Code, kein Deployment.</a:t>
+              <a:t>I – Informieren (0:06–0:11). Kurzer, einfacher Input – keine Fachbegriffe. Die vier Punkte nennen, dann Demo mit einem vorab generierten Beispiel (die Generierung dauert mehrere Minuten – nicht live abwarten). Stoffreduktion: kein Code, kein Deployment.</a:t>
             </a:r>
           </a:p>
         </p:txBody>
@@ -1001,7 +1001,7 @@
           <a:lstStyle/>
           <a:p>
             <a:r>
-              <a:t>I → V. Drei Schritte zeigen, Link/QR teilen, einmal vormachen. Dann übernehmen die Teilnehmenden.</a:t>
+              <a:t>I → V. Drei Schritte zeigen, Link/QR teilen, einmal vormachen. Ergebnis über ein vorab generiertes Beispiel zeigen. Dann übernehmen die Teilnehmenden.</a:t>
             </a:r>
           </a:p>
         </p:txBody>
@@ -1071,7 +1071,7 @@
           <a:lstStyle/>
           <a:p>
             <a:r>
-              <a:t>V – Verarbeiten (0:11–0:19). Aktivste Phase (~8 Min.). Herumgehen, Hilfestellung geben. Plan B bei knapper Zeit: nur ein Live-Beispiel.</a:t>
+              <a:t>V – Verarbeiten (0:11–0:19). Aktivste Phase (~8 Min.). Die Teilnehmenden bauen ihren Prompt und starten die Generierung – sie läuft mehrere Minuten weiter, also nicht abwarten. Herumgehen, Hilfestellung geben. Fertige Ergebnisse später im Gruppenchat teilen.</a:t>
             </a:r>
           </a:p>
         </p:txBody>
@@ -8738,14 +8738,56 @@
                 </a:solidFill>
                 <a:latin typeface="Arial"/>
               </a:rPr>
-              <a:t>1–2 zeigen ihre Website live.</a:t>
-            </a:r>
-          </a:p>
-        </p:txBody>
-      </p:sp>
-      <p:sp>
-        <p:nvSpPr>
-          <p:cNvPr id="17" name="Rectangle 16"/>
+              <a:t>In AI Studio einfügen und starten.</a:t>
+            </a:r>
+          </a:p>
+        </p:txBody>
+      </p:sp>
+      <p:sp>
+        <p:nvSpPr>
+          <p:cNvPr id="17" name="TextBox 16"/>
+          <p:cNvSpPr txBox="1"/>
+          <p:nvPr/>
+        </p:nvSpPr>
+        <p:spPr>
+          <a:xfrm>
+            <a:off x="868680" y="5879592"/>
+            <a:ext cx="6766560" cy="822960"/>
+          </a:xfrm>
+          <a:prstGeom prst="rect">
+            <a:avLst/>
+          </a:prstGeom>
+          <a:noFill/>
+        </p:spPr>
+        <p:txBody>
+          <a:bodyPr wrap="square" anchor="t" lIns="0" rIns="0" tIns="0" bIns="0">
+            <a:spAutoFit/>
+          </a:bodyPr>
+          <a:lstStyle/>
+          <a:p>
+            <a:pPr algn="l">
+              <a:lnSpc>
+                <a:spcPct val="115000"/>
+              </a:lnSpc>
+              <a:spcAft>
+                <a:spcPts val="200"/>
+              </a:spcAft>
+            </a:pPr>
+            <a:r>
+              <a:rPr sz="1300" b="0" i="1">
+                <a:solidFill>
+                  <a:srgbClr val="A1A1AA"/>
+                </a:solidFill>
+                <a:latin typeface="Arial"/>
+              </a:rPr>
+              <a:t>Die Generierung dauert ein paar Minuten — starten, nicht warten. Ergebnis später im Gruppenchat teilen.</a:t>
+            </a:r>
+          </a:p>
+        </p:txBody>
+      </p:sp>
+      <p:sp>
+        <p:nvSpPr>
+          <p:cNvPr id="18" name="Rectangle 17"/>
           <p:cNvSpPr/>
           <p:nvPr/>
         </p:nvSpPr>
@@ -8775,7 +8817,7 @@
       </p:sp>
       <p:pic>
         <p:nvPicPr>
-          <p:cNvPr id="18" name="Picture 17" descr="qr.png"/>
+          <p:cNvPr id="19" name="Picture 18" descr="qr.png"/>
           <p:cNvPicPr>
             <a:picLocks noChangeAspect="1"/>
           </p:cNvPicPr>
@@ -8799,7 +8841,7 @@
       </p:pic>
       <p:sp>
         <p:nvSpPr>
-          <p:cNvPr id="19" name="TextBox 18"/>
+          <p:cNvPr id="20" name="TextBox 19"/>
           <p:cNvSpPr txBox="1"/>
           <p:nvPr/>
         </p:nvSpPr>

--- a/unterlagen/slides.pptx
+++ b/unterlagen/slides.pptx
@@ -651,7 +651,7 @@
           <a:lstStyle/>
           <a:p>
             <a:r>
-              <a:t>A – Ausrichten. Die drei Lernziele in eigenen Worten nennen (nach Mager, beobachtbar). Kurz halten.</a:t>
+              <a:t>R – Reaktivieren (0:03–0:06). Per Handzeichen fragen, wer schon eine KI genutzt hat. Brücke bauen: KI baut ganze Websites. Dialogisch, aktivierend.</a:t>
             </a:r>
           </a:p>
         </p:txBody>
@@ -791,7 +791,7 @@
           <a:lstStyle/>
           <a:p>
             <a:r>
-              <a:t>R – Reaktivieren (0:03–0:06). Per Handzeichen fragen, wer schon eine KI genutzt hat. Brücke bauen: KI baut ganze Websites. Dialogisch, aktivierend.</a:t>
+              <a:t>A – Ausrichten. Die drei Lernziele in eigenen Worten nennen (nach Mager, beobachtbar). Kurz halten.</a:t>
             </a:r>
           </a:p>
         </p:txBody>
@@ -1071,7 +1071,7 @@
           <a:lstStyle/>
           <a:p>
             <a:r>
-              <a:t>V – Verarbeiten (0:11–0:19). Aktivste Phase (~8 Min.). Die Teilnehmenden bauen ihren Prompt und starten die Generierung – sie läuft mehrere Minuten weiter, also nicht abwarten. Herumgehen, Hilfestellung geben. Fertige Ergebnisse später im Gruppenchat teilen.</a:t>
+              <a:t>V – Verarbeiten (0:11–0:19). Aktivste Phase (~8 Min.). Die Teilnehmenden bauen ihren Prompt und starten die Generierung – sie läuft mehrere Minuten weiter, also nicht abwarten. Herumgehen, Hilfestellung geben. Fertige Ergebnisse später im Gruppenchat teilen. Tipp für Einsteiger:innen: den Schalter „Einfach &amp; schnell“ im Baukasten anhaken — schnelleres, überschaubareres Ergebnis.</a:t>
             </a:r>
           </a:p>
         </p:txBody>
@@ -4866,7 +4866,7 @@
             <a:avLst/>
           </a:prstGeom>
           <a:solidFill>
-            <a:srgbClr val="FFFFFF"/>
+            <a:srgbClr val="121316"/>
           </a:solidFill>
           <a:ln>
             <a:noFill/>
@@ -4889,7 +4889,7 @@
         </p:nvSpPr>
         <p:spPr>
           <a:xfrm>
-            <a:off x="868680" y="777240"/>
+            <a:off x="868680" y="1005840"/>
             <a:ext cx="10058400" cy="365760"/>
           </a:xfrm>
           <a:prstGeom prst="rect">
@@ -4911,11 +4911,11 @@
             <a:r>
               <a:rPr sz="1200" b="1" i="0">
                 <a:solidFill>
-                  <a:srgbClr val="71717A"/>
-                </a:solidFill>
-                <a:latin typeface="Arial"/>
-              </a:rPr>
-              <a:t>LERNZIELE · NACH MAGER</a:t>
+                  <a:srgbClr val="A1A1AA"/>
+                </a:solidFill>
+                <a:latin typeface="Arial"/>
+              </a:rPr>
+              <a:t>EINSTIEG &amp; REAKTIVIEREN</a:t>
             </a:r>
           </a:p>
         </p:txBody>
@@ -4928,8 +4928,8 @@
         </p:nvSpPr>
         <p:spPr>
           <a:xfrm>
-            <a:off x="868680" y="1234440"/>
-            <a:ext cx="10424160" cy="822960"/>
+            <a:off x="868680" y="1737360"/>
+            <a:ext cx="10332720" cy="2194560"/>
           </a:xfrm>
           <a:prstGeom prst="rect">
             <a:avLst/>
@@ -4943,18 +4943,49 @@
           <a:lstStyle/>
           <a:p>
             <a:pPr algn="l">
+              <a:lnSpc>
+                <a:spcPct val="112000"/>
+              </a:lnSpc>
               <a:spcAft>
                 <a:spcPts val="200"/>
               </a:spcAft>
             </a:pPr>
             <a:r>
-              <a:rPr sz="3300" b="1" i="0">
-                <a:solidFill>
-                  <a:srgbClr val="121316"/>
-                </a:solidFill>
-                <a:latin typeface="Arial"/>
-              </a:rPr>
-              <a:t>Was ihr danach könnt</a:t>
+              <a:rPr sz="3600" b="1" i="0">
+                <a:solidFill>
+                  <a:srgbClr val="FFFFFF"/>
+                </a:solidFill>
+                <a:latin typeface="Arial"/>
+              </a:rPr>
+              <a:t>„Wer hätte gern eine </a:t>
+            </a:r>
+            <a:r>
+              <a:rPr sz="3600" b="1" i="0">
+                <a:solidFill>
+                  <a:srgbClr val="FFFFFF"/>
+                </a:solidFill>
+                <a:latin typeface="Arial"/>
+              </a:rPr>
+              <a:t>eigene Website</a:t>
+            </a:r>
+          </a:p>
+          <a:p>
+            <a:pPr algn="l">
+              <a:lnSpc>
+                <a:spcPct val="112000"/>
+              </a:lnSpc>
+              <a:spcAft>
+                <a:spcPts val="200"/>
+              </a:spcAft>
+            </a:pPr>
+            <a:r>
+              <a:rPr sz="3600" b="1" i="0">
+                <a:solidFill>
+                  <a:srgbClr val="FFFFFF"/>
+                </a:solidFill>
+                <a:latin typeface="Arial"/>
+              </a:rPr>
+              <a:t>– und wen schreckt der Aufwand ab?“</a:t>
             </a:r>
           </a:p>
         </p:txBody>
@@ -4967,7 +4998,7 @@
         </p:nvCxnSpPr>
         <p:spPr>
           <a:xfrm>
-            <a:off x="868680" y="2468880"/>
+            <a:off x="868680" y="4114800"/>
             <a:ext cx="10469879" cy="0"/>
           </a:xfrm>
           <a:prstGeom prst="line">
@@ -4975,7 +5006,7 @@
           </a:prstGeom>
           <a:ln w="12700">
             <a:solidFill>
-              <a:srgbClr val="E4E4E7"/>
+              <a:srgbClr val="3F3F46"/>
             </a:solidFill>
           </a:ln>
           <a:effectLst/>
@@ -4983,83 +5014,14 @@
       </p:cxnSp>
       <p:sp>
         <p:nvSpPr>
-          <p:cNvPr id="6" name="Oval 5"/>
-          <p:cNvSpPr/>
-          <p:nvPr/>
-        </p:nvSpPr>
-        <p:spPr>
-          <a:xfrm>
-            <a:off x="868680" y="2761488"/>
-            <a:ext cx="548640" cy="548640"/>
-          </a:xfrm>
-          <a:prstGeom prst="ellipse">
-            <a:avLst/>
-          </a:prstGeom>
-          <a:noFill/>
-          <a:ln w="16510">
-            <a:solidFill>
-              <a:srgbClr val="121316"/>
-            </a:solidFill>
-          </a:ln>
-          <a:effectLst/>
-        </p:spPr>
-        <p:txBody>
-          <a:bodyPr rtlCol="0" anchor="ctr"/>
-          <a:lstStyle/>
-          <a:p>
-            <a:pPr algn="ctr"/>
-          </a:p>
-        </p:txBody>
-      </p:sp>
-      <p:sp>
-        <p:nvSpPr>
-          <p:cNvPr id="7" name="TextBox 6"/>
+          <p:cNvPr id="6" name="TextBox 5"/>
           <p:cNvSpPr txBox="1"/>
           <p:nvPr/>
         </p:nvSpPr>
         <p:spPr>
           <a:xfrm>
-            <a:off x="868680" y="2734056"/>
-            <a:ext cx="548640" cy="548640"/>
-          </a:xfrm>
-          <a:prstGeom prst="rect">
-            <a:avLst/>
-          </a:prstGeom>
-          <a:noFill/>
-        </p:spPr>
-        <p:txBody>
-          <a:bodyPr wrap="square" anchor="ctr" lIns="0" rIns="0" tIns="0" bIns="0">
-            <a:spAutoFit/>
-          </a:bodyPr>
-          <a:lstStyle/>
-          <a:p>
-            <a:pPr algn="ctr">
-              <a:spcAft>
-                <a:spcPts val="200"/>
-              </a:spcAft>
-            </a:pPr>
-            <a:r>
-              <a:rPr sz="1400" b="1" i="0">
-                <a:solidFill>
-                  <a:srgbClr val="121316"/>
-                </a:solidFill>
-                <a:latin typeface="Arial"/>
-              </a:rPr>
-              <a:t>1</a:t>
-            </a:r>
-          </a:p>
-        </p:txBody>
-      </p:sp>
-      <p:sp>
-        <p:nvSpPr>
-          <p:cNvPr id="8" name="TextBox 7"/>
-          <p:cNvSpPr txBox="1"/>
-          <p:nvPr/>
-        </p:nvSpPr>
-        <p:spPr>
-          <a:xfrm>
-            <a:off x="1737360" y="2724912"/>
-            <a:ext cx="9509760" cy="1005840"/>
+            <a:off x="868680" y="4434840"/>
+            <a:ext cx="10332720" cy="1828800"/>
           </a:xfrm>
           <a:prstGeom prst="rect">
             <a:avLst/>
@@ -5074,17 +5036,17 @@
           <a:p>
             <a:pPr algn="l">
               <a:spcAft>
-                <a:spcPts val="300"/>
-              </a:spcAft>
-            </a:pPr>
-            <a:r>
-              <a:rPr sz="2000" b="1" i="0">
-                <a:solidFill>
-                  <a:srgbClr val="121316"/>
-                </a:solidFill>
-                <a:latin typeface="Arial"/>
-              </a:rPr>
-              <a:t>Erklären, was Google AI Studio ist</a:t>
+                <a:spcPts val="1000"/>
+              </a:spcAft>
+            </a:pPr>
+            <a:r>
+              <a:rPr sz="1900" b="0" i="0">
+                <a:solidFill>
+                  <a:srgbClr val="E7E7EA"/>
+                </a:solidFill>
+                <a:latin typeface="Arial"/>
+              </a:rPr>
+              <a:t>Wer hat schon einmal eine KI (z. B. ChatGPT) gefragt?</a:t>
             </a:r>
           </a:p>
           <a:p>
@@ -5094,331 +5056,26 @@
               </a:spcAft>
             </a:pPr>
             <a:r>
-              <a:rPr sz="1400" b="0" i="0">
-                <a:solidFill>
-                  <a:srgbClr val="71717A"/>
-                </a:solidFill>
-                <a:latin typeface="Arial"/>
-              </a:rPr>
-              <a:t>Zwei Beispiele nennen, was man damit bauen kann.</a:t>
-            </a:r>
-          </a:p>
-        </p:txBody>
-      </p:sp>
-      <p:cxnSp>
-        <p:nvCxnSpPr>
-          <p:cNvPr id="9" name="Connector 8"/>
-          <p:cNvCxnSpPr/>
-          <p:nvPr/>
-        </p:nvCxnSpPr>
-        <p:spPr>
-          <a:xfrm>
-            <a:off x="868680" y="3749039"/>
-            <a:ext cx="10469879" cy="0"/>
-          </a:xfrm>
-          <a:prstGeom prst="line">
-            <a:avLst/>
-          </a:prstGeom>
-          <a:ln w="12700">
-            <a:solidFill>
-              <a:srgbClr val="E4E4E7"/>
-            </a:solidFill>
-          </a:ln>
-          <a:effectLst/>
-        </p:spPr>
-      </p:cxnSp>
-      <p:sp>
-        <p:nvSpPr>
-          <p:cNvPr id="10" name="Oval 9"/>
-          <p:cNvSpPr/>
-          <p:nvPr/>
-        </p:nvSpPr>
-        <p:spPr>
-          <a:xfrm>
-            <a:off x="868680" y="4041648"/>
-            <a:ext cx="548640" cy="548640"/>
-          </a:xfrm>
-          <a:prstGeom prst="ellipse">
-            <a:avLst/>
-          </a:prstGeom>
-          <a:noFill/>
-          <a:ln w="16510">
-            <a:solidFill>
-              <a:srgbClr val="121316"/>
-            </a:solidFill>
-          </a:ln>
-          <a:effectLst/>
-        </p:spPr>
-        <p:txBody>
-          <a:bodyPr rtlCol="0" anchor="ctr"/>
-          <a:lstStyle/>
-          <a:p>
-            <a:pPr algn="ctr"/>
-          </a:p>
-        </p:txBody>
-      </p:sp>
-      <p:sp>
-        <p:nvSpPr>
-          <p:cNvPr id="11" name="TextBox 10"/>
-          <p:cNvSpPr txBox="1"/>
-          <p:nvPr/>
-        </p:nvSpPr>
-        <p:spPr>
-          <a:xfrm>
-            <a:off x="868680" y="4014215"/>
-            <a:ext cx="548640" cy="548640"/>
-          </a:xfrm>
-          <a:prstGeom prst="rect">
-            <a:avLst/>
-          </a:prstGeom>
-          <a:noFill/>
-        </p:spPr>
-        <p:txBody>
-          <a:bodyPr wrap="square" anchor="ctr" lIns="0" rIns="0" tIns="0" bIns="0">
-            <a:spAutoFit/>
-          </a:bodyPr>
-          <a:lstStyle/>
-          <a:p>
-            <a:pPr algn="ctr">
-              <a:spcAft>
-                <a:spcPts val="200"/>
-              </a:spcAft>
-            </a:pPr>
-            <a:r>
-              <a:rPr sz="1400" b="1" i="0">
-                <a:solidFill>
-                  <a:srgbClr val="121316"/>
-                </a:solidFill>
-                <a:latin typeface="Arial"/>
-              </a:rPr>
-              <a:t>2</a:t>
-            </a:r>
-          </a:p>
-        </p:txBody>
-      </p:sp>
-      <p:sp>
-        <p:nvSpPr>
-          <p:cNvPr id="12" name="TextBox 11"/>
-          <p:cNvSpPr txBox="1"/>
-          <p:nvPr/>
-        </p:nvSpPr>
-        <p:spPr>
-          <a:xfrm>
-            <a:off x="1737360" y="4005072"/>
-            <a:ext cx="9509760" cy="1005840"/>
-          </a:xfrm>
-          <a:prstGeom prst="rect">
-            <a:avLst/>
-          </a:prstGeom>
-          <a:noFill/>
-        </p:spPr>
-        <p:txBody>
-          <a:bodyPr wrap="square" anchor="t" lIns="0" rIns="0" tIns="0" bIns="0">
-            <a:spAutoFit/>
-          </a:bodyPr>
-          <a:lstStyle/>
-          <a:p>
-            <a:pPr algn="l">
-              <a:spcAft>
-                <a:spcPts val="300"/>
-              </a:spcAft>
-            </a:pPr>
-            <a:r>
-              <a:rPr sz="2000" b="1" i="0">
-                <a:solidFill>
-                  <a:srgbClr val="121316"/>
-                </a:solidFill>
-                <a:latin typeface="Arial"/>
-              </a:rPr>
-              <a:t>Einen Website-Auftrag bauen</a:t>
-            </a:r>
-          </a:p>
-          <a:p>
-            <a:pPr algn="l">
-              <a:spcAft>
-                <a:spcPts val="200"/>
-              </a:spcAft>
-            </a:pPr>
-            <a:r>
-              <a:rPr sz="1400" b="0" i="0">
-                <a:solidFill>
-                  <a:srgbClr val="71717A"/>
-                </a:solidFill>
-                <a:latin typeface="Arial"/>
-              </a:rPr>
-              <a:t>Mit dem Baukasten einen klaren Prompt zusammenstellen.</a:t>
-            </a:r>
-          </a:p>
-        </p:txBody>
-      </p:sp>
-      <p:cxnSp>
-        <p:nvCxnSpPr>
-          <p:cNvPr id="13" name="Connector 12"/>
-          <p:cNvCxnSpPr/>
-          <p:nvPr/>
-        </p:nvCxnSpPr>
-        <p:spPr>
-          <a:xfrm>
-            <a:off x="868680" y="5029200"/>
-            <a:ext cx="10469879" cy="0"/>
-          </a:xfrm>
-          <a:prstGeom prst="line">
-            <a:avLst/>
-          </a:prstGeom>
-          <a:ln w="12700">
-            <a:solidFill>
-              <a:srgbClr val="E4E4E7"/>
-            </a:solidFill>
-          </a:ln>
-          <a:effectLst/>
-        </p:spPr>
-      </p:cxnSp>
-      <p:sp>
-        <p:nvSpPr>
-          <p:cNvPr id="14" name="Oval 13"/>
-          <p:cNvSpPr/>
-          <p:nvPr/>
-        </p:nvSpPr>
-        <p:spPr>
-          <a:xfrm>
-            <a:off x="868680" y="5321808"/>
-            <a:ext cx="548640" cy="548640"/>
-          </a:xfrm>
-          <a:prstGeom prst="ellipse">
-            <a:avLst/>
-          </a:prstGeom>
-          <a:noFill/>
-          <a:ln w="16510">
-            <a:solidFill>
-              <a:srgbClr val="121316"/>
-            </a:solidFill>
-          </a:ln>
-          <a:effectLst/>
-        </p:spPr>
-        <p:txBody>
-          <a:bodyPr rtlCol="0" anchor="ctr"/>
-          <a:lstStyle/>
-          <a:p>
-            <a:pPr algn="ctr"/>
-          </a:p>
-        </p:txBody>
-      </p:sp>
-      <p:sp>
-        <p:nvSpPr>
-          <p:cNvPr id="15" name="TextBox 14"/>
-          <p:cNvSpPr txBox="1"/>
-          <p:nvPr/>
-        </p:nvSpPr>
-        <p:spPr>
-          <a:xfrm>
-            <a:off x="868680" y="5294376"/>
-            <a:ext cx="548640" cy="548640"/>
-          </a:xfrm>
-          <a:prstGeom prst="rect">
-            <a:avLst/>
-          </a:prstGeom>
-          <a:noFill/>
-        </p:spPr>
-        <p:txBody>
-          <a:bodyPr wrap="square" anchor="ctr" lIns="0" rIns="0" tIns="0" bIns="0">
-            <a:spAutoFit/>
-          </a:bodyPr>
-          <a:lstStyle/>
-          <a:p>
-            <a:pPr algn="ctr">
-              <a:spcAft>
-                <a:spcPts val="200"/>
-              </a:spcAft>
-            </a:pPr>
-            <a:r>
-              <a:rPr sz="1400" b="1" i="0">
-                <a:solidFill>
-                  <a:srgbClr val="121316"/>
-                </a:solidFill>
-                <a:latin typeface="Arial"/>
-              </a:rPr>
-              <a:t>3</a:t>
-            </a:r>
-          </a:p>
-        </p:txBody>
-      </p:sp>
-      <p:sp>
-        <p:nvSpPr>
-          <p:cNvPr id="16" name="TextBox 15"/>
-          <p:cNvSpPr txBox="1"/>
-          <p:nvPr/>
-        </p:nvSpPr>
-        <p:spPr>
-          <a:xfrm>
-            <a:off x="1737360" y="5285232"/>
-            <a:ext cx="9509760" cy="1005840"/>
-          </a:xfrm>
-          <a:prstGeom prst="rect">
-            <a:avLst/>
-          </a:prstGeom>
-          <a:noFill/>
-        </p:spPr>
-        <p:txBody>
-          <a:bodyPr wrap="square" anchor="t" lIns="0" rIns="0" tIns="0" bIns="0">
-            <a:spAutoFit/>
-          </a:bodyPr>
-          <a:lstStyle/>
-          <a:p>
-            <a:pPr algn="l">
-              <a:spcAft>
-                <a:spcPts val="300"/>
-              </a:spcAft>
-            </a:pPr>
-            <a:r>
-              <a:rPr sz="2000" b="1" i="0">
-                <a:solidFill>
-                  <a:srgbClr val="121316"/>
-                </a:solidFill>
-                <a:latin typeface="Arial"/>
-              </a:rPr>
-              <a:t>Eine erste Website erzeugen</a:t>
-            </a:r>
-          </a:p>
-          <a:p>
-            <a:pPr algn="l">
-              <a:spcAft>
-                <a:spcPts val="200"/>
-              </a:spcAft>
-            </a:pPr>
-            <a:r>
-              <a:rPr sz="1400" b="0" i="0">
-                <a:solidFill>
-                  <a:srgbClr val="71717A"/>
-                </a:solidFill>
-                <a:latin typeface="Arial"/>
-              </a:rPr>
-              <a:t>Prompt in AI Studio einfügen, Vorschau sehen.</a:t>
-            </a:r>
-          </a:p>
-        </p:txBody>
-      </p:sp>
-      <p:cxnSp>
-        <p:nvCxnSpPr>
-          <p:cNvPr id="17" name="Connector 16"/>
-          <p:cNvCxnSpPr/>
-          <p:nvPr/>
-        </p:nvCxnSpPr>
-        <p:spPr>
-          <a:xfrm>
-            <a:off x="868680" y="6309360"/>
-            <a:ext cx="10469879" cy="0"/>
-          </a:xfrm>
-          <a:prstGeom prst="line">
-            <a:avLst/>
-          </a:prstGeom>
-          <a:ln w="12700">
-            <a:solidFill>
-              <a:srgbClr val="E4E4E7"/>
-            </a:solidFill>
-          </a:ln>
-          <a:effectLst/>
-        </p:spPr>
-      </p:cxnSp>
+              <a:rPr sz="1900" b="0" i="0">
+                <a:solidFill>
+                  <a:srgbClr val="E7E7EA"/>
+                </a:solidFill>
+                <a:latin typeface="Arial"/>
+              </a:rPr>
+              <a:t>KI schreibt nicht nur Texte – sie baut ganze </a:t>
+            </a:r>
+            <a:r>
+              <a:rPr sz="1900" b="1" i="0">
+                <a:solidFill>
+                  <a:srgbClr val="FFFFFF"/>
+                </a:solidFill>
+                <a:latin typeface="Arial"/>
+              </a:rPr>
+              <a:t>Websites.</a:t>
+            </a:r>
+          </a:p>
+        </p:txBody>
+      </p:sp>
     </p:spTree>
   </p:cSld>
   <p:clrMapOvr>
@@ -6329,7 +5986,7 @@
             <a:avLst/>
           </a:prstGeom>
           <a:solidFill>
-            <a:srgbClr val="121316"/>
+            <a:srgbClr val="FFFFFF"/>
           </a:solidFill>
           <a:ln>
             <a:noFill/>
@@ -6352,7 +6009,7 @@
         </p:nvSpPr>
         <p:spPr>
           <a:xfrm>
-            <a:off x="868680" y="1005840"/>
+            <a:off x="868680" y="777240"/>
             <a:ext cx="10058400" cy="365760"/>
           </a:xfrm>
           <a:prstGeom prst="rect">
@@ -6374,11 +6031,11 @@
             <a:r>
               <a:rPr sz="1200" b="1" i="0">
                 <a:solidFill>
-                  <a:srgbClr val="A1A1AA"/>
-                </a:solidFill>
-                <a:latin typeface="Arial"/>
-              </a:rPr>
-              <a:t>EINSTIEG &amp; REAKTIVIEREN</a:t>
+                  <a:srgbClr val="71717A"/>
+                </a:solidFill>
+                <a:latin typeface="Arial"/>
+              </a:rPr>
+              <a:t>LERNZIELE · NACH MAGER</a:t>
             </a:r>
           </a:p>
         </p:txBody>
@@ -6391,8 +6048,8 @@
         </p:nvSpPr>
         <p:spPr>
           <a:xfrm>
-            <a:off x="868680" y="1737360"/>
-            <a:ext cx="10332720" cy="2194560"/>
+            <a:off x="868680" y="1234440"/>
+            <a:ext cx="10424160" cy="822960"/>
           </a:xfrm>
           <a:prstGeom prst="rect">
             <a:avLst/>
@@ -6406,49 +6063,18 @@
           <a:lstStyle/>
           <a:p>
             <a:pPr algn="l">
-              <a:lnSpc>
-                <a:spcPct val="112000"/>
-              </a:lnSpc>
               <a:spcAft>
                 <a:spcPts val="200"/>
               </a:spcAft>
             </a:pPr>
             <a:r>
-              <a:rPr sz="3600" b="1" i="0">
-                <a:solidFill>
-                  <a:srgbClr val="FFFFFF"/>
-                </a:solidFill>
-                <a:latin typeface="Arial"/>
-              </a:rPr>
-              <a:t>„Wer hätte gern eine </a:t>
-            </a:r>
-            <a:r>
-              <a:rPr sz="3600" b="1" i="0">
-                <a:solidFill>
-                  <a:srgbClr val="FFFFFF"/>
-                </a:solidFill>
-                <a:latin typeface="Arial"/>
-              </a:rPr>
-              <a:t>eigene Website</a:t>
-            </a:r>
-          </a:p>
-          <a:p>
-            <a:pPr algn="l">
-              <a:lnSpc>
-                <a:spcPct val="112000"/>
-              </a:lnSpc>
-              <a:spcAft>
-                <a:spcPts val="200"/>
-              </a:spcAft>
-            </a:pPr>
-            <a:r>
-              <a:rPr sz="3600" b="1" i="0">
-                <a:solidFill>
-                  <a:srgbClr val="FFFFFF"/>
-                </a:solidFill>
-                <a:latin typeface="Arial"/>
-              </a:rPr>
-              <a:t>– und wen schreckt der Aufwand ab?“</a:t>
+              <a:rPr sz="3300" b="1" i="0">
+                <a:solidFill>
+                  <a:srgbClr val="121316"/>
+                </a:solidFill>
+                <a:latin typeface="Arial"/>
+              </a:rPr>
+              <a:t>Was ihr danach könnt</a:t>
             </a:r>
           </a:p>
         </p:txBody>
@@ -6461,7 +6087,7 @@
         </p:nvCxnSpPr>
         <p:spPr>
           <a:xfrm>
-            <a:off x="868680" y="4114800"/>
+            <a:off x="868680" y="2468880"/>
             <a:ext cx="10469879" cy="0"/>
           </a:xfrm>
           <a:prstGeom prst="line">
@@ -6469,7 +6095,7 @@
           </a:prstGeom>
           <a:ln w="12700">
             <a:solidFill>
-              <a:srgbClr val="3F3F46"/>
+              <a:srgbClr val="E4E4E7"/>
             </a:solidFill>
           </a:ln>
           <a:effectLst/>
@@ -6477,14 +6103,83 @@
       </p:cxnSp>
       <p:sp>
         <p:nvSpPr>
-          <p:cNvPr id="6" name="TextBox 5"/>
+          <p:cNvPr id="6" name="Oval 5"/>
+          <p:cNvSpPr/>
+          <p:nvPr/>
+        </p:nvSpPr>
+        <p:spPr>
+          <a:xfrm>
+            <a:off x="868680" y="2761488"/>
+            <a:ext cx="548640" cy="548640"/>
+          </a:xfrm>
+          <a:prstGeom prst="ellipse">
+            <a:avLst/>
+          </a:prstGeom>
+          <a:noFill/>
+          <a:ln w="16510">
+            <a:solidFill>
+              <a:srgbClr val="121316"/>
+            </a:solidFill>
+          </a:ln>
+          <a:effectLst/>
+        </p:spPr>
+        <p:txBody>
+          <a:bodyPr rtlCol="0" anchor="ctr"/>
+          <a:lstStyle/>
+          <a:p>
+            <a:pPr algn="ctr"/>
+          </a:p>
+        </p:txBody>
+      </p:sp>
+      <p:sp>
+        <p:nvSpPr>
+          <p:cNvPr id="7" name="TextBox 6"/>
           <p:cNvSpPr txBox="1"/>
           <p:nvPr/>
         </p:nvSpPr>
         <p:spPr>
           <a:xfrm>
-            <a:off x="868680" y="4434840"/>
-            <a:ext cx="10332720" cy="1828800"/>
+            <a:off x="868680" y="2734056"/>
+            <a:ext cx="548640" cy="548640"/>
+          </a:xfrm>
+          <a:prstGeom prst="rect">
+            <a:avLst/>
+          </a:prstGeom>
+          <a:noFill/>
+        </p:spPr>
+        <p:txBody>
+          <a:bodyPr wrap="square" anchor="ctr" lIns="0" rIns="0" tIns="0" bIns="0">
+            <a:spAutoFit/>
+          </a:bodyPr>
+          <a:lstStyle/>
+          <a:p>
+            <a:pPr algn="ctr">
+              <a:spcAft>
+                <a:spcPts val="200"/>
+              </a:spcAft>
+            </a:pPr>
+            <a:r>
+              <a:rPr sz="1400" b="1" i="0">
+                <a:solidFill>
+                  <a:srgbClr val="121316"/>
+                </a:solidFill>
+                <a:latin typeface="Arial"/>
+              </a:rPr>
+              <a:t>1</a:t>
+            </a:r>
+          </a:p>
+        </p:txBody>
+      </p:sp>
+      <p:sp>
+        <p:nvSpPr>
+          <p:cNvPr id="8" name="TextBox 7"/>
+          <p:cNvSpPr txBox="1"/>
+          <p:nvPr/>
+        </p:nvSpPr>
+        <p:spPr>
+          <a:xfrm>
+            <a:off x="1737360" y="2724912"/>
+            <a:ext cx="9509760" cy="1005840"/>
           </a:xfrm>
           <a:prstGeom prst="rect">
             <a:avLst/>
@@ -6499,17 +6194,17 @@
           <a:p>
             <a:pPr algn="l">
               <a:spcAft>
-                <a:spcPts val="1000"/>
-              </a:spcAft>
-            </a:pPr>
-            <a:r>
-              <a:rPr sz="1900" b="0" i="0">
-                <a:solidFill>
-                  <a:srgbClr val="E7E7EA"/>
-                </a:solidFill>
-                <a:latin typeface="Arial"/>
-              </a:rPr>
-              <a:t>Wer hat schon einmal eine KI (z. B. ChatGPT) gefragt?</a:t>
+                <a:spcPts val="300"/>
+              </a:spcAft>
+            </a:pPr>
+            <a:r>
+              <a:rPr sz="2000" b="1" i="0">
+                <a:solidFill>
+                  <a:srgbClr val="121316"/>
+                </a:solidFill>
+                <a:latin typeface="Arial"/>
+              </a:rPr>
+              <a:t>Erklären, was Google AI Studio ist</a:t>
             </a:r>
           </a:p>
           <a:p>
@@ -6519,26 +6214,331 @@
               </a:spcAft>
             </a:pPr>
             <a:r>
-              <a:rPr sz="1900" b="0" i="0">
-                <a:solidFill>
-                  <a:srgbClr val="E7E7EA"/>
-                </a:solidFill>
-                <a:latin typeface="Arial"/>
-              </a:rPr>
-              <a:t>KI schreibt nicht nur Texte – sie baut ganze </a:t>
-            </a:r>
-            <a:r>
-              <a:rPr sz="1900" b="1" i="0">
-                <a:solidFill>
-                  <a:srgbClr val="FFFFFF"/>
-                </a:solidFill>
-                <a:latin typeface="Arial"/>
-              </a:rPr>
-              <a:t>Websites.</a:t>
-            </a:r>
-          </a:p>
-        </p:txBody>
-      </p:sp>
+              <a:rPr sz="1400" b="0" i="0">
+                <a:solidFill>
+                  <a:srgbClr val="71717A"/>
+                </a:solidFill>
+                <a:latin typeface="Arial"/>
+              </a:rPr>
+              <a:t>Zwei Beispiele nennen, was man damit bauen kann.</a:t>
+            </a:r>
+          </a:p>
+        </p:txBody>
+      </p:sp>
+      <p:cxnSp>
+        <p:nvCxnSpPr>
+          <p:cNvPr id="9" name="Connector 8"/>
+          <p:cNvCxnSpPr/>
+          <p:nvPr/>
+        </p:nvCxnSpPr>
+        <p:spPr>
+          <a:xfrm>
+            <a:off x="868680" y="3749039"/>
+            <a:ext cx="10469879" cy="0"/>
+          </a:xfrm>
+          <a:prstGeom prst="line">
+            <a:avLst/>
+          </a:prstGeom>
+          <a:ln w="12700">
+            <a:solidFill>
+              <a:srgbClr val="E4E4E7"/>
+            </a:solidFill>
+          </a:ln>
+          <a:effectLst/>
+        </p:spPr>
+      </p:cxnSp>
+      <p:sp>
+        <p:nvSpPr>
+          <p:cNvPr id="10" name="Oval 9"/>
+          <p:cNvSpPr/>
+          <p:nvPr/>
+        </p:nvSpPr>
+        <p:spPr>
+          <a:xfrm>
+            <a:off x="868680" y="4041648"/>
+            <a:ext cx="548640" cy="548640"/>
+          </a:xfrm>
+          <a:prstGeom prst="ellipse">
+            <a:avLst/>
+          </a:prstGeom>
+          <a:noFill/>
+          <a:ln w="16510">
+            <a:solidFill>
+              <a:srgbClr val="121316"/>
+            </a:solidFill>
+          </a:ln>
+          <a:effectLst/>
+        </p:spPr>
+        <p:txBody>
+          <a:bodyPr rtlCol="0" anchor="ctr"/>
+          <a:lstStyle/>
+          <a:p>
+            <a:pPr algn="ctr"/>
+          </a:p>
+        </p:txBody>
+      </p:sp>
+      <p:sp>
+        <p:nvSpPr>
+          <p:cNvPr id="11" name="TextBox 10"/>
+          <p:cNvSpPr txBox="1"/>
+          <p:nvPr/>
+        </p:nvSpPr>
+        <p:spPr>
+          <a:xfrm>
+            <a:off x="868680" y="4014215"/>
+            <a:ext cx="548640" cy="548640"/>
+          </a:xfrm>
+          <a:prstGeom prst="rect">
+            <a:avLst/>
+          </a:prstGeom>
+          <a:noFill/>
+        </p:spPr>
+        <p:txBody>
+          <a:bodyPr wrap="square" anchor="ctr" lIns="0" rIns="0" tIns="0" bIns="0">
+            <a:spAutoFit/>
+          </a:bodyPr>
+          <a:lstStyle/>
+          <a:p>
+            <a:pPr algn="ctr">
+              <a:spcAft>
+                <a:spcPts val="200"/>
+              </a:spcAft>
+            </a:pPr>
+            <a:r>
+              <a:rPr sz="1400" b="1" i="0">
+                <a:solidFill>
+                  <a:srgbClr val="121316"/>
+                </a:solidFill>
+                <a:latin typeface="Arial"/>
+              </a:rPr>
+              <a:t>2</a:t>
+            </a:r>
+          </a:p>
+        </p:txBody>
+      </p:sp>
+      <p:sp>
+        <p:nvSpPr>
+          <p:cNvPr id="12" name="TextBox 11"/>
+          <p:cNvSpPr txBox="1"/>
+          <p:nvPr/>
+        </p:nvSpPr>
+        <p:spPr>
+          <a:xfrm>
+            <a:off x="1737360" y="4005072"/>
+            <a:ext cx="9509760" cy="1005840"/>
+          </a:xfrm>
+          <a:prstGeom prst="rect">
+            <a:avLst/>
+          </a:prstGeom>
+          <a:noFill/>
+        </p:spPr>
+        <p:txBody>
+          <a:bodyPr wrap="square" anchor="t" lIns="0" rIns="0" tIns="0" bIns="0">
+            <a:spAutoFit/>
+          </a:bodyPr>
+          <a:lstStyle/>
+          <a:p>
+            <a:pPr algn="l">
+              <a:spcAft>
+                <a:spcPts val="300"/>
+              </a:spcAft>
+            </a:pPr>
+            <a:r>
+              <a:rPr sz="2000" b="1" i="0">
+                <a:solidFill>
+                  <a:srgbClr val="121316"/>
+                </a:solidFill>
+                <a:latin typeface="Arial"/>
+              </a:rPr>
+              <a:t>Einen Website-Auftrag bauen</a:t>
+            </a:r>
+          </a:p>
+          <a:p>
+            <a:pPr algn="l">
+              <a:spcAft>
+                <a:spcPts val="200"/>
+              </a:spcAft>
+            </a:pPr>
+            <a:r>
+              <a:rPr sz="1400" b="0" i="0">
+                <a:solidFill>
+                  <a:srgbClr val="71717A"/>
+                </a:solidFill>
+                <a:latin typeface="Arial"/>
+              </a:rPr>
+              <a:t>Mit dem Baukasten einen klaren Prompt zusammenstellen.</a:t>
+            </a:r>
+          </a:p>
+        </p:txBody>
+      </p:sp>
+      <p:cxnSp>
+        <p:nvCxnSpPr>
+          <p:cNvPr id="13" name="Connector 12"/>
+          <p:cNvCxnSpPr/>
+          <p:nvPr/>
+        </p:nvCxnSpPr>
+        <p:spPr>
+          <a:xfrm>
+            <a:off x="868680" y="5029200"/>
+            <a:ext cx="10469879" cy="0"/>
+          </a:xfrm>
+          <a:prstGeom prst="line">
+            <a:avLst/>
+          </a:prstGeom>
+          <a:ln w="12700">
+            <a:solidFill>
+              <a:srgbClr val="E4E4E7"/>
+            </a:solidFill>
+          </a:ln>
+          <a:effectLst/>
+        </p:spPr>
+      </p:cxnSp>
+      <p:sp>
+        <p:nvSpPr>
+          <p:cNvPr id="14" name="Oval 13"/>
+          <p:cNvSpPr/>
+          <p:nvPr/>
+        </p:nvSpPr>
+        <p:spPr>
+          <a:xfrm>
+            <a:off x="868680" y="5321808"/>
+            <a:ext cx="548640" cy="548640"/>
+          </a:xfrm>
+          <a:prstGeom prst="ellipse">
+            <a:avLst/>
+          </a:prstGeom>
+          <a:noFill/>
+          <a:ln w="16510">
+            <a:solidFill>
+              <a:srgbClr val="121316"/>
+            </a:solidFill>
+          </a:ln>
+          <a:effectLst/>
+        </p:spPr>
+        <p:txBody>
+          <a:bodyPr rtlCol="0" anchor="ctr"/>
+          <a:lstStyle/>
+          <a:p>
+            <a:pPr algn="ctr"/>
+          </a:p>
+        </p:txBody>
+      </p:sp>
+      <p:sp>
+        <p:nvSpPr>
+          <p:cNvPr id="15" name="TextBox 14"/>
+          <p:cNvSpPr txBox="1"/>
+          <p:nvPr/>
+        </p:nvSpPr>
+        <p:spPr>
+          <a:xfrm>
+            <a:off x="868680" y="5294376"/>
+            <a:ext cx="548640" cy="548640"/>
+          </a:xfrm>
+          <a:prstGeom prst="rect">
+            <a:avLst/>
+          </a:prstGeom>
+          <a:noFill/>
+        </p:spPr>
+        <p:txBody>
+          <a:bodyPr wrap="square" anchor="ctr" lIns="0" rIns="0" tIns="0" bIns="0">
+            <a:spAutoFit/>
+          </a:bodyPr>
+          <a:lstStyle/>
+          <a:p>
+            <a:pPr algn="ctr">
+              <a:spcAft>
+                <a:spcPts val="200"/>
+              </a:spcAft>
+            </a:pPr>
+            <a:r>
+              <a:rPr sz="1400" b="1" i="0">
+                <a:solidFill>
+                  <a:srgbClr val="121316"/>
+                </a:solidFill>
+                <a:latin typeface="Arial"/>
+              </a:rPr>
+              <a:t>3</a:t>
+            </a:r>
+          </a:p>
+        </p:txBody>
+      </p:sp>
+      <p:sp>
+        <p:nvSpPr>
+          <p:cNvPr id="16" name="TextBox 15"/>
+          <p:cNvSpPr txBox="1"/>
+          <p:nvPr/>
+        </p:nvSpPr>
+        <p:spPr>
+          <a:xfrm>
+            <a:off x="1737360" y="5285232"/>
+            <a:ext cx="9509760" cy="1005840"/>
+          </a:xfrm>
+          <a:prstGeom prst="rect">
+            <a:avLst/>
+          </a:prstGeom>
+          <a:noFill/>
+        </p:spPr>
+        <p:txBody>
+          <a:bodyPr wrap="square" anchor="t" lIns="0" rIns="0" tIns="0" bIns="0">
+            <a:spAutoFit/>
+          </a:bodyPr>
+          <a:lstStyle/>
+          <a:p>
+            <a:pPr algn="l">
+              <a:spcAft>
+                <a:spcPts val="300"/>
+              </a:spcAft>
+            </a:pPr>
+            <a:r>
+              <a:rPr sz="2000" b="1" i="0">
+                <a:solidFill>
+                  <a:srgbClr val="121316"/>
+                </a:solidFill>
+                <a:latin typeface="Arial"/>
+              </a:rPr>
+              <a:t>Eine erste Website erzeugen</a:t>
+            </a:r>
+          </a:p>
+          <a:p>
+            <a:pPr algn="l">
+              <a:spcAft>
+                <a:spcPts val="200"/>
+              </a:spcAft>
+            </a:pPr>
+            <a:r>
+              <a:rPr sz="1400" b="0" i="0">
+                <a:solidFill>
+                  <a:srgbClr val="71717A"/>
+                </a:solidFill>
+                <a:latin typeface="Arial"/>
+              </a:rPr>
+              <a:t>Prompt in AI Studio einfügen, Vorschau sehen.</a:t>
+            </a:r>
+          </a:p>
+        </p:txBody>
+      </p:sp>
+      <p:cxnSp>
+        <p:nvCxnSpPr>
+          <p:cNvPr id="17" name="Connector 16"/>
+          <p:cNvCxnSpPr/>
+          <p:nvPr/>
+        </p:nvCxnSpPr>
+        <p:spPr>
+          <a:xfrm>
+            <a:off x="868680" y="6309360"/>
+            <a:ext cx="10469879" cy="0"/>
+          </a:xfrm>
+          <a:prstGeom prst="line">
+            <a:avLst/>
+          </a:prstGeom>
+          <a:ln w="12700">
+            <a:solidFill>
+              <a:srgbClr val="E4E4E7"/>
+            </a:solidFill>
+          </a:ln>
+          <a:effectLst/>
+        </p:spPr>
+      </p:cxnSp>
     </p:spTree>
   </p:cSld>
   <p:clrMapOvr>
@@ -7547,7 +7547,7 @@
         <p:spPr>
           <a:xfrm>
             <a:off x="868680" y="1234440"/>
-            <a:ext cx="7315200" cy="822960"/>
+            <a:ext cx="10424160" cy="822960"/>
           </a:xfrm>
           <a:prstGeom prst="rect">
             <a:avLst/>
@@ -7585,8 +7585,8 @@
         </p:nvCxnSpPr>
         <p:spPr>
           <a:xfrm>
-            <a:off x="868680" y="2468880"/>
-            <a:ext cx="6766560" cy="0"/>
+            <a:off x="868680" y="2651760"/>
+            <a:ext cx="10469879" cy="0"/>
           </a:xfrm>
           <a:prstGeom prst="line">
             <a:avLst/>
@@ -7607,8 +7607,8 @@
         </p:nvSpPr>
         <p:spPr>
           <a:xfrm>
-            <a:off x="868680" y="2706624"/>
-            <a:ext cx="502920" cy="502920"/>
+            <a:off x="868680" y="2926079"/>
+            <a:ext cx="548640" cy="548640"/>
           </a:xfrm>
           <a:prstGeom prst="ellipse">
             <a:avLst/>
@@ -7637,8 +7637,8 @@
         </p:nvSpPr>
         <p:spPr>
           <a:xfrm>
-            <a:off x="868680" y="2679192"/>
-            <a:ext cx="502920" cy="502920"/>
+            <a:off x="868680" y="2898648"/>
+            <a:ext cx="548640" cy="548640"/>
           </a:xfrm>
           <a:prstGeom prst="rect">
             <a:avLst/>
@@ -7657,7 +7657,7 @@
               </a:spcAft>
             </a:pPr>
             <a:r>
-              <a:rPr sz="1300" b="1" i="0">
+              <a:rPr sz="1400" b="1" i="0">
                 <a:solidFill>
                   <a:srgbClr val="121316"/>
                 </a:solidFill>
@@ -7676,8 +7676,8 @@
         </p:nvSpPr>
         <p:spPr>
           <a:xfrm>
-            <a:off x="1691640" y="2651760"/>
-            <a:ext cx="5760720" cy="914400"/>
+            <a:off x="1737360" y="2871215"/>
+            <a:ext cx="9418320" cy="914400"/>
           </a:xfrm>
           <a:prstGeom prst="rect">
             <a:avLst/>
@@ -7692,33 +7692,33 @@
           <a:p>
             <a:pPr algn="l">
               <a:spcAft>
+                <a:spcPts val="300"/>
+              </a:spcAft>
+            </a:pPr>
+            <a:r>
+              <a:rPr sz="2000" b="1" i="0">
+                <a:solidFill>
+                  <a:srgbClr val="121316"/>
+                </a:solidFill>
+                <a:latin typeface="Arial"/>
+              </a:rPr>
+              <a:t>Baukasten ausfüllen</a:t>
+            </a:r>
+          </a:p>
+          <a:p>
+            <a:pPr algn="l">
+              <a:spcAft>
                 <a:spcPts val="200"/>
               </a:spcAft>
             </a:pPr>
             <a:r>
-              <a:rPr sz="1800" b="1" i="0">
-                <a:solidFill>
-                  <a:srgbClr val="121316"/>
-                </a:solidFill>
-                <a:latin typeface="Arial"/>
-              </a:rPr>
-              <a:t>Baukasten ausfüllen</a:t>
-            </a:r>
-          </a:p>
-          <a:p>
-            <a:pPr algn="l">
-              <a:spcAft>
-                <a:spcPts val="200"/>
-              </a:spcAft>
-            </a:pPr>
-            <a:r>
-              <a:rPr sz="1300" b="0" i="0">
+              <a:rPr sz="1400" b="0" i="0">
                 <a:solidFill>
                   <a:srgbClr val="71717A"/>
                 </a:solidFill>
                 <a:latin typeface="Arial"/>
               </a:rPr>
-              <a:t>Fragen beantworten – der Prompt entsteht.</a:t>
+              <a:t>Fragen beantworten – der Prompt entsteht automatisch.</a:t>
             </a:r>
           </a:p>
         </p:txBody>
@@ -7731,8 +7731,8 @@
         </p:nvCxnSpPr>
         <p:spPr>
           <a:xfrm>
-            <a:off x="868680" y="3520440"/>
-            <a:ext cx="6766560" cy="0"/>
+            <a:off x="868680" y="3794760"/>
+            <a:ext cx="10469879" cy="0"/>
           </a:xfrm>
           <a:prstGeom prst="line">
             <a:avLst/>
@@ -7753,8 +7753,8 @@
         </p:nvSpPr>
         <p:spPr>
           <a:xfrm>
-            <a:off x="868680" y="3758184"/>
-            <a:ext cx="502920" cy="502920"/>
+            <a:off x="868680" y="4069080"/>
+            <a:ext cx="548640" cy="548640"/>
           </a:xfrm>
           <a:prstGeom prst="ellipse">
             <a:avLst/>
@@ -7783,8 +7783,8 @@
         </p:nvSpPr>
         <p:spPr>
           <a:xfrm>
-            <a:off x="868680" y="3730752"/>
-            <a:ext cx="502920" cy="502920"/>
+            <a:off x="868680" y="4041648"/>
+            <a:ext cx="548640" cy="548640"/>
           </a:xfrm>
           <a:prstGeom prst="rect">
             <a:avLst/>
@@ -7803,7 +7803,7 @@
               </a:spcAft>
             </a:pPr>
             <a:r>
-              <a:rPr sz="1300" b="1" i="0">
+              <a:rPr sz="1400" b="1" i="0">
                 <a:solidFill>
                   <a:srgbClr val="121316"/>
                 </a:solidFill>
@@ -7822,8 +7822,8 @@
         </p:nvSpPr>
         <p:spPr>
           <a:xfrm>
-            <a:off x="1691640" y="3703320"/>
-            <a:ext cx="5760720" cy="914400"/>
+            <a:off x="1737360" y="4014216"/>
+            <a:ext cx="9418320" cy="914400"/>
           </a:xfrm>
           <a:prstGeom prst="rect">
             <a:avLst/>
@@ -7838,33 +7838,33 @@
           <a:p>
             <a:pPr algn="l">
               <a:spcAft>
+                <a:spcPts val="300"/>
+              </a:spcAft>
+            </a:pPr>
+            <a:r>
+              <a:rPr sz="2000" b="1" i="0">
+                <a:solidFill>
+                  <a:srgbClr val="121316"/>
+                </a:solidFill>
+                <a:latin typeface="Arial"/>
+              </a:rPr>
+              <a:t>Prompt kopieren</a:t>
+            </a:r>
+          </a:p>
+          <a:p>
+            <a:pPr algn="l">
+              <a:spcAft>
                 <a:spcPts val="200"/>
               </a:spcAft>
             </a:pPr>
             <a:r>
-              <a:rPr sz="1800" b="1" i="0">
-                <a:solidFill>
-                  <a:srgbClr val="121316"/>
-                </a:solidFill>
-                <a:latin typeface="Arial"/>
-              </a:rPr>
-              <a:t>Prompt kopieren</a:t>
-            </a:r>
-          </a:p>
-          <a:p>
-            <a:pPr algn="l">
-              <a:spcAft>
-                <a:spcPts val="200"/>
-              </a:spcAft>
-            </a:pPr>
-            <a:r>
-              <a:rPr sz="1300" b="0" i="0">
+              <a:rPr sz="1400" b="0" i="0">
                 <a:solidFill>
                   <a:srgbClr val="71717A"/>
                 </a:solidFill>
                 <a:latin typeface="Arial"/>
               </a:rPr>
-              <a:t>Ein Klick.</a:t>
+              <a:t>Ein Klick auf „Prompt kopieren“.</a:t>
             </a:r>
           </a:p>
         </p:txBody>
@@ -7877,8 +7877,8 @@
         </p:nvCxnSpPr>
         <p:spPr>
           <a:xfrm>
-            <a:off x="868680" y="4572000"/>
-            <a:ext cx="6766560" cy="0"/>
+            <a:off x="868680" y="4937760"/>
+            <a:ext cx="10469879" cy="0"/>
           </a:xfrm>
           <a:prstGeom prst="line">
             <a:avLst/>
@@ -7899,8 +7899,8 @@
         </p:nvSpPr>
         <p:spPr>
           <a:xfrm>
-            <a:off x="868680" y="4809744"/>
-            <a:ext cx="502920" cy="502920"/>
+            <a:off x="868680" y="5212080"/>
+            <a:ext cx="548640" cy="548640"/>
           </a:xfrm>
           <a:prstGeom prst="ellipse">
             <a:avLst/>
@@ -7929,8 +7929,8 @@
         </p:nvSpPr>
         <p:spPr>
           <a:xfrm>
-            <a:off x="868680" y="4782312"/>
-            <a:ext cx="502920" cy="502920"/>
+            <a:off x="868680" y="5184648"/>
+            <a:ext cx="548640" cy="548640"/>
           </a:xfrm>
           <a:prstGeom prst="rect">
             <a:avLst/>
@@ -7949,7 +7949,7 @@
               </a:spcAft>
             </a:pPr>
             <a:r>
-              <a:rPr sz="1300" b="1" i="0">
+              <a:rPr sz="1400" b="1" i="0">
                 <a:solidFill>
                   <a:srgbClr val="121316"/>
                 </a:solidFill>
@@ -7968,8 +7968,8 @@
         </p:nvSpPr>
         <p:spPr>
           <a:xfrm>
-            <a:off x="1691640" y="4754880"/>
-            <a:ext cx="5760720" cy="914400"/>
+            <a:off x="1737360" y="5157216"/>
+            <a:ext cx="9418320" cy="914400"/>
           </a:xfrm>
           <a:prstGeom prst="rect">
             <a:avLst/>
@@ -7984,33 +7984,33 @@
           <a:p>
             <a:pPr algn="l">
               <a:spcAft>
+                <a:spcPts val="300"/>
+              </a:spcAft>
+            </a:pPr>
+            <a:r>
+              <a:rPr sz="2000" b="1" i="0">
+                <a:solidFill>
+                  <a:srgbClr val="121316"/>
+                </a:solidFill>
+                <a:latin typeface="Arial"/>
+              </a:rPr>
+              <a:t>In AI Studio einfügen</a:t>
+            </a:r>
+          </a:p>
+          <a:p>
+            <a:pPr algn="l">
+              <a:spcAft>
                 <a:spcPts val="200"/>
               </a:spcAft>
             </a:pPr>
             <a:r>
-              <a:rPr sz="1800" b="1" i="0">
-                <a:solidFill>
-                  <a:srgbClr val="121316"/>
-                </a:solidFill>
-                <a:latin typeface="Arial"/>
-              </a:rPr>
-              <a:t>In AI Studio einfügen</a:t>
-            </a:r>
-          </a:p>
-          <a:p>
-            <a:pPr algn="l">
-              <a:spcAft>
-                <a:spcPts val="200"/>
-              </a:spcAft>
-            </a:pPr>
-            <a:r>
-              <a:rPr sz="1300" b="0" i="0">
+              <a:rPr sz="1400" b="0" i="0">
                 <a:solidFill>
                   <a:srgbClr val="71717A"/>
                 </a:solidFill>
                 <a:latin typeface="Arial"/>
               </a:rPr>
-              <a:t>Einfügen, abschicken, Vorschau.</a:t>
+              <a:t>Einfügen, abschicken – die Vorschau erscheint.</a:t>
             </a:r>
           </a:p>
         </p:txBody>
@@ -8023,8 +8023,8 @@
         </p:nvCxnSpPr>
         <p:spPr>
           <a:xfrm>
-            <a:off x="868680" y="5623560"/>
-            <a:ext cx="6766560" cy="0"/>
+            <a:off x="868680" y="6080760"/>
+            <a:ext cx="10469879" cy="0"/>
           </a:xfrm>
           <a:prstGeom prst="line">
             <a:avLst/>
@@ -8037,154 +8037,6 @@
           <a:effectLst/>
         </p:spPr>
       </p:cxnSp>
-      <p:sp>
-        <p:nvSpPr>
-          <p:cNvPr id="18" name="Rectangle 17"/>
-          <p:cNvSpPr/>
-          <p:nvPr/>
-        </p:nvSpPr>
-        <p:spPr>
-          <a:xfrm>
-            <a:off x="8732520" y="2468880"/>
-            <a:ext cx="2606040" cy="3246120"/>
-          </a:xfrm>
-          <a:prstGeom prst="rect">
-            <a:avLst/>
-          </a:prstGeom>
-          <a:noFill/>
-          <a:ln w="12700">
-            <a:solidFill>
-              <a:srgbClr val="E4E4E7"/>
-            </a:solidFill>
-          </a:ln>
-          <a:effectLst/>
-        </p:spPr>
-        <p:txBody>
-          <a:bodyPr rtlCol="0" anchor="ctr"/>
-          <a:lstStyle/>
-          <a:p>
-            <a:pPr algn="ctr"/>
-          </a:p>
-        </p:txBody>
-      </p:sp>
-      <p:sp>
-        <p:nvSpPr>
-          <p:cNvPr id="19" name="TextBox 18"/>
-          <p:cNvSpPr txBox="1"/>
-          <p:nvPr/>
-        </p:nvSpPr>
-        <p:spPr>
-          <a:xfrm>
-            <a:off x="8732520" y="2697480"/>
-            <a:ext cx="2606040" cy="365760"/>
-          </a:xfrm>
-          <a:prstGeom prst="rect">
-            <a:avLst/>
-          </a:prstGeom>
-          <a:noFill/>
-        </p:spPr>
-        <p:txBody>
-          <a:bodyPr wrap="square" anchor="t" lIns="0" rIns="0" tIns="0" bIns="0">
-            <a:spAutoFit/>
-          </a:bodyPr>
-          <a:lstStyle/>
-          <a:p>
-            <a:pPr algn="ctr">
-              <a:spcAft>
-                <a:spcPts val="200"/>
-              </a:spcAft>
-            </a:pPr>
-            <a:r>
-              <a:rPr sz="1100" b="1" i="0">
-                <a:solidFill>
-                  <a:srgbClr val="71717A"/>
-                </a:solidFill>
-                <a:latin typeface="Arial"/>
-              </a:rPr>
-              <a:t>SCANNEN</a:t>
-            </a:r>
-          </a:p>
-        </p:txBody>
-      </p:sp>
-      <p:pic>
-        <p:nvPicPr>
-          <p:cNvPr id="20" name="Picture 19" descr="qr.png"/>
-          <p:cNvPicPr>
-            <a:picLocks noChangeAspect="1"/>
-          </p:cNvPicPr>
-          <p:nvPr/>
-        </p:nvPicPr>
-        <p:blipFill>
-          <a:blip r:embed="rId2"/>
-          <a:stretch>
-            <a:fillRect/>
-          </a:stretch>
-        </p:blipFill>
-        <p:spPr>
-          <a:xfrm>
-            <a:off x="9390888" y="3108960"/>
-            <a:ext cx="1280160" cy="1280160"/>
-          </a:xfrm>
-          <a:prstGeom prst="rect">
-            <a:avLst/>
-          </a:prstGeom>
-        </p:spPr>
-      </p:pic>
-      <p:sp>
-        <p:nvSpPr>
-          <p:cNvPr id="21" name="TextBox 20"/>
-          <p:cNvSpPr txBox="1"/>
-          <p:nvPr/>
-        </p:nvSpPr>
-        <p:spPr>
-          <a:xfrm>
-            <a:off x="8823960" y="4617720"/>
-            <a:ext cx="2423160" cy="1005840"/>
-          </a:xfrm>
-          <a:prstGeom prst="rect">
-            <a:avLst/>
-          </a:prstGeom>
-          <a:noFill/>
-        </p:spPr>
-        <p:txBody>
-          <a:bodyPr wrap="square" anchor="t" lIns="0" rIns="0" tIns="0" bIns="0">
-            <a:spAutoFit/>
-          </a:bodyPr>
-          <a:lstStyle/>
-          <a:p>
-            <a:pPr algn="ctr">
-              <a:spcAft>
-                <a:spcPts val="200"/>
-              </a:spcAft>
-            </a:pPr>
-            <a:r>
-              <a:rPr sz="1100" b="1" i="0">
-                <a:solidFill>
-                  <a:srgbClr val="2563EB"/>
-                </a:solidFill>
-                <a:latin typeface="Arial"/>
-              </a:rPr>
-              <a:t>criseone.github.io/</a:t>
-            </a:r>
-          </a:p>
-          <a:p>
-            <a:pPr algn="ctr">
-              <a:spcAft>
-                <a:spcPts val="200"/>
-              </a:spcAft>
-            </a:pPr>
-            <a:r>
-              <a:rPr sz="1100" b="1" i="0">
-                <a:solidFill>
-                  <a:srgbClr val="2563EB"/>
-                </a:solidFill>
-                <a:latin typeface="Arial"/>
-              </a:rPr>
-              <a:t>meine-website-ai-studio</a:t>
-            </a:r>
-          </a:p>
-        </p:txBody>
-      </p:sp>
     </p:spTree>
   </p:cSld>
   <p:clrMapOvr>

--- a/unterlagen/slides.pptx
+++ b/unterlagen/slides.pptx
@@ -6,9 +6,9 @@
   </p:sldMasterIdLst>
   <p:sldIdLst>
     <p:sldId id="256" r:id="rId7"/>
-    <p:sldId id="257" r:id="rId8"/>
     <p:sldId id="258" r:id="rId9"/>
     <p:sldId id="259" r:id="rId10"/>
+    <p:sldId id="257" r:id="rId8"/>
     <p:sldId id="260" r:id="rId11"/>
     <p:sldId id="261" r:id="rId12"/>
     <p:sldId id="262" r:id="rId13"/>
@@ -511,7 +511,7 @@
           <a:lstStyle/>
           <a:p>
             <a:r>
-              <a:t>A – Ausrichten (0:00–0:03). Begrüssen, kurz persönlich abholen: Wer hätte gern eine eigene Website? Thema und Dauer nennen, betonen: heute geht es ums selbst Ausprobieren.</a:t>
+              <a:t>A – Ausrichten (0:00–0:03). Begrüssen, kurz persönlich abholen: Wer hätte gern eine eigene Website? Thema und Dauer nennen, betonen: heute geht es ums selbst Ausprobieren. Gleich zu Beginn live eine Website starten (vorbereiteter Prompt, „Go“ drücken) — sie baut im Hintergrund und wird am Schluss enthüllt (so ist die ganze Lektion die Wartezeit). Fuchs Communications im zweiten Tab als Backup.</a:t>
             </a:r>
           </a:p>
         </p:txBody>
@@ -1071,7 +1071,7 @@
           <a:lstStyle/>
           <a:p>
             <a:r>
-              <a:t>V – Verarbeiten (0:11–0:19). Aktivste Phase (~8 Min.). Die Teilnehmenden bauen ihren Prompt und starten die Generierung – sie läuft mehrere Minuten weiter, also nicht abwarten. Herumgehen, Hilfestellung geben. Fertige Ergebnisse später im Gruppenchat teilen. Tipp für Einsteiger:innen: den Schalter „Einfach &amp; schnell“ im Baukasten anhaken — schnelleres, überschaubareres Ergebnis.</a:t>
+              <a:t>V – Verarbeiten (0:11–0:19). Aktivste Phase (~8 Min.). Die Teilnehmenden bauen ihren Prompt und starten die Generierung – sie läuft mehrere Minuten weiter, also nicht abwarten. Herumgehen, Hilfestellung geben. Fertige Ergebnisse später im Gruppenchat teilen. Wartezeit für einen kurzen Austausch zur eigenen Idee nutzen.</a:t>
             </a:r>
           </a:p>
         </p:txBody>
@@ -1141,7 +1141,7 @@
           <a:lstStyle/>
           <a:p>
             <a:r>
-              <a:t>A – Auswerten (0:19–0:23). Lernzielkontrolle: drei Schritte und zwei Bau-Beispiele nennen lassen (Murmelrunde). Fragen zulassen.</a:t>
+              <a:t>A – Auswerten (0:19–0:23). Zuerst die zu Beginn gestartete Website enthüllen (Aha-Moment). Dann Lernzielkontrolle: drei Schritte und zwei Bau-Beispiele nennen lassen (Murmelrunde). Fragen zulassen. Ergebnisse der TN später im Gruppenchat. Backup: Fuchs Communications zeigen, falls die Live-Website nicht fertig oder fehlerhaft ist.</a:t>
             </a:r>
           </a:p>
         </p:txBody>
@@ -4311,7 +4311,7 @@
                 </a:solidFill>
                 <a:latin typeface="Arial"/>
               </a:rPr>
-              <a:t>Ohne Programmieren – beschreiben, die KI baut.</a:t>
+              <a:t>Wie baut man 2026 eine Website — oder eine App?</a:t>
             </a:r>
           </a:p>
         </p:txBody>
@@ -4372,7 +4372,7 @@
                 </a:solidFill>
                 <a:latin typeface="Arial"/>
               </a:rPr>
-              <a:t>20–25 Min.      Absolute Einsteiger:innen      Name / Datum: ______________</a:t>
+              <a:t>20–25 Min.      Absolute Einsteiger:innen      Tim Fuchs · 05.09.2026</a:t>
             </a:r>
           </a:p>
         </p:txBody>
@@ -4475,7 +4475,7 @@
                 </a:solidFill>
                 <a:latin typeface="Arial"/>
               </a:rPr>
-              <a:t>Eure Website ist nur einen Prompt entfernt.</a:t>
+              <a:t>Eure Websites sind fertig oder gerade noch am Bauen — und ihr wisst jetzt, wie es geht.</a:t>
             </a:r>
           </a:p>
         </p:txBody>
@@ -4621,7 +4621,7 @@
                 </a:solidFill>
                 <a:latin typeface="Arial"/>
               </a:rPr>
-              <a:t>Kurz herumgehen, Ideen holen.</a:t>
+              <a:t>Fertig oder in Arbeit — kurz herumgehen, Ideen holen.</a:t>
             </a:r>
           </a:p>
         </p:txBody>
@@ -4866,7 +4866,7 @@
             <a:avLst/>
           </a:prstGeom>
           <a:solidFill>
-            <a:srgbClr val="121316"/>
+            <a:srgbClr val="FFFFFF"/>
           </a:solidFill>
           <a:ln>
             <a:noFill/>
@@ -4889,7 +4889,7 @@
         </p:nvSpPr>
         <p:spPr>
           <a:xfrm>
-            <a:off x="868680" y="1005840"/>
+            <a:off x="868680" y="777240"/>
             <a:ext cx="10058400" cy="365760"/>
           </a:xfrm>
           <a:prstGeom prst="rect">
@@ -4911,11 +4911,11 @@
             <a:r>
               <a:rPr sz="1200" b="1" i="0">
                 <a:solidFill>
-                  <a:srgbClr val="A1A1AA"/>
-                </a:solidFill>
-                <a:latin typeface="Arial"/>
-              </a:rPr>
-              <a:t>EINSTIEG &amp; REAKTIVIEREN</a:t>
+                  <a:srgbClr val="71717A"/>
+                </a:solidFill>
+                <a:latin typeface="Arial"/>
+              </a:rPr>
+              <a:t>ABLAUF · ARIVA</a:t>
             </a:r>
           </a:p>
         </p:txBody>
@@ -4928,8 +4928,8 @@
         </p:nvSpPr>
         <p:spPr>
           <a:xfrm>
-            <a:off x="868680" y="1737360"/>
-            <a:ext cx="10332720" cy="2194560"/>
+            <a:off x="868680" y="1234440"/>
+            <a:ext cx="10424160" cy="822960"/>
           </a:xfrm>
           <a:prstGeom prst="rect">
             <a:avLst/>
@@ -4943,49 +4943,18 @@
           <a:lstStyle/>
           <a:p>
             <a:pPr algn="l">
-              <a:lnSpc>
-                <a:spcPct val="112000"/>
-              </a:lnSpc>
               <a:spcAft>
                 <a:spcPts val="200"/>
               </a:spcAft>
             </a:pPr>
             <a:r>
-              <a:rPr sz="3600" b="1" i="0">
-                <a:solidFill>
-                  <a:srgbClr val="FFFFFF"/>
-                </a:solidFill>
-                <a:latin typeface="Arial"/>
-              </a:rPr>
-              <a:t>„Wer hätte gern eine </a:t>
-            </a:r>
-            <a:r>
-              <a:rPr sz="3600" b="1" i="0">
-                <a:solidFill>
-                  <a:srgbClr val="FFFFFF"/>
-                </a:solidFill>
-                <a:latin typeface="Arial"/>
-              </a:rPr>
-              <a:t>eigene Website</a:t>
-            </a:r>
-          </a:p>
-          <a:p>
-            <a:pPr algn="l">
-              <a:lnSpc>
-                <a:spcPct val="112000"/>
-              </a:lnSpc>
-              <a:spcAft>
-                <a:spcPts val="200"/>
-              </a:spcAft>
-            </a:pPr>
-            <a:r>
-              <a:rPr sz="3600" b="1" i="0">
-                <a:solidFill>
-                  <a:srgbClr val="FFFFFF"/>
-                </a:solidFill>
-                <a:latin typeface="Arial"/>
-              </a:rPr>
-              <a:t>– und wen schreckt der Aufwand ab?“</a:t>
+              <a:rPr sz="3300" b="1" i="0">
+                <a:solidFill>
+                  <a:srgbClr val="121316"/>
+                </a:solidFill>
+                <a:latin typeface="Arial"/>
+              </a:rPr>
+              <a:t>So läuft die Lektion</a:t>
             </a:r>
           </a:p>
         </p:txBody>
@@ -4998,7 +4967,7 @@
         </p:nvCxnSpPr>
         <p:spPr>
           <a:xfrm>
-            <a:off x="868680" y="4114800"/>
+            <a:off x="868680" y="2331720"/>
             <a:ext cx="10469879" cy="0"/>
           </a:xfrm>
           <a:prstGeom prst="line">
@@ -5006,7 +4975,7 @@
           </a:prstGeom>
           <a:ln w="12700">
             <a:solidFill>
-              <a:srgbClr val="3F3F46"/>
+              <a:srgbClr val="E4E4E7"/>
             </a:solidFill>
           </a:ln>
           <a:effectLst/>
@@ -5020,8 +4989,8 @@
         </p:nvSpPr>
         <p:spPr>
           <a:xfrm>
-            <a:off x="868680" y="4434840"/>
-            <a:ext cx="10332720" cy="1828800"/>
+            <a:off x="978407" y="2651760"/>
+            <a:ext cx="1874519" cy="822960"/>
           </a:xfrm>
           <a:prstGeom prst="rect">
             <a:avLst/>
@@ -5036,42 +5005,707 @@
           <a:p>
             <a:pPr algn="l">
               <a:spcAft>
-                <a:spcPts val="1000"/>
-              </a:spcAft>
-            </a:pPr>
-            <a:r>
-              <a:rPr sz="1900" b="0" i="0">
-                <a:solidFill>
-                  <a:srgbClr val="E7E7EA"/>
-                </a:solidFill>
-                <a:latin typeface="Arial"/>
-              </a:rPr>
-              <a:t>Wer hat schon einmal eine KI (z. B. ChatGPT) gefragt?</a:t>
-            </a:r>
-          </a:p>
+                <a:spcPts val="200"/>
+              </a:spcAft>
+            </a:pPr>
+            <a:r>
+              <a:rPr sz="3400" b="1" i="0">
+                <a:solidFill>
+                  <a:srgbClr val="121316"/>
+                </a:solidFill>
+                <a:latin typeface="Arial"/>
+              </a:rPr>
+              <a:t>A</a:t>
+            </a:r>
+          </a:p>
+        </p:txBody>
+      </p:sp>
+      <p:sp>
+        <p:nvSpPr>
+          <p:cNvPr id="7" name="TextBox 6"/>
+          <p:cNvSpPr txBox="1"/>
+          <p:nvPr/>
+        </p:nvSpPr>
+        <p:spPr>
+          <a:xfrm>
+            <a:off x="978407" y="3520439"/>
+            <a:ext cx="1874519" cy="1645920"/>
+          </a:xfrm>
+          <a:prstGeom prst="rect">
+            <a:avLst/>
+          </a:prstGeom>
+          <a:noFill/>
+        </p:spPr>
+        <p:txBody>
+          <a:bodyPr wrap="square" anchor="t" lIns="0" rIns="0" tIns="0" bIns="0">
+            <a:spAutoFit/>
+          </a:bodyPr>
+          <a:lstStyle/>
           <a:p>
             <a:pPr algn="l">
+              <a:lnSpc>
+                <a:spcPct val="100000"/>
+              </a:lnSpc>
+              <a:spcAft>
+                <a:spcPts val="300"/>
+              </a:spcAft>
+            </a:pPr>
+            <a:r>
+              <a:rPr sz="1500" b="1" i="0">
+                <a:solidFill>
+                  <a:srgbClr val="121316"/>
+                </a:solidFill>
+                <a:latin typeface="Arial"/>
+              </a:rPr>
+              <a:t>Ausrichten</a:t>
+            </a:r>
+          </a:p>
+          <a:p>
+            <a:pPr algn="l">
+              <a:spcAft>
+                <a:spcPts val="500"/>
+              </a:spcAft>
+            </a:pPr>
+            <a:r>
+              <a:rPr sz="1400" b="1" i="0">
+                <a:solidFill>
+                  <a:srgbClr val="71717A"/>
+                </a:solidFill>
+                <a:latin typeface="Arial"/>
+              </a:rPr>
+              <a:t>3′</a:t>
+            </a:r>
+          </a:p>
+          <a:p>
+            <a:pPr algn="l">
+              <a:lnSpc>
+                <a:spcPct val="105000"/>
+              </a:lnSpc>
               <a:spcAft>
                 <a:spcPts val="200"/>
               </a:spcAft>
             </a:pPr>
             <a:r>
-              <a:rPr sz="1900" b="0" i="0">
-                <a:solidFill>
-                  <a:srgbClr val="E7E7EA"/>
-                </a:solidFill>
-                <a:latin typeface="Arial"/>
-              </a:rPr>
-              <a:t>KI schreibt nicht nur Texte – sie baut ganze </a:t>
-            </a:r>
-            <a:r>
-              <a:rPr sz="1900" b="1" i="0">
-                <a:solidFill>
-                  <a:srgbClr val="FFFFFF"/>
-                </a:solidFill>
-                <a:latin typeface="Arial"/>
-              </a:rPr>
-              <a:t>Websites.</a:t>
+              <a:rPr sz="1200" b="0" i="0">
+                <a:solidFill>
+                  <a:srgbClr val="71717A"/>
+                </a:solidFill>
+                <a:latin typeface="Arial"/>
+              </a:rPr>
+              <a:t>Ziele &amp; Ablauf</a:t>
+            </a:r>
+          </a:p>
+        </p:txBody>
+      </p:sp>
+      <p:cxnSp>
+        <p:nvCxnSpPr>
+          <p:cNvPr id="8" name="Connector 7"/>
+          <p:cNvCxnSpPr/>
+          <p:nvPr/>
+        </p:nvCxnSpPr>
+        <p:spPr>
+          <a:xfrm>
+            <a:off x="2962656" y="2514600"/>
+            <a:ext cx="0" cy="2743200"/>
+          </a:xfrm>
+          <a:prstGeom prst="line">
+            <a:avLst/>
+          </a:prstGeom>
+          <a:ln w="12700">
+            <a:solidFill>
+              <a:srgbClr val="E4E4E7"/>
+            </a:solidFill>
+          </a:ln>
+          <a:effectLst/>
+        </p:spPr>
+      </p:cxnSp>
+      <p:sp>
+        <p:nvSpPr>
+          <p:cNvPr id="9" name="TextBox 8"/>
+          <p:cNvSpPr txBox="1"/>
+          <p:nvPr/>
+        </p:nvSpPr>
+        <p:spPr>
+          <a:xfrm>
+            <a:off x="3072384" y="2651760"/>
+            <a:ext cx="1874519" cy="822960"/>
+          </a:xfrm>
+          <a:prstGeom prst="rect">
+            <a:avLst/>
+          </a:prstGeom>
+          <a:noFill/>
+        </p:spPr>
+        <p:txBody>
+          <a:bodyPr wrap="square" anchor="t" lIns="0" rIns="0" tIns="0" bIns="0">
+            <a:spAutoFit/>
+          </a:bodyPr>
+          <a:lstStyle/>
+          <a:p>
+            <a:pPr algn="l">
+              <a:spcAft>
+                <a:spcPts val="200"/>
+              </a:spcAft>
+            </a:pPr>
+            <a:r>
+              <a:rPr sz="3400" b="1" i="0">
+                <a:solidFill>
+                  <a:srgbClr val="121316"/>
+                </a:solidFill>
+                <a:latin typeface="Arial"/>
+              </a:rPr>
+              <a:t>R</a:t>
+            </a:r>
+          </a:p>
+        </p:txBody>
+      </p:sp>
+      <p:sp>
+        <p:nvSpPr>
+          <p:cNvPr id="10" name="TextBox 9"/>
+          <p:cNvSpPr txBox="1"/>
+          <p:nvPr/>
+        </p:nvSpPr>
+        <p:spPr>
+          <a:xfrm>
+            <a:off x="3072384" y="3520439"/>
+            <a:ext cx="1874519" cy="1645920"/>
+          </a:xfrm>
+          <a:prstGeom prst="rect">
+            <a:avLst/>
+          </a:prstGeom>
+          <a:noFill/>
+        </p:spPr>
+        <p:txBody>
+          <a:bodyPr wrap="square" anchor="t" lIns="0" rIns="0" tIns="0" bIns="0">
+            <a:spAutoFit/>
+          </a:bodyPr>
+          <a:lstStyle/>
+          <a:p>
+            <a:pPr algn="l">
+              <a:lnSpc>
+                <a:spcPct val="100000"/>
+              </a:lnSpc>
+              <a:spcAft>
+                <a:spcPts val="300"/>
+              </a:spcAft>
+            </a:pPr>
+            <a:r>
+              <a:rPr sz="1500" b="1" i="0">
+                <a:solidFill>
+                  <a:srgbClr val="121316"/>
+                </a:solidFill>
+                <a:latin typeface="Arial"/>
+              </a:rPr>
+              <a:t>Reaktivieren</a:t>
+            </a:r>
+          </a:p>
+          <a:p>
+            <a:pPr algn="l">
+              <a:spcAft>
+                <a:spcPts val="500"/>
+              </a:spcAft>
+            </a:pPr>
+            <a:r>
+              <a:rPr sz="1400" b="1" i="0">
+                <a:solidFill>
+                  <a:srgbClr val="71717A"/>
+                </a:solidFill>
+                <a:latin typeface="Arial"/>
+              </a:rPr>
+              <a:t>3′</a:t>
+            </a:r>
+          </a:p>
+          <a:p>
+            <a:pPr algn="l">
+              <a:lnSpc>
+                <a:spcPct val="105000"/>
+              </a:lnSpc>
+              <a:spcAft>
+                <a:spcPts val="200"/>
+              </a:spcAft>
+            </a:pPr>
+            <a:r>
+              <a:rPr sz="1200" b="0" i="0">
+                <a:solidFill>
+                  <a:srgbClr val="71717A"/>
+                </a:solidFill>
+                <a:latin typeface="Arial"/>
+              </a:rPr>
+              <a:t>An KI anknüpfen</a:t>
+            </a:r>
+          </a:p>
+        </p:txBody>
+      </p:sp>
+      <p:cxnSp>
+        <p:nvCxnSpPr>
+          <p:cNvPr id="11" name="Connector 10"/>
+          <p:cNvCxnSpPr/>
+          <p:nvPr/>
+        </p:nvCxnSpPr>
+        <p:spPr>
+          <a:xfrm>
+            <a:off x="5056632" y="2514600"/>
+            <a:ext cx="0" cy="2743200"/>
+          </a:xfrm>
+          <a:prstGeom prst="line">
+            <a:avLst/>
+          </a:prstGeom>
+          <a:ln w="12700">
+            <a:solidFill>
+              <a:srgbClr val="E4E4E7"/>
+            </a:solidFill>
+          </a:ln>
+          <a:effectLst/>
+        </p:spPr>
+      </p:cxnSp>
+      <p:sp>
+        <p:nvSpPr>
+          <p:cNvPr id="12" name="TextBox 11"/>
+          <p:cNvSpPr txBox="1"/>
+          <p:nvPr/>
+        </p:nvSpPr>
+        <p:spPr>
+          <a:xfrm>
+            <a:off x="5166360" y="2651760"/>
+            <a:ext cx="1874519" cy="822960"/>
+          </a:xfrm>
+          <a:prstGeom prst="rect">
+            <a:avLst/>
+          </a:prstGeom>
+          <a:noFill/>
+        </p:spPr>
+        <p:txBody>
+          <a:bodyPr wrap="square" anchor="t" lIns="0" rIns="0" tIns="0" bIns="0">
+            <a:spAutoFit/>
+          </a:bodyPr>
+          <a:lstStyle/>
+          <a:p>
+            <a:pPr algn="l">
+              <a:spcAft>
+                <a:spcPts val="200"/>
+              </a:spcAft>
+            </a:pPr>
+            <a:r>
+              <a:rPr sz="3400" b="1" i="0">
+                <a:solidFill>
+                  <a:srgbClr val="121316"/>
+                </a:solidFill>
+                <a:latin typeface="Arial"/>
+              </a:rPr>
+              <a:t>I</a:t>
+            </a:r>
+          </a:p>
+        </p:txBody>
+      </p:sp>
+      <p:sp>
+        <p:nvSpPr>
+          <p:cNvPr id="13" name="TextBox 12"/>
+          <p:cNvSpPr txBox="1"/>
+          <p:nvPr/>
+        </p:nvSpPr>
+        <p:spPr>
+          <a:xfrm>
+            <a:off x="5166360" y="3520439"/>
+            <a:ext cx="1874519" cy="1645920"/>
+          </a:xfrm>
+          <a:prstGeom prst="rect">
+            <a:avLst/>
+          </a:prstGeom>
+          <a:noFill/>
+        </p:spPr>
+        <p:txBody>
+          <a:bodyPr wrap="square" anchor="t" lIns="0" rIns="0" tIns="0" bIns="0">
+            <a:spAutoFit/>
+          </a:bodyPr>
+          <a:lstStyle/>
+          <a:p>
+            <a:pPr algn="l">
+              <a:lnSpc>
+                <a:spcPct val="100000"/>
+              </a:lnSpc>
+              <a:spcAft>
+                <a:spcPts val="300"/>
+              </a:spcAft>
+            </a:pPr>
+            <a:r>
+              <a:rPr sz="1500" b="1" i="0">
+                <a:solidFill>
+                  <a:srgbClr val="121316"/>
+                </a:solidFill>
+                <a:latin typeface="Arial"/>
+              </a:rPr>
+              <a:t>Informieren</a:t>
+            </a:r>
+          </a:p>
+          <a:p>
+            <a:pPr algn="l">
+              <a:spcAft>
+                <a:spcPts val="500"/>
+              </a:spcAft>
+            </a:pPr>
+            <a:r>
+              <a:rPr sz="1400" b="1" i="0">
+                <a:solidFill>
+                  <a:srgbClr val="71717A"/>
+                </a:solidFill>
+                <a:latin typeface="Arial"/>
+              </a:rPr>
+              <a:t>5′</a:t>
+            </a:r>
+          </a:p>
+          <a:p>
+            <a:pPr algn="l">
+              <a:lnSpc>
+                <a:spcPct val="105000"/>
+              </a:lnSpc>
+              <a:spcAft>
+                <a:spcPts val="200"/>
+              </a:spcAft>
+            </a:pPr>
+            <a:r>
+              <a:rPr sz="1200" b="0" i="0">
+                <a:solidFill>
+                  <a:srgbClr val="71717A"/>
+                </a:solidFill>
+                <a:latin typeface="Arial"/>
+              </a:rPr>
+              <a:t>AI Studio + Demo</a:t>
+            </a:r>
+          </a:p>
+        </p:txBody>
+      </p:sp>
+      <p:cxnSp>
+        <p:nvCxnSpPr>
+          <p:cNvPr id="14" name="Connector 13"/>
+          <p:cNvCxnSpPr/>
+          <p:nvPr/>
+        </p:nvCxnSpPr>
+        <p:spPr>
+          <a:xfrm>
+            <a:off x="7150608" y="2514600"/>
+            <a:ext cx="0" cy="2743200"/>
+          </a:xfrm>
+          <a:prstGeom prst="line">
+            <a:avLst/>
+          </a:prstGeom>
+          <a:ln w="12700">
+            <a:solidFill>
+              <a:srgbClr val="E4E4E7"/>
+            </a:solidFill>
+          </a:ln>
+          <a:effectLst/>
+        </p:spPr>
+      </p:cxnSp>
+      <p:sp>
+        <p:nvSpPr>
+          <p:cNvPr id="15" name="TextBox 14"/>
+          <p:cNvSpPr txBox="1"/>
+          <p:nvPr/>
+        </p:nvSpPr>
+        <p:spPr>
+          <a:xfrm>
+            <a:off x="7260336" y="2651760"/>
+            <a:ext cx="1874519" cy="822960"/>
+          </a:xfrm>
+          <a:prstGeom prst="rect">
+            <a:avLst/>
+          </a:prstGeom>
+          <a:noFill/>
+        </p:spPr>
+        <p:txBody>
+          <a:bodyPr wrap="square" anchor="t" lIns="0" rIns="0" tIns="0" bIns="0">
+            <a:spAutoFit/>
+          </a:bodyPr>
+          <a:lstStyle/>
+          <a:p>
+            <a:pPr algn="l">
+              <a:spcAft>
+                <a:spcPts val="200"/>
+              </a:spcAft>
+            </a:pPr>
+            <a:r>
+              <a:rPr sz="3400" b="1" i="0">
+                <a:solidFill>
+                  <a:srgbClr val="121316"/>
+                </a:solidFill>
+                <a:latin typeface="Arial"/>
+              </a:rPr>
+              <a:t>V</a:t>
+            </a:r>
+          </a:p>
+        </p:txBody>
+      </p:sp>
+      <p:sp>
+        <p:nvSpPr>
+          <p:cNvPr id="16" name="TextBox 15"/>
+          <p:cNvSpPr txBox="1"/>
+          <p:nvPr/>
+        </p:nvSpPr>
+        <p:spPr>
+          <a:xfrm>
+            <a:off x="7260336" y="3520439"/>
+            <a:ext cx="1874519" cy="1645920"/>
+          </a:xfrm>
+          <a:prstGeom prst="rect">
+            <a:avLst/>
+          </a:prstGeom>
+          <a:noFill/>
+        </p:spPr>
+        <p:txBody>
+          <a:bodyPr wrap="square" anchor="t" lIns="0" rIns="0" tIns="0" bIns="0">
+            <a:spAutoFit/>
+          </a:bodyPr>
+          <a:lstStyle/>
+          <a:p>
+            <a:pPr algn="l">
+              <a:lnSpc>
+                <a:spcPct val="100000"/>
+              </a:lnSpc>
+              <a:spcAft>
+                <a:spcPts val="300"/>
+              </a:spcAft>
+            </a:pPr>
+            <a:r>
+              <a:rPr sz="1500" b="1" i="0">
+                <a:solidFill>
+                  <a:srgbClr val="121316"/>
+                </a:solidFill>
+                <a:latin typeface="Arial"/>
+              </a:rPr>
+              <a:t>Verarbeiten</a:t>
+            </a:r>
+          </a:p>
+          <a:p>
+            <a:pPr algn="l">
+              <a:spcAft>
+                <a:spcPts val="500"/>
+              </a:spcAft>
+            </a:pPr>
+            <a:r>
+              <a:rPr sz="1400" b="1" i="0">
+                <a:solidFill>
+                  <a:srgbClr val="71717A"/>
+                </a:solidFill>
+                <a:latin typeface="Arial"/>
+              </a:rPr>
+              <a:t>8′</a:t>
+            </a:r>
+          </a:p>
+          <a:p>
+            <a:pPr algn="l">
+              <a:lnSpc>
+                <a:spcPct val="105000"/>
+              </a:lnSpc>
+              <a:spcAft>
+                <a:spcPts val="200"/>
+              </a:spcAft>
+            </a:pPr>
+            <a:r>
+              <a:rPr sz="1200" b="0" i="0">
+                <a:solidFill>
+                  <a:srgbClr val="71717A"/>
+                </a:solidFill>
+                <a:latin typeface="Arial"/>
+              </a:rPr>
+              <a:t>Selbst bauen</a:t>
+            </a:r>
+          </a:p>
+        </p:txBody>
+      </p:sp>
+      <p:cxnSp>
+        <p:nvCxnSpPr>
+          <p:cNvPr id="17" name="Connector 16"/>
+          <p:cNvCxnSpPr/>
+          <p:nvPr/>
+        </p:nvCxnSpPr>
+        <p:spPr>
+          <a:xfrm>
+            <a:off x="9244584" y="2514600"/>
+            <a:ext cx="0" cy="2743200"/>
+          </a:xfrm>
+          <a:prstGeom prst="line">
+            <a:avLst/>
+          </a:prstGeom>
+          <a:ln w="12700">
+            <a:solidFill>
+              <a:srgbClr val="E4E4E7"/>
+            </a:solidFill>
+          </a:ln>
+          <a:effectLst/>
+        </p:spPr>
+      </p:cxnSp>
+      <p:sp>
+        <p:nvSpPr>
+          <p:cNvPr id="18" name="TextBox 17"/>
+          <p:cNvSpPr txBox="1"/>
+          <p:nvPr/>
+        </p:nvSpPr>
+        <p:spPr>
+          <a:xfrm>
+            <a:off x="9354311" y="2651760"/>
+            <a:ext cx="1874519" cy="822960"/>
+          </a:xfrm>
+          <a:prstGeom prst="rect">
+            <a:avLst/>
+          </a:prstGeom>
+          <a:noFill/>
+        </p:spPr>
+        <p:txBody>
+          <a:bodyPr wrap="square" anchor="t" lIns="0" rIns="0" tIns="0" bIns="0">
+            <a:spAutoFit/>
+          </a:bodyPr>
+          <a:lstStyle/>
+          <a:p>
+            <a:pPr algn="l">
+              <a:spcAft>
+                <a:spcPts val="200"/>
+              </a:spcAft>
+            </a:pPr>
+            <a:r>
+              <a:rPr sz="3400" b="1" i="0">
+                <a:solidFill>
+                  <a:srgbClr val="121316"/>
+                </a:solidFill>
+                <a:latin typeface="Arial"/>
+              </a:rPr>
+              <a:t>A</a:t>
+            </a:r>
+          </a:p>
+        </p:txBody>
+      </p:sp>
+      <p:sp>
+        <p:nvSpPr>
+          <p:cNvPr id="19" name="TextBox 18"/>
+          <p:cNvSpPr txBox="1"/>
+          <p:nvPr/>
+        </p:nvSpPr>
+        <p:spPr>
+          <a:xfrm>
+            <a:off x="9354311" y="3520439"/>
+            <a:ext cx="1874519" cy="1645920"/>
+          </a:xfrm>
+          <a:prstGeom prst="rect">
+            <a:avLst/>
+          </a:prstGeom>
+          <a:noFill/>
+        </p:spPr>
+        <p:txBody>
+          <a:bodyPr wrap="square" anchor="t" lIns="0" rIns="0" tIns="0" bIns="0">
+            <a:spAutoFit/>
+          </a:bodyPr>
+          <a:lstStyle/>
+          <a:p>
+            <a:pPr algn="l">
+              <a:lnSpc>
+                <a:spcPct val="100000"/>
+              </a:lnSpc>
+              <a:spcAft>
+                <a:spcPts val="300"/>
+              </a:spcAft>
+            </a:pPr>
+            <a:r>
+              <a:rPr sz="1500" b="1" i="0">
+                <a:solidFill>
+                  <a:srgbClr val="121316"/>
+                </a:solidFill>
+                <a:latin typeface="Arial"/>
+              </a:rPr>
+              <a:t>Auswerten</a:t>
+            </a:r>
+          </a:p>
+          <a:p>
+            <a:pPr algn="l">
+              <a:spcAft>
+                <a:spcPts val="500"/>
+              </a:spcAft>
+            </a:pPr>
+            <a:r>
+              <a:rPr sz="1400" b="1" i="0">
+                <a:solidFill>
+                  <a:srgbClr val="71717A"/>
+                </a:solidFill>
+                <a:latin typeface="Arial"/>
+              </a:rPr>
+              <a:t>4′</a:t>
+            </a:r>
+          </a:p>
+          <a:p>
+            <a:pPr algn="l">
+              <a:lnSpc>
+                <a:spcPct val="105000"/>
+              </a:lnSpc>
+              <a:spcAft>
+                <a:spcPts val="200"/>
+              </a:spcAft>
+            </a:pPr>
+            <a:r>
+              <a:rPr sz="1200" b="0" i="0">
+                <a:solidFill>
+                  <a:srgbClr val="71717A"/>
+                </a:solidFill>
+                <a:latin typeface="Arial"/>
+              </a:rPr>
+              <a:t>Prüfen &amp; Abschluss</a:t>
+            </a:r>
+          </a:p>
+        </p:txBody>
+      </p:sp>
+      <p:cxnSp>
+        <p:nvCxnSpPr>
+          <p:cNvPr id="20" name="Connector 19"/>
+          <p:cNvCxnSpPr/>
+          <p:nvPr/>
+        </p:nvCxnSpPr>
+        <p:spPr>
+          <a:xfrm>
+            <a:off x="868680" y="5349240"/>
+            <a:ext cx="10469879" cy="0"/>
+          </a:xfrm>
+          <a:prstGeom prst="line">
+            <a:avLst/>
+          </a:prstGeom>
+          <a:ln w="12700">
+            <a:solidFill>
+              <a:srgbClr val="E4E4E7"/>
+            </a:solidFill>
+          </a:ln>
+          <a:effectLst/>
+        </p:spPr>
+      </p:cxnSp>
+      <p:sp>
+        <p:nvSpPr>
+          <p:cNvPr id="21" name="TextBox 20"/>
+          <p:cNvSpPr txBox="1"/>
+          <p:nvPr/>
+        </p:nvSpPr>
+        <p:spPr>
+          <a:xfrm>
+            <a:off x="868680" y="5532120"/>
+            <a:ext cx="10469880" cy="365760"/>
+          </a:xfrm>
+          <a:prstGeom prst="rect">
+            <a:avLst/>
+          </a:prstGeom>
+          <a:noFill/>
+        </p:spPr>
+        <p:txBody>
+          <a:bodyPr wrap="square" anchor="t" lIns="0" rIns="0" tIns="0" bIns="0">
+            <a:spAutoFit/>
+          </a:bodyPr>
+          <a:lstStyle/>
+          <a:p>
+            <a:pPr algn="l">
+              <a:spcAft>
+                <a:spcPts val="200"/>
+              </a:spcAft>
+            </a:pPr>
+            <a:r>
+              <a:rPr sz="1300" b="0" i="1">
+                <a:solidFill>
+                  <a:srgbClr val="71717A"/>
+                </a:solidFill>
+                <a:latin typeface="Arial"/>
+              </a:rPr>
+              <a:t>Gesamt 23 Minuten — Schwerpunkt: selbst ausprobieren.</a:t>
             </a:r>
           </a:p>
         </p:txBody>
@@ -5158,7 +5792,7 @@
                 </a:solidFill>
                 <a:latin typeface="Arial"/>
               </a:rPr>
-              <a:t>ABLAUF · ARIVA</a:t>
+              <a:t>LERNZIELE · NACH MAGER</a:t>
             </a:r>
           </a:p>
         </p:txBody>
@@ -5197,7 +5831,7 @@
                 </a:solidFill>
                 <a:latin typeface="Arial"/>
               </a:rPr>
-              <a:t>So läuft die Lektion</a:t>
+              <a:t>Was ihr danach könnt</a:t>
             </a:r>
           </a:p>
         </p:txBody>
@@ -5210,7 +5844,7 @@
         </p:nvCxnSpPr>
         <p:spPr>
           <a:xfrm>
-            <a:off x="868680" y="2331720"/>
+            <a:off x="868680" y="2468880"/>
             <a:ext cx="10469879" cy="0"/>
           </a:xfrm>
           <a:prstGeom prst="line">
@@ -5226,14 +5860,83 @@
       </p:cxnSp>
       <p:sp>
         <p:nvSpPr>
-          <p:cNvPr id="6" name="TextBox 5"/>
+          <p:cNvPr id="6" name="Oval 5"/>
+          <p:cNvSpPr/>
+          <p:nvPr/>
+        </p:nvSpPr>
+        <p:spPr>
+          <a:xfrm>
+            <a:off x="868680" y="2761488"/>
+            <a:ext cx="548640" cy="548640"/>
+          </a:xfrm>
+          <a:prstGeom prst="ellipse">
+            <a:avLst/>
+          </a:prstGeom>
+          <a:noFill/>
+          <a:ln w="16510">
+            <a:solidFill>
+              <a:srgbClr val="121316"/>
+            </a:solidFill>
+          </a:ln>
+          <a:effectLst/>
+        </p:spPr>
+        <p:txBody>
+          <a:bodyPr rtlCol="0" anchor="ctr"/>
+          <a:lstStyle/>
+          <a:p>
+            <a:pPr algn="ctr"/>
+          </a:p>
+        </p:txBody>
+      </p:sp>
+      <p:sp>
+        <p:nvSpPr>
+          <p:cNvPr id="7" name="TextBox 6"/>
           <p:cNvSpPr txBox="1"/>
           <p:nvPr/>
         </p:nvSpPr>
         <p:spPr>
           <a:xfrm>
-            <a:off x="978407" y="2651760"/>
-            <a:ext cx="1874519" cy="822960"/>
+            <a:off x="868680" y="2734056"/>
+            <a:ext cx="548640" cy="548640"/>
+          </a:xfrm>
+          <a:prstGeom prst="rect">
+            <a:avLst/>
+          </a:prstGeom>
+          <a:noFill/>
+        </p:spPr>
+        <p:txBody>
+          <a:bodyPr wrap="square" anchor="ctr" lIns="0" rIns="0" tIns="0" bIns="0">
+            <a:spAutoFit/>
+          </a:bodyPr>
+          <a:lstStyle/>
+          <a:p>
+            <a:pPr algn="ctr">
+              <a:spcAft>
+                <a:spcPts val="200"/>
+              </a:spcAft>
+            </a:pPr>
+            <a:r>
+              <a:rPr sz="1400" b="1" i="0">
+                <a:solidFill>
+                  <a:srgbClr val="121316"/>
+                </a:solidFill>
+                <a:latin typeface="Arial"/>
+              </a:rPr>
+              <a:t>1</a:t>
+            </a:r>
+          </a:p>
+        </p:txBody>
+      </p:sp>
+      <p:sp>
+        <p:nvSpPr>
+          <p:cNvPr id="8" name="TextBox 7"/>
+          <p:cNvSpPr txBox="1"/>
+          <p:nvPr/>
+        </p:nvSpPr>
+        <p:spPr>
+          <a:xfrm>
+            <a:off x="1737360" y="2724912"/>
+            <a:ext cx="9509760" cy="1005840"/>
           </a:xfrm>
           <a:prstGeom prst="rect">
             <a:avLst/>
@@ -5248,108 +5951,47 @@
           <a:p>
             <a:pPr algn="l">
               <a:spcAft>
+                <a:spcPts val="300"/>
+              </a:spcAft>
+            </a:pPr>
+            <a:r>
+              <a:rPr sz="2000" b="1" i="0">
+                <a:solidFill>
+                  <a:srgbClr val="121316"/>
+                </a:solidFill>
+                <a:latin typeface="Arial"/>
+              </a:rPr>
+              <a:t>Erklären, was Google AI Studio ist</a:t>
+            </a:r>
+          </a:p>
+          <a:p>
+            <a:pPr algn="l">
+              <a:spcAft>
                 <a:spcPts val="200"/>
               </a:spcAft>
             </a:pPr>
             <a:r>
-              <a:rPr sz="3400" b="1" i="0">
-                <a:solidFill>
-                  <a:srgbClr val="121316"/>
-                </a:solidFill>
-                <a:latin typeface="Arial"/>
-              </a:rPr>
-              <a:t>A</a:t>
-            </a:r>
-          </a:p>
-        </p:txBody>
-      </p:sp>
-      <p:sp>
-        <p:nvSpPr>
-          <p:cNvPr id="7" name="TextBox 6"/>
-          <p:cNvSpPr txBox="1"/>
-          <p:nvPr/>
-        </p:nvSpPr>
-        <p:spPr>
-          <a:xfrm>
-            <a:off x="978407" y="3520439"/>
-            <a:ext cx="1874519" cy="1645920"/>
-          </a:xfrm>
-          <a:prstGeom prst="rect">
-            <a:avLst/>
-          </a:prstGeom>
-          <a:noFill/>
-        </p:spPr>
-        <p:txBody>
-          <a:bodyPr wrap="square" anchor="t" lIns="0" rIns="0" tIns="0" bIns="0">
-            <a:spAutoFit/>
-          </a:bodyPr>
-          <a:lstStyle/>
-          <a:p>
-            <a:pPr algn="l">
-              <a:lnSpc>
-                <a:spcPct val="100000"/>
-              </a:lnSpc>
-              <a:spcAft>
-                <a:spcPts val="300"/>
-              </a:spcAft>
-            </a:pPr>
-            <a:r>
-              <a:rPr sz="1500" b="1" i="0">
-                <a:solidFill>
-                  <a:srgbClr val="121316"/>
-                </a:solidFill>
-                <a:latin typeface="Arial"/>
-              </a:rPr>
-              <a:t>Ausrichten</a:t>
-            </a:r>
-          </a:p>
-          <a:p>
-            <a:pPr algn="l">
-              <a:spcAft>
-                <a:spcPts val="500"/>
-              </a:spcAft>
-            </a:pPr>
-            <a:r>
-              <a:rPr sz="1400" b="1" i="0">
+              <a:rPr sz="1400" b="0" i="0">
                 <a:solidFill>
                   <a:srgbClr val="71717A"/>
                 </a:solidFill>
                 <a:latin typeface="Arial"/>
               </a:rPr>
-              <a:t>3′</a:t>
-            </a:r>
-          </a:p>
-          <a:p>
-            <a:pPr algn="l">
-              <a:lnSpc>
-                <a:spcPct val="105000"/>
-              </a:lnSpc>
-              <a:spcAft>
-                <a:spcPts val="200"/>
-              </a:spcAft>
-            </a:pPr>
-            <a:r>
-              <a:rPr sz="1200" b="0" i="0">
-                <a:solidFill>
-                  <a:srgbClr val="71717A"/>
-                </a:solidFill>
-                <a:latin typeface="Arial"/>
-              </a:rPr>
-              <a:t>Ziele &amp; Ablauf</a:t>
+              <a:t>Zwei Beispiele nennen, was man damit bauen kann.</a:t>
             </a:r>
           </a:p>
         </p:txBody>
       </p:sp>
       <p:cxnSp>
         <p:nvCxnSpPr>
-          <p:cNvPr id="8" name="Connector 7"/>
+          <p:cNvPr id="9" name="Connector 8"/>
           <p:cNvCxnSpPr/>
           <p:nvPr/>
         </p:nvCxnSpPr>
         <p:spPr>
           <a:xfrm>
-            <a:off x="2962656" y="2514600"/>
-            <a:ext cx="0" cy="2743200"/>
+            <a:off x="868680" y="3749039"/>
+            <a:ext cx="10469879" cy="0"/>
           </a:xfrm>
           <a:prstGeom prst="line">
             <a:avLst/>
@@ -5364,14 +6006,83 @@
       </p:cxnSp>
       <p:sp>
         <p:nvSpPr>
-          <p:cNvPr id="9" name="TextBox 8"/>
+          <p:cNvPr id="10" name="Oval 9"/>
+          <p:cNvSpPr/>
+          <p:nvPr/>
+        </p:nvSpPr>
+        <p:spPr>
+          <a:xfrm>
+            <a:off x="868680" y="4041648"/>
+            <a:ext cx="548640" cy="548640"/>
+          </a:xfrm>
+          <a:prstGeom prst="ellipse">
+            <a:avLst/>
+          </a:prstGeom>
+          <a:noFill/>
+          <a:ln w="16510">
+            <a:solidFill>
+              <a:srgbClr val="121316"/>
+            </a:solidFill>
+          </a:ln>
+          <a:effectLst/>
+        </p:spPr>
+        <p:txBody>
+          <a:bodyPr rtlCol="0" anchor="ctr"/>
+          <a:lstStyle/>
+          <a:p>
+            <a:pPr algn="ctr"/>
+          </a:p>
+        </p:txBody>
+      </p:sp>
+      <p:sp>
+        <p:nvSpPr>
+          <p:cNvPr id="11" name="TextBox 10"/>
           <p:cNvSpPr txBox="1"/>
           <p:nvPr/>
         </p:nvSpPr>
         <p:spPr>
           <a:xfrm>
-            <a:off x="3072384" y="2651760"/>
-            <a:ext cx="1874519" cy="822960"/>
+            <a:off x="868680" y="4014215"/>
+            <a:ext cx="548640" cy="548640"/>
+          </a:xfrm>
+          <a:prstGeom prst="rect">
+            <a:avLst/>
+          </a:prstGeom>
+          <a:noFill/>
+        </p:spPr>
+        <p:txBody>
+          <a:bodyPr wrap="square" anchor="ctr" lIns="0" rIns="0" tIns="0" bIns="0">
+            <a:spAutoFit/>
+          </a:bodyPr>
+          <a:lstStyle/>
+          <a:p>
+            <a:pPr algn="ctr">
+              <a:spcAft>
+                <a:spcPts val="200"/>
+              </a:spcAft>
+            </a:pPr>
+            <a:r>
+              <a:rPr sz="1400" b="1" i="0">
+                <a:solidFill>
+                  <a:srgbClr val="121316"/>
+                </a:solidFill>
+                <a:latin typeface="Arial"/>
+              </a:rPr>
+              <a:t>2</a:t>
+            </a:r>
+          </a:p>
+        </p:txBody>
+      </p:sp>
+      <p:sp>
+        <p:nvSpPr>
+          <p:cNvPr id="12" name="TextBox 11"/>
+          <p:cNvSpPr txBox="1"/>
+          <p:nvPr/>
+        </p:nvSpPr>
+        <p:spPr>
+          <a:xfrm>
+            <a:off x="1737360" y="4005072"/>
+            <a:ext cx="9509760" cy="1005840"/>
           </a:xfrm>
           <a:prstGeom prst="rect">
             <a:avLst/>
@@ -5386,108 +6097,47 @@
           <a:p>
             <a:pPr algn="l">
               <a:spcAft>
+                <a:spcPts val="300"/>
+              </a:spcAft>
+            </a:pPr>
+            <a:r>
+              <a:rPr sz="2000" b="1" i="0">
+                <a:solidFill>
+                  <a:srgbClr val="121316"/>
+                </a:solidFill>
+                <a:latin typeface="Arial"/>
+              </a:rPr>
+              <a:t>Einen Website-Auftrag bauen</a:t>
+            </a:r>
+          </a:p>
+          <a:p>
+            <a:pPr algn="l">
+              <a:spcAft>
                 <a:spcPts val="200"/>
               </a:spcAft>
             </a:pPr>
             <a:r>
-              <a:rPr sz="3400" b="1" i="0">
-                <a:solidFill>
-                  <a:srgbClr val="121316"/>
-                </a:solidFill>
-                <a:latin typeface="Arial"/>
-              </a:rPr>
-              <a:t>R</a:t>
-            </a:r>
-          </a:p>
-        </p:txBody>
-      </p:sp>
-      <p:sp>
-        <p:nvSpPr>
-          <p:cNvPr id="10" name="TextBox 9"/>
-          <p:cNvSpPr txBox="1"/>
-          <p:nvPr/>
-        </p:nvSpPr>
-        <p:spPr>
-          <a:xfrm>
-            <a:off x="3072384" y="3520439"/>
-            <a:ext cx="1874519" cy="1645920"/>
-          </a:xfrm>
-          <a:prstGeom prst="rect">
-            <a:avLst/>
-          </a:prstGeom>
-          <a:noFill/>
-        </p:spPr>
-        <p:txBody>
-          <a:bodyPr wrap="square" anchor="t" lIns="0" rIns="0" tIns="0" bIns="0">
-            <a:spAutoFit/>
-          </a:bodyPr>
-          <a:lstStyle/>
-          <a:p>
-            <a:pPr algn="l">
-              <a:lnSpc>
-                <a:spcPct val="100000"/>
-              </a:lnSpc>
-              <a:spcAft>
-                <a:spcPts val="300"/>
-              </a:spcAft>
-            </a:pPr>
-            <a:r>
-              <a:rPr sz="1500" b="1" i="0">
-                <a:solidFill>
-                  <a:srgbClr val="121316"/>
-                </a:solidFill>
-                <a:latin typeface="Arial"/>
-              </a:rPr>
-              <a:t>Reaktivieren</a:t>
-            </a:r>
-          </a:p>
-          <a:p>
-            <a:pPr algn="l">
-              <a:spcAft>
-                <a:spcPts val="500"/>
-              </a:spcAft>
-            </a:pPr>
-            <a:r>
-              <a:rPr sz="1400" b="1" i="0">
+              <a:rPr sz="1400" b="0" i="0">
                 <a:solidFill>
                   <a:srgbClr val="71717A"/>
                 </a:solidFill>
                 <a:latin typeface="Arial"/>
               </a:rPr>
-              <a:t>3′</a:t>
-            </a:r>
-          </a:p>
-          <a:p>
-            <a:pPr algn="l">
-              <a:lnSpc>
-                <a:spcPct val="105000"/>
-              </a:lnSpc>
-              <a:spcAft>
-                <a:spcPts val="200"/>
-              </a:spcAft>
-            </a:pPr>
-            <a:r>
-              <a:rPr sz="1200" b="0" i="0">
-                <a:solidFill>
-                  <a:srgbClr val="71717A"/>
-                </a:solidFill>
-                <a:latin typeface="Arial"/>
-              </a:rPr>
-              <a:t>An KI anknüpfen</a:t>
+              <a:t>Mit dem Baukasten einen klaren Prompt zusammenstellen.</a:t>
             </a:r>
           </a:p>
         </p:txBody>
       </p:sp>
       <p:cxnSp>
         <p:nvCxnSpPr>
-          <p:cNvPr id="11" name="Connector 10"/>
+          <p:cNvPr id="13" name="Connector 12"/>
           <p:cNvCxnSpPr/>
           <p:nvPr/>
         </p:nvCxnSpPr>
         <p:spPr>
           <a:xfrm>
-            <a:off x="5056632" y="2514600"/>
-            <a:ext cx="0" cy="2743200"/>
+            <a:off x="868680" y="5029200"/>
+            <a:ext cx="10469879" cy="0"/>
           </a:xfrm>
           <a:prstGeom prst="line">
             <a:avLst/>
@@ -5502,14 +6152,83 @@
       </p:cxnSp>
       <p:sp>
         <p:nvSpPr>
-          <p:cNvPr id="12" name="TextBox 11"/>
+          <p:cNvPr id="14" name="Oval 13"/>
+          <p:cNvSpPr/>
+          <p:nvPr/>
+        </p:nvSpPr>
+        <p:spPr>
+          <a:xfrm>
+            <a:off x="868680" y="5321808"/>
+            <a:ext cx="548640" cy="548640"/>
+          </a:xfrm>
+          <a:prstGeom prst="ellipse">
+            <a:avLst/>
+          </a:prstGeom>
+          <a:noFill/>
+          <a:ln w="16510">
+            <a:solidFill>
+              <a:srgbClr val="121316"/>
+            </a:solidFill>
+          </a:ln>
+          <a:effectLst/>
+        </p:spPr>
+        <p:txBody>
+          <a:bodyPr rtlCol="0" anchor="ctr"/>
+          <a:lstStyle/>
+          <a:p>
+            <a:pPr algn="ctr"/>
+          </a:p>
+        </p:txBody>
+      </p:sp>
+      <p:sp>
+        <p:nvSpPr>
+          <p:cNvPr id="15" name="TextBox 14"/>
           <p:cNvSpPr txBox="1"/>
           <p:nvPr/>
         </p:nvSpPr>
         <p:spPr>
           <a:xfrm>
-            <a:off x="5166360" y="2651760"/>
-            <a:ext cx="1874519" cy="822960"/>
+            <a:off x="868680" y="5294376"/>
+            <a:ext cx="548640" cy="548640"/>
+          </a:xfrm>
+          <a:prstGeom prst="rect">
+            <a:avLst/>
+          </a:prstGeom>
+          <a:noFill/>
+        </p:spPr>
+        <p:txBody>
+          <a:bodyPr wrap="square" anchor="ctr" lIns="0" rIns="0" tIns="0" bIns="0">
+            <a:spAutoFit/>
+          </a:bodyPr>
+          <a:lstStyle/>
+          <a:p>
+            <a:pPr algn="ctr">
+              <a:spcAft>
+                <a:spcPts val="200"/>
+              </a:spcAft>
+            </a:pPr>
+            <a:r>
+              <a:rPr sz="1400" b="1" i="0">
+                <a:solidFill>
+                  <a:srgbClr val="121316"/>
+                </a:solidFill>
+                <a:latin typeface="Arial"/>
+              </a:rPr>
+              <a:t>3</a:t>
+            </a:r>
+          </a:p>
+        </p:txBody>
+      </p:sp>
+      <p:sp>
+        <p:nvSpPr>
+          <p:cNvPr id="16" name="TextBox 15"/>
+          <p:cNvSpPr txBox="1"/>
+          <p:nvPr/>
+        </p:nvSpPr>
+        <p:spPr>
+          <a:xfrm>
+            <a:off x="1737360" y="5285232"/>
+            <a:ext cx="9509760" cy="1005840"/>
           </a:xfrm>
           <a:prstGeom prst="rect">
             <a:avLst/>
@@ -5524,108 +6243,47 @@
           <a:p>
             <a:pPr algn="l">
               <a:spcAft>
+                <a:spcPts val="300"/>
+              </a:spcAft>
+            </a:pPr>
+            <a:r>
+              <a:rPr sz="2000" b="1" i="0">
+                <a:solidFill>
+                  <a:srgbClr val="121316"/>
+                </a:solidFill>
+                <a:latin typeface="Arial"/>
+              </a:rPr>
+              <a:t>Eine erste Website starten</a:t>
+            </a:r>
+          </a:p>
+          <a:p>
+            <a:pPr algn="l">
+              <a:spcAft>
                 <a:spcPts val="200"/>
               </a:spcAft>
             </a:pPr>
             <a:r>
-              <a:rPr sz="3400" b="1" i="0">
-                <a:solidFill>
-                  <a:srgbClr val="121316"/>
-                </a:solidFill>
-                <a:latin typeface="Arial"/>
-              </a:rPr>
-              <a:t>I</a:t>
-            </a:r>
-          </a:p>
-        </p:txBody>
-      </p:sp>
-      <p:sp>
-        <p:nvSpPr>
-          <p:cNvPr id="13" name="TextBox 12"/>
-          <p:cNvSpPr txBox="1"/>
-          <p:nvPr/>
-        </p:nvSpPr>
-        <p:spPr>
-          <a:xfrm>
-            <a:off x="5166360" y="3520439"/>
-            <a:ext cx="1874519" cy="1645920"/>
-          </a:xfrm>
-          <a:prstGeom prst="rect">
-            <a:avLst/>
-          </a:prstGeom>
-          <a:noFill/>
-        </p:spPr>
-        <p:txBody>
-          <a:bodyPr wrap="square" anchor="t" lIns="0" rIns="0" tIns="0" bIns="0">
-            <a:spAutoFit/>
-          </a:bodyPr>
-          <a:lstStyle/>
-          <a:p>
-            <a:pPr algn="l">
-              <a:lnSpc>
-                <a:spcPct val="100000"/>
-              </a:lnSpc>
-              <a:spcAft>
-                <a:spcPts val="300"/>
-              </a:spcAft>
-            </a:pPr>
-            <a:r>
-              <a:rPr sz="1500" b="1" i="0">
-                <a:solidFill>
-                  <a:srgbClr val="121316"/>
-                </a:solidFill>
-                <a:latin typeface="Arial"/>
-              </a:rPr>
-              <a:t>Informieren</a:t>
-            </a:r>
-          </a:p>
-          <a:p>
-            <a:pPr algn="l">
-              <a:spcAft>
-                <a:spcPts val="500"/>
-              </a:spcAft>
-            </a:pPr>
-            <a:r>
-              <a:rPr sz="1400" b="1" i="0">
+              <a:rPr sz="1400" b="0" i="0">
                 <a:solidFill>
                   <a:srgbClr val="71717A"/>
                 </a:solidFill>
                 <a:latin typeface="Arial"/>
               </a:rPr>
-              <a:t>5′</a:t>
-            </a:r>
-          </a:p>
-          <a:p>
-            <a:pPr algn="l">
-              <a:lnSpc>
-                <a:spcPct val="105000"/>
-              </a:lnSpc>
-              <a:spcAft>
-                <a:spcPts val="200"/>
-              </a:spcAft>
-            </a:pPr>
-            <a:r>
-              <a:rPr sz="1200" b="0" i="0">
-                <a:solidFill>
-                  <a:srgbClr val="71717A"/>
-                </a:solidFill>
-                <a:latin typeface="Arial"/>
-              </a:rPr>
-              <a:t>AI Studio + Demo</a:t>
+              <a:t>Prompt in AI Studio einfügen und losschicken.</a:t>
             </a:r>
           </a:p>
         </p:txBody>
       </p:sp>
       <p:cxnSp>
         <p:nvCxnSpPr>
-          <p:cNvPr id="14" name="Connector 13"/>
+          <p:cNvPr id="17" name="Connector 16"/>
           <p:cNvCxnSpPr/>
           <p:nvPr/>
         </p:nvCxnSpPr>
         <p:spPr>
           <a:xfrm>
-            <a:off x="7150608" y="2514600"/>
-            <a:ext cx="0" cy="2743200"/>
+            <a:off x="868680" y="6309360"/>
+            <a:ext cx="10469879" cy="0"/>
           </a:xfrm>
           <a:prstGeom prst="line">
             <a:avLst/>
@@ -5638,321 +6296,6 @@
           <a:effectLst/>
         </p:spPr>
       </p:cxnSp>
-      <p:sp>
-        <p:nvSpPr>
-          <p:cNvPr id="15" name="TextBox 14"/>
-          <p:cNvSpPr txBox="1"/>
-          <p:nvPr/>
-        </p:nvSpPr>
-        <p:spPr>
-          <a:xfrm>
-            <a:off x="7260336" y="2651760"/>
-            <a:ext cx="1874519" cy="822960"/>
-          </a:xfrm>
-          <a:prstGeom prst="rect">
-            <a:avLst/>
-          </a:prstGeom>
-          <a:noFill/>
-        </p:spPr>
-        <p:txBody>
-          <a:bodyPr wrap="square" anchor="t" lIns="0" rIns="0" tIns="0" bIns="0">
-            <a:spAutoFit/>
-          </a:bodyPr>
-          <a:lstStyle/>
-          <a:p>
-            <a:pPr algn="l">
-              <a:spcAft>
-                <a:spcPts val="200"/>
-              </a:spcAft>
-            </a:pPr>
-            <a:r>
-              <a:rPr sz="3400" b="1" i="0">
-                <a:solidFill>
-                  <a:srgbClr val="121316"/>
-                </a:solidFill>
-                <a:latin typeface="Arial"/>
-              </a:rPr>
-              <a:t>V</a:t>
-            </a:r>
-          </a:p>
-        </p:txBody>
-      </p:sp>
-      <p:sp>
-        <p:nvSpPr>
-          <p:cNvPr id="16" name="TextBox 15"/>
-          <p:cNvSpPr txBox="1"/>
-          <p:nvPr/>
-        </p:nvSpPr>
-        <p:spPr>
-          <a:xfrm>
-            <a:off x="7260336" y="3520439"/>
-            <a:ext cx="1874519" cy="1645920"/>
-          </a:xfrm>
-          <a:prstGeom prst="rect">
-            <a:avLst/>
-          </a:prstGeom>
-          <a:noFill/>
-        </p:spPr>
-        <p:txBody>
-          <a:bodyPr wrap="square" anchor="t" lIns="0" rIns="0" tIns="0" bIns="0">
-            <a:spAutoFit/>
-          </a:bodyPr>
-          <a:lstStyle/>
-          <a:p>
-            <a:pPr algn="l">
-              <a:lnSpc>
-                <a:spcPct val="100000"/>
-              </a:lnSpc>
-              <a:spcAft>
-                <a:spcPts val="300"/>
-              </a:spcAft>
-            </a:pPr>
-            <a:r>
-              <a:rPr sz="1500" b="1" i="0">
-                <a:solidFill>
-                  <a:srgbClr val="121316"/>
-                </a:solidFill>
-                <a:latin typeface="Arial"/>
-              </a:rPr>
-              <a:t>Verarbeiten</a:t>
-            </a:r>
-          </a:p>
-          <a:p>
-            <a:pPr algn="l">
-              <a:spcAft>
-                <a:spcPts val="500"/>
-              </a:spcAft>
-            </a:pPr>
-            <a:r>
-              <a:rPr sz="1400" b="1" i="0">
-                <a:solidFill>
-                  <a:srgbClr val="71717A"/>
-                </a:solidFill>
-                <a:latin typeface="Arial"/>
-              </a:rPr>
-              <a:t>8′</a:t>
-            </a:r>
-          </a:p>
-          <a:p>
-            <a:pPr algn="l">
-              <a:lnSpc>
-                <a:spcPct val="105000"/>
-              </a:lnSpc>
-              <a:spcAft>
-                <a:spcPts val="200"/>
-              </a:spcAft>
-            </a:pPr>
-            <a:r>
-              <a:rPr sz="1200" b="0" i="0">
-                <a:solidFill>
-                  <a:srgbClr val="71717A"/>
-                </a:solidFill>
-                <a:latin typeface="Arial"/>
-              </a:rPr>
-              <a:t>Selbst bauen</a:t>
-            </a:r>
-          </a:p>
-        </p:txBody>
-      </p:sp>
-      <p:cxnSp>
-        <p:nvCxnSpPr>
-          <p:cNvPr id="17" name="Connector 16"/>
-          <p:cNvCxnSpPr/>
-          <p:nvPr/>
-        </p:nvCxnSpPr>
-        <p:spPr>
-          <a:xfrm>
-            <a:off x="9244584" y="2514600"/>
-            <a:ext cx="0" cy="2743200"/>
-          </a:xfrm>
-          <a:prstGeom prst="line">
-            <a:avLst/>
-          </a:prstGeom>
-          <a:ln w="12700">
-            <a:solidFill>
-              <a:srgbClr val="E4E4E7"/>
-            </a:solidFill>
-          </a:ln>
-          <a:effectLst/>
-        </p:spPr>
-      </p:cxnSp>
-      <p:sp>
-        <p:nvSpPr>
-          <p:cNvPr id="18" name="TextBox 17"/>
-          <p:cNvSpPr txBox="1"/>
-          <p:nvPr/>
-        </p:nvSpPr>
-        <p:spPr>
-          <a:xfrm>
-            <a:off x="9354311" y="2651760"/>
-            <a:ext cx="1874519" cy="822960"/>
-          </a:xfrm>
-          <a:prstGeom prst="rect">
-            <a:avLst/>
-          </a:prstGeom>
-          <a:noFill/>
-        </p:spPr>
-        <p:txBody>
-          <a:bodyPr wrap="square" anchor="t" lIns="0" rIns="0" tIns="0" bIns="0">
-            <a:spAutoFit/>
-          </a:bodyPr>
-          <a:lstStyle/>
-          <a:p>
-            <a:pPr algn="l">
-              <a:spcAft>
-                <a:spcPts val="200"/>
-              </a:spcAft>
-            </a:pPr>
-            <a:r>
-              <a:rPr sz="3400" b="1" i="0">
-                <a:solidFill>
-                  <a:srgbClr val="121316"/>
-                </a:solidFill>
-                <a:latin typeface="Arial"/>
-              </a:rPr>
-              <a:t>A</a:t>
-            </a:r>
-          </a:p>
-        </p:txBody>
-      </p:sp>
-      <p:sp>
-        <p:nvSpPr>
-          <p:cNvPr id="19" name="TextBox 18"/>
-          <p:cNvSpPr txBox="1"/>
-          <p:nvPr/>
-        </p:nvSpPr>
-        <p:spPr>
-          <a:xfrm>
-            <a:off x="9354311" y="3520439"/>
-            <a:ext cx="1874519" cy="1645920"/>
-          </a:xfrm>
-          <a:prstGeom prst="rect">
-            <a:avLst/>
-          </a:prstGeom>
-          <a:noFill/>
-        </p:spPr>
-        <p:txBody>
-          <a:bodyPr wrap="square" anchor="t" lIns="0" rIns="0" tIns="0" bIns="0">
-            <a:spAutoFit/>
-          </a:bodyPr>
-          <a:lstStyle/>
-          <a:p>
-            <a:pPr algn="l">
-              <a:lnSpc>
-                <a:spcPct val="100000"/>
-              </a:lnSpc>
-              <a:spcAft>
-                <a:spcPts val="300"/>
-              </a:spcAft>
-            </a:pPr>
-            <a:r>
-              <a:rPr sz="1500" b="1" i="0">
-                <a:solidFill>
-                  <a:srgbClr val="121316"/>
-                </a:solidFill>
-                <a:latin typeface="Arial"/>
-              </a:rPr>
-              <a:t>Auswerten</a:t>
-            </a:r>
-          </a:p>
-          <a:p>
-            <a:pPr algn="l">
-              <a:spcAft>
-                <a:spcPts val="500"/>
-              </a:spcAft>
-            </a:pPr>
-            <a:r>
-              <a:rPr sz="1400" b="1" i="0">
-                <a:solidFill>
-                  <a:srgbClr val="71717A"/>
-                </a:solidFill>
-                <a:latin typeface="Arial"/>
-              </a:rPr>
-              <a:t>4′</a:t>
-            </a:r>
-          </a:p>
-          <a:p>
-            <a:pPr algn="l">
-              <a:lnSpc>
-                <a:spcPct val="105000"/>
-              </a:lnSpc>
-              <a:spcAft>
-                <a:spcPts val="200"/>
-              </a:spcAft>
-            </a:pPr>
-            <a:r>
-              <a:rPr sz="1200" b="0" i="0">
-                <a:solidFill>
-                  <a:srgbClr val="71717A"/>
-                </a:solidFill>
-                <a:latin typeface="Arial"/>
-              </a:rPr>
-              <a:t>Prüfen &amp; Abschluss</a:t>
-            </a:r>
-          </a:p>
-        </p:txBody>
-      </p:sp>
-      <p:cxnSp>
-        <p:nvCxnSpPr>
-          <p:cNvPr id="20" name="Connector 19"/>
-          <p:cNvCxnSpPr/>
-          <p:nvPr/>
-        </p:nvCxnSpPr>
-        <p:spPr>
-          <a:xfrm>
-            <a:off x="868680" y="5349240"/>
-            <a:ext cx="10469879" cy="0"/>
-          </a:xfrm>
-          <a:prstGeom prst="line">
-            <a:avLst/>
-          </a:prstGeom>
-          <a:ln w="12700">
-            <a:solidFill>
-              <a:srgbClr val="E4E4E7"/>
-            </a:solidFill>
-          </a:ln>
-          <a:effectLst/>
-        </p:spPr>
-      </p:cxnSp>
-      <p:sp>
-        <p:nvSpPr>
-          <p:cNvPr id="21" name="TextBox 20"/>
-          <p:cNvSpPr txBox="1"/>
-          <p:nvPr/>
-        </p:nvSpPr>
-        <p:spPr>
-          <a:xfrm>
-            <a:off x="868680" y="5532120"/>
-            <a:ext cx="10469880" cy="365760"/>
-          </a:xfrm>
-          <a:prstGeom prst="rect">
-            <a:avLst/>
-          </a:prstGeom>
-          <a:noFill/>
-        </p:spPr>
-        <p:txBody>
-          <a:bodyPr wrap="square" anchor="t" lIns="0" rIns="0" tIns="0" bIns="0">
-            <a:spAutoFit/>
-          </a:bodyPr>
-          <a:lstStyle/>
-          <a:p>
-            <a:pPr algn="l">
-              <a:spcAft>
-                <a:spcPts val="200"/>
-              </a:spcAft>
-            </a:pPr>
-            <a:r>
-              <a:rPr sz="1300" b="0" i="1">
-                <a:solidFill>
-                  <a:srgbClr val="71717A"/>
-                </a:solidFill>
-                <a:latin typeface="Arial"/>
-              </a:rPr>
-              <a:t>Gesamt 23 Minuten — Schwerpunkt: selbst ausprobieren.</a:t>
-            </a:r>
-          </a:p>
-        </p:txBody>
-      </p:sp>
     </p:spTree>
   </p:cSld>
   <p:clrMapOvr>
@@ -5986,7 +6329,7 @@
             <a:avLst/>
           </a:prstGeom>
           <a:solidFill>
-            <a:srgbClr val="FFFFFF"/>
+            <a:srgbClr val="121316"/>
           </a:solidFill>
           <a:ln>
             <a:noFill/>
@@ -6009,7 +6352,7 @@
         </p:nvSpPr>
         <p:spPr>
           <a:xfrm>
-            <a:off x="868680" y="777240"/>
+            <a:off x="868680" y="868680"/>
             <a:ext cx="10058400" cy="365760"/>
           </a:xfrm>
           <a:prstGeom prst="rect">
@@ -6031,11 +6374,11 @@
             <a:r>
               <a:rPr sz="1200" b="1" i="0">
                 <a:solidFill>
-                  <a:srgbClr val="71717A"/>
-                </a:solidFill>
-                <a:latin typeface="Arial"/>
-              </a:rPr>
-              <a:t>LERNZIELE · NACH MAGER</a:t>
+                  <a:srgbClr val="A1A1AA"/>
+                </a:solidFill>
+                <a:latin typeface="Arial"/>
+              </a:rPr>
+              <a:t>REAKTIVIEREN</a:t>
             </a:r>
           </a:p>
         </p:txBody>
@@ -6048,8 +6391,8 @@
         </p:nvSpPr>
         <p:spPr>
           <a:xfrm>
-            <a:off x="868680" y="1234440"/>
-            <a:ext cx="10424160" cy="822960"/>
+            <a:off x="868680" y="1508760"/>
+            <a:ext cx="10424160" cy="1737360"/>
           </a:xfrm>
           <a:prstGeom prst="rect">
             <a:avLst/>
@@ -6063,31 +6406,92 @@
           <a:lstStyle/>
           <a:p>
             <a:pPr algn="l">
+              <a:lnSpc>
+                <a:spcPct val="106000"/>
+              </a:lnSpc>
               <a:spcAft>
                 <a:spcPts val="200"/>
               </a:spcAft>
             </a:pPr>
             <a:r>
-              <a:rPr sz="3300" b="1" i="0">
-                <a:solidFill>
-                  <a:srgbClr val="121316"/>
-                </a:solidFill>
-                <a:latin typeface="Arial"/>
-              </a:rPr>
-              <a:t>Was ihr danach könnt</a:t>
+              <a:rPr sz="3500" b="1" i="0">
+                <a:solidFill>
+                  <a:srgbClr val="FFFFFF"/>
+                </a:solidFill>
+                <a:latin typeface="Arial"/>
+              </a:rPr>
+              <a:t>Hand hoch: Wer hat schon mal</a:t>
+            </a:r>
+          </a:p>
+          <a:p>
+            <a:pPr algn="l">
+              <a:lnSpc>
+                <a:spcPct val="106000"/>
+              </a:lnSpc>
+              <a:spcAft>
+                <a:spcPts val="200"/>
+              </a:spcAft>
+            </a:pPr>
+            <a:r>
+              <a:rPr sz="3500" b="1" i="0">
+                <a:solidFill>
+                  <a:srgbClr val="FFFFFF"/>
+                </a:solidFill>
+                <a:latin typeface="Arial"/>
+              </a:rPr>
+              <a:t>eine KI etwas gefragt?</a:t>
+            </a:r>
+          </a:p>
+        </p:txBody>
+      </p:sp>
+      <p:sp>
+        <p:nvSpPr>
+          <p:cNvPr id="5" name="TextBox 4"/>
+          <p:cNvSpPr txBox="1"/>
+          <p:nvPr/>
+        </p:nvSpPr>
+        <p:spPr>
+          <a:xfrm>
+            <a:off x="868680" y="3154680"/>
+            <a:ext cx="10058400" cy="457200"/>
+          </a:xfrm>
+          <a:prstGeom prst="rect">
+            <a:avLst/>
+          </a:prstGeom>
+          <a:noFill/>
+        </p:spPr>
+        <p:txBody>
+          <a:bodyPr wrap="square" anchor="t" lIns="0" rIns="0" tIns="0" bIns="0">
+            <a:spAutoFit/>
+          </a:bodyPr>
+          <a:lstStyle/>
+          <a:p>
+            <a:pPr algn="l">
+              <a:spcAft>
+                <a:spcPts val="200"/>
+              </a:spcAft>
+            </a:pPr>
+            <a:r>
+              <a:rPr sz="1700" b="0" i="0">
+                <a:solidFill>
+                  <a:srgbClr val="A1A1AA"/>
+                </a:solidFill>
+                <a:latin typeface="Arial"/>
+              </a:rPr>
+              <a:t>ChatGPT, Gemini und Co.</a:t>
             </a:r>
           </a:p>
         </p:txBody>
       </p:sp>
       <p:cxnSp>
         <p:nvCxnSpPr>
-          <p:cNvPr id="5" name="Connector 4"/>
+          <p:cNvPr id="6" name="Connector 5"/>
           <p:cNvCxnSpPr/>
           <p:nvPr/>
         </p:nvCxnSpPr>
         <p:spPr>
           <a:xfrm>
-            <a:off x="868680" y="2468880"/>
+            <a:off x="868680" y="4069080"/>
             <a:ext cx="10469879" cy="0"/>
           </a:xfrm>
           <a:prstGeom prst="line">
@@ -6095,7 +6499,7 @@
           </a:prstGeom>
           <a:ln w="12700">
             <a:solidFill>
-              <a:srgbClr val="E4E4E7"/>
+              <a:srgbClr val="3F3F46"/>
             </a:solidFill>
           </a:ln>
           <a:effectLst/>
@@ -6103,83 +6507,14 @@
       </p:cxnSp>
       <p:sp>
         <p:nvSpPr>
-          <p:cNvPr id="6" name="Oval 5"/>
-          <p:cNvSpPr/>
-          <p:nvPr/>
-        </p:nvSpPr>
-        <p:spPr>
-          <a:xfrm>
-            <a:off x="868680" y="2761488"/>
-            <a:ext cx="548640" cy="548640"/>
-          </a:xfrm>
-          <a:prstGeom prst="ellipse">
-            <a:avLst/>
-          </a:prstGeom>
-          <a:noFill/>
-          <a:ln w="16510">
-            <a:solidFill>
-              <a:srgbClr val="121316"/>
-            </a:solidFill>
-          </a:ln>
-          <a:effectLst/>
-        </p:spPr>
-        <p:txBody>
-          <a:bodyPr rtlCol="0" anchor="ctr"/>
-          <a:lstStyle/>
-          <a:p>
-            <a:pPr algn="ctr"/>
-          </a:p>
-        </p:txBody>
-      </p:sp>
-      <p:sp>
-        <p:nvSpPr>
           <p:cNvPr id="7" name="TextBox 6"/>
           <p:cNvSpPr txBox="1"/>
           <p:nvPr/>
         </p:nvSpPr>
         <p:spPr>
           <a:xfrm>
-            <a:off x="868680" y="2734056"/>
-            <a:ext cx="548640" cy="548640"/>
-          </a:xfrm>
-          <a:prstGeom prst="rect">
-            <a:avLst/>
-          </a:prstGeom>
-          <a:noFill/>
-        </p:spPr>
-        <p:txBody>
-          <a:bodyPr wrap="square" anchor="ctr" lIns="0" rIns="0" tIns="0" bIns="0">
-            <a:spAutoFit/>
-          </a:bodyPr>
-          <a:lstStyle/>
-          <a:p>
-            <a:pPr algn="ctr">
-              <a:spcAft>
-                <a:spcPts val="200"/>
-              </a:spcAft>
-            </a:pPr>
-            <a:r>
-              <a:rPr sz="1400" b="1" i="0">
-                <a:solidFill>
-                  <a:srgbClr val="121316"/>
-                </a:solidFill>
-                <a:latin typeface="Arial"/>
-              </a:rPr>
-              <a:t>1</a:t>
-            </a:r>
-          </a:p>
-        </p:txBody>
-      </p:sp>
-      <p:sp>
-        <p:nvSpPr>
-          <p:cNvPr id="8" name="TextBox 7"/>
-          <p:cNvSpPr txBox="1"/>
-          <p:nvPr/>
-        </p:nvSpPr>
-        <p:spPr>
-          <a:xfrm>
-            <a:off x="1737360" y="2724912"/>
-            <a:ext cx="9509760" cy="1005840"/>
+            <a:off x="868680" y="4389120"/>
+            <a:ext cx="10424160" cy="1280160"/>
           </a:xfrm>
           <a:prstGeom prst="rect">
             <a:avLst/>
@@ -6193,352 +6528,34 @@
           <a:lstStyle/>
           <a:p>
             <a:pPr algn="l">
-              <a:spcAft>
-                <a:spcPts val="300"/>
-              </a:spcAft>
-            </a:pPr>
-            <a:r>
-              <a:rPr sz="2000" b="1" i="0">
-                <a:solidFill>
-                  <a:srgbClr val="121316"/>
-                </a:solidFill>
-                <a:latin typeface="Arial"/>
-              </a:rPr>
-              <a:t>Erklären, was Google AI Studio ist</a:t>
-            </a:r>
-          </a:p>
-          <a:p>
-            <a:pPr algn="l">
+              <a:lnSpc>
+                <a:spcPct val="110000"/>
+              </a:lnSpc>
               <a:spcAft>
                 <a:spcPts val="200"/>
               </a:spcAft>
             </a:pPr>
             <a:r>
-              <a:rPr sz="1400" b="0" i="0">
-                <a:solidFill>
-                  <a:srgbClr val="71717A"/>
-                </a:solidFill>
-                <a:latin typeface="Arial"/>
-              </a:rPr>
-              <a:t>Zwei Beispiele nennen, was man damit bauen kann.</a:t>
-            </a:r>
-          </a:p>
-        </p:txBody>
-      </p:sp>
-      <p:cxnSp>
-        <p:nvCxnSpPr>
-          <p:cNvPr id="9" name="Connector 8"/>
-          <p:cNvCxnSpPr/>
-          <p:nvPr/>
-        </p:nvCxnSpPr>
-        <p:spPr>
-          <a:xfrm>
-            <a:off x="868680" y="3749039"/>
-            <a:ext cx="10469879" cy="0"/>
-          </a:xfrm>
-          <a:prstGeom prst="line">
-            <a:avLst/>
-          </a:prstGeom>
-          <a:ln w="12700">
-            <a:solidFill>
-              <a:srgbClr val="E4E4E7"/>
-            </a:solidFill>
-          </a:ln>
-          <a:effectLst/>
-        </p:spPr>
-      </p:cxnSp>
-      <p:sp>
-        <p:nvSpPr>
-          <p:cNvPr id="10" name="Oval 9"/>
-          <p:cNvSpPr/>
-          <p:nvPr/>
-        </p:nvSpPr>
-        <p:spPr>
-          <a:xfrm>
-            <a:off x="868680" y="4041648"/>
-            <a:ext cx="548640" cy="548640"/>
-          </a:xfrm>
-          <a:prstGeom prst="ellipse">
-            <a:avLst/>
-          </a:prstGeom>
-          <a:noFill/>
-          <a:ln w="16510">
-            <a:solidFill>
-              <a:srgbClr val="121316"/>
-            </a:solidFill>
-          </a:ln>
-          <a:effectLst/>
-        </p:spPr>
-        <p:txBody>
-          <a:bodyPr rtlCol="0" anchor="ctr"/>
-          <a:lstStyle/>
-          <a:p>
-            <a:pPr algn="ctr"/>
-          </a:p>
-        </p:txBody>
-      </p:sp>
-      <p:sp>
-        <p:nvSpPr>
-          <p:cNvPr id="11" name="TextBox 10"/>
-          <p:cNvSpPr txBox="1"/>
-          <p:nvPr/>
-        </p:nvSpPr>
-        <p:spPr>
-          <a:xfrm>
-            <a:off x="868680" y="4014215"/>
-            <a:ext cx="548640" cy="548640"/>
-          </a:xfrm>
-          <a:prstGeom prst="rect">
-            <a:avLst/>
-          </a:prstGeom>
-          <a:noFill/>
-        </p:spPr>
-        <p:txBody>
-          <a:bodyPr wrap="square" anchor="ctr" lIns="0" rIns="0" tIns="0" bIns="0">
-            <a:spAutoFit/>
-          </a:bodyPr>
-          <a:lstStyle/>
-          <a:p>
-            <a:pPr algn="ctr">
-              <a:spcAft>
-                <a:spcPts val="200"/>
-              </a:spcAft>
-            </a:pPr>
-            <a:r>
-              <a:rPr sz="1400" b="1" i="0">
-                <a:solidFill>
-                  <a:srgbClr val="121316"/>
-                </a:solidFill>
-                <a:latin typeface="Arial"/>
-              </a:rPr>
-              <a:t>2</a:t>
-            </a:r>
-          </a:p>
-        </p:txBody>
-      </p:sp>
-      <p:sp>
-        <p:nvSpPr>
-          <p:cNvPr id="12" name="TextBox 11"/>
-          <p:cNvSpPr txBox="1"/>
-          <p:nvPr/>
-        </p:nvSpPr>
-        <p:spPr>
-          <a:xfrm>
-            <a:off x="1737360" y="4005072"/>
-            <a:ext cx="9509760" cy="1005840"/>
-          </a:xfrm>
-          <a:prstGeom prst="rect">
-            <a:avLst/>
-          </a:prstGeom>
-          <a:noFill/>
-        </p:spPr>
-        <p:txBody>
-          <a:bodyPr wrap="square" anchor="t" lIns="0" rIns="0" tIns="0" bIns="0">
-            <a:spAutoFit/>
-          </a:bodyPr>
-          <a:lstStyle/>
-          <a:p>
-            <a:pPr algn="l">
-              <a:spcAft>
-                <a:spcPts val="300"/>
-              </a:spcAft>
-            </a:pPr>
-            <a:r>
-              <a:rPr sz="2000" b="1" i="0">
-                <a:solidFill>
-                  <a:srgbClr val="121316"/>
-                </a:solidFill>
-                <a:latin typeface="Arial"/>
-              </a:rPr>
-              <a:t>Einen Website-Auftrag bauen</a:t>
-            </a:r>
-          </a:p>
-          <a:p>
-            <a:pPr algn="l">
-              <a:spcAft>
-                <a:spcPts val="200"/>
-              </a:spcAft>
-            </a:pPr>
-            <a:r>
-              <a:rPr sz="1400" b="0" i="0">
-                <a:solidFill>
-                  <a:srgbClr val="71717A"/>
-                </a:solidFill>
-                <a:latin typeface="Arial"/>
-              </a:rPr>
-              <a:t>Mit dem Baukasten einen klaren Prompt zusammenstellen.</a:t>
-            </a:r>
-          </a:p>
-        </p:txBody>
-      </p:sp>
-      <p:cxnSp>
-        <p:nvCxnSpPr>
-          <p:cNvPr id="13" name="Connector 12"/>
-          <p:cNvCxnSpPr/>
-          <p:nvPr/>
-        </p:nvCxnSpPr>
-        <p:spPr>
-          <a:xfrm>
-            <a:off x="868680" y="5029200"/>
-            <a:ext cx="10469879" cy="0"/>
-          </a:xfrm>
-          <a:prstGeom prst="line">
-            <a:avLst/>
-          </a:prstGeom>
-          <a:ln w="12700">
-            <a:solidFill>
-              <a:srgbClr val="E4E4E7"/>
-            </a:solidFill>
-          </a:ln>
-          <a:effectLst/>
-        </p:spPr>
-      </p:cxnSp>
-      <p:sp>
-        <p:nvSpPr>
-          <p:cNvPr id="14" name="Oval 13"/>
-          <p:cNvSpPr/>
-          <p:nvPr/>
-        </p:nvSpPr>
-        <p:spPr>
-          <a:xfrm>
-            <a:off x="868680" y="5321808"/>
-            <a:ext cx="548640" cy="548640"/>
-          </a:xfrm>
-          <a:prstGeom prst="ellipse">
-            <a:avLst/>
-          </a:prstGeom>
-          <a:noFill/>
-          <a:ln w="16510">
-            <a:solidFill>
-              <a:srgbClr val="121316"/>
-            </a:solidFill>
-          </a:ln>
-          <a:effectLst/>
-        </p:spPr>
-        <p:txBody>
-          <a:bodyPr rtlCol="0" anchor="ctr"/>
-          <a:lstStyle/>
-          <a:p>
-            <a:pPr algn="ctr"/>
-          </a:p>
-        </p:txBody>
-      </p:sp>
-      <p:sp>
-        <p:nvSpPr>
-          <p:cNvPr id="15" name="TextBox 14"/>
-          <p:cNvSpPr txBox="1"/>
-          <p:nvPr/>
-        </p:nvSpPr>
-        <p:spPr>
-          <a:xfrm>
-            <a:off x="868680" y="5294376"/>
-            <a:ext cx="548640" cy="548640"/>
-          </a:xfrm>
-          <a:prstGeom prst="rect">
-            <a:avLst/>
-          </a:prstGeom>
-          <a:noFill/>
-        </p:spPr>
-        <p:txBody>
-          <a:bodyPr wrap="square" anchor="ctr" lIns="0" rIns="0" tIns="0" bIns="0">
-            <a:spAutoFit/>
-          </a:bodyPr>
-          <a:lstStyle/>
-          <a:p>
-            <a:pPr algn="ctr">
-              <a:spcAft>
-                <a:spcPts val="200"/>
-              </a:spcAft>
-            </a:pPr>
-            <a:r>
-              <a:rPr sz="1400" b="1" i="0">
-                <a:solidFill>
-                  <a:srgbClr val="121316"/>
-                </a:solidFill>
-                <a:latin typeface="Arial"/>
-              </a:rPr>
-              <a:t>3</a:t>
-            </a:r>
-          </a:p>
-        </p:txBody>
-      </p:sp>
-      <p:sp>
-        <p:nvSpPr>
-          <p:cNvPr id="16" name="TextBox 15"/>
-          <p:cNvSpPr txBox="1"/>
-          <p:nvPr/>
-        </p:nvSpPr>
-        <p:spPr>
-          <a:xfrm>
-            <a:off x="1737360" y="5285232"/>
-            <a:ext cx="9509760" cy="1005840"/>
-          </a:xfrm>
-          <a:prstGeom prst="rect">
-            <a:avLst/>
-          </a:prstGeom>
-          <a:noFill/>
-        </p:spPr>
-        <p:txBody>
-          <a:bodyPr wrap="square" anchor="t" lIns="0" rIns="0" tIns="0" bIns="0">
-            <a:spAutoFit/>
-          </a:bodyPr>
-          <a:lstStyle/>
-          <a:p>
-            <a:pPr algn="l">
-              <a:spcAft>
-                <a:spcPts val="300"/>
-              </a:spcAft>
-            </a:pPr>
-            <a:r>
-              <a:rPr sz="2000" b="1" i="0">
-                <a:solidFill>
-                  <a:srgbClr val="121316"/>
-                </a:solidFill>
-                <a:latin typeface="Arial"/>
-              </a:rPr>
-              <a:t>Eine erste Website erzeugen</a:t>
-            </a:r>
-          </a:p>
-          <a:p>
-            <a:pPr algn="l">
-              <a:spcAft>
-                <a:spcPts val="200"/>
-              </a:spcAft>
-            </a:pPr>
-            <a:r>
-              <a:rPr sz="1400" b="0" i="0">
-                <a:solidFill>
-                  <a:srgbClr val="71717A"/>
-                </a:solidFill>
-                <a:latin typeface="Arial"/>
-              </a:rPr>
-              <a:t>Prompt in AI Studio einfügen, Vorschau sehen.</a:t>
-            </a:r>
-          </a:p>
-        </p:txBody>
-      </p:sp>
-      <p:cxnSp>
-        <p:nvCxnSpPr>
-          <p:cNvPr id="17" name="Connector 16"/>
-          <p:cNvCxnSpPr/>
-          <p:nvPr/>
-        </p:nvCxnSpPr>
-        <p:spPr>
-          <a:xfrm>
-            <a:off x="868680" y="6309360"/>
-            <a:ext cx="10469879" cy="0"/>
-          </a:xfrm>
-          <a:prstGeom prst="line">
-            <a:avLst/>
-          </a:prstGeom>
-          <a:ln w="12700">
-            <a:solidFill>
-              <a:srgbClr val="E4E4E7"/>
-            </a:solidFill>
-          </a:ln>
-          <a:effectLst/>
-        </p:spPr>
-      </p:cxnSp>
+              <a:rPr sz="2700" b="1" i="0">
+                <a:solidFill>
+                  <a:srgbClr val="FFFFFF"/>
+                </a:solidFill>
+                <a:latin typeface="Arial"/>
+              </a:rPr>
+              <a:t>KI schreibt nicht nur Texte — </a:t>
+            </a:r>
+            <a:r>
+              <a:rPr sz="2700" b="1" i="0">
+                <a:solidFill>
+                  <a:srgbClr val="2563EB"/>
+                </a:solidFill>
+                <a:latin typeface="Arial"/>
+              </a:rPr>
+              <a:t>sie baut ganze Websites.</a:t>
+            </a:r>
+          </a:p>
+        </p:txBody>
+      </p:sp>
     </p:spTree>
   </p:cSld>
   <p:clrMapOvr>
@@ -6790,7 +6807,7 @@
                 </a:solidFill>
                 <a:latin typeface="Arial"/>
               </a:rPr>
-              <a:t>Kostenloses Web-Tool von Google  </a:t>
+              <a:t>Websites und kleine Apps bauen  </a:t>
             </a:r>
             <a:r>
               <a:rPr sz="1400" b="0" i="0">
@@ -6799,7 +6816,7 @@
                 </a:solidFill>
                 <a:latin typeface="Arial"/>
               </a:rPr>
-              <a:t>Build-Modus auf aistudio.google.com/apps – nichts installieren.</a:t>
+              <a:t>z. B. Portfolio, Vereinsseite, Quiz oder Rechner.</a:t>
             </a:r>
           </a:p>
         </p:txBody>
@@ -7068,7 +7085,7 @@
                 </a:solidFill>
                 <a:latin typeface="Arial"/>
               </a:rPr>
-              <a:t>Sofort sichtbar  </a:t>
+              <a:t>Kostenlos, direkt im Browser  </a:t>
             </a:r>
             <a:r>
               <a:rPr sz="1400" b="0" i="0">
@@ -7077,7 +7094,7 @@
                 </a:solidFill>
                 <a:latin typeface="Arial"/>
               </a:rPr>
-              <a:t>Die Vorschau erscheint live.</a:t>
+              <a:t>Build-Modus auf aistudio.google.com/apps – nichts installieren.</a:t>
             </a:r>
           </a:p>
         </p:txBody>
@@ -7207,7 +7224,7 @@
                 </a:solidFill>
                 <a:latin typeface="Arial"/>
               </a:rPr>
-              <a:t>Einfach anpassen  </a:t>
+              <a:t>Anschauen und anpassen  </a:t>
             </a:r>
             <a:r>
               <a:rPr sz="1400" b="0" i="0">
@@ -7216,7 +7233,7 @@
                 </a:solidFill>
                 <a:latin typeface="Arial"/>
               </a:rPr>
-              <a:t>Änderung als nächste Nachricht schreiben.</a:t>
+              <a:t>Vorschau im Browser; Änderungen als nächste Nachricht.</a:t>
             </a:r>
           </a:p>
         </p:txBody>
@@ -8010,7 +8027,7 @@
                 </a:solidFill>
                 <a:latin typeface="Arial"/>
               </a:rPr>
-              <a:t>Einfügen, abschicken – die Vorschau erscheint.</a:t>
+              <a:t>Einfügen, abschicken – die KI baut los (ein paar Minuten).</a:t>
             </a:r>
           </a:p>
         </p:txBody>
@@ -8632,7 +8649,7 @@
                 </a:solidFill>
                 <a:latin typeface="Arial"/>
               </a:rPr>
-              <a:t>Die Generierung dauert ein paar Minuten — starten, nicht warten. Ergebnis später im Gruppenchat teilen.</a:t>
+              <a:t>Starten — und während es baut, kurz austauschen. Den Link teilt ihr später im Gruppenchat.</a:t>
             </a:r>
           </a:p>
         </p:txBody>
@@ -8725,23 +8742,7 @@
                 </a:solidFill>
                 <a:latin typeface="Arial"/>
               </a:rPr>
-              <a:t>criseone.github.io/</a:t>
-            </a:r>
-          </a:p>
-          <a:p>
-            <a:pPr algn="ctr">
-              <a:spcAft>
-                <a:spcPts val="200"/>
-              </a:spcAft>
-            </a:pPr>
-            <a:r>
-              <a:rPr sz="1150" b="1" i="0">
-                <a:solidFill>
-                  <a:srgbClr val="121316"/>
-                </a:solidFill>
-                <a:latin typeface="Arial"/>
-              </a:rPr>
-              <a:t>meine-website-ai-studio</a:t>
+              <a:t>tinyurl.com/website-baukasten</a:t>
             </a:r>
           </a:p>
         </p:txBody>
@@ -9170,7 +9171,41 @@
                 </a:solidFill>
                 <a:latin typeface="Arial"/>
               </a:rPr>
-              <a:t>Fragen? Dann: selbst weiterprobieren.</a:t>
+              <a:t>Fragen? Jetzt ist der beste Moment.</a:t>
+            </a:r>
+          </a:p>
+        </p:txBody>
+      </p:sp>
+      <p:sp>
+        <p:nvSpPr>
+          <p:cNvPr id="12" name="TextBox 11"/>
+          <p:cNvSpPr txBox="1"/>
+          <p:nvPr/>
+        </p:nvSpPr>
+        <p:spPr>
+          <a:xfrm>
+            <a:off x="868680" y="1938528"/>
+            <a:ext cx="10469880" cy="411480"/>
+          </a:xfrm>
+          <a:prstGeom prst="rect">
+            <a:avLst/>
+          </a:prstGeom>
+          <a:noFill/>
+        </p:spPr>
+        <p:txBody>
+          <a:bodyPr wrap="square" lIns="0" rIns="0" tIns="0" bIns="0">
+            <a:spAutoFit/>
+          </a:bodyPr>
+          <a:lstStyle/>
+          <a:p>
+            <a:r>
+              <a:rPr sz="1500" b="1">
+                <a:solidFill>
+                  <a:srgbClr val="2563EB"/>
+                </a:solidFill>
+                <a:latin typeface="Arial"/>
+              </a:rPr>
+              <a:t>Während eure Websites bauen, schauen wir kurz, was hängen geblieben ist.</a:t>
             </a:r>
           </a:p>
         </p:txBody>
